--- a/folletos/2026-04/pptx/FIP_VANTRUST_LIQUIDEZ_DOLAR.pptx
+++ b/folletos/2026-04/pptx/FIP_VANTRUST_LIQUIDEZ_DOLAR.pptx
@@ -2927,7 +2927,7 @@
                 <a:ea typeface="Calibri" pitchFamily="34" charset="-122"/>
                 <a:cs typeface="Calibri" pitchFamily="34" charset="-120"/>
               </a:rPr>
-              <a:t>prueba USD</a:t>
+              <a:t>prueba 2 USD</a:t>
             </a:r>
             <a:endParaRPr lang="en-US" sz="800" dirty="0"/>
           </a:p>

--- a/folletos/2026-04/pptx/FIP_VANTRUST_LIQUIDEZ_DOLAR.pptx
+++ b/folletos/2026-04/pptx/FIP_VANTRUST_LIQUIDEZ_DOLAR.pptx
@@ -5363,7 +5363,7 @@
                 <a:ea typeface="Calibri" pitchFamily="34" charset="-122"/>
                 <a:cs typeface="Calibri" pitchFamily="34" charset="-120"/>
               </a:rPr>
-              <a:t>prueba USD</a:t>
+              <a:t>prueba 3 USD</a:t>
             </a:r>
             <a:endParaRPr lang="en-US" sz="800" dirty="0"/>
           </a:p>

--- a/folletos/2026-04/pptx/FIP_VANTRUST_LIQUIDEZ_DOLAR.pptx
+++ b/folletos/2026-04/pptx/FIP_VANTRUST_LIQUIDEZ_DOLAR.pptx
@@ -2842,6 +2842,966 @@
                 </c:pt>
                 <c:pt idx="9">
                   <c:v>1035.71</c:v>
+                </c:pt>
+              </c:numCache>
+            </c:numRef>
+          </c:val>
+          <c:smooth val="0"/>
+        </c:ser>
+        <c:ser>
+          <c:idx val="2"/>
+          <c:order val="2"/>
+          <c:tx>
+            <c:strRef>
+              <c:f>Sheet1!$D$1</c:f>
+              <c:strCache>
+                <c:ptCount val="1"/>
+                <c:pt idx="0">
+                  <c:v>Competencia Relevante</c:v>
+                </c:pt>
+              </c:strCache>
+            </c:strRef>
+          </c:tx>
+          <c:spPr>
+            <a:solidFill>
+              <a:srgbClr val="BBBBBB"/>
+            </a:solidFill>
+            <a:ln w="19050" cap="flat">
+              <a:solidFill>
+                <a:srgbClr val="BBBBBB"/>
+              </a:solidFill>
+              <a:prstDash val="solid"/>
+              <a:round/>
+            </a:ln>
+            <a:effectLst/>
+          </c:spPr>
+          <c:invertIfNegative val="0"/>
+          <c:dLbls>
+            <c:numFmt formatCode="#,##0" sourceLinked="0"/>
+            <c:txPr>
+              <a:bodyPr/>
+              <a:lstStyle/>
+              <a:p>
+                <a:pPr>
+                  <a:defRPr b="0" i="0" strike="noStrike" sz="1200" u="none">
+                    <a:solidFill>
+                      <a:srgbClr val="000000"/>
+                    </a:solidFill>
+                    <a:latin typeface="Arial"/>
+                  </a:defRPr>
+                </a:pPr>
+              </a:p>
+            </c:txPr>
+            <c:showLegendKey val="0"/>
+            <c:showVal val="0"/>
+            <c:showCatName val="0"/>
+            <c:showSerName val="0"/>
+            <c:showPercent val="0"/>
+            <c:showBubbleSize val="0"/>
+            <c:showLeaderLines val="0"/>
+          </c:dLbls>
+          <c:marker>
+            <c:symbol val="circle"/>
+            <c:size val="6"/>
+            <c:spPr>
+              <a:solidFill>
+                <a:srgbClr val="BBBBBB"/>
+              </a:solidFill>
+              <a:ln w="9525" cap="flat">
+                <a:solidFill>
+                  <a:srgbClr val="BBBBBB"/>
+                </a:solidFill>
+                <a:prstDash val="solid"/>
+                <a:round/>
+              </a:ln>
+              <a:effectLst/>
+            </c:spPr>
+          </c:marker>
+          <c:cat>
+            <c:multiLvlStrRef>
+              <c:f>Sheet1!$A$2:$A$281</c:f>
+              <c:multiLvlStrCache>
+                <c:ptCount val="280"/>
+                <c:lvl>
+                  <c:pt idx="0">
+                    <c:v>Jul 2025</c:v>
+                  </c:pt>
+                  <c:pt idx="1">
+                    <c:v>Jul 2025</c:v>
+                  </c:pt>
+                  <c:pt idx="2">
+                    <c:v>Aug 2025</c:v>
+                  </c:pt>
+                  <c:pt idx="3">
+                    <c:v>Aug 2025</c:v>
+                  </c:pt>
+                  <c:pt idx="4">
+                    <c:v>Aug 2025</c:v>
+                  </c:pt>
+                  <c:pt idx="5">
+                    <c:v>Aug 2025</c:v>
+                  </c:pt>
+                  <c:pt idx="6">
+                    <c:v>Aug 2025</c:v>
+                  </c:pt>
+                  <c:pt idx="7">
+                    <c:v>Aug 2025</c:v>
+                  </c:pt>
+                  <c:pt idx="8">
+                    <c:v>Aug 2025</c:v>
+                  </c:pt>
+                  <c:pt idx="9">
+                    <c:v>Aug 2025</c:v>
+                  </c:pt>
+                  <c:pt idx="10">
+                    <c:v>Aug 2025</c:v>
+                  </c:pt>
+                  <c:pt idx="11">
+                    <c:v>Aug 2025</c:v>
+                  </c:pt>
+                  <c:pt idx="12">
+                    <c:v>Aug 2025</c:v>
+                  </c:pt>
+                  <c:pt idx="13">
+                    <c:v>Aug 2025</c:v>
+                  </c:pt>
+                  <c:pt idx="14">
+                    <c:v>Aug 2025</c:v>
+                  </c:pt>
+                  <c:pt idx="15">
+                    <c:v>Aug 2025</c:v>
+                  </c:pt>
+                  <c:pt idx="16">
+                    <c:v>Aug 2025</c:v>
+                  </c:pt>
+                  <c:pt idx="17">
+                    <c:v>Aug 2025</c:v>
+                  </c:pt>
+                  <c:pt idx="18">
+                    <c:v>Aug 2025</c:v>
+                  </c:pt>
+                  <c:pt idx="19">
+                    <c:v>Aug 2025</c:v>
+                  </c:pt>
+                  <c:pt idx="20">
+                    <c:v>Aug 2025</c:v>
+                  </c:pt>
+                  <c:pt idx="21">
+                    <c:v>Aug 2025</c:v>
+                  </c:pt>
+                  <c:pt idx="22">
+                    <c:v>Aug 2025</c:v>
+                  </c:pt>
+                  <c:pt idx="23">
+                    <c:v>Aug 2025</c:v>
+                  </c:pt>
+                  <c:pt idx="24">
+                    <c:v>Aug 2025</c:v>
+                  </c:pt>
+                  <c:pt idx="25">
+                    <c:v>Aug 2025</c:v>
+                  </c:pt>
+                  <c:pt idx="26">
+                    <c:v>Aug 2025</c:v>
+                  </c:pt>
+                  <c:pt idx="27">
+                    <c:v>Aug 2025</c:v>
+                  </c:pt>
+                  <c:pt idx="28">
+                    <c:v>Aug 2025</c:v>
+                  </c:pt>
+                  <c:pt idx="29">
+                    <c:v>Aug 2025</c:v>
+                  </c:pt>
+                  <c:pt idx="30">
+                    <c:v>Aug 2025</c:v>
+                  </c:pt>
+                  <c:pt idx="31">
+                    <c:v>Aug 2025</c:v>
+                  </c:pt>
+                  <c:pt idx="32">
+                    <c:v>Aug 2025</c:v>
+                  </c:pt>
+                  <c:pt idx="33">
+                    <c:v>Sep 2025</c:v>
+                  </c:pt>
+                  <c:pt idx="34">
+                    <c:v>Sep 2025</c:v>
+                  </c:pt>
+                  <c:pt idx="35">
+                    <c:v>Sep 2025</c:v>
+                  </c:pt>
+                  <c:pt idx="36">
+                    <c:v>Sep 2025</c:v>
+                  </c:pt>
+                  <c:pt idx="37">
+                    <c:v>Sep 2025</c:v>
+                  </c:pt>
+                  <c:pt idx="38">
+                    <c:v>Sep 2025</c:v>
+                  </c:pt>
+                  <c:pt idx="39">
+                    <c:v>Sep 2025</c:v>
+                  </c:pt>
+                  <c:pt idx="40">
+                    <c:v>Sep 2025</c:v>
+                  </c:pt>
+                  <c:pt idx="41">
+                    <c:v>Sep 2025</c:v>
+                  </c:pt>
+                  <c:pt idx="42">
+                    <c:v>Sep 2025</c:v>
+                  </c:pt>
+                  <c:pt idx="43">
+                    <c:v>Sep 2025</c:v>
+                  </c:pt>
+                  <c:pt idx="44">
+                    <c:v>Sep 2025</c:v>
+                  </c:pt>
+                  <c:pt idx="45">
+                    <c:v>Sep 2025</c:v>
+                  </c:pt>
+                  <c:pt idx="46">
+                    <c:v>Sep 2025</c:v>
+                  </c:pt>
+                  <c:pt idx="47">
+                    <c:v>Sep 2025</c:v>
+                  </c:pt>
+                  <c:pt idx="48">
+                    <c:v>Sep 2025</c:v>
+                  </c:pt>
+                  <c:pt idx="49">
+                    <c:v>Sep 2025</c:v>
+                  </c:pt>
+                  <c:pt idx="50">
+                    <c:v>Sep 2025</c:v>
+                  </c:pt>
+                  <c:pt idx="51">
+                    <c:v>Sep 2025</c:v>
+                  </c:pt>
+                  <c:pt idx="52">
+                    <c:v>Sep 2025</c:v>
+                  </c:pt>
+                  <c:pt idx="53">
+                    <c:v>Sep 2025</c:v>
+                  </c:pt>
+                  <c:pt idx="54">
+                    <c:v>Sep 2025</c:v>
+                  </c:pt>
+                  <c:pt idx="55">
+                    <c:v>Sep 2025</c:v>
+                  </c:pt>
+                  <c:pt idx="56">
+                    <c:v>Sep 2025</c:v>
+                  </c:pt>
+                  <c:pt idx="57">
+                    <c:v>Sep 2025</c:v>
+                  </c:pt>
+                  <c:pt idx="58">
+                    <c:v>Sep 2025</c:v>
+                  </c:pt>
+                  <c:pt idx="59">
+                    <c:v>Sep 2025</c:v>
+                  </c:pt>
+                  <c:pt idx="60">
+                    <c:v>Sep 2025</c:v>
+                  </c:pt>
+                  <c:pt idx="61">
+                    <c:v>Sep 2025</c:v>
+                  </c:pt>
+                  <c:pt idx="62">
+                    <c:v>Sep 2025</c:v>
+                  </c:pt>
+                  <c:pt idx="63">
+                    <c:v>Oct 2025</c:v>
+                  </c:pt>
+                  <c:pt idx="64">
+                    <c:v>Oct 2025</c:v>
+                  </c:pt>
+                  <c:pt idx="65">
+                    <c:v>Oct 2025</c:v>
+                  </c:pt>
+                  <c:pt idx="66">
+                    <c:v>Oct 2025</c:v>
+                  </c:pt>
+                  <c:pt idx="67">
+                    <c:v>Oct 2025</c:v>
+                  </c:pt>
+                  <c:pt idx="68">
+                    <c:v>Oct 2025</c:v>
+                  </c:pt>
+                  <c:pt idx="69">
+                    <c:v>Oct 2025</c:v>
+                  </c:pt>
+                  <c:pt idx="70">
+                    <c:v>Oct 2025</c:v>
+                  </c:pt>
+                  <c:pt idx="71">
+                    <c:v>Oct 2025</c:v>
+                  </c:pt>
+                  <c:pt idx="72">
+                    <c:v>Oct 2025</c:v>
+                  </c:pt>
+                  <c:pt idx="73">
+                    <c:v>Oct 2025</c:v>
+                  </c:pt>
+                  <c:pt idx="74">
+                    <c:v>Oct 2025</c:v>
+                  </c:pt>
+                  <c:pt idx="75">
+                    <c:v>Oct 2025</c:v>
+                  </c:pt>
+                  <c:pt idx="76">
+                    <c:v>Oct 2025</c:v>
+                  </c:pt>
+                  <c:pt idx="77">
+                    <c:v>Oct 2025</c:v>
+                  </c:pt>
+                  <c:pt idx="78">
+                    <c:v>Oct 2025</c:v>
+                  </c:pt>
+                  <c:pt idx="79">
+                    <c:v>Oct 2025</c:v>
+                  </c:pt>
+                  <c:pt idx="80">
+                    <c:v>Oct 2025</c:v>
+                  </c:pt>
+                  <c:pt idx="81">
+                    <c:v>Oct 2025</c:v>
+                  </c:pt>
+                  <c:pt idx="82">
+                    <c:v>Oct 2025</c:v>
+                  </c:pt>
+                  <c:pt idx="83">
+                    <c:v>Oct 2025</c:v>
+                  </c:pt>
+                  <c:pt idx="84">
+                    <c:v>Oct 2025</c:v>
+                  </c:pt>
+                  <c:pt idx="85">
+                    <c:v>Oct 2025</c:v>
+                  </c:pt>
+                  <c:pt idx="86">
+                    <c:v>Oct 2025</c:v>
+                  </c:pt>
+                  <c:pt idx="87">
+                    <c:v>Oct 2025</c:v>
+                  </c:pt>
+                  <c:pt idx="88">
+                    <c:v>Oct 2025</c:v>
+                  </c:pt>
+                  <c:pt idx="89">
+                    <c:v>Oct 2025</c:v>
+                  </c:pt>
+                  <c:pt idx="90">
+                    <c:v>Oct 2025</c:v>
+                  </c:pt>
+                  <c:pt idx="91">
+                    <c:v>Oct 2025</c:v>
+                  </c:pt>
+                  <c:pt idx="92">
+                    <c:v>Oct 2025</c:v>
+                  </c:pt>
+                  <c:pt idx="93">
+                    <c:v>Oct 2025</c:v>
+                  </c:pt>
+                  <c:pt idx="94">
+                    <c:v>Nov 2025</c:v>
+                  </c:pt>
+                  <c:pt idx="95">
+                    <c:v>Nov 2025</c:v>
+                  </c:pt>
+                  <c:pt idx="96">
+                    <c:v>Nov 2025</c:v>
+                  </c:pt>
+                  <c:pt idx="97">
+                    <c:v>Nov 2025</c:v>
+                  </c:pt>
+                  <c:pt idx="98">
+                    <c:v>Nov 2025</c:v>
+                  </c:pt>
+                  <c:pt idx="99">
+                    <c:v>Nov 2025</c:v>
+                  </c:pt>
+                  <c:pt idx="100">
+                    <c:v>Nov 2025</c:v>
+                  </c:pt>
+                  <c:pt idx="101">
+                    <c:v>Nov 2025</c:v>
+                  </c:pt>
+                  <c:pt idx="102">
+                    <c:v>Nov 2025</c:v>
+                  </c:pt>
+                  <c:pt idx="103">
+                    <c:v>Nov 2025</c:v>
+                  </c:pt>
+                  <c:pt idx="104">
+                    <c:v>Nov 2025</c:v>
+                  </c:pt>
+                  <c:pt idx="105">
+                    <c:v>Nov 2025</c:v>
+                  </c:pt>
+                  <c:pt idx="106">
+                    <c:v>Nov 2025</c:v>
+                  </c:pt>
+                  <c:pt idx="107">
+                    <c:v>Nov 2025</c:v>
+                  </c:pt>
+                  <c:pt idx="108">
+                    <c:v>Nov 2025</c:v>
+                  </c:pt>
+                  <c:pt idx="109">
+                    <c:v>Nov 2025</c:v>
+                  </c:pt>
+                  <c:pt idx="110">
+                    <c:v>Nov 2025</c:v>
+                  </c:pt>
+                  <c:pt idx="111">
+                    <c:v>Nov 2025</c:v>
+                  </c:pt>
+                  <c:pt idx="112">
+                    <c:v>Nov 2025</c:v>
+                  </c:pt>
+                  <c:pt idx="113">
+                    <c:v>Nov 2025</c:v>
+                  </c:pt>
+                  <c:pt idx="114">
+                    <c:v>Nov 2025</c:v>
+                  </c:pt>
+                  <c:pt idx="115">
+                    <c:v>Nov 2025</c:v>
+                  </c:pt>
+                  <c:pt idx="116">
+                    <c:v>Nov 2025</c:v>
+                  </c:pt>
+                  <c:pt idx="117">
+                    <c:v>Nov 2025</c:v>
+                  </c:pt>
+                  <c:pt idx="118">
+                    <c:v>Nov 2025</c:v>
+                  </c:pt>
+                  <c:pt idx="119">
+                    <c:v>Nov 2025</c:v>
+                  </c:pt>
+                  <c:pt idx="120">
+                    <c:v>Nov 2025</c:v>
+                  </c:pt>
+                  <c:pt idx="121">
+                    <c:v>Nov 2025</c:v>
+                  </c:pt>
+                  <c:pt idx="122">
+                    <c:v>Nov 2025</c:v>
+                  </c:pt>
+                  <c:pt idx="123">
+                    <c:v>Nov 2025</c:v>
+                  </c:pt>
+                  <c:pt idx="124">
+                    <c:v>Dec 2025</c:v>
+                  </c:pt>
+                  <c:pt idx="125">
+                    <c:v>Dec 2025</c:v>
+                  </c:pt>
+                  <c:pt idx="126">
+                    <c:v>Dec 2025</c:v>
+                  </c:pt>
+                  <c:pt idx="127">
+                    <c:v>Dec 2025</c:v>
+                  </c:pt>
+                  <c:pt idx="128">
+                    <c:v>Dec 2025</c:v>
+                  </c:pt>
+                  <c:pt idx="129">
+                    <c:v>Dec 2025</c:v>
+                  </c:pt>
+                  <c:pt idx="130">
+                    <c:v>Dec 2025</c:v>
+                  </c:pt>
+                  <c:pt idx="131">
+                    <c:v>Dec 2025</c:v>
+                  </c:pt>
+                  <c:pt idx="132">
+                    <c:v>Dec 2025</c:v>
+                  </c:pt>
+                  <c:pt idx="133">
+                    <c:v>Dec 2025</c:v>
+                  </c:pt>
+                  <c:pt idx="134">
+                    <c:v>Dec 2025</c:v>
+                  </c:pt>
+                  <c:pt idx="135">
+                    <c:v>Dec 2025</c:v>
+                  </c:pt>
+                  <c:pt idx="136">
+                    <c:v>Dec 2025</c:v>
+                  </c:pt>
+                  <c:pt idx="137">
+                    <c:v>Dec 2025</c:v>
+                  </c:pt>
+                  <c:pt idx="138">
+                    <c:v>Dec 2025</c:v>
+                  </c:pt>
+                  <c:pt idx="139">
+                    <c:v>Dec 2025</c:v>
+                  </c:pt>
+                  <c:pt idx="140">
+                    <c:v>Dec 2025</c:v>
+                  </c:pt>
+                  <c:pt idx="141">
+                    <c:v>Dec 2025</c:v>
+                  </c:pt>
+                  <c:pt idx="142">
+                    <c:v>Dec 2025</c:v>
+                  </c:pt>
+                  <c:pt idx="143">
+                    <c:v>Dec 2025</c:v>
+                  </c:pt>
+                  <c:pt idx="144">
+                    <c:v>Dec 2025</c:v>
+                  </c:pt>
+                  <c:pt idx="145">
+                    <c:v>Dec 2025</c:v>
+                  </c:pt>
+                  <c:pt idx="146">
+                    <c:v>Dec 2025</c:v>
+                  </c:pt>
+                  <c:pt idx="147">
+                    <c:v>Dec 2025</c:v>
+                  </c:pt>
+                  <c:pt idx="148">
+                    <c:v>Dec 2025</c:v>
+                  </c:pt>
+                  <c:pt idx="149">
+                    <c:v>Dec 2025</c:v>
+                  </c:pt>
+                  <c:pt idx="150">
+                    <c:v>Dec 2025</c:v>
+                  </c:pt>
+                  <c:pt idx="151">
+                    <c:v>Dec 2025</c:v>
+                  </c:pt>
+                  <c:pt idx="152">
+                    <c:v>Dec 2025</c:v>
+                  </c:pt>
+                  <c:pt idx="153">
+                    <c:v>Dec 2025</c:v>
+                  </c:pt>
+                  <c:pt idx="154">
+                    <c:v>Dec 2025</c:v>
+                  </c:pt>
+                  <c:pt idx="155">
+                    <c:v>Jan 2026</c:v>
+                  </c:pt>
+                  <c:pt idx="156">
+                    <c:v>Jan 2026</c:v>
+                  </c:pt>
+                  <c:pt idx="157">
+                    <c:v>Jan 2026</c:v>
+                  </c:pt>
+                  <c:pt idx="158">
+                    <c:v>Jan 2026</c:v>
+                  </c:pt>
+                  <c:pt idx="159">
+                    <c:v>Jan 2026</c:v>
+                  </c:pt>
+                  <c:pt idx="160">
+                    <c:v>Jan 2026</c:v>
+                  </c:pt>
+                  <c:pt idx="161">
+                    <c:v>Jan 2026</c:v>
+                  </c:pt>
+                  <c:pt idx="162">
+                    <c:v>Jan 2026</c:v>
+                  </c:pt>
+                  <c:pt idx="163">
+                    <c:v>Jan 2026</c:v>
+                  </c:pt>
+                  <c:pt idx="164">
+                    <c:v>Jan 2026</c:v>
+                  </c:pt>
+                  <c:pt idx="165">
+                    <c:v>Jan 2026</c:v>
+                  </c:pt>
+                  <c:pt idx="166">
+                    <c:v>Jan 2026</c:v>
+                  </c:pt>
+                  <c:pt idx="167">
+                    <c:v>Jan 2026</c:v>
+                  </c:pt>
+                  <c:pt idx="168">
+                    <c:v>Jan 2026</c:v>
+                  </c:pt>
+                  <c:pt idx="169">
+                    <c:v>Jan 2026</c:v>
+                  </c:pt>
+                  <c:pt idx="170">
+                    <c:v>Jan 2026</c:v>
+                  </c:pt>
+                  <c:pt idx="171">
+                    <c:v>Jan 2026</c:v>
+                  </c:pt>
+                  <c:pt idx="172">
+                    <c:v>Jan 2026</c:v>
+                  </c:pt>
+                  <c:pt idx="173">
+                    <c:v>Jan 2026</c:v>
+                  </c:pt>
+                  <c:pt idx="174">
+                    <c:v>Jan 2026</c:v>
+                  </c:pt>
+                  <c:pt idx="175">
+                    <c:v>Jan 2026</c:v>
+                  </c:pt>
+                  <c:pt idx="176">
+                    <c:v>Jan 2026</c:v>
+                  </c:pt>
+                  <c:pt idx="177">
+                    <c:v>Jan 2026</c:v>
+                  </c:pt>
+                  <c:pt idx="178">
+                    <c:v>Jan 2026</c:v>
+                  </c:pt>
+                  <c:pt idx="179">
+                    <c:v>Jan 2026</c:v>
+                  </c:pt>
+                  <c:pt idx="180">
+                    <c:v>Jan 2026</c:v>
+                  </c:pt>
+                  <c:pt idx="181">
+                    <c:v>Jan 2026</c:v>
+                  </c:pt>
+                  <c:pt idx="182">
+                    <c:v>Jan 2026</c:v>
+                  </c:pt>
+                  <c:pt idx="183">
+                    <c:v>Jan 2026</c:v>
+                  </c:pt>
+                  <c:pt idx="184">
+                    <c:v>Jan 2026</c:v>
+                  </c:pt>
+                  <c:pt idx="185">
+                    <c:v>Jan 2026</c:v>
+                  </c:pt>
+                  <c:pt idx="186">
+                    <c:v>Feb 2026</c:v>
+                  </c:pt>
+                  <c:pt idx="187">
+                    <c:v>Feb 2026</c:v>
+                  </c:pt>
+                  <c:pt idx="188">
+                    <c:v>Feb 2026</c:v>
+                  </c:pt>
+                  <c:pt idx="189">
+                    <c:v>Feb 2026</c:v>
+                  </c:pt>
+                  <c:pt idx="190">
+                    <c:v>Feb 2026</c:v>
+                  </c:pt>
+                  <c:pt idx="191">
+                    <c:v>Feb 2026</c:v>
+                  </c:pt>
+                  <c:pt idx="192">
+                    <c:v>Feb 2026</c:v>
+                  </c:pt>
+                  <c:pt idx="193">
+                    <c:v>Feb 2026</c:v>
+                  </c:pt>
+                  <c:pt idx="194">
+                    <c:v>Feb 2026</c:v>
+                  </c:pt>
+                  <c:pt idx="195">
+                    <c:v>Feb 2026</c:v>
+                  </c:pt>
+                  <c:pt idx="196">
+                    <c:v>Feb 2026</c:v>
+                  </c:pt>
+                  <c:pt idx="197">
+                    <c:v>Feb 2026</c:v>
+                  </c:pt>
+                  <c:pt idx="198">
+                    <c:v>Feb 2026</c:v>
+                  </c:pt>
+                  <c:pt idx="199">
+                    <c:v>Feb 2026</c:v>
+                  </c:pt>
+                  <c:pt idx="200">
+                    <c:v>Feb 2026</c:v>
+                  </c:pt>
+                  <c:pt idx="201">
+                    <c:v>Feb 2026</c:v>
+                  </c:pt>
+                  <c:pt idx="202">
+                    <c:v>Feb 2026</c:v>
+                  </c:pt>
+                  <c:pt idx="203">
+                    <c:v>Feb 2026</c:v>
+                  </c:pt>
+                  <c:pt idx="204">
+                    <c:v>Feb 2026</c:v>
+                  </c:pt>
+                  <c:pt idx="205">
+                    <c:v>Feb 2026</c:v>
+                  </c:pt>
+                  <c:pt idx="206">
+                    <c:v>Feb 2026</c:v>
+                  </c:pt>
+                  <c:pt idx="207">
+                    <c:v>Feb 2026</c:v>
+                  </c:pt>
+                  <c:pt idx="208">
+                    <c:v>Feb 2026</c:v>
+                  </c:pt>
+                  <c:pt idx="209">
+                    <c:v>Feb 2026</c:v>
+                  </c:pt>
+                  <c:pt idx="210">
+                    <c:v>Feb 2026</c:v>
+                  </c:pt>
+                  <c:pt idx="211">
+                    <c:v>Feb 2026</c:v>
+                  </c:pt>
+                  <c:pt idx="212">
+                    <c:v>Feb 2026</c:v>
+                  </c:pt>
+                  <c:pt idx="213">
+                    <c:v>Feb 2026</c:v>
+                  </c:pt>
+                  <c:pt idx="214">
+                    <c:v>Mar 2026</c:v>
+                  </c:pt>
+                  <c:pt idx="215">
+                    <c:v>Mar 2026</c:v>
+                  </c:pt>
+                  <c:pt idx="216">
+                    <c:v>Mar 2026</c:v>
+                  </c:pt>
+                  <c:pt idx="217">
+                    <c:v>Mar 2026</c:v>
+                  </c:pt>
+                  <c:pt idx="218">
+                    <c:v>Mar 2026</c:v>
+                  </c:pt>
+                  <c:pt idx="219">
+                    <c:v>Mar 2026</c:v>
+                  </c:pt>
+                  <c:pt idx="220">
+                    <c:v>Mar 2026</c:v>
+                  </c:pt>
+                  <c:pt idx="221">
+                    <c:v>Mar 2026</c:v>
+                  </c:pt>
+                  <c:pt idx="222">
+                    <c:v>Mar 2026</c:v>
+                  </c:pt>
+                  <c:pt idx="223">
+                    <c:v>Mar 2026</c:v>
+                  </c:pt>
+                  <c:pt idx="224">
+                    <c:v>Mar 2026</c:v>
+                  </c:pt>
+                  <c:pt idx="225">
+                    <c:v>Mar 2026</c:v>
+                  </c:pt>
+                  <c:pt idx="226">
+                    <c:v>Mar 2026</c:v>
+                  </c:pt>
+                  <c:pt idx="227">
+                    <c:v>Mar 2026</c:v>
+                  </c:pt>
+                  <c:pt idx="228">
+                    <c:v>Mar 2026</c:v>
+                  </c:pt>
+                  <c:pt idx="229">
+                    <c:v>Mar 2026</c:v>
+                  </c:pt>
+                  <c:pt idx="230">
+                    <c:v>Mar 2026</c:v>
+                  </c:pt>
+                  <c:pt idx="231">
+                    <c:v>Mar 2026</c:v>
+                  </c:pt>
+                  <c:pt idx="232">
+                    <c:v>Mar 2026</c:v>
+                  </c:pt>
+                  <c:pt idx="233">
+                    <c:v>Mar 2026</c:v>
+                  </c:pt>
+                  <c:pt idx="234">
+                    <c:v>Mar 2026</c:v>
+                  </c:pt>
+                  <c:pt idx="235">
+                    <c:v>Mar 2026</c:v>
+                  </c:pt>
+                  <c:pt idx="236">
+                    <c:v>Mar 2026</c:v>
+                  </c:pt>
+                  <c:pt idx="237">
+                    <c:v>Mar 2026</c:v>
+                  </c:pt>
+                  <c:pt idx="238">
+                    <c:v>Mar 2026</c:v>
+                  </c:pt>
+                  <c:pt idx="239">
+                    <c:v>Mar 2026</c:v>
+                  </c:pt>
+                  <c:pt idx="240">
+                    <c:v>Mar 2026</c:v>
+                  </c:pt>
+                  <c:pt idx="241">
+                    <c:v>Mar 2026</c:v>
+                  </c:pt>
+                  <c:pt idx="242">
+                    <c:v>Mar 2026</c:v>
+                  </c:pt>
+                  <c:pt idx="243">
+                    <c:v>Mar 2026</c:v>
+                  </c:pt>
+                  <c:pt idx="244">
+                    <c:v>Mar 2026</c:v>
+                  </c:pt>
+                  <c:pt idx="245">
+                    <c:v>Apr 2026</c:v>
+                  </c:pt>
+                  <c:pt idx="246">
+                    <c:v>Apr 2026</c:v>
+                  </c:pt>
+                  <c:pt idx="247">
+                    <c:v>Apr 2026</c:v>
+                  </c:pt>
+                  <c:pt idx="248">
+                    <c:v>Apr 2026</c:v>
+                  </c:pt>
+                  <c:pt idx="249">
+                    <c:v>Apr 2026</c:v>
+                  </c:pt>
+                  <c:pt idx="250">
+                    <c:v>Apr 2026</c:v>
+                  </c:pt>
+                  <c:pt idx="251">
+                    <c:v>Apr 2026</c:v>
+                  </c:pt>
+                  <c:pt idx="252">
+                    <c:v>Apr 2026</c:v>
+                  </c:pt>
+                  <c:pt idx="253">
+                    <c:v>Apr 2026</c:v>
+                  </c:pt>
+                  <c:pt idx="254">
+                    <c:v>Apr 2026</c:v>
+                  </c:pt>
+                  <c:pt idx="255">
+                    <c:v>Apr 2026</c:v>
+                  </c:pt>
+                  <c:pt idx="256">
+                    <c:v>Apr 2026</c:v>
+                  </c:pt>
+                  <c:pt idx="257">
+                    <c:v>Apr 2026</c:v>
+                  </c:pt>
+                  <c:pt idx="258">
+                    <c:v>Apr 2026</c:v>
+                  </c:pt>
+                  <c:pt idx="259">
+                    <c:v>Apr 2026</c:v>
+                  </c:pt>
+                  <c:pt idx="260">
+                    <c:v>Apr 2026</c:v>
+                  </c:pt>
+                  <c:pt idx="261">
+                    <c:v>Apr 2026</c:v>
+                  </c:pt>
+                  <c:pt idx="262">
+                    <c:v>Apr 2026</c:v>
+                  </c:pt>
+                  <c:pt idx="263">
+                    <c:v>Apr 2026</c:v>
+                  </c:pt>
+                  <c:pt idx="264">
+                    <c:v>Apr 2026</c:v>
+                  </c:pt>
+                  <c:pt idx="265">
+                    <c:v>Apr 2026</c:v>
+                  </c:pt>
+                  <c:pt idx="266">
+                    <c:v>Apr 2026</c:v>
+                  </c:pt>
+                  <c:pt idx="267">
+                    <c:v>Apr 2026</c:v>
+                  </c:pt>
+                  <c:pt idx="268">
+                    <c:v>Apr 2026</c:v>
+                  </c:pt>
+                  <c:pt idx="269">
+                    <c:v>Apr 2026</c:v>
+                  </c:pt>
+                  <c:pt idx="270">
+                    <c:v>Apr 2026</c:v>
+                  </c:pt>
+                  <c:pt idx="271">
+                    <c:v>Apr 2026</c:v>
+                  </c:pt>
+                  <c:pt idx="272">
+                    <c:v>Apr 2026</c:v>
+                  </c:pt>
+                  <c:pt idx="273">
+                    <c:v>Apr 2026</c:v>
+                  </c:pt>
+                  <c:pt idx="274">
+                    <c:v>Apr 2026</c:v>
+                  </c:pt>
+                  <c:pt idx="275">
+                    <c:v>May 2026</c:v>
+                  </c:pt>
+                  <c:pt idx="276">
+                    <c:v>May 2026</c:v>
+                  </c:pt>
+                  <c:pt idx="277">
+                    <c:v>May 2026</c:v>
+                  </c:pt>
+                  <c:pt idx="278">
+                    <c:v>May 2026</c:v>
+                  </c:pt>
+                  <c:pt idx="279">
+                    <c:v>May 2026</c:v>
+                  </c:pt>
+                </c:lvl>
+              </c:multiLvlStrCache>
+            </c:multiLvlStrRef>
+          </c:cat>
+          <c:val>
+            <c:numRef>
+              <c:f>Sheet1!$D$2:$D$281</c:f>
+              <c:numCache>
+                <c:formatCode>General</c:formatCode>
+                <c:ptCount val="280"/>
+                <c:pt idx="0">
+                  <c:v>1000</c:v>
+                </c:pt>
+                <c:pt idx="1">
+                  <c:v>1003.01</c:v>
+                </c:pt>
+                <c:pt idx="2">
+                  <c:v>1005.93</c:v>
+                </c:pt>
+                <c:pt idx="3">
+                  <c:v>1008.9</c:v>
+                </c:pt>
+                <c:pt idx="4">
+                  <c:v>1011.73</c:v>
+                </c:pt>
+                <c:pt idx="5">
+                  <c:v>1014.66</c:v>
+                </c:pt>
+                <c:pt idx="6">
+                  <c:v>1017.58</c:v>
+                </c:pt>
+                <c:pt idx="7">
+                  <c:v>1020.16</c:v>
+                </c:pt>
+                <c:pt idx="8">
+                  <c:v>1022.94</c:v>
+                </c:pt>
+                <c:pt idx="9">
+                  <c:v>1025.63</c:v>
                 </c:pt>
               </c:numCache>
             </c:numRef>
@@ -5161,7 +6121,7 @@
                 <a:ea typeface="Calibri" pitchFamily="34" charset="-122"/>
                 <a:cs typeface="Calibri" pitchFamily="34" charset="-120"/>
               </a:rPr>
-              <a:t>La rentabilidad esperada del FIP VANTRUST LIQUIDEZ DOLAR, es la tasa de política monetaria promedio del Banco Central de Chile.</a:t>
+              <a:t>La rentabilidad esperada del FIP VANTRUST LIQUIDEZ DOLAR, es la tasa de politica monetaria promedio del Banco Central de Chile.</a:t>
             </a:r>
             <a:endParaRPr lang="en-US" sz="700" dirty="0"/>
           </a:p>
@@ -5363,7 +6323,7 @@
                 <a:ea typeface="Calibri" pitchFamily="34" charset="-122"/>
                 <a:cs typeface="Calibri" pitchFamily="34" charset="-120"/>
               </a:rPr>
-              <a:t>prueba 3 USD</a:t>
+              <a:t>prueba USD</a:t>
             </a:r>
             <a:endParaRPr lang="en-US" sz="800" dirty="0"/>
           </a:p>
@@ -6411,6 +7371,17 @@
                       <a:pPr algn="ctr" indent="0" marL="0">
                         <a:buNone/>
                       </a:pPr>
+                      <a:r>
+                        <a:rPr lang="en-US" sz="750" dirty="0">
+                          <a:solidFill>
+                            <a:srgbClr val="333333"/>
+                          </a:solidFill>
+                          <a:latin typeface="Calibri" pitchFamily="34" charset="0"/>
+                          <a:ea typeface="Calibri" pitchFamily="34" charset="-122"/>
+                          <a:cs typeface="Calibri" pitchFamily="34" charset="-120"/>
+                        </a:rPr>
+                        <a:t>0,26%</a:t>
+                      </a:r>
                       <a:endParaRPr lang="en-US" sz="750" dirty="0">
                         <a:latin typeface="Calibri" charset="0"/>
                         <a:ea typeface="Calibri" charset="0"/>
@@ -6468,6 +7439,17 @@
                       <a:pPr algn="ctr" indent="0" marL="0">
                         <a:buNone/>
                       </a:pPr>
+                      <a:r>
+                        <a:rPr lang="en-US" sz="750" dirty="0">
+                          <a:solidFill>
+                            <a:srgbClr val="333333"/>
+                          </a:solidFill>
+                          <a:latin typeface="Calibri" pitchFamily="34" charset="0"/>
+                          <a:ea typeface="Calibri" pitchFamily="34" charset="-122"/>
+                          <a:cs typeface="Calibri" pitchFamily="34" charset="-120"/>
+                        </a:rPr>
+                        <a:t>0,79%</a:t>
+                      </a:r>
                       <a:endParaRPr lang="en-US" sz="750" dirty="0">
                         <a:latin typeface="Calibri" charset="0"/>
                         <a:ea typeface="Calibri" charset="0"/>
@@ -6525,6 +7507,17 @@
                       <a:pPr algn="ctr" indent="0" marL="0">
                         <a:buNone/>
                       </a:pPr>
+                      <a:r>
+                        <a:rPr lang="en-US" sz="750" dirty="0">
+                          <a:solidFill>
+                            <a:srgbClr val="333333"/>
+                          </a:solidFill>
+                          <a:latin typeface="Calibri" pitchFamily="34" charset="0"/>
+                          <a:ea typeface="Calibri" pitchFamily="34" charset="-122"/>
+                          <a:cs typeface="Calibri" pitchFamily="34" charset="-120"/>
+                        </a:rPr>
+                        <a:t>1,66%</a:t>
+                      </a:r>
                       <a:endParaRPr lang="en-US" sz="750" dirty="0">
                         <a:latin typeface="Calibri" charset="0"/>
                         <a:ea typeface="Calibri" charset="0"/>
@@ -6582,6 +7575,17 @@
                       <a:pPr algn="ctr" indent="0" marL="0">
                         <a:buNone/>
                       </a:pPr>
+                      <a:r>
+                        <a:rPr lang="en-US" sz="750" dirty="0">
+                          <a:solidFill>
+                            <a:srgbClr val="333333"/>
+                          </a:solidFill>
+                          <a:latin typeface="Calibri" pitchFamily="34" charset="0"/>
+                          <a:ea typeface="Calibri" pitchFamily="34" charset="-122"/>
+                          <a:cs typeface="Calibri" pitchFamily="34" charset="-120"/>
+                        </a:rPr>
+                        <a:t>3,46%</a:t>
+                      </a:r>
                       <a:endParaRPr lang="en-US" sz="750" dirty="0">
                         <a:latin typeface="Calibri" charset="0"/>
                         <a:ea typeface="Calibri" charset="0"/>
@@ -6639,6 +7643,17 @@
                       <a:pPr algn="ctr" indent="0" marL="0">
                         <a:buNone/>
                       </a:pPr>
+                      <a:r>
+                        <a:rPr lang="en-US" sz="750" dirty="0">
+                          <a:solidFill>
+                            <a:srgbClr val="333333"/>
+                          </a:solidFill>
+                          <a:latin typeface="Calibri" pitchFamily="34" charset="0"/>
+                          <a:ea typeface="Calibri" pitchFamily="34" charset="-122"/>
+                          <a:cs typeface="Calibri" pitchFamily="34" charset="-120"/>
+                        </a:rPr>
+                        <a:t>0,79%</a:t>
+                      </a:r>
                       <a:endParaRPr lang="en-US" sz="750" dirty="0">
                         <a:latin typeface="Calibri" charset="0"/>
                         <a:ea typeface="Calibri" charset="0"/>
@@ -11908,6 +12923,17 @@
                       <a:pPr algn="ctr" indent="0" marL="0">
                         <a:buNone/>
                       </a:pPr>
+                      <a:r>
+                        <a:rPr lang="en-US" sz="580" dirty="0">
+                          <a:solidFill>
+                            <a:srgbClr val="666666"/>
+                          </a:solidFill>
+                          <a:latin typeface="Calibri" pitchFamily="34" charset="0"/>
+                          <a:ea typeface="Calibri" pitchFamily="34" charset="-122"/>
+                          <a:cs typeface="Calibri" pitchFamily="34" charset="-120"/>
+                        </a:rPr>
+                        <a:t>0,00%</a:t>
+                      </a:r>
                       <a:endParaRPr lang="en-US" sz="580" dirty="0">
                         <a:latin typeface="Calibri" charset="0"/>
                         <a:ea typeface="Calibri" charset="0"/>
@@ -11962,6 +12988,17 @@
                       <a:pPr algn="ctr" indent="0" marL="0">
                         <a:buNone/>
                       </a:pPr>
+                      <a:r>
+                        <a:rPr lang="en-US" sz="580" dirty="0">
+                          <a:solidFill>
+                            <a:srgbClr val="666666"/>
+                          </a:solidFill>
+                          <a:latin typeface="Calibri" pitchFamily="34" charset="0"/>
+                          <a:ea typeface="Calibri" pitchFamily="34" charset="-122"/>
+                          <a:cs typeface="Calibri" pitchFamily="34" charset="-120"/>
+                        </a:rPr>
+                        <a:t>0,28%</a:t>
+                      </a:r>
                       <a:endParaRPr lang="en-US" sz="580" dirty="0">
                         <a:latin typeface="Calibri" charset="0"/>
                         <a:ea typeface="Calibri" charset="0"/>
@@ -12016,6 +13053,17 @@
                       <a:pPr algn="ctr" indent="0" marL="0">
                         <a:buNone/>
                       </a:pPr>
+                      <a:r>
+                        <a:rPr lang="en-US" sz="580" dirty="0">
+                          <a:solidFill>
+                            <a:srgbClr val="666666"/>
+                          </a:solidFill>
+                          <a:latin typeface="Calibri" pitchFamily="34" charset="0"/>
+                          <a:ea typeface="Calibri" pitchFamily="34" charset="-122"/>
+                          <a:cs typeface="Calibri" pitchFamily="34" charset="-120"/>
+                        </a:rPr>
+                        <a:t>0,30%</a:t>
+                      </a:r>
                       <a:endParaRPr lang="en-US" sz="580" dirty="0">
                         <a:latin typeface="Calibri" charset="0"/>
                         <a:ea typeface="Calibri" charset="0"/>
@@ -12070,6 +13118,17 @@
                       <a:pPr algn="ctr" indent="0" marL="0">
                         <a:buNone/>
                       </a:pPr>
+                      <a:r>
+                        <a:rPr lang="en-US" sz="580" dirty="0">
+                          <a:solidFill>
+                            <a:srgbClr val="666666"/>
+                          </a:solidFill>
+                          <a:latin typeface="Calibri" pitchFamily="34" charset="0"/>
+                          <a:ea typeface="Calibri" pitchFamily="34" charset="-122"/>
+                          <a:cs typeface="Calibri" pitchFamily="34" charset="-120"/>
+                        </a:rPr>
+                        <a:t>0,29%</a:t>
+                      </a:r>
                       <a:endParaRPr lang="en-US" sz="580" dirty="0">
                         <a:latin typeface="Calibri" charset="0"/>
                         <a:ea typeface="Calibri" charset="0"/>
@@ -12124,6 +13183,17 @@
                       <a:pPr algn="ctr" indent="0" marL="0">
                         <a:buNone/>
                       </a:pPr>
+                      <a:r>
+                        <a:rPr lang="en-US" sz="580" dirty="0">
+                          <a:solidFill>
+                            <a:srgbClr val="666666"/>
+                          </a:solidFill>
+                          <a:latin typeface="Calibri" pitchFamily="34" charset="0"/>
+                          <a:ea typeface="Calibri" pitchFamily="34" charset="-122"/>
+                          <a:cs typeface="Calibri" pitchFamily="34" charset="-120"/>
+                        </a:rPr>
+                        <a:t>0,29%</a:t>
+                      </a:r>
                       <a:endParaRPr lang="en-US" sz="580" dirty="0">
                         <a:latin typeface="Calibri" charset="0"/>
                         <a:ea typeface="Calibri" charset="0"/>
@@ -12178,6 +13248,17 @@
                       <a:pPr algn="ctr" indent="0" marL="0">
                         <a:buNone/>
                       </a:pPr>
+                      <a:r>
+                        <a:rPr lang="en-US" sz="580" dirty="0">
+                          <a:solidFill>
+                            <a:srgbClr val="666666"/>
+                          </a:solidFill>
+                          <a:latin typeface="Calibri" pitchFamily="34" charset="0"/>
+                          <a:ea typeface="Calibri" pitchFamily="34" charset="-122"/>
+                          <a:cs typeface="Calibri" pitchFamily="34" charset="-120"/>
+                        </a:rPr>
+                        <a:t>0,28%</a:t>
+                      </a:r>
                       <a:endParaRPr lang="en-US" sz="580" dirty="0">
                         <a:latin typeface="Calibri" charset="0"/>
                         <a:ea typeface="Calibri" charset="0"/>
@@ -12232,6 +13313,17 @@
                       <a:pPr algn="ctr" indent="0" marL="0">
                         <a:buNone/>
                       </a:pPr>
+                      <a:r>
+                        <a:rPr lang="en-US" sz="580" dirty="0">
+                          <a:solidFill>
+                            <a:srgbClr val="666666"/>
+                          </a:solidFill>
+                          <a:latin typeface="Calibri" pitchFamily="34" charset="0"/>
+                          <a:ea typeface="Calibri" pitchFamily="34" charset="-122"/>
+                          <a:cs typeface="Calibri" pitchFamily="34" charset="-120"/>
+                        </a:rPr>
+                        <a:t>0,30%</a:t>
+                      </a:r>
                       <a:endParaRPr lang="en-US" sz="580" dirty="0">
                         <a:latin typeface="Calibri" charset="0"/>
                         <a:ea typeface="Calibri" charset="0"/>
@@ -12286,6 +13378,17 @@
                       <a:pPr algn="ctr" indent="0" marL="0">
                         <a:buNone/>
                       </a:pPr>
+                      <a:r>
+                        <a:rPr lang="en-US" sz="580" dirty="0">
+                          <a:solidFill>
+                            <a:srgbClr val="666666"/>
+                          </a:solidFill>
+                          <a:latin typeface="Calibri" pitchFamily="34" charset="0"/>
+                          <a:ea typeface="Calibri" pitchFamily="34" charset="-122"/>
+                          <a:cs typeface="Calibri" pitchFamily="34" charset="-120"/>
+                        </a:rPr>
+                        <a:t>0,30%</a:t>
+                      </a:r>
                       <a:endParaRPr lang="en-US" sz="580" dirty="0">
                         <a:latin typeface="Calibri" charset="0"/>
                         <a:ea typeface="Calibri" charset="0"/>
@@ -12340,6 +13443,17 @@
                       <a:pPr algn="ctr" indent="0" marL="0">
                         <a:buNone/>
                       </a:pPr>
+                      <a:r>
+                        <a:rPr lang="en-US" sz="580" dirty="0">
+                          <a:solidFill>
+                            <a:srgbClr val="666666"/>
+                          </a:solidFill>
+                          <a:latin typeface="Calibri" pitchFamily="34" charset="0"/>
+                          <a:ea typeface="Calibri" pitchFamily="34" charset="-122"/>
+                          <a:cs typeface="Calibri" pitchFamily="34" charset="-120"/>
+                        </a:rPr>
+                        <a:t>0,29%</a:t>
+                      </a:r>
                       <a:endParaRPr lang="en-US" sz="580" dirty="0">
                         <a:latin typeface="Calibri" charset="0"/>
                         <a:ea typeface="Calibri" charset="0"/>
@@ -12394,6 +13508,17 @@
                       <a:pPr algn="ctr" indent="0" marL="0">
                         <a:buNone/>
                       </a:pPr>
+                      <a:r>
+                        <a:rPr lang="en-US" sz="580" dirty="0">
+                          <a:solidFill>
+                            <a:srgbClr val="666666"/>
+                          </a:solidFill>
+                          <a:latin typeface="Calibri" pitchFamily="34" charset="0"/>
+                          <a:ea typeface="Calibri" pitchFamily="34" charset="-122"/>
+                          <a:cs typeface="Calibri" pitchFamily="34" charset="-120"/>
+                        </a:rPr>
+                        <a:t>0,30%</a:t>
+                      </a:r>
                       <a:endParaRPr lang="en-US" sz="580" dirty="0">
                         <a:latin typeface="Calibri" charset="0"/>
                         <a:ea typeface="Calibri" charset="0"/>
@@ -12448,6 +13573,17 @@
                       <a:pPr algn="ctr" indent="0" marL="0">
                         <a:buNone/>
                       </a:pPr>
+                      <a:r>
+                        <a:rPr lang="en-US" sz="580" dirty="0">
+                          <a:solidFill>
+                            <a:srgbClr val="666666"/>
+                          </a:solidFill>
+                          <a:latin typeface="Calibri" pitchFamily="34" charset="0"/>
+                          <a:ea typeface="Calibri" pitchFamily="34" charset="-122"/>
+                          <a:cs typeface="Calibri" pitchFamily="34" charset="-120"/>
+                        </a:rPr>
+                        <a:t>0,28%</a:t>
+                      </a:r>
                       <a:endParaRPr lang="en-US" sz="580" dirty="0">
                         <a:latin typeface="Calibri" charset="0"/>
                         <a:ea typeface="Calibri" charset="0"/>
@@ -12502,6 +13638,17 @@
                       <a:pPr algn="ctr" indent="0" marL="0">
                         <a:buNone/>
                       </a:pPr>
+                      <a:r>
+                        <a:rPr lang="en-US" sz="580" dirty="0">
+                          <a:solidFill>
+                            <a:srgbClr val="666666"/>
+                          </a:solidFill>
+                          <a:latin typeface="Calibri" pitchFamily="34" charset="0"/>
+                          <a:ea typeface="Calibri" pitchFamily="34" charset="-122"/>
+                          <a:cs typeface="Calibri" pitchFamily="34" charset="-120"/>
+                        </a:rPr>
+                        <a:t>0,58%</a:t>
+                      </a:r>
                       <a:endParaRPr lang="en-US" sz="580" dirty="0">
                         <a:latin typeface="Calibri" charset="0"/>
                         <a:ea typeface="Calibri" charset="0"/>
@@ -12556,6 +13703,17 @@
                       <a:pPr algn="ctr" indent="0" marL="0">
                         <a:buNone/>
                       </a:pPr>
+                      <a:r>
+                        <a:rPr lang="en-US" sz="580" dirty="0">
+                          <a:solidFill>
+                            <a:srgbClr val="666666"/>
+                          </a:solidFill>
+                          <a:latin typeface="Calibri" pitchFamily="34" charset="0"/>
+                          <a:ea typeface="Calibri" pitchFamily="34" charset="-122"/>
+                          <a:cs typeface="Calibri" pitchFamily="34" charset="-120"/>
+                        </a:rPr>
+                        <a:t>3,53%</a:t>
+                      </a:r>
                       <a:endParaRPr lang="en-US" sz="580" dirty="0">
                         <a:latin typeface="Calibri" charset="0"/>
                         <a:ea typeface="Calibri" charset="0"/>
@@ -14509,6 +15667,212 @@
                       <a:pPr algn="ctr" indent="0" marL="0">
                         <a:buNone/>
                       </a:pPr>
+                      <a:r>
+                        <a:rPr lang="en-US" sz="580" dirty="0">
+                          <a:solidFill>
+                            <a:srgbClr val="666666"/>
+                          </a:solidFill>
+                          <a:latin typeface="Calibri" pitchFamily="34" charset="0"/>
+                          <a:ea typeface="Calibri" pitchFamily="34" charset="-122"/>
+                          <a:cs typeface="Calibri" pitchFamily="34" charset="-120"/>
+                        </a:rPr>
+                        <a:t>0,00%</a:t>
+                      </a:r>
+                      <a:endParaRPr lang="en-US" sz="580" dirty="0">
+                        <a:latin typeface="Calibri" charset="0"/>
+                        <a:ea typeface="Calibri" charset="0"/>
+                        <a:cs typeface="Calibri" charset="0"/>
+                      </a:endParaRPr>
+                    </a:p>
+                  </a:txBody>
+                  <a:tcPr marL="91440" marR="91440" marT="45720" marB="45720">
+                    <a:lnL w="2540" cap="flat" cmpd="sng" algn="ctr">
+                      <a:solidFill>
+                        <a:srgbClr val="EEEEEE"/>
+                      </a:solidFill>
+                      <a:prstDash val="solid"/>
+                      <a:round/>
+                      <a:headEnd type="none" w="med" len="med"/>
+                      <a:tailEnd type="none" w="med" len="med"/>
+                    </a:lnL>
+                    <a:lnR w="2540" cap="flat" cmpd="sng" algn="ctr">
+                      <a:solidFill>
+                        <a:srgbClr val="EEEEEE"/>
+                      </a:solidFill>
+                      <a:prstDash val="solid"/>
+                      <a:round/>
+                      <a:headEnd type="none" w="med" len="med"/>
+                      <a:tailEnd type="none" w="med" len="med"/>
+                    </a:lnR>
+                    <a:lnT w="2540" cap="flat" cmpd="sng" algn="ctr">
+                      <a:solidFill>
+                        <a:srgbClr val="EEEEEE"/>
+                      </a:solidFill>
+                      <a:prstDash val="solid"/>
+                      <a:round/>
+                      <a:headEnd type="none" w="med" len="med"/>
+                      <a:tailEnd type="none" w="med" len="med"/>
+                    </a:lnT>
+                    <a:lnB w="2540" cap="flat" cmpd="sng" algn="ctr">
+                      <a:solidFill>
+                        <a:srgbClr val="EEEEEE"/>
+                      </a:solidFill>
+                      <a:prstDash val="solid"/>
+                      <a:round/>
+                      <a:headEnd type="none" w="med" len="med"/>
+                      <a:tailEnd type="none" w="med" len="med"/>
+                    </a:lnB>
+                  </a:tcPr>
+                </a:tc>
+                <a:tc>
+                  <a:txBody>
+                    <a:bodyPr/>
+                    <a:lstStyle/>
+                    <a:p>
+                      <a:pPr algn="ctr" indent="0" marL="0">
+                        <a:buNone/>
+                      </a:pPr>
+                      <a:r>
+                        <a:rPr lang="en-US" sz="580" dirty="0">
+                          <a:solidFill>
+                            <a:srgbClr val="666666"/>
+                          </a:solidFill>
+                          <a:latin typeface="Calibri" pitchFamily="34" charset="0"/>
+                          <a:ea typeface="Calibri" pitchFamily="34" charset="-122"/>
+                          <a:cs typeface="Calibri" pitchFamily="34" charset="-120"/>
+                        </a:rPr>
+                        <a:t>0,25%</a:t>
+                      </a:r>
+                      <a:endParaRPr lang="en-US" sz="580" dirty="0">
+                        <a:latin typeface="Calibri" charset="0"/>
+                        <a:ea typeface="Calibri" charset="0"/>
+                        <a:cs typeface="Calibri" charset="0"/>
+                      </a:endParaRPr>
+                    </a:p>
+                  </a:txBody>
+                  <a:tcPr marL="91440" marR="91440" marT="45720" marB="45720">
+                    <a:lnL w="2540" cap="flat" cmpd="sng" algn="ctr">
+                      <a:solidFill>
+                        <a:srgbClr val="EEEEEE"/>
+                      </a:solidFill>
+                      <a:prstDash val="solid"/>
+                      <a:round/>
+                      <a:headEnd type="none" w="med" len="med"/>
+                      <a:tailEnd type="none" w="med" len="med"/>
+                    </a:lnL>
+                    <a:lnR w="2540" cap="flat" cmpd="sng" algn="ctr">
+                      <a:solidFill>
+                        <a:srgbClr val="EEEEEE"/>
+                      </a:solidFill>
+                      <a:prstDash val="solid"/>
+                      <a:round/>
+                      <a:headEnd type="none" w="med" len="med"/>
+                      <a:tailEnd type="none" w="med" len="med"/>
+                    </a:lnR>
+                    <a:lnT w="2540" cap="flat" cmpd="sng" algn="ctr">
+                      <a:solidFill>
+                        <a:srgbClr val="EEEEEE"/>
+                      </a:solidFill>
+                      <a:prstDash val="solid"/>
+                      <a:round/>
+                      <a:headEnd type="none" w="med" len="med"/>
+                      <a:tailEnd type="none" w="med" len="med"/>
+                    </a:lnT>
+                    <a:lnB w="2540" cap="flat" cmpd="sng" algn="ctr">
+                      <a:solidFill>
+                        <a:srgbClr val="EEEEEE"/>
+                      </a:solidFill>
+                      <a:prstDash val="solid"/>
+                      <a:round/>
+                      <a:headEnd type="none" w="med" len="med"/>
+                      <a:tailEnd type="none" w="med" len="med"/>
+                    </a:lnB>
+                  </a:tcPr>
+                </a:tc>
+                <a:tc>
+                  <a:txBody>
+                    <a:bodyPr/>
+                    <a:lstStyle/>
+                    <a:p>
+                      <a:pPr algn="ctr" indent="0" marL="0">
+                        <a:buNone/>
+                      </a:pPr>
+                      <a:r>
+                        <a:rPr lang="en-US" sz="580" dirty="0">
+                          <a:solidFill>
+                            <a:srgbClr val="666666"/>
+                          </a:solidFill>
+                          <a:latin typeface="Calibri" pitchFamily="34" charset="0"/>
+                          <a:ea typeface="Calibri" pitchFamily="34" charset="-122"/>
+                          <a:cs typeface="Calibri" pitchFamily="34" charset="-120"/>
+                        </a:rPr>
+                        <a:t>0,27%</a:t>
+                      </a:r>
+                      <a:endParaRPr lang="en-US" sz="580" dirty="0">
+                        <a:latin typeface="Calibri" charset="0"/>
+                        <a:ea typeface="Calibri" charset="0"/>
+                        <a:cs typeface="Calibri" charset="0"/>
+                      </a:endParaRPr>
+                    </a:p>
+                  </a:txBody>
+                  <a:tcPr marL="91440" marR="91440" marT="45720" marB="45720">
+                    <a:lnL w="2540" cap="flat" cmpd="sng" algn="ctr">
+                      <a:solidFill>
+                        <a:srgbClr val="EEEEEE"/>
+                      </a:solidFill>
+                      <a:prstDash val="solid"/>
+                      <a:round/>
+                      <a:headEnd type="none" w="med" len="med"/>
+                      <a:tailEnd type="none" w="med" len="med"/>
+                    </a:lnL>
+                    <a:lnR w="2540" cap="flat" cmpd="sng" algn="ctr">
+                      <a:solidFill>
+                        <a:srgbClr val="EEEEEE"/>
+                      </a:solidFill>
+                      <a:prstDash val="solid"/>
+                      <a:round/>
+                      <a:headEnd type="none" w="med" len="med"/>
+                      <a:tailEnd type="none" w="med" len="med"/>
+                    </a:lnR>
+                    <a:lnT w="2540" cap="flat" cmpd="sng" algn="ctr">
+                      <a:solidFill>
+                        <a:srgbClr val="EEEEEE"/>
+                      </a:solidFill>
+                      <a:prstDash val="solid"/>
+                      <a:round/>
+                      <a:headEnd type="none" w="med" len="med"/>
+                      <a:tailEnd type="none" w="med" len="med"/>
+                    </a:lnT>
+                    <a:lnB w="2540" cap="flat" cmpd="sng" algn="ctr">
+                      <a:solidFill>
+                        <a:srgbClr val="EEEEEE"/>
+                      </a:solidFill>
+                      <a:prstDash val="solid"/>
+                      <a:round/>
+                      <a:headEnd type="none" w="med" len="med"/>
+                      <a:tailEnd type="none" w="med" len="med"/>
+                    </a:lnB>
+                  </a:tcPr>
+                </a:tc>
+                <a:tc>
+                  <a:txBody>
+                    <a:bodyPr/>
+                    <a:lstStyle/>
+                    <a:p>
+                      <a:pPr algn="ctr" indent="0" marL="0">
+                        <a:buNone/>
+                      </a:pPr>
+                      <a:r>
+                        <a:rPr lang="en-US" sz="580" dirty="0">
+                          <a:solidFill>
+                            <a:srgbClr val="666666"/>
+                          </a:solidFill>
+                          <a:latin typeface="Calibri" pitchFamily="34" charset="0"/>
+                          <a:ea typeface="Calibri" pitchFamily="34" charset="-122"/>
+                          <a:cs typeface="Calibri" pitchFamily="34" charset="-120"/>
+                        </a:rPr>
+                        <a:t>0,26%</a:t>
+                      </a:r>
                       <a:endParaRPr lang="en-US" sz="580" dirty="0">
                         <a:latin typeface="Calibri" charset="0"/>
                         <a:ea typeface="Calibri" charset="0"/>
@@ -14995,168 +16359,17 @@
                       <a:pPr algn="ctr" indent="0" marL="0">
                         <a:buNone/>
                       </a:pPr>
-                      <a:endParaRPr lang="en-US" sz="580" dirty="0">
-                        <a:latin typeface="Calibri" charset="0"/>
-                        <a:ea typeface="Calibri" charset="0"/>
-                        <a:cs typeface="Calibri" charset="0"/>
-                      </a:endParaRPr>
-                    </a:p>
-                  </a:txBody>
-                  <a:tcPr marL="91440" marR="91440" marT="45720" marB="45720">
-                    <a:lnL w="2540" cap="flat" cmpd="sng" algn="ctr">
-                      <a:solidFill>
-                        <a:srgbClr val="EEEEEE"/>
-                      </a:solidFill>
-                      <a:prstDash val="solid"/>
-                      <a:round/>
-                      <a:headEnd type="none" w="med" len="med"/>
-                      <a:tailEnd type="none" w="med" len="med"/>
-                    </a:lnL>
-                    <a:lnR w="2540" cap="flat" cmpd="sng" algn="ctr">
-                      <a:solidFill>
-                        <a:srgbClr val="EEEEEE"/>
-                      </a:solidFill>
-                      <a:prstDash val="solid"/>
-                      <a:round/>
-                      <a:headEnd type="none" w="med" len="med"/>
-                      <a:tailEnd type="none" w="med" len="med"/>
-                    </a:lnR>
-                    <a:lnT w="2540" cap="flat" cmpd="sng" algn="ctr">
-                      <a:solidFill>
-                        <a:srgbClr val="EEEEEE"/>
-                      </a:solidFill>
-                      <a:prstDash val="solid"/>
-                      <a:round/>
-                      <a:headEnd type="none" w="med" len="med"/>
-                      <a:tailEnd type="none" w="med" len="med"/>
-                    </a:lnT>
-                    <a:lnB w="2540" cap="flat" cmpd="sng" algn="ctr">
-                      <a:solidFill>
-                        <a:srgbClr val="EEEEEE"/>
-                      </a:solidFill>
-                      <a:prstDash val="solid"/>
-                      <a:round/>
-                      <a:headEnd type="none" w="med" len="med"/>
-                      <a:tailEnd type="none" w="med" len="med"/>
-                    </a:lnB>
-                  </a:tcPr>
-                </a:tc>
-                <a:tc>
-                  <a:txBody>
-                    <a:bodyPr/>
-                    <a:lstStyle/>
-                    <a:p>
-                      <a:pPr algn="ctr" indent="0" marL="0">
-                        <a:buNone/>
-                      </a:pPr>
-                      <a:endParaRPr lang="en-US" sz="580" dirty="0">
-                        <a:latin typeface="Calibri" charset="0"/>
-                        <a:ea typeface="Calibri" charset="0"/>
-                        <a:cs typeface="Calibri" charset="0"/>
-                      </a:endParaRPr>
-                    </a:p>
-                  </a:txBody>
-                  <a:tcPr marL="91440" marR="91440" marT="45720" marB="45720">
-                    <a:lnL w="2540" cap="flat" cmpd="sng" algn="ctr">
-                      <a:solidFill>
-                        <a:srgbClr val="EEEEEE"/>
-                      </a:solidFill>
-                      <a:prstDash val="solid"/>
-                      <a:round/>
-                      <a:headEnd type="none" w="med" len="med"/>
-                      <a:tailEnd type="none" w="med" len="med"/>
-                    </a:lnL>
-                    <a:lnR w="2540" cap="flat" cmpd="sng" algn="ctr">
-                      <a:solidFill>
-                        <a:srgbClr val="EEEEEE"/>
-                      </a:solidFill>
-                      <a:prstDash val="solid"/>
-                      <a:round/>
-                      <a:headEnd type="none" w="med" len="med"/>
-                      <a:tailEnd type="none" w="med" len="med"/>
-                    </a:lnR>
-                    <a:lnT w="2540" cap="flat" cmpd="sng" algn="ctr">
-                      <a:solidFill>
-                        <a:srgbClr val="EEEEEE"/>
-                      </a:solidFill>
-                      <a:prstDash val="solid"/>
-                      <a:round/>
-                      <a:headEnd type="none" w="med" len="med"/>
-                      <a:tailEnd type="none" w="med" len="med"/>
-                    </a:lnT>
-                    <a:lnB w="2540" cap="flat" cmpd="sng" algn="ctr">
-                      <a:solidFill>
-                        <a:srgbClr val="EEEEEE"/>
-                      </a:solidFill>
-                      <a:prstDash val="solid"/>
-                      <a:round/>
-                      <a:headEnd type="none" w="med" len="med"/>
-                      <a:tailEnd type="none" w="med" len="med"/>
-                    </a:lnB>
-                  </a:tcPr>
-                </a:tc>
-                <a:tc>
-                  <a:txBody>
-                    <a:bodyPr/>
-                    <a:lstStyle/>
-                    <a:p>
-                      <a:pPr algn="ctr" indent="0" marL="0">
-                        <a:buNone/>
-                      </a:pPr>
-                      <a:endParaRPr lang="en-US" sz="580" dirty="0">
-                        <a:latin typeface="Calibri" charset="0"/>
-                        <a:ea typeface="Calibri" charset="0"/>
-                        <a:cs typeface="Calibri" charset="0"/>
-                      </a:endParaRPr>
-                    </a:p>
-                  </a:txBody>
-                  <a:tcPr marL="91440" marR="91440" marT="45720" marB="45720">
-                    <a:lnL w="2540" cap="flat" cmpd="sng" algn="ctr">
-                      <a:solidFill>
-                        <a:srgbClr val="EEEEEE"/>
-                      </a:solidFill>
-                      <a:prstDash val="solid"/>
-                      <a:round/>
-                      <a:headEnd type="none" w="med" len="med"/>
-                      <a:tailEnd type="none" w="med" len="med"/>
-                    </a:lnL>
-                    <a:lnR w="2540" cap="flat" cmpd="sng" algn="ctr">
-                      <a:solidFill>
-                        <a:srgbClr val="EEEEEE"/>
-                      </a:solidFill>
-                      <a:prstDash val="solid"/>
-                      <a:round/>
-                      <a:headEnd type="none" w="med" len="med"/>
-                      <a:tailEnd type="none" w="med" len="med"/>
-                    </a:lnR>
-                    <a:lnT w="2540" cap="flat" cmpd="sng" algn="ctr">
-                      <a:solidFill>
-                        <a:srgbClr val="EEEEEE"/>
-                      </a:solidFill>
-                      <a:prstDash val="solid"/>
-                      <a:round/>
-                      <a:headEnd type="none" w="med" len="med"/>
-                      <a:tailEnd type="none" w="med" len="med"/>
-                    </a:lnT>
-                    <a:lnB w="2540" cap="flat" cmpd="sng" algn="ctr">
-                      <a:solidFill>
-                        <a:srgbClr val="EEEEEE"/>
-                      </a:solidFill>
-                      <a:prstDash val="solid"/>
-                      <a:round/>
-                      <a:headEnd type="none" w="med" len="med"/>
-                      <a:tailEnd type="none" w="med" len="med"/>
-                    </a:lnB>
-                  </a:tcPr>
-                </a:tc>
-                <a:tc>
-                  <a:txBody>
-                    <a:bodyPr/>
-                    <a:lstStyle/>
-                    <a:p>
-                      <a:pPr algn="ctr" indent="0" marL="0">
-                        <a:buNone/>
-                      </a:pPr>
+                      <a:r>
+                        <a:rPr lang="en-US" sz="580" dirty="0">
+                          <a:solidFill>
+                            <a:srgbClr val="666666"/>
+                          </a:solidFill>
+                          <a:latin typeface="Calibri" pitchFamily="34" charset="0"/>
+                          <a:ea typeface="Calibri" pitchFamily="34" charset="-122"/>
+                          <a:cs typeface="Calibri" pitchFamily="34" charset="-120"/>
+                        </a:rPr>
+                        <a:t>0,79%</a:t>
+                      </a:r>
                       <a:endParaRPr lang="en-US" sz="580" dirty="0">
                         <a:latin typeface="Calibri" charset="0"/>
                         <a:ea typeface="Calibri" charset="0"/>

--- a/folletos/2026-04/pptx/FIP_VANTRUST_LIQUIDEZ_DOLAR.pptx
+++ b/folletos/2026-04/pptx/FIP_VANTRUST_LIQUIDEZ_DOLAR.pptx
@@ -6323,7 +6323,7 @@
                 <a:ea typeface="Calibri" pitchFamily="34" charset="-122"/>
                 <a:cs typeface="Calibri" pitchFamily="34" charset="-120"/>
               </a:rPr>
-              <a:t>prueba USD</a:t>
+              <a:t>Prueba 4 Usd</a:t>
             </a:r>
             <a:endParaRPr lang="en-US" sz="800" dirty="0"/>
           </a:p>

--- a/folletos/2026-04/pptx/FIP_VANTRUST_LIQUIDEZ_DOLAR.pptx
+++ b/folletos/2026-04/pptx/FIP_VANTRUST_LIQUIDEZ_DOLAR.pptx
@@ -1897,7 +1897,7 @@
               <c:strCache>
                 <c:ptCount val="1"/>
                 <c:pt idx="0">
-                  <c:v>ICP Nom</c:v>
+                  <c:v>ICP Nom.</c:v>
                 </c:pt>
               </c:strCache>
             </c:strRef>
@@ -2857,18 +2857,18 @@
               <c:strCache>
                 <c:ptCount val="1"/>
                 <c:pt idx="0">
-                  <c:v>Competencia Relevante</c:v>
+                  <c:v>Competencia Relevante (*)</c:v>
                 </c:pt>
               </c:strCache>
             </c:strRef>
           </c:tx>
           <c:spPr>
             <a:solidFill>
-              <a:srgbClr val="BBBBBB"/>
+              <a:srgbClr val="555555"/>
             </a:solidFill>
             <a:ln w="19050" cap="flat">
               <a:solidFill>
-                <a:srgbClr val="BBBBBB"/>
+                <a:srgbClr val="555555"/>
               </a:solidFill>
               <a:prstDash val="solid"/>
               <a:round/>
@@ -2905,11 +2905,11 @@
             <c:size val="6"/>
             <c:spPr>
               <a:solidFill>
-                <a:srgbClr val="BBBBBB"/>
+                <a:srgbClr val="555555"/>
               </a:solidFill>
               <a:ln w="9525" cap="flat">
                 <a:solidFill>
-                  <a:srgbClr val="BBBBBB"/>
+                  <a:srgbClr val="555555"/>
                 </a:solidFill>
                 <a:prstDash val="solid"/>
                 <a:round/>
@@ -3877,7 +3877,7 @@
         <c:auto val="1"/>
         <c:lblAlgn val="ctr"/>
         <c:noMultiLvlLbl val="1"/>
-        <c:tickLblSkip val="35"/>
+        <c:tickLblSkip val="28"/>
       </c:catAx>
       <c:valAx>
         <c:axId val="2094734552"/>
@@ -3889,7 +3889,7 @@
         <c:axPos val="l"/>
         <c:majorGridlines>
           <c:spPr>
-            <a:ln w="6350" cap="flat">
+            <a:ln w="3810" cap="flat">
               <a:solidFill>
                 <a:srgbClr val="EEEEEE"/>
               </a:solidFill>
@@ -3916,7 +3916,7 @@
           <a:lstStyle/>
           <a:p>
             <a:pPr>
-              <a:defRPr sz="700" b="0" i="0" u="none" strike="noStrike">
+              <a:defRPr sz="600" b="0" i="0" u="none" strike="noStrike">
                 <a:solidFill>
                   <a:srgbClr val="666666"/>
                 </a:solidFill>
@@ -3941,14 +3941,14 @@
       </c:spPr>
     </c:plotArea>
     <c:legend>
-      <c:legendPos val="b"/>
+      <c:legendPos val="r"/>
       <c:overlay val="0"/>
       <c:txPr>
         <a:bodyPr/>
         <a:lstStyle/>
         <a:p>
           <a:pPr>
-            <a:defRPr sz="700">      </a:defRPr>
+            <a:defRPr sz="600">      </a:defRPr>
           </a:pPr>
           <a:endParaRPr lang="en-US"/>
         </a:p>
@@ -4837,7 +4837,27 @@
         <p:spPr>
           <a:xfrm>
             <a:off x="0" y="0"/>
-            <a:ext cx="2542032" cy="1828800"/>
+            <a:ext cx="2450592" cy="10689336"/>
+          </a:xfrm>
+          <a:prstGeom prst="rect">
+            <a:avLst/>
+          </a:prstGeom>
+          <a:solidFill>
+            <a:srgbClr val="FFFFFF"/>
+          </a:solidFill>
+          <a:ln/>
+        </p:spPr>
+      </p:sp>
+      <p:sp>
+        <p:nvSpPr>
+          <p:cNvPr id="3" name="Shape 1"/>
+          <p:cNvSpPr/>
+          <p:nvPr/>
+        </p:nvSpPr>
+        <p:spPr>
+          <a:xfrm>
+            <a:off x="0" y="0"/>
+            <a:ext cx="2450592" cy="1737360"/>
           </a:xfrm>
           <a:prstGeom prst="rect">
             <a:avLst/>
@@ -4850,14 +4870,14 @@
       </p:sp>
       <p:sp>
         <p:nvSpPr>
-          <p:cNvPr id="3" name="Text 1"/>
+          <p:cNvPr id="4" name="Text 2"/>
           <p:cNvSpPr/>
           <p:nvPr/>
         </p:nvSpPr>
         <p:spPr>
           <a:xfrm>
-            <a:off x="182880" y="164592"/>
-            <a:ext cx="2194560" cy="1325880"/>
+            <a:off x="118872" y="164592"/>
+            <a:ext cx="2212848" cy="1188720"/>
           </a:xfrm>
           <a:prstGeom prst="rect">
             <a:avLst/>
@@ -4873,7 +4893,7 @@
               <a:buNone/>
             </a:pPr>
             <a:r>
-              <a:rPr lang="en-US" sz="2400" b="1" dirty="0">
+              <a:rPr lang="en-US" sz="2200" b="1" dirty="0">
                 <a:solidFill>
                   <a:srgbClr val="FFFFFF"/>
                 </a:solidFill>
@@ -4883,14 +4903,14 @@
               </a:rPr>
               <a:t>Liquidez</a:t>
             </a:r>
-            <a:endParaRPr lang="en-US" sz="2400" dirty="0"/>
+            <a:endParaRPr lang="en-US" sz="2200" dirty="0"/>
           </a:p>
           <a:p>
             <a:pPr indent="0" marL="0">
               <a:buNone/>
             </a:pPr>
             <a:r>
-              <a:rPr lang="en-US" sz="2400" b="1" dirty="0">
+              <a:rPr lang="en-US" sz="2200" b="1" dirty="0">
                 <a:solidFill>
                   <a:srgbClr val="FFFFFF"/>
                 </a:solidFill>
@@ -4900,20 +4920,20 @@
               </a:rPr>
               <a:t>Dolar</a:t>
             </a:r>
-            <a:endParaRPr lang="en-US" sz="2400" dirty="0"/>
+            <a:endParaRPr lang="en-US" sz="2200" dirty="0"/>
           </a:p>
         </p:txBody>
       </p:sp>
       <p:sp>
         <p:nvSpPr>
-          <p:cNvPr id="4" name="Text 2"/>
+          <p:cNvPr id="5" name="Text 3"/>
           <p:cNvSpPr/>
           <p:nvPr/>
         </p:nvSpPr>
         <p:spPr>
           <a:xfrm>
-            <a:off x="182880" y="1536192"/>
-            <a:ext cx="2194560" cy="182880"/>
+            <a:off x="118872" y="1417320"/>
+            <a:ext cx="2212848" cy="182880"/>
           </a:xfrm>
           <a:prstGeom prst="rect">
             <a:avLst/>
@@ -4929,7 +4949,7 @@
               <a:buNone/>
             </a:pPr>
             <a:r>
-              <a:rPr lang="en-US" sz="700" spc="500" kern="0" dirty="0">
+              <a:rPr lang="en-US" sz="700" spc="400" kern="0" dirty="0">
                 <a:solidFill>
                   <a:srgbClr val="AAAAAA"/>
                 </a:solidFill>
@@ -4945,13 +4965,13 @@
       </p:sp>
       <p:sp>
         <p:nvSpPr>
-          <p:cNvPr id="5" name="Shape 3"/>
+          <p:cNvPr id="6" name="Shape 4"/>
           <p:cNvSpPr/>
           <p:nvPr/>
         </p:nvSpPr>
         <p:spPr>
           <a:xfrm>
-            <a:off x="2560320" y="0"/>
+            <a:off x="2450592" y="0"/>
             <a:ext cx="0" cy="10689336"/>
           </a:xfrm>
           <a:prstGeom prst="line">
@@ -4960,50 +4980,11 @@
           <a:noFill/>
           <a:ln w="6350">
             <a:solidFill>
-              <a:srgbClr val="CCCCCC"/>
+              <a:srgbClr val="EEEEEE"/>
             </a:solidFill>
             <a:prstDash val="solid"/>
           </a:ln>
         </p:spPr>
-      </p:sp>
-      <p:sp>
-        <p:nvSpPr>
-          <p:cNvPr id="6" name="Text 4"/>
-          <p:cNvSpPr/>
-          <p:nvPr/>
-        </p:nvSpPr>
-        <p:spPr>
-          <a:xfrm>
-            <a:off x="2697480" y="137160"/>
-            <a:ext cx="4636008" cy="182880"/>
-          </a:xfrm>
-          <a:prstGeom prst="rect">
-            <a:avLst/>
-          </a:prstGeom>
-          <a:noFill/>
-          <a:ln/>
-        </p:spPr>
-        <p:txBody>
-          <a:bodyPr wrap="square" lIns="0" tIns="0" rIns="0" bIns="0" rtlCol="0" anchor="ctr"/>
-          <a:lstStyle/>
-          <a:p>
-            <a:pPr algn="r" indent="0" marL="0">
-              <a:buNone/>
-            </a:pPr>
-            <a:r>
-              <a:rPr lang="en-US" sz="750" dirty="0">
-                <a:solidFill>
-                  <a:srgbClr val="666666"/>
-                </a:solidFill>
-                <a:latin typeface="Calibri" pitchFamily="34" charset="0"/>
-                <a:ea typeface="Calibri" pitchFamily="34" charset="-122"/>
-                <a:cs typeface="Calibri" pitchFamily="34" charset="-120"/>
-              </a:rPr>
-              <a:t>VanTrust Capital</a:t>
-            </a:r>
-            <a:endParaRPr lang="en-US" sz="750" dirty="0"/>
-          </a:p>
-        </p:txBody>
       </p:sp>
       <p:sp>
         <p:nvSpPr>
@@ -5013,8 +4994,8 @@
         </p:nvSpPr>
         <p:spPr>
           <a:xfrm>
-            <a:off x="228600" y="1920240"/>
-            <a:ext cx="2240280" cy="173736"/>
+            <a:off x="118872" y="1828800"/>
+            <a:ext cx="2212848" cy="164592"/>
           </a:xfrm>
           <a:prstGeom prst="rect">
             <a:avLst/>
@@ -5030,7 +5011,7 @@
               <a:buNone/>
             </a:pPr>
             <a:r>
-              <a:rPr lang="en-US" sz="850" b="1" dirty="0">
+              <a:rPr lang="en-US" sz="800" b="1" dirty="0">
                 <a:solidFill>
                   <a:srgbClr val="000000"/>
                 </a:solidFill>
@@ -5040,7 +5021,7 @@
               </a:rPr>
               <a:t>Información General</a:t>
             </a:r>
-            <a:endParaRPr lang="en-US" sz="850" dirty="0"/>
+            <a:endParaRPr lang="en-US" sz="800" dirty="0"/>
           </a:p>
         </p:txBody>
       </p:sp>
@@ -5052,16 +5033,16 @@
         </p:nvSpPr>
         <p:spPr>
           <a:xfrm>
-            <a:off x="228600" y="2121408"/>
-            <a:ext cx="2240280" cy="0"/>
+            <a:off x="118872" y="2011680"/>
+            <a:ext cx="2212848" cy="0"/>
           </a:xfrm>
           <a:prstGeom prst="line">
             <a:avLst/>
           </a:prstGeom>
           <a:noFill/>
-          <a:ln w="5080">
+          <a:ln w="12700">
             <a:solidFill>
-              <a:srgbClr val="CCCCCC"/>
+              <a:srgbClr val="000000"/>
             </a:solidFill>
             <a:prstDash val="solid"/>
           </a:ln>
@@ -5075,8 +5056,8 @@
         </p:nvSpPr>
         <p:spPr>
           <a:xfrm>
-            <a:off x="228600" y="2194560"/>
-            <a:ext cx="914400" cy="164592"/>
+            <a:off x="118872" y="2075688"/>
+            <a:ext cx="914400" cy="155448"/>
           </a:xfrm>
           <a:prstGeom prst="rect">
             <a:avLst/>
@@ -5092,7 +5073,7 @@
               <a:buNone/>
             </a:pPr>
             <a:r>
-              <a:rPr lang="en-US" sz="680" b="1" dirty="0">
+              <a:rPr lang="en-US" sz="650" b="1" dirty="0">
                 <a:solidFill>
                   <a:srgbClr val="000000"/>
                 </a:solidFill>
@@ -5102,7 +5083,7 @@
               </a:rPr>
               <a:t>Administradora</a:t>
             </a:r>
-            <a:endParaRPr lang="en-US" sz="680" dirty="0"/>
+            <a:endParaRPr lang="en-US" sz="650" dirty="0"/>
           </a:p>
         </p:txBody>
       </p:sp>
@@ -5114,8 +5095,8 @@
         </p:nvSpPr>
         <p:spPr>
           <a:xfrm>
-            <a:off x="1161288" y="2194560"/>
-            <a:ext cx="1298448" cy="164592"/>
+            <a:off x="1051560" y="2075688"/>
+            <a:ext cx="1280160" cy="155448"/>
           </a:xfrm>
           <a:prstGeom prst="rect">
             <a:avLst/>
@@ -5131,9 +5112,9 @@
               <a:buNone/>
             </a:pPr>
             <a:r>
-              <a:rPr lang="en-US" sz="680" dirty="0">
+              <a:rPr lang="en-US" sz="650" dirty="0">
                 <a:solidFill>
-                  <a:srgbClr val="333333"/>
+                  <a:srgbClr val="555555"/>
                 </a:solidFill>
                 <a:latin typeface="Calibri" pitchFamily="34" charset="0"/>
                 <a:ea typeface="Calibri" pitchFamily="34" charset="-122"/>
@@ -5141,7 +5122,7 @@
               </a:rPr>
               <a:t>Vantrust Gestion Patrimonial S.A.</a:t>
             </a:r>
-            <a:endParaRPr lang="en-US" sz="680" dirty="0"/>
+            <a:endParaRPr lang="en-US" sz="650" dirty="0"/>
           </a:p>
         </p:txBody>
       </p:sp>
@@ -5153,8 +5134,8 @@
         </p:nvSpPr>
         <p:spPr>
           <a:xfrm>
-            <a:off x="228600" y="2377440"/>
-            <a:ext cx="914400" cy="164592"/>
+            <a:off x="118872" y="2249424"/>
+            <a:ext cx="914400" cy="155448"/>
           </a:xfrm>
           <a:prstGeom prst="rect">
             <a:avLst/>
@@ -5170,7 +5151,7 @@
               <a:buNone/>
             </a:pPr>
             <a:r>
-              <a:rPr lang="en-US" sz="680" b="1" dirty="0">
+              <a:rPr lang="en-US" sz="650" b="1" dirty="0">
                 <a:solidFill>
                   <a:srgbClr val="000000"/>
                 </a:solidFill>
@@ -5180,7 +5161,7 @@
               </a:rPr>
               <a:t>RUT Fondo</a:t>
             </a:r>
-            <a:endParaRPr lang="en-US" sz="680" dirty="0"/>
+            <a:endParaRPr lang="en-US" sz="650" dirty="0"/>
           </a:p>
         </p:txBody>
       </p:sp>
@@ -5192,8 +5173,8 @@
         </p:nvSpPr>
         <p:spPr>
           <a:xfrm>
-            <a:off x="1161288" y="2377440"/>
-            <a:ext cx="1298448" cy="164592"/>
+            <a:off x="1051560" y="2249424"/>
+            <a:ext cx="1280160" cy="155448"/>
           </a:xfrm>
           <a:prstGeom prst="rect">
             <a:avLst/>
@@ -5209,9 +5190,9 @@
               <a:buNone/>
             </a:pPr>
             <a:r>
-              <a:rPr lang="en-US" sz="680" dirty="0">
+              <a:rPr lang="en-US" sz="650" dirty="0">
                 <a:solidFill>
-                  <a:srgbClr val="333333"/>
+                  <a:srgbClr val="555555"/>
                 </a:solidFill>
                 <a:latin typeface="Calibri" pitchFamily="34" charset="0"/>
                 <a:ea typeface="Calibri" pitchFamily="34" charset="-122"/>
@@ -5219,7 +5200,7 @@
               </a:rPr>
               <a:t>76,637,334-8</a:t>
             </a:r>
-            <a:endParaRPr lang="en-US" sz="680" dirty="0"/>
+            <a:endParaRPr lang="en-US" sz="650" dirty="0"/>
           </a:p>
         </p:txBody>
       </p:sp>
@@ -5231,8 +5212,8 @@
         </p:nvSpPr>
         <p:spPr>
           <a:xfrm>
-            <a:off x="228600" y="2560320"/>
-            <a:ext cx="914400" cy="164592"/>
+            <a:off x="118872" y="2423160"/>
+            <a:ext cx="914400" cy="155448"/>
           </a:xfrm>
           <a:prstGeom prst="rect">
             <a:avLst/>
@@ -5248,7 +5229,7 @@
               <a:buNone/>
             </a:pPr>
             <a:r>
-              <a:rPr lang="en-US" sz="680" b="1" dirty="0">
+              <a:rPr lang="en-US" sz="650" b="1" dirty="0">
                 <a:solidFill>
                   <a:srgbClr val="000000"/>
                 </a:solidFill>
@@ -5258,7 +5239,7 @@
               </a:rPr>
               <a:t>Moneda</a:t>
             </a:r>
-            <a:endParaRPr lang="en-US" sz="680" dirty="0"/>
+            <a:endParaRPr lang="en-US" sz="650" dirty="0"/>
           </a:p>
         </p:txBody>
       </p:sp>
@@ -5270,8 +5251,8 @@
         </p:nvSpPr>
         <p:spPr>
           <a:xfrm>
-            <a:off x="1161288" y="2560320"/>
-            <a:ext cx="1298448" cy="164592"/>
+            <a:off x="1051560" y="2423160"/>
+            <a:ext cx="1280160" cy="155448"/>
           </a:xfrm>
           <a:prstGeom prst="rect">
             <a:avLst/>
@@ -5287,9 +5268,9 @@
               <a:buNone/>
             </a:pPr>
             <a:r>
-              <a:rPr lang="en-US" sz="680" dirty="0">
+              <a:rPr lang="en-US" sz="650" dirty="0">
                 <a:solidFill>
-                  <a:srgbClr val="333333"/>
+                  <a:srgbClr val="555555"/>
                 </a:solidFill>
                 <a:latin typeface="Calibri" pitchFamily="34" charset="0"/>
                 <a:ea typeface="Calibri" pitchFamily="34" charset="-122"/>
@@ -5297,7 +5278,7 @@
               </a:rPr>
               <a:t>USD</a:t>
             </a:r>
-            <a:endParaRPr lang="en-US" sz="680" dirty="0"/>
+            <a:endParaRPr lang="en-US" sz="650" dirty="0"/>
           </a:p>
         </p:txBody>
       </p:sp>
@@ -5309,8 +5290,8 @@
         </p:nvSpPr>
         <p:spPr>
           <a:xfrm>
-            <a:off x="228600" y="2743200"/>
-            <a:ext cx="914400" cy="164592"/>
+            <a:off x="118872" y="2596896"/>
+            <a:ext cx="914400" cy="155448"/>
           </a:xfrm>
           <a:prstGeom prst="rect">
             <a:avLst/>
@@ -5326,7 +5307,7 @@
               <a:buNone/>
             </a:pPr>
             <a:r>
-              <a:rPr lang="en-US" sz="680" b="1" dirty="0">
+              <a:rPr lang="en-US" sz="650" b="1" dirty="0">
                 <a:solidFill>
                   <a:srgbClr val="000000"/>
                 </a:solidFill>
@@ -5336,7 +5317,7 @@
               </a:rPr>
               <a:t>Tipo de Fondo</a:t>
             </a:r>
-            <a:endParaRPr lang="en-US" sz="680" dirty="0"/>
+            <a:endParaRPr lang="en-US" sz="650" dirty="0"/>
           </a:p>
         </p:txBody>
       </p:sp>
@@ -5348,8 +5329,8 @@
         </p:nvSpPr>
         <p:spPr>
           <a:xfrm>
-            <a:off x="1161288" y="2743200"/>
-            <a:ext cx="1298448" cy="164592"/>
+            <a:off x="1051560" y="2596896"/>
+            <a:ext cx="1280160" cy="155448"/>
           </a:xfrm>
           <a:prstGeom prst="rect">
             <a:avLst/>
@@ -5365,9 +5346,9 @@
               <a:buNone/>
             </a:pPr>
             <a:r>
-              <a:rPr lang="en-US" sz="680" dirty="0">
+              <a:rPr lang="en-US" sz="650" dirty="0">
                 <a:solidFill>
-                  <a:srgbClr val="333333"/>
+                  <a:srgbClr val="555555"/>
                 </a:solidFill>
                 <a:latin typeface="Calibri" pitchFamily="34" charset="0"/>
                 <a:ea typeface="Calibri" pitchFamily="34" charset="-122"/>
@@ -5375,7 +5356,7 @@
               </a:rPr>
               <a:t>Fondo de Inversión Privado</a:t>
             </a:r>
-            <a:endParaRPr lang="en-US" sz="680" dirty="0"/>
+            <a:endParaRPr lang="en-US" sz="650" dirty="0"/>
           </a:p>
         </p:txBody>
       </p:sp>
@@ -5387,8 +5368,8 @@
         </p:nvSpPr>
         <p:spPr>
           <a:xfrm>
-            <a:off x="228600" y="2926080"/>
-            <a:ext cx="914400" cy="164592"/>
+            <a:off x="118872" y="2770632"/>
+            <a:ext cx="914400" cy="155448"/>
           </a:xfrm>
           <a:prstGeom prst="rect">
             <a:avLst/>
@@ -5404,7 +5385,7 @@
               <a:buNone/>
             </a:pPr>
             <a:r>
-              <a:rPr lang="en-US" sz="680" b="1" dirty="0">
+              <a:rPr lang="en-US" sz="650" b="1" dirty="0">
                 <a:solidFill>
                   <a:srgbClr val="000000"/>
                 </a:solidFill>
@@ -5414,7 +5395,7 @@
               </a:rPr>
               <a:t>Fecha Inicio</a:t>
             </a:r>
-            <a:endParaRPr lang="en-US" sz="680" dirty="0"/>
+            <a:endParaRPr lang="en-US" sz="650" dirty="0"/>
           </a:p>
         </p:txBody>
       </p:sp>
@@ -5426,8 +5407,8 @@
         </p:nvSpPr>
         <p:spPr>
           <a:xfrm>
-            <a:off x="1161288" y="2926080"/>
-            <a:ext cx="1298448" cy="164592"/>
+            <a:off x="1051560" y="2770632"/>
+            <a:ext cx="1280160" cy="155448"/>
           </a:xfrm>
           <a:prstGeom prst="rect">
             <a:avLst/>
@@ -5443,9 +5424,9 @@
               <a:buNone/>
             </a:pPr>
             <a:r>
-              <a:rPr lang="en-US" sz="680" dirty="0">
+              <a:rPr lang="en-US" sz="650" dirty="0">
                 <a:solidFill>
-                  <a:srgbClr val="333333"/>
+                  <a:srgbClr val="555555"/>
                 </a:solidFill>
                 <a:latin typeface="Calibri" pitchFamily="34" charset="0"/>
                 <a:ea typeface="Calibri" pitchFamily="34" charset="-122"/>
@@ -5453,7 +5434,7 @@
               </a:rPr>
               <a:t>July 2025</a:t>
             </a:r>
-            <a:endParaRPr lang="en-US" sz="680" dirty="0"/>
+            <a:endParaRPr lang="en-US" sz="650" dirty="0"/>
           </a:p>
         </p:txBody>
       </p:sp>
@@ -5465,8 +5446,8 @@
         </p:nvSpPr>
         <p:spPr>
           <a:xfrm>
-            <a:off x="228600" y="3108960"/>
-            <a:ext cx="914400" cy="164592"/>
+            <a:off x="118872" y="2944368"/>
+            <a:ext cx="914400" cy="155448"/>
           </a:xfrm>
           <a:prstGeom prst="rect">
             <a:avLst/>
@@ -5482,7 +5463,7 @@
               <a:buNone/>
             </a:pPr>
             <a:r>
-              <a:rPr lang="en-US" sz="680" b="1" dirty="0">
+              <a:rPr lang="en-US" sz="650" b="1" dirty="0">
                 <a:solidFill>
                   <a:srgbClr val="000000"/>
                 </a:solidFill>
@@ -5492,7 +5473,7 @@
               </a:rPr>
               <a:t>Benchmark</a:t>
             </a:r>
-            <a:endParaRPr lang="en-US" sz="680" dirty="0"/>
+            <a:endParaRPr lang="en-US" sz="650" dirty="0"/>
           </a:p>
         </p:txBody>
       </p:sp>
@@ -5504,8 +5485,8 @@
         </p:nvSpPr>
         <p:spPr>
           <a:xfrm>
-            <a:off x="1161288" y="3108960"/>
-            <a:ext cx="1298448" cy="164592"/>
+            <a:off x="1051560" y="2944368"/>
+            <a:ext cx="1280160" cy="155448"/>
           </a:xfrm>
           <a:prstGeom prst="rect">
             <a:avLst/>
@@ -5521,9 +5502,9 @@
               <a:buNone/>
             </a:pPr>
             <a:r>
-              <a:rPr lang="en-US" sz="680" dirty="0">
+              <a:rPr lang="en-US" sz="650" dirty="0">
                 <a:solidFill>
-                  <a:srgbClr val="333333"/>
+                  <a:srgbClr val="555555"/>
                 </a:solidFill>
                 <a:latin typeface="Calibri" pitchFamily="34" charset="0"/>
                 <a:ea typeface="Calibri" pitchFamily="34" charset="-122"/>
@@ -5531,7 +5512,7 @@
               </a:rPr>
               <a:t>Índice Cámara Promedio (ICP)</a:t>
             </a:r>
-            <a:endParaRPr lang="en-US" sz="680" dirty="0"/>
+            <a:endParaRPr lang="en-US" sz="650" dirty="0"/>
           </a:p>
         </p:txBody>
       </p:sp>
@@ -5543,8 +5524,8 @@
         </p:nvSpPr>
         <p:spPr>
           <a:xfrm>
-            <a:off x="228600" y="3291840"/>
-            <a:ext cx="914400" cy="164592"/>
+            <a:off x="118872" y="3118104"/>
+            <a:ext cx="914400" cy="155448"/>
           </a:xfrm>
           <a:prstGeom prst="rect">
             <a:avLst/>
@@ -5560,7 +5541,7 @@
               <a:buNone/>
             </a:pPr>
             <a:r>
-              <a:rPr lang="en-US" sz="680" b="1" dirty="0">
+              <a:rPr lang="en-US" sz="650" b="1" dirty="0">
                 <a:solidFill>
                   <a:srgbClr val="000000"/>
                 </a:solidFill>
@@ -5570,7 +5551,7 @@
               </a:rPr>
               <a:t>Fondo Rescatable</a:t>
             </a:r>
-            <a:endParaRPr lang="en-US" sz="680" dirty="0"/>
+            <a:endParaRPr lang="en-US" sz="650" dirty="0"/>
           </a:p>
         </p:txBody>
       </p:sp>
@@ -5582,8 +5563,8 @@
         </p:nvSpPr>
         <p:spPr>
           <a:xfrm>
-            <a:off x="1161288" y="3291840"/>
-            <a:ext cx="1298448" cy="164592"/>
+            <a:off x="1051560" y="3118104"/>
+            <a:ext cx="1280160" cy="155448"/>
           </a:xfrm>
           <a:prstGeom prst="rect">
             <a:avLst/>
@@ -5599,9 +5580,9 @@
               <a:buNone/>
             </a:pPr>
             <a:r>
-              <a:rPr lang="en-US" sz="680" dirty="0">
+              <a:rPr lang="en-US" sz="650" dirty="0">
                 <a:solidFill>
-                  <a:srgbClr val="333333"/>
+                  <a:srgbClr val="555555"/>
                 </a:solidFill>
                 <a:latin typeface="Calibri" pitchFamily="34" charset="0"/>
                 <a:ea typeface="Calibri" pitchFamily="34" charset="-122"/>
@@ -5609,7 +5590,7 @@
               </a:rPr>
               <a:t>Sí</a:t>
             </a:r>
-            <a:endParaRPr lang="en-US" sz="680" dirty="0"/>
+            <a:endParaRPr lang="en-US" sz="650" dirty="0"/>
           </a:p>
         </p:txBody>
       </p:sp>
@@ -5621,8 +5602,8 @@
         </p:nvSpPr>
         <p:spPr>
           <a:xfrm>
-            <a:off x="228600" y="3474720"/>
-            <a:ext cx="914400" cy="164592"/>
+            <a:off x="118872" y="3291840"/>
+            <a:ext cx="914400" cy="155448"/>
           </a:xfrm>
           <a:prstGeom prst="rect">
             <a:avLst/>
@@ -5638,7 +5619,7 @@
               <a:buNone/>
             </a:pPr>
             <a:r>
-              <a:rPr lang="en-US" sz="680" b="1" dirty="0">
+              <a:rPr lang="en-US" sz="650" b="1" dirty="0">
                 <a:solidFill>
                   <a:srgbClr val="000000"/>
                 </a:solidFill>
@@ -5648,7 +5629,7 @@
               </a:rPr>
               <a:t>Plazo Rescate</a:t>
             </a:r>
-            <a:endParaRPr lang="en-US" sz="680" dirty="0"/>
+            <a:endParaRPr lang="en-US" sz="650" dirty="0"/>
           </a:p>
         </p:txBody>
       </p:sp>
@@ -5660,8 +5641,8 @@
         </p:nvSpPr>
         <p:spPr>
           <a:xfrm>
-            <a:off x="1161288" y="3474720"/>
-            <a:ext cx="1298448" cy="164592"/>
+            <a:off x="1051560" y="3291840"/>
+            <a:ext cx="1280160" cy="155448"/>
           </a:xfrm>
           <a:prstGeom prst="rect">
             <a:avLst/>
@@ -5677,9 +5658,9 @@
               <a:buNone/>
             </a:pPr>
             <a:r>
-              <a:rPr lang="en-US" sz="680" dirty="0">
+              <a:rPr lang="en-US" sz="650" dirty="0">
                 <a:solidFill>
-                  <a:srgbClr val="333333"/>
+                  <a:srgbClr val="555555"/>
                 </a:solidFill>
                 <a:latin typeface="Calibri" pitchFamily="34" charset="0"/>
                 <a:ea typeface="Calibri" pitchFamily="34" charset="-122"/>
@@ -5687,7 +5668,7 @@
               </a:rPr>
               <a:t>A más tardar 15 días corridos</a:t>
             </a:r>
-            <a:endParaRPr lang="en-US" sz="680" dirty="0"/>
+            <a:endParaRPr lang="en-US" sz="650" dirty="0"/>
           </a:p>
         </p:txBody>
       </p:sp>
@@ -5699,8 +5680,8 @@
         </p:nvSpPr>
         <p:spPr>
           <a:xfrm>
-            <a:off x="228600" y="3657600"/>
-            <a:ext cx="914400" cy="256032"/>
+            <a:off x="118872" y="3465576"/>
+            <a:ext cx="914400" cy="246888"/>
           </a:xfrm>
           <a:prstGeom prst="rect">
             <a:avLst/>
@@ -5716,7 +5697,7 @@
               <a:buNone/>
             </a:pPr>
             <a:r>
-              <a:rPr lang="en-US" sz="680" b="1" dirty="0">
+              <a:rPr lang="en-US" sz="650" b="1" dirty="0">
                 <a:solidFill>
                   <a:srgbClr val="000000"/>
                 </a:solidFill>
@@ -5726,7 +5707,7 @@
               </a:rPr>
               <a:t>Riesgos</a:t>
             </a:r>
-            <a:endParaRPr lang="en-US" sz="680" dirty="0"/>
+            <a:endParaRPr lang="en-US" sz="650" dirty="0"/>
           </a:p>
         </p:txBody>
       </p:sp>
@@ -5738,8 +5719,8 @@
         </p:nvSpPr>
         <p:spPr>
           <a:xfrm>
-            <a:off x="1161288" y="3657600"/>
-            <a:ext cx="1298448" cy="256032"/>
+            <a:off x="1051560" y="3465576"/>
+            <a:ext cx="1280160" cy="246888"/>
           </a:xfrm>
           <a:prstGeom prst="rect">
             <a:avLst/>
@@ -5755,9 +5736,9 @@
               <a:buNone/>
             </a:pPr>
             <a:r>
-              <a:rPr lang="en-US" sz="680" dirty="0">
+              <a:rPr lang="en-US" sz="650" dirty="0">
                 <a:solidFill>
-                  <a:srgbClr val="333333"/>
+                  <a:srgbClr val="555555"/>
                 </a:solidFill>
                 <a:latin typeface="Calibri" pitchFamily="34" charset="0"/>
                 <a:ea typeface="Calibri" pitchFamily="34" charset="-122"/>
@@ -5765,7 +5746,7 @@
               </a:rPr>
               <a:t>Mercado- Crédito - Liquidez - Tasa de interés - Derivados</a:t>
             </a:r>
-            <a:endParaRPr lang="en-US" sz="680" dirty="0"/>
+            <a:endParaRPr lang="en-US" sz="650" dirty="0"/>
           </a:p>
         </p:txBody>
       </p:sp>
@@ -5777,8 +5758,8 @@
         </p:nvSpPr>
         <p:spPr>
           <a:xfrm>
-            <a:off x="228600" y="3931920"/>
-            <a:ext cx="914400" cy="256032"/>
+            <a:off x="118872" y="3730752"/>
+            <a:ext cx="914400" cy="246888"/>
           </a:xfrm>
           <a:prstGeom prst="rect">
             <a:avLst/>
@@ -5794,7 +5775,7 @@
               <a:buNone/>
             </a:pPr>
             <a:r>
-              <a:rPr lang="en-US" sz="680" b="1" dirty="0">
+              <a:rPr lang="en-US" sz="650" b="1" dirty="0">
                 <a:solidFill>
                   <a:srgbClr val="000000"/>
                 </a:solidFill>
@@ -5804,7 +5785,7 @@
               </a:rPr>
               <a:t>Remuneración</a:t>
             </a:r>
-            <a:endParaRPr lang="en-US" sz="680" dirty="0"/>
+            <a:endParaRPr lang="en-US" sz="650" dirty="0"/>
           </a:p>
         </p:txBody>
       </p:sp>
@@ -5816,8 +5797,8 @@
         </p:nvSpPr>
         <p:spPr>
           <a:xfrm>
-            <a:off x="1161288" y="3931920"/>
-            <a:ext cx="1298448" cy="256032"/>
+            <a:off x="1051560" y="3730752"/>
+            <a:ext cx="1280160" cy="246888"/>
           </a:xfrm>
           <a:prstGeom prst="rect">
             <a:avLst/>
@@ -5833,9 +5814,9 @@
               <a:buNone/>
             </a:pPr>
             <a:r>
-              <a:rPr lang="en-US" sz="680" dirty="0">
+              <a:rPr lang="en-US" sz="650" dirty="0">
                 <a:solidFill>
-                  <a:srgbClr val="333333"/>
+                  <a:srgbClr val="555555"/>
                 </a:solidFill>
                 <a:latin typeface="Calibri" pitchFamily="34" charset="0"/>
                 <a:ea typeface="Calibri" pitchFamily="34" charset="-122"/>
@@ -5843,7 +5824,7 @@
               </a:rPr>
               <a:t>0,295% IVA Incluido</a:t>
             </a:r>
-            <a:endParaRPr lang="en-US" sz="680" dirty="0"/>
+            <a:endParaRPr lang="en-US" sz="650" dirty="0"/>
           </a:p>
         </p:txBody>
       </p:sp>
@@ -5855,8 +5836,8 @@
         </p:nvSpPr>
         <p:spPr>
           <a:xfrm>
-            <a:off x="228600" y="4206240"/>
-            <a:ext cx="914400" cy="164592"/>
+            <a:off x="118872" y="3995928"/>
+            <a:ext cx="914400" cy="155448"/>
           </a:xfrm>
           <a:prstGeom prst="rect">
             <a:avLst/>
@@ -5872,7 +5853,7 @@
               <a:buNone/>
             </a:pPr>
             <a:r>
-              <a:rPr lang="en-US" sz="680" b="1" dirty="0">
+              <a:rPr lang="en-US" sz="650" b="1" dirty="0">
                 <a:solidFill>
                   <a:srgbClr val="000000"/>
                 </a:solidFill>
@@ -5882,7 +5863,7 @@
               </a:rPr>
               <a:t>Custodio</a:t>
             </a:r>
-            <a:endParaRPr lang="en-US" sz="680" dirty="0"/>
+            <a:endParaRPr lang="en-US" sz="650" dirty="0"/>
           </a:p>
         </p:txBody>
       </p:sp>
@@ -5894,8 +5875,8 @@
         </p:nvSpPr>
         <p:spPr>
           <a:xfrm>
-            <a:off x="1161288" y="4206240"/>
-            <a:ext cx="1298448" cy="164592"/>
+            <a:off x="1051560" y="3995928"/>
+            <a:ext cx="1280160" cy="155448"/>
           </a:xfrm>
           <a:prstGeom prst="rect">
             <a:avLst/>
@@ -5911,9 +5892,9 @@
               <a:buNone/>
             </a:pPr>
             <a:r>
-              <a:rPr lang="en-US" sz="680" dirty="0">
+              <a:rPr lang="en-US" sz="650" dirty="0">
                 <a:solidFill>
-                  <a:srgbClr val="333333"/>
+                  <a:srgbClr val="555555"/>
                 </a:solidFill>
                 <a:latin typeface="Calibri" pitchFamily="34" charset="0"/>
                 <a:ea typeface="Calibri" pitchFamily="34" charset="-122"/>
@@ -5921,7 +5902,7 @@
               </a:rPr>
               <a:t>Vantrust Capital C. de Bolsa</a:t>
             </a:r>
-            <a:endParaRPr lang="en-US" sz="680" dirty="0"/>
+            <a:endParaRPr lang="en-US" sz="650" dirty="0"/>
           </a:p>
         </p:txBody>
       </p:sp>
@@ -5933,16 +5914,16 @@
         </p:nvSpPr>
         <p:spPr>
           <a:xfrm>
-            <a:off x="228600" y="4443984"/>
-            <a:ext cx="2240280" cy="0"/>
+            <a:off x="118872" y="4224528"/>
+            <a:ext cx="2212848" cy="0"/>
           </a:xfrm>
           <a:prstGeom prst="line">
             <a:avLst/>
           </a:prstGeom>
           <a:noFill/>
-          <a:ln w="5080">
+          <a:ln w="6350">
             <a:solidFill>
-              <a:srgbClr val="CCCCCC"/>
+              <a:srgbClr val="DDDDDD"/>
             </a:solidFill>
             <a:prstDash val="solid"/>
           </a:ln>
@@ -5956,8 +5937,8 @@
         </p:nvSpPr>
         <p:spPr>
           <a:xfrm>
-            <a:off x="228600" y="4535424"/>
-            <a:ext cx="2240280" cy="173736"/>
+            <a:off x="118872" y="4315968"/>
+            <a:ext cx="2212848" cy="164592"/>
           </a:xfrm>
           <a:prstGeom prst="rect">
             <a:avLst/>
@@ -5973,7 +5954,7 @@
               <a:buNone/>
             </a:pPr>
             <a:r>
-              <a:rPr lang="en-US" sz="850" b="1" dirty="0">
+              <a:rPr lang="en-US" sz="800" b="1" dirty="0">
                 <a:solidFill>
                   <a:srgbClr val="000000"/>
                 </a:solidFill>
@@ -5983,20 +5964,43 @@
               </a:rPr>
               <a:t>Objetivo</a:t>
             </a:r>
-            <a:endParaRPr lang="en-US" sz="850" dirty="0"/>
+            <a:endParaRPr lang="en-US" sz="800" dirty="0"/>
           </a:p>
         </p:txBody>
       </p:sp>
       <p:sp>
         <p:nvSpPr>
-          <p:cNvPr id="33" name="Text 31"/>
+          <p:cNvPr id="33" name="Shape 31"/>
           <p:cNvSpPr/>
           <p:nvPr/>
         </p:nvSpPr>
         <p:spPr>
           <a:xfrm>
-            <a:off x="228600" y="4718304"/>
-            <a:ext cx="2240280" cy="658368"/>
+            <a:off x="118872" y="4498848"/>
+            <a:ext cx="2212848" cy="0"/>
+          </a:xfrm>
+          <a:prstGeom prst="line">
+            <a:avLst/>
+          </a:prstGeom>
+          <a:noFill/>
+          <a:ln w="12700">
+            <a:solidFill>
+              <a:srgbClr val="000000"/>
+            </a:solidFill>
+            <a:prstDash val="solid"/>
+          </a:ln>
+        </p:spPr>
+      </p:sp>
+      <p:sp>
+        <p:nvSpPr>
+          <p:cNvPr id="34" name="Text 32"/>
+          <p:cNvSpPr/>
+          <p:nvPr/>
+        </p:nvSpPr>
+        <p:spPr>
+          <a:xfrm>
+            <a:off x="118872" y="4562856"/>
+            <a:ext cx="2212848" cy="685800"/>
           </a:xfrm>
           <a:prstGeom prst="rect">
             <a:avLst/>
@@ -6014,7 +6018,7 @@
             <a:r>
               <a:rPr lang="en-US" sz="700" dirty="0">
                 <a:solidFill>
-                  <a:srgbClr val="333333"/>
+                  <a:srgbClr val="555555"/>
                 </a:solidFill>
                 <a:latin typeface="Calibri" pitchFamily="34" charset="0"/>
                 <a:ea typeface="Calibri" pitchFamily="34" charset="-122"/>
@@ -6028,22 +6032,22 @@
       </p:sp>
       <p:sp>
         <p:nvSpPr>
-          <p:cNvPr id="34" name="Shape 32"/>
+          <p:cNvPr id="35" name="Shape 33"/>
           <p:cNvSpPr/>
           <p:nvPr/>
         </p:nvSpPr>
         <p:spPr>
           <a:xfrm>
-            <a:off x="228600" y="5468112"/>
-            <a:ext cx="2240280" cy="0"/>
+            <a:off x="118872" y="5312664"/>
+            <a:ext cx="2212848" cy="0"/>
           </a:xfrm>
           <a:prstGeom prst="line">
             <a:avLst/>
           </a:prstGeom>
           <a:noFill/>
-          <a:ln w="5080">
+          <a:ln w="6350">
             <a:solidFill>
-              <a:srgbClr val="CCCCCC"/>
+              <a:srgbClr val="DDDDDD"/>
             </a:solidFill>
             <a:prstDash val="solid"/>
           </a:ln>
@@ -6051,14 +6055,14 @@
       </p:sp>
       <p:sp>
         <p:nvSpPr>
-          <p:cNvPr id="35" name="Text 33"/>
+          <p:cNvPr id="36" name="Text 34"/>
           <p:cNvSpPr/>
           <p:nvPr/>
         </p:nvSpPr>
         <p:spPr>
           <a:xfrm>
-            <a:off x="228600" y="5559552"/>
-            <a:ext cx="2240280" cy="173736"/>
+            <a:off x="118872" y="5404104"/>
+            <a:ext cx="2212848" cy="164592"/>
           </a:xfrm>
           <a:prstGeom prst="rect">
             <a:avLst/>
@@ -6074,7 +6078,7 @@
               <a:buNone/>
             </a:pPr>
             <a:r>
-              <a:rPr lang="en-US" sz="850" b="1" dirty="0">
+              <a:rPr lang="en-US" sz="800" b="1" dirty="0">
                 <a:solidFill>
                   <a:srgbClr val="000000"/>
                 </a:solidFill>
@@ -6084,20 +6088,43 @@
               </a:rPr>
               <a:t>Rentabilidad</a:t>
             </a:r>
-            <a:endParaRPr lang="en-US" sz="850" dirty="0"/>
+            <a:endParaRPr lang="en-US" sz="800" dirty="0"/>
           </a:p>
         </p:txBody>
       </p:sp>
       <p:sp>
         <p:nvSpPr>
-          <p:cNvPr id="36" name="Text 34"/>
+          <p:cNvPr id="37" name="Shape 35"/>
           <p:cNvSpPr/>
           <p:nvPr/>
         </p:nvSpPr>
         <p:spPr>
           <a:xfrm>
-            <a:off x="228600" y="5742432"/>
-            <a:ext cx="2240280" cy="566928"/>
+            <a:off x="118872" y="5586984"/>
+            <a:ext cx="2212848" cy="0"/>
+          </a:xfrm>
+          <a:prstGeom prst="line">
+            <a:avLst/>
+          </a:prstGeom>
+          <a:noFill/>
+          <a:ln w="12700">
+            <a:solidFill>
+              <a:srgbClr val="000000"/>
+            </a:solidFill>
+            <a:prstDash val="solid"/>
+          </a:ln>
+        </p:spPr>
+      </p:sp>
+      <p:sp>
+        <p:nvSpPr>
+          <p:cNvPr id="38" name="Text 36"/>
+          <p:cNvSpPr/>
+          <p:nvPr/>
+        </p:nvSpPr>
+        <p:spPr>
+          <a:xfrm>
+            <a:off x="118872" y="5650992"/>
+            <a:ext cx="2212848" cy="594360"/>
           </a:xfrm>
           <a:prstGeom prst="rect">
             <a:avLst/>
@@ -6115,7 +6142,7 @@
             <a:r>
               <a:rPr lang="en-US" sz="700" dirty="0">
                 <a:solidFill>
-                  <a:srgbClr val="333333"/>
+                  <a:srgbClr val="555555"/>
                 </a:solidFill>
                 <a:latin typeface="Calibri" pitchFamily="34" charset="0"/>
                 <a:ea typeface="Calibri" pitchFamily="34" charset="-122"/>
@@ -6129,22 +6156,22 @@
       </p:sp>
       <p:sp>
         <p:nvSpPr>
-          <p:cNvPr id="37" name="Shape 35"/>
+          <p:cNvPr id="39" name="Shape 37"/>
           <p:cNvSpPr/>
           <p:nvPr/>
         </p:nvSpPr>
         <p:spPr>
           <a:xfrm>
-            <a:off x="228600" y="6400800"/>
-            <a:ext cx="2240280" cy="0"/>
+            <a:off x="118872" y="6309360"/>
+            <a:ext cx="2212848" cy="0"/>
           </a:xfrm>
           <a:prstGeom prst="line">
             <a:avLst/>
           </a:prstGeom>
           <a:noFill/>
-          <a:ln w="5080">
+          <a:ln w="6350">
             <a:solidFill>
-              <a:srgbClr val="CCCCCC"/>
+              <a:srgbClr val="DDDDDD"/>
             </a:solidFill>
             <a:prstDash val="solid"/>
           </a:ln>
@@ -6152,14 +6179,14 @@
       </p:sp>
       <p:sp>
         <p:nvSpPr>
-          <p:cNvPr id="38" name="Text 36"/>
+          <p:cNvPr id="40" name="Text 38"/>
           <p:cNvSpPr/>
           <p:nvPr/>
         </p:nvSpPr>
         <p:spPr>
           <a:xfrm>
-            <a:off x="228600" y="6492240"/>
-            <a:ext cx="2240280" cy="173736"/>
+            <a:off x="118872" y="6400800"/>
+            <a:ext cx="2212848" cy="164592"/>
           </a:xfrm>
           <a:prstGeom prst="rect">
             <a:avLst/>
@@ -6175,7 +6202,7 @@
               <a:buNone/>
             </a:pPr>
             <a:r>
-              <a:rPr lang="en-US" sz="850" b="1" dirty="0">
+              <a:rPr lang="en-US" sz="800" b="1" dirty="0">
                 <a:solidFill>
                   <a:srgbClr val="000000"/>
                 </a:solidFill>
@@ -6185,20 +6212,43 @@
               </a:rPr>
               <a:t>Inversionistas</a:t>
             </a:r>
-            <a:endParaRPr lang="en-US" sz="850" dirty="0"/>
+            <a:endParaRPr lang="en-US" sz="800" dirty="0"/>
           </a:p>
         </p:txBody>
       </p:sp>
       <p:sp>
         <p:nvSpPr>
-          <p:cNvPr id="39" name="Text 37"/>
+          <p:cNvPr id="41" name="Shape 39"/>
           <p:cNvSpPr/>
           <p:nvPr/>
         </p:nvSpPr>
         <p:spPr>
           <a:xfrm>
-            <a:off x="228600" y="6675120"/>
-            <a:ext cx="2240280" cy="502920"/>
+            <a:off x="118872" y="6583680"/>
+            <a:ext cx="2212848" cy="0"/>
+          </a:xfrm>
+          <a:prstGeom prst="line">
+            <a:avLst/>
+          </a:prstGeom>
+          <a:noFill/>
+          <a:ln w="12700">
+            <a:solidFill>
+              <a:srgbClr val="000000"/>
+            </a:solidFill>
+            <a:prstDash val="solid"/>
+          </a:ln>
+        </p:spPr>
+      </p:sp>
+      <p:sp>
+        <p:nvSpPr>
+          <p:cNvPr id="42" name="Text 40"/>
+          <p:cNvSpPr/>
+          <p:nvPr/>
+        </p:nvSpPr>
+        <p:spPr>
+          <a:xfrm>
+            <a:off x="118872" y="6647688"/>
+            <a:ext cx="2212848" cy="502920"/>
           </a:xfrm>
           <a:prstGeom prst="rect">
             <a:avLst/>
@@ -6216,7 +6266,7 @@
             <a:r>
               <a:rPr lang="en-US" sz="700" dirty="0">
                 <a:solidFill>
-                  <a:srgbClr val="333333"/>
+                  <a:srgbClr val="555555"/>
                 </a:solidFill>
                 <a:latin typeface="Calibri" pitchFamily="34" charset="0"/>
                 <a:ea typeface="Calibri" pitchFamily="34" charset="-122"/>
@@ -6230,14 +6280,14 @@
       </p:sp>
       <p:sp>
         <p:nvSpPr>
-          <p:cNvPr id="40" name="Text 38"/>
+          <p:cNvPr id="43" name="Text 41"/>
           <p:cNvSpPr/>
           <p:nvPr/>
         </p:nvSpPr>
         <p:spPr>
           <a:xfrm>
-            <a:off x="2697480" y="137160"/>
-            <a:ext cx="4636008" cy="246888"/>
+            <a:off x="2606040" y="137160"/>
+            <a:ext cx="4818888" cy="246888"/>
           </a:xfrm>
           <a:prstGeom prst="rect">
             <a:avLst/>
@@ -6269,22 +6319,22 @@
       </p:sp>
       <p:sp>
         <p:nvSpPr>
-          <p:cNvPr id="41" name="Shape 39"/>
+          <p:cNvPr id="44" name="Shape 42"/>
           <p:cNvSpPr/>
           <p:nvPr/>
         </p:nvSpPr>
         <p:spPr>
           <a:xfrm>
-            <a:off x="2697480" y="429768"/>
-            <a:ext cx="4636008" cy="0"/>
+            <a:off x="2606040" y="411480"/>
+            <a:ext cx="4818888" cy="0"/>
           </a:xfrm>
           <a:prstGeom prst="line">
             <a:avLst/>
           </a:prstGeom>
           <a:noFill/>
-          <a:ln w="5080">
+          <a:ln w="19050">
             <a:solidFill>
-              <a:srgbClr val="CCCCCC"/>
+              <a:srgbClr val="000000"/>
             </a:solidFill>
             <a:prstDash val="solid"/>
           </a:ln>
@@ -6292,14 +6342,14 @@
       </p:sp>
       <p:sp>
         <p:nvSpPr>
-          <p:cNvPr id="42" name="Text 40"/>
+          <p:cNvPr id="45" name="Text 43"/>
           <p:cNvSpPr/>
           <p:nvPr/>
         </p:nvSpPr>
         <p:spPr>
           <a:xfrm>
-            <a:off x="2697480" y="521208"/>
-            <a:ext cx="4636008" cy="1600200"/>
+            <a:off x="2606040" y="502920"/>
+            <a:ext cx="4818888" cy="1645920"/>
           </a:xfrm>
           <a:prstGeom prst="rect">
             <a:avLst/>
@@ -6311,7 +6361,7 @@
           <a:bodyPr wrap="square" lIns="0" tIns="0" rIns="0" bIns="0" rtlCol="0" anchor="t"/>
           <a:lstStyle/>
           <a:p>
-            <a:pPr indent="0" marL="0">
+            <a:pPr algn="just" indent="0" marL="0">
               <a:buNone/>
             </a:pPr>
             <a:r>
@@ -6323,7 +6373,7 @@
                 <a:ea typeface="Calibri" pitchFamily="34" charset="-122"/>
                 <a:cs typeface="Calibri" pitchFamily="34" charset="-120"/>
               </a:rPr>
-              <a:t>Prueba 4 Usd</a:t>
+              <a:t>prueba USD</a:t>
             </a:r>
             <a:endParaRPr lang="en-US" sz="800" dirty="0"/>
           </a:p>
@@ -6331,14 +6381,14 @@
       </p:sp>
       <p:sp>
         <p:nvSpPr>
-          <p:cNvPr id="43" name="Text 41"/>
+          <p:cNvPr id="46" name="Text 44"/>
           <p:cNvSpPr/>
           <p:nvPr/>
         </p:nvSpPr>
         <p:spPr>
           <a:xfrm>
-            <a:off x="2697480" y="2212848"/>
-            <a:ext cx="4636008" cy="164592"/>
+            <a:off x="2606040" y="2240280"/>
+            <a:ext cx="4818888" cy="155448"/>
           </a:xfrm>
           <a:prstGeom prst="rect">
             <a:avLst/>
@@ -6354,7 +6404,7 @@
               <a:buNone/>
             </a:pPr>
             <a:r>
-              <a:rPr lang="en-US" sz="800" b="1" dirty="0">
+              <a:rPr lang="en-US" sz="750" b="1" dirty="0">
                 <a:solidFill>
                   <a:srgbClr val="000000"/>
                 </a:solidFill>
@@ -6364,19 +6414,19 @@
               </a:rPr>
               <a:t>Liquidez Dolar</a:t>
             </a:r>
-            <a:endParaRPr lang="en-US" sz="800" dirty="0"/>
+            <a:endParaRPr lang="en-US" sz="750" dirty="0"/>
           </a:p>
         </p:txBody>
       </p:sp>
       <p:graphicFrame>
         <p:nvGraphicFramePr>
-          <p:cNvPr id="44" name="Chart 0" descr=""/>
+          <p:cNvPr id="47" name="Chart 0" descr=""/>
           <p:cNvGraphicFramePr/>
           <p:nvPr/>
         </p:nvGraphicFramePr>
         <p:xfrm>
-          <a:off x="2697480" y="2395728"/>
-          <a:ext cx="4636008" cy="1828800"/>
+          <a:off x="2606040" y="2414016"/>
+          <a:ext cx="4818888" cy="1737360"/>
         </p:xfrm>
         <a:graphic xmlns:a="http://schemas.openxmlformats.org/drawingml/2006/main">
           <a:graphicData uri="http://schemas.openxmlformats.org/drawingml/2006/chart">
@@ -6386,14 +6436,14 @@
       </p:graphicFrame>
       <p:sp>
         <p:nvSpPr>
-          <p:cNvPr id="45" name="Text 42"/>
+          <p:cNvPr id="48" name="Text 45"/>
           <p:cNvSpPr/>
           <p:nvPr/>
         </p:nvSpPr>
         <p:spPr>
           <a:xfrm>
-            <a:off x="2697480" y="4389120"/>
-            <a:ext cx="4636008" cy="228600"/>
+            <a:off x="2606040" y="4315968"/>
+            <a:ext cx="4818888" cy="228600"/>
           </a:xfrm>
           <a:prstGeom prst="rect">
             <a:avLst/>
@@ -6423,6 +6473,29 @@
           </a:p>
         </p:txBody>
       </p:sp>
+      <p:sp>
+        <p:nvSpPr>
+          <p:cNvPr id="49" name="Shape 46"/>
+          <p:cNvSpPr/>
+          <p:nvPr/>
+        </p:nvSpPr>
+        <p:spPr>
+          <a:xfrm>
+            <a:off x="2606040" y="4572000"/>
+            <a:ext cx="4818888" cy="0"/>
+          </a:xfrm>
+          <a:prstGeom prst="line">
+            <a:avLst/>
+          </a:prstGeom>
+          <a:noFill/>
+          <a:ln w="19050">
+            <a:solidFill>
+              <a:srgbClr val="000000"/>
+            </a:solidFill>
+            <a:prstDash val="solid"/>
+          </a:ln>
+        </p:spPr>
+      </p:sp>
       <p:graphicFrame>
         <p:nvGraphicFramePr>
           <p:cNvPr id="2" name="Table 0"/>
@@ -6438,28 +6511,28 @@
           </p:nvPr>
         </p:nvGraphicFramePr>
         <p:xfrm>
-          <a:off x="2697480" y="4663440"/>
-          <a:ext cx="4636008" cy="914400"/>
+          <a:off x="2606040" y="4645152"/>
+          <a:ext cx="4818888" cy="914400"/>
         </p:xfrm>
         <a:graphic>
           <a:graphicData uri="http://schemas.openxmlformats.org/drawingml/2006/table">
             <a:tbl>
               <a:tblPr/>
               <a:tblGrid>
-                <a:gridCol w="1325880"/>
-                <a:gridCol w="594360"/>
+                <a:gridCol w="1298448"/>
+                <a:gridCol w="566928"/>
                 <a:gridCol w="658368"/>
                 <a:gridCol w="658368"/>
+                <a:gridCol w="566928"/>
                 <a:gridCol w="594360"/>
-                <a:gridCol w="621792"/>
               </a:tblGrid>
-              <a:tr h="192024">
+              <a:tr h="182880">
                 <a:tc>
                   <a:txBody>
                     <a:bodyPr/>
                     <a:lstStyle/>
                     <a:p>
-                      <a:pPr algn="ctr" indent="0" marL="0">
+                      <a:pPr algn="l" indent="0" marL="0">
                         <a:buNone/>
                       </a:pPr>
                       <a:r>
@@ -6481,34 +6554,34 @@
                     </a:p>
                   </a:txBody>
                   <a:tcPr marL="91440" marR="91440" marT="45720" marB="45720">
-                    <a:lnL w="6350" cap="flat" cmpd="sng" algn="ctr">
-                      <a:solidFill>
-                        <a:srgbClr val="CCCCCC"/>
+                    <a:lnL w="19050" cap="flat" cmpd="sng" algn="ctr">
+                      <a:solidFill>
+                        <a:srgbClr val="000000"/>
                       </a:solidFill>
                       <a:prstDash val="solid"/>
                       <a:round/>
                       <a:headEnd type="none" w="med" len="med"/>
                       <a:tailEnd type="none" w="med" len="med"/>
                     </a:lnL>
-                    <a:lnR w="6350" cap="flat" cmpd="sng" algn="ctr">
-                      <a:solidFill>
-                        <a:srgbClr val="CCCCCC"/>
+                    <a:lnR w="19050" cap="flat" cmpd="sng" algn="ctr">
+                      <a:solidFill>
+                        <a:srgbClr val="000000"/>
                       </a:solidFill>
                       <a:prstDash val="solid"/>
                       <a:round/>
                       <a:headEnd type="none" w="med" len="med"/>
                       <a:tailEnd type="none" w="med" len="med"/>
                     </a:lnR>
-                    <a:lnT w="6350" cap="flat" cmpd="sng" algn="ctr">
-                      <a:solidFill>
-                        <a:srgbClr val="CCCCCC"/>
+                    <a:lnT w="19050" cap="flat" cmpd="sng" algn="ctr">
+                      <a:solidFill>
+                        <a:srgbClr val="000000"/>
                       </a:solidFill>
                       <a:prstDash val="solid"/>
                       <a:round/>
                       <a:headEnd type="none" w="med" len="med"/>
                       <a:tailEnd type="none" w="med" len="med"/>
                     </a:lnT>
-                    <a:lnB w="12700" cap="flat" cmpd="sng" algn="ctr">
+                    <a:lnB w="19050" cap="flat" cmpd="sng" algn="ctr">
                       <a:solidFill>
                         <a:srgbClr val="000000"/>
                       </a:solidFill>
@@ -6549,34 +6622,34 @@
                     </a:p>
                   </a:txBody>
                   <a:tcPr marL="91440" marR="91440" marT="45720" marB="45720">
-                    <a:lnL w="6350" cap="flat" cmpd="sng" algn="ctr">
-                      <a:solidFill>
-                        <a:srgbClr val="CCCCCC"/>
+                    <a:lnL w="19050" cap="flat" cmpd="sng" algn="ctr">
+                      <a:solidFill>
+                        <a:srgbClr val="000000"/>
                       </a:solidFill>
                       <a:prstDash val="solid"/>
                       <a:round/>
                       <a:headEnd type="none" w="med" len="med"/>
                       <a:tailEnd type="none" w="med" len="med"/>
                     </a:lnL>
-                    <a:lnR w="6350" cap="flat" cmpd="sng" algn="ctr">
-                      <a:solidFill>
-                        <a:srgbClr val="CCCCCC"/>
+                    <a:lnR w="19050" cap="flat" cmpd="sng" algn="ctr">
+                      <a:solidFill>
+                        <a:srgbClr val="000000"/>
                       </a:solidFill>
                       <a:prstDash val="solid"/>
                       <a:round/>
                       <a:headEnd type="none" w="med" len="med"/>
                       <a:tailEnd type="none" w="med" len="med"/>
                     </a:lnR>
-                    <a:lnT w="6350" cap="flat" cmpd="sng" algn="ctr">
-                      <a:solidFill>
-                        <a:srgbClr val="CCCCCC"/>
+                    <a:lnT w="19050" cap="flat" cmpd="sng" algn="ctr">
+                      <a:solidFill>
+                        <a:srgbClr val="000000"/>
                       </a:solidFill>
                       <a:prstDash val="solid"/>
                       <a:round/>
                       <a:headEnd type="none" w="med" len="med"/>
                       <a:tailEnd type="none" w="med" len="med"/>
                     </a:lnT>
-                    <a:lnB w="12700" cap="flat" cmpd="sng" algn="ctr">
+                    <a:lnB w="19050" cap="flat" cmpd="sng" algn="ctr">
                       <a:solidFill>
                         <a:srgbClr val="000000"/>
                       </a:solidFill>
@@ -6617,34 +6690,34 @@
                     </a:p>
                   </a:txBody>
                   <a:tcPr marL="91440" marR="91440" marT="45720" marB="45720">
-                    <a:lnL w="6350" cap="flat" cmpd="sng" algn="ctr">
-                      <a:solidFill>
-                        <a:srgbClr val="CCCCCC"/>
+                    <a:lnL w="19050" cap="flat" cmpd="sng" algn="ctr">
+                      <a:solidFill>
+                        <a:srgbClr val="000000"/>
                       </a:solidFill>
                       <a:prstDash val="solid"/>
                       <a:round/>
                       <a:headEnd type="none" w="med" len="med"/>
                       <a:tailEnd type="none" w="med" len="med"/>
                     </a:lnL>
-                    <a:lnR w="6350" cap="flat" cmpd="sng" algn="ctr">
-                      <a:solidFill>
-                        <a:srgbClr val="CCCCCC"/>
+                    <a:lnR w="19050" cap="flat" cmpd="sng" algn="ctr">
+                      <a:solidFill>
+                        <a:srgbClr val="000000"/>
                       </a:solidFill>
                       <a:prstDash val="solid"/>
                       <a:round/>
                       <a:headEnd type="none" w="med" len="med"/>
                       <a:tailEnd type="none" w="med" len="med"/>
                     </a:lnR>
-                    <a:lnT w="6350" cap="flat" cmpd="sng" algn="ctr">
-                      <a:solidFill>
-                        <a:srgbClr val="CCCCCC"/>
+                    <a:lnT w="19050" cap="flat" cmpd="sng" algn="ctr">
+                      <a:solidFill>
+                        <a:srgbClr val="000000"/>
                       </a:solidFill>
                       <a:prstDash val="solid"/>
                       <a:round/>
                       <a:headEnd type="none" w="med" len="med"/>
                       <a:tailEnd type="none" w="med" len="med"/>
                     </a:lnT>
-                    <a:lnB w="12700" cap="flat" cmpd="sng" algn="ctr">
+                    <a:lnB w="19050" cap="flat" cmpd="sng" algn="ctr">
                       <a:solidFill>
                         <a:srgbClr val="000000"/>
                       </a:solidFill>
@@ -6685,34 +6758,34 @@
                     </a:p>
                   </a:txBody>
                   <a:tcPr marL="91440" marR="91440" marT="45720" marB="45720">
-                    <a:lnL w="6350" cap="flat" cmpd="sng" algn="ctr">
-                      <a:solidFill>
-                        <a:srgbClr val="CCCCCC"/>
+                    <a:lnL w="19050" cap="flat" cmpd="sng" algn="ctr">
+                      <a:solidFill>
+                        <a:srgbClr val="000000"/>
                       </a:solidFill>
                       <a:prstDash val="solid"/>
                       <a:round/>
                       <a:headEnd type="none" w="med" len="med"/>
                       <a:tailEnd type="none" w="med" len="med"/>
                     </a:lnL>
-                    <a:lnR w="6350" cap="flat" cmpd="sng" algn="ctr">
-                      <a:solidFill>
-                        <a:srgbClr val="CCCCCC"/>
+                    <a:lnR w="19050" cap="flat" cmpd="sng" algn="ctr">
+                      <a:solidFill>
+                        <a:srgbClr val="000000"/>
                       </a:solidFill>
                       <a:prstDash val="solid"/>
                       <a:round/>
                       <a:headEnd type="none" w="med" len="med"/>
                       <a:tailEnd type="none" w="med" len="med"/>
                     </a:lnR>
-                    <a:lnT w="6350" cap="flat" cmpd="sng" algn="ctr">
-                      <a:solidFill>
-                        <a:srgbClr val="CCCCCC"/>
+                    <a:lnT w="19050" cap="flat" cmpd="sng" algn="ctr">
+                      <a:solidFill>
+                        <a:srgbClr val="000000"/>
                       </a:solidFill>
                       <a:prstDash val="solid"/>
                       <a:round/>
                       <a:headEnd type="none" w="med" len="med"/>
                       <a:tailEnd type="none" w="med" len="med"/>
                     </a:lnT>
-                    <a:lnB w="12700" cap="flat" cmpd="sng" algn="ctr">
+                    <a:lnB w="19050" cap="flat" cmpd="sng" algn="ctr">
                       <a:solidFill>
                         <a:srgbClr val="000000"/>
                       </a:solidFill>
@@ -6753,34 +6826,34 @@
                     </a:p>
                   </a:txBody>
                   <a:tcPr marL="91440" marR="91440" marT="45720" marB="45720">
-                    <a:lnL w="6350" cap="flat" cmpd="sng" algn="ctr">
-                      <a:solidFill>
-                        <a:srgbClr val="CCCCCC"/>
+                    <a:lnL w="19050" cap="flat" cmpd="sng" algn="ctr">
+                      <a:solidFill>
+                        <a:srgbClr val="000000"/>
                       </a:solidFill>
                       <a:prstDash val="solid"/>
                       <a:round/>
                       <a:headEnd type="none" w="med" len="med"/>
                       <a:tailEnd type="none" w="med" len="med"/>
                     </a:lnL>
-                    <a:lnR w="6350" cap="flat" cmpd="sng" algn="ctr">
-                      <a:solidFill>
-                        <a:srgbClr val="CCCCCC"/>
+                    <a:lnR w="19050" cap="flat" cmpd="sng" algn="ctr">
+                      <a:solidFill>
+                        <a:srgbClr val="000000"/>
                       </a:solidFill>
                       <a:prstDash val="solid"/>
                       <a:round/>
                       <a:headEnd type="none" w="med" len="med"/>
                       <a:tailEnd type="none" w="med" len="med"/>
                     </a:lnR>
-                    <a:lnT w="6350" cap="flat" cmpd="sng" algn="ctr">
-                      <a:solidFill>
-                        <a:srgbClr val="CCCCCC"/>
+                    <a:lnT w="19050" cap="flat" cmpd="sng" algn="ctr">
+                      <a:solidFill>
+                        <a:srgbClr val="000000"/>
                       </a:solidFill>
                       <a:prstDash val="solid"/>
                       <a:round/>
                       <a:headEnd type="none" w="med" len="med"/>
                       <a:tailEnd type="none" w="med" len="med"/>
                     </a:lnT>
-                    <a:lnB w="12700" cap="flat" cmpd="sng" algn="ctr">
+                    <a:lnB w="19050" cap="flat" cmpd="sng" algn="ctr">
                       <a:solidFill>
                         <a:srgbClr val="000000"/>
                       </a:solidFill>
@@ -6842,34 +6915,34 @@
                     </a:p>
                   </a:txBody>
                   <a:tcPr marL="91440" marR="91440" marT="45720" marB="45720">
-                    <a:lnL w="6350" cap="flat" cmpd="sng" algn="ctr">
-                      <a:solidFill>
-                        <a:srgbClr val="CCCCCC"/>
+                    <a:lnL w="19050" cap="flat" cmpd="sng" algn="ctr">
+                      <a:solidFill>
+                        <a:srgbClr val="000000"/>
                       </a:solidFill>
                       <a:prstDash val="solid"/>
                       <a:round/>
                       <a:headEnd type="none" w="med" len="med"/>
                       <a:tailEnd type="none" w="med" len="med"/>
                     </a:lnL>
-                    <a:lnR w="6350" cap="flat" cmpd="sng" algn="ctr">
-                      <a:solidFill>
-                        <a:srgbClr val="CCCCCC"/>
+                    <a:lnR w="19050" cap="flat" cmpd="sng" algn="ctr">
+                      <a:solidFill>
+                        <a:srgbClr val="000000"/>
                       </a:solidFill>
                       <a:prstDash val="solid"/>
                       <a:round/>
                       <a:headEnd type="none" w="med" len="med"/>
                       <a:tailEnd type="none" w="med" len="med"/>
                     </a:lnR>
-                    <a:lnT w="6350" cap="flat" cmpd="sng" algn="ctr">
-                      <a:solidFill>
-                        <a:srgbClr val="CCCCCC"/>
+                    <a:lnT w="19050" cap="flat" cmpd="sng" algn="ctr">
+                      <a:solidFill>
+                        <a:srgbClr val="000000"/>
                       </a:solidFill>
                       <a:prstDash val="solid"/>
                       <a:round/>
                       <a:headEnd type="none" w="med" len="med"/>
                       <a:tailEnd type="none" w="med" len="med"/>
                     </a:lnT>
-                    <a:lnB w="12700" cap="flat" cmpd="sng" algn="ctr">
+                    <a:lnB w="19050" cap="flat" cmpd="sng" algn="ctr">
                       <a:solidFill>
                         <a:srgbClr val="000000"/>
                       </a:solidFill>
@@ -6884,7 +6957,7 @@
                   </a:tcPr>
                 </a:tc>
               </a:tr>
-              <a:tr h="192024">
+              <a:tr h="182880">
                 <a:tc>
                   <a:txBody>
                     <a:bodyPr/>
@@ -6894,7 +6967,7 @@
                         <a:buNone/>
                       </a:pPr>
                       <a:r>
-                        <a:rPr lang="en-US" sz="750" dirty="0">
+                        <a:rPr lang="en-US" sz="750" b="1" dirty="0">
                           <a:solidFill>
                             <a:srgbClr val="000000"/>
                           </a:solidFill>
@@ -6914,7 +6987,7 @@
                   <a:tcPr marL="91440" marR="91440" marT="45720" marB="45720">
                     <a:lnL w="3810" cap="flat" cmpd="sng" algn="ctr">
                       <a:solidFill>
-                        <a:srgbClr val="CCCCCC"/>
+                        <a:srgbClr val="DDDDDD"/>
                       </a:solidFill>
                       <a:prstDash val="solid"/>
                       <a:round/>
@@ -6923,7 +6996,7 @@
                     </a:lnL>
                     <a:lnR w="3810" cap="flat" cmpd="sng" algn="ctr">
                       <a:solidFill>
-                        <a:srgbClr val="CCCCCC"/>
+                        <a:srgbClr val="DDDDDD"/>
                       </a:solidFill>
                       <a:prstDash val="solid"/>
                       <a:round/>
@@ -6932,7 +7005,7 @@
                     </a:lnR>
                     <a:lnT w="3810" cap="flat" cmpd="sng" algn="ctr">
                       <a:solidFill>
-                        <a:srgbClr val="CCCCCC"/>
+                        <a:srgbClr val="DDDDDD"/>
                       </a:solidFill>
                       <a:prstDash val="solid"/>
                       <a:round/>
@@ -6941,7 +7014,7 @@
                     </a:lnT>
                     <a:lnB w="3810" cap="flat" cmpd="sng" algn="ctr">
                       <a:solidFill>
-                        <a:srgbClr val="CCCCCC"/>
+                        <a:srgbClr val="DDDDDD"/>
                       </a:solidFill>
                       <a:prstDash val="solid"/>
                       <a:round/>
@@ -6982,7 +7055,7 @@
                   <a:tcPr marL="91440" marR="91440" marT="45720" marB="45720">
                     <a:lnL w="3810" cap="flat" cmpd="sng" algn="ctr">
                       <a:solidFill>
-                        <a:srgbClr val="CCCCCC"/>
+                        <a:srgbClr val="DDDDDD"/>
                       </a:solidFill>
                       <a:prstDash val="solid"/>
                       <a:round/>
@@ -6991,7 +7064,7 @@
                     </a:lnL>
                     <a:lnR w="3810" cap="flat" cmpd="sng" algn="ctr">
                       <a:solidFill>
-                        <a:srgbClr val="CCCCCC"/>
+                        <a:srgbClr val="DDDDDD"/>
                       </a:solidFill>
                       <a:prstDash val="solid"/>
                       <a:round/>
@@ -7000,7 +7073,7 @@
                     </a:lnR>
                     <a:lnT w="3810" cap="flat" cmpd="sng" algn="ctr">
                       <a:solidFill>
-                        <a:srgbClr val="CCCCCC"/>
+                        <a:srgbClr val="DDDDDD"/>
                       </a:solidFill>
                       <a:prstDash val="solid"/>
                       <a:round/>
@@ -7009,7 +7082,7 @@
                     </a:lnT>
                     <a:lnB w="3810" cap="flat" cmpd="sng" algn="ctr">
                       <a:solidFill>
-                        <a:srgbClr val="CCCCCC"/>
+                        <a:srgbClr val="DDDDDD"/>
                       </a:solidFill>
                       <a:prstDash val="solid"/>
                       <a:round/>
@@ -7050,7 +7123,7 @@
                   <a:tcPr marL="91440" marR="91440" marT="45720" marB="45720">
                     <a:lnL w="3810" cap="flat" cmpd="sng" algn="ctr">
                       <a:solidFill>
-                        <a:srgbClr val="CCCCCC"/>
+                        <a:srgbClr val="DDDDDD"/>
                       </a:solidFill>
                       <a:prstDash val="solid"/>
                       <a:round/>
@@ -7059,7 +7132,7 @@
                     </a:lnL>
                     <a:lnR w="3810" cap="flat" cmpd="sng" algn="ctr">
                       <a:solidFill>
-                        <a:srgbClr val="CCCCCC"/>
+                        <a:srgbClr val="DDDDDD"/>
                       </a:solidFill>
                       <a:prstDash val="solid"/>
                       <a:round/>
@@ -7068,7 +7141,7 @@
                     </a:lnR>
                     <a:lnT w="3810" cap="flat" cmpd="sng" algn="ctr">
                       <a:solidFill>
-                        <a:srgbClr val="CCCCCC"/>
+                        <a:srgbClr val="DDDDDD"/>
                       </a:solidFill>
                       <a:prstDash val="solid"/>
                       <a:round/>
@@ -7077,7 +7150,7 @@
                     </a:lnT>
                     <a:lnB w="3810" cap="flat" cmpd="sng" algn="ctr">
                       <a:solidFill>
-                        <a:srgbClr val="CCCCCC"/>
+                        <a:srgbClr val="DDDDDD"/>
                       </a:solidFill>
                       <a:prstDash val="solid"/>
                       <a:round/>
@@ -7118,7 +7191,7 @@
                   <a:tcPr marL="91440" marR="91440" marT="45720" marB="45720">
                     <a:lnL w="3810" cap="flat" cmpd="sng" algn="ctr">
                       <a:solidFill>
-                        <a:srgbClr val="CCCCCC"/>
+                        <a:srgbClr val="DDDDDD"/>
                       </a:solidFill>
                       <a:prstDash val="solid"/>
                       <a:round/>
@@ -7127,7 +7200,7 @@
                     </a:lnL>
                     <a:lnR w="3810" cap="flat" cmpd="sng" algn="ctr">
                       <a:solidFill>
-                        <a:srgbClr val="CCCCCC"/>
+                        <a:srgbClr val="DDDDDD"/>
                       </a:solidFill>
                       <a:prstDash val="solid"/>
                       <a:round/>
@@ -7136,7 +7209,7 @@
                     </a:lnR>
                     <a:lnT w="3810" cap="flat" cmpd="sng" algn="ctr">
                       <a:solidFill>
-                        <a:srgbClr val="CCCCCC"/>
+                        <a:srgbClr val="DDDDDD"/>
                       </a:solidFill>
                       <a:prstDash val="solid"/>
                       <a:round/>
@@ -7145,7 +7218,7 @@
                     </a:lnT>
                     <a:lnB w="3810" cap="flat" cmpd="sng" algn="ctr">
                       <a:solidFill>
-                        <a:srgbClr val="CCCCCC"/>
+                        <a:srgbClr val="DDDDDD"/>
                       </a:solidFill>
                       <a:prstDash val="solid"/>
                       <a:round/>
@@ -7186,7 +7259,7 @@
                   <a:tcPr marL="91440" marR="91440" marT="45720" marB="45720">
                     <a:lnL w="3810" cap="flat" cmpd="sng" algn="ctr">
                       <a:solidFill>
-                        <a:srgbClr val="CCCCCC"/>
+                        <a:srgbClr val="DDDDDD"/>
                       </a:solidFill>
                       <a:prstDash val="solid"/>
                       <a:round/>
@@ -7195,7 +7268,7 @@
                     </a:lnL>
                     <a:lnR w="3810" cap="flat" cmpd="sng" algn="ctr">
                       <a:solidFill>
-                        <a:srgbClr val="CCCCCC"/>
+                        <a:srgbClr val="DDDDDD"/>
                       </a:solidFill>
                       <a:prstDash val="solid"/>
                       <a:round/>
@@ -7204,7 +7277,7 @@
                     </a:lnR>
                     <a:lnT w="3810" cap="flat" cmpd="sng" algn="ctr">
                       <a:solidFill>
-                        <a:srgbClr val="CCCCCC"/>
+                        <a:srgbClr val="DDDDDD"/>
                       </a:solidFill>
                       <a:prstDash val="solid"/>
                       <a:round/>
@@ -7213,7 +7286,7 @@
                     </a:lnT>
                     <a:lnB w="3810" cap="flat" cmpd="sng" algn="ctr">
                       <a:solidFill>
-                        <a:srgbClr val="CCCCCC"/>
+                        <a:srgbClr val="DDDDDD"/>
                       </a:solidFill>
                       <a:prstDash val="solid"/>
                       <a:round/>
@@ -7242,7 +7315,7 @@
                           <a:ea typeface="Calibri" pitchFamily="34" charset="-122"/>
                           <a:cs typeface="Calibri" pitchFamily="34" charset="-120"/>
                         </a:rPr>
-                        <a:t>1,13%</a:t>
+                        <a:t>3,39%</a:t>
                       </a:r>
                       <a:endParaRPr lang="en-US" sz="750" dirty="0">
                         <a:latin typeface="Calibri" charset="0"/>
@@ -7254,7 +7327,7 @@
                   <a:tcPr marL="91440" marR="91440" marT="45720" marB="45720">
                     <a:lnL w="3810" cap="flat" cmpd="sng" algn="ctr">
                       <a:solidFill>
-                        <a:srgbClr val="CCCCCC"/>
+                        <a:srgbClr val="DDDDDD"/>
                       </a:solidFill>
                       <a:prstDash val="solid"/>
                       <a:round/>
@@ -7263,7 +7336,7 @@
                     </a:lnL>
                     <a:lnR w="3810" cap="flat" cmpd="sng" algn="ctr">
                       <a:solidFill>
-                        <a:srgbClr val="CCCCCC"/>
+                        <a:srgbClr val="DDDDDD"/>
                       </a:solidFill>
                       <a:prstDash val="solid"/>
                       <a:round/>
@@ -7272,7 +7345,7 @@
                     </a:lnR>
                     <a:lnT w="3810" cap="flat" cmpd="sng" algn="ctr">
                       <a:solidFill>
-                        <a:srgbClr val="CCCCCC"/>
+                        <a:srgbClr val="DDDDDD"/>
                       </a:solidFill>
                       <a:prstDash val="solid"/>
                       <a:round/>
@@ -7281,7 +7354,7 @@
                     </a:lnT>
                     <a:lnB w="3810" cap="flat" cmpd="sng" algn="ctr">
                       <a:solidFill>
-                        <a:srgbClr val="CCCCCC"/>
+                        <a:srgbClr val="DDDDDD"/>
                       </a:solidFill>
                       <a:prstDash val="solid"/>
                       <a:round/>
@@ -7294,7 +7367,7 @@
                   </a:tcPr>
                 </a:tc>
               </a:tr>
-              <a:tr h="192024">
+              <a:tr h="182880">
                 <a:tc>
                   <a:txBody>
                     <a:bodyPr/>
@@ -7304,7 +7377,7 @@
                         <a:buNone/>
                       </a:pPr>
                       <a:r>
-                        <a:rPr lang="en-US" sz="750" dirty="0">
+                        <a:rPr lang="en-US" sz="750" b="1" dirty="0">
                           <a:solidFill>
                             <a:srgbClr val="000000"/>
                           </a:solidFill>
@@ -7324,7 +7397,7 @@
                   <a:tcPr marL="91440" marR="91440" marT="45720" marB="45720">
                     <a:lnL w="3810" cap="flat" cmpd="sng" algn="ctr">
                       <a:solidFill>
-                        <a:srgbClr val="CCCCCC"/>
+                        <a:srgbClr val="DDDDDD"/>
                       </a:solidFill>
                       <a:prstDash val="solid"/>
                       <a:round/>
@@ -7333,7 +7406,7 @@
                     </a:lnL>
                     <a:lnR w="3810" cap="flat" cmpd="sng" algn="ctr">
                       <a:solidFill>
-                        <a:srgbClr val="CCCCCC"/>
+                        <a:srgbClr val="DDDDDD"/>
                       </a:solidFill>
                       <a:prstDash val="solid"/>
                       <a:round/>
@@ -7342,7 +7415,7 @@
                     </a:lnR>
                     <a:lnT w="3810" cap="flat" cmpd="sng" algn="ctr">
                       <a:solidFill>
-                        <a:srgbClr val="CCCCCC"/>
+                        <a:srgbClr val="DDDDDD"/>
                       </a:solidFill>
                       <a:prstDash val="solid"/>
                       <a:round/>
@@ -7351,7 +7424,7 @@
                     </a:lnT>
                     <a:lnB w="3810" cap="flat" cmpd="sng" algn="ctr">
                       <a:solidFill>
-                        <a:srgbClr val="CCCCCC"/>
+                        <a:srgbClr val="DDDDDD"/>
                       </a:solidFill>
                       <a:prstDash val="solid"/>
                       <a:round/>
@@ -7392,7 +7465,7 @@
                   <a:tcPr marL="91440" marR="91440" marT="45720" marB="45720">
                     <a:lnL w="3810" cap="flat" cmpd="sng" algn="ctr">
                       <a:solidFill>
-                        <a:srgbClr val="CCCCCC"/>
+                        <a:srgbClr val="DDDDDD"/>
                       </a:solidFill>
                       <a:prstDash val="solid"/>
                       <a:round/>
@@ -7401,7 +7474,7 @@
                     </a:lnL>
                     <a:lnR w="3810" cap="flat" cmpd="sng" algn="ctr">
                       <a:solidFill>
-                        <a:srgbClr val="CCCCCC"/>
+                        <a:srgbClr val="DDDDDD"/>
                       </a:solidFill>
                       <a:prstDash val="solid"/>
                       <a:round/>
@@ -7410,7 +7483,7 @@
                     </a:lnR>
                     <a:lnT w="3810" cap="flat" cmpd="sng" algn="ctr">
                       <a:solidFill>
-                        <a:srgbClr val="CCCCCC"/>
+                        <a:srgbClr val="DDDDDD"/>
                       </a:solidFill>
                       <a:prstDash val="solid"/>
                       <a:round/>
@@ -7419,7 +7492,7 @@
                     </a:lnT>
                     <a:lnB w="3810" cap="flat" cmpd="sng" algn="ctr">
                       <a:solidFill>
-                        <a:srgbClr val="CCCCCC"/>
+                        <a:srgbClr val="DDDDDD"/>
                       </a:solidFill>
                       <a:prstDash val="solid"/>
                       <a:round/>
@@ -7460,7 +7533,7 @@
                   <a:tcPr marL="91440" marR="91440" marT="45720" marB="45720">
                     <a:lnL w="3810" cap="flat" cmpd="sng" algn="ctr">
                       <a:solidFill>
-                        <a:srgbClr val="CCCCCC"/>
+                        <a:srgbClr val="DDDDDD"/>
                       </a:solidFill>
                       <a:prstDash val="solid"/>
                       <a:round/>
@@ -7469,7 +7542,7 @@
                     </a:lnL>
                     <a:lnR w="3810" cap="flat" cmpd="sng" algn="ctr">
                       <a:solidFill>
-                        <a:srgbClr val="CCCCCC"/>
+                        <a:srgbClr val="DDDDDD"/>
                       </a:solidFill>
                       <a:prstDash val="solid"/>
                       <a:round/>
@@ -7478,7 +7551,7 @@
                     </a:lnR>
                     <a:lnT w="3810" cap="flat" cmpd="sng" algn="ctr">
                       <a:solidFill>
-                        <a:srgbClr val="CCCCCC"/>
+                        <a:srgbClr val="DDDDDD"/>
                       </a:solidFill>
                       <a:prstDash val="solid"/>
                       <a:round/>
@@ -7487,7 +7560,7 @@
                     </a:lnT>
                     <a:lnB w="3810" cap="flat" cmpd="sng" algn="ctr">
                       <a:solidFill>
-                        <a:srgbClr val="CCCCCC"/>
+                        <a:srgbClr val="DDDDDD"/>
                       </a:solidFill>
                       <a:prstDash val="solid"/>
                       <a:round/>
@@ -7528,7 +7601,7 @@
                   <a:tcPr marL="91440" marR="91440" marT="45720" marB="45720">
                     <a:lnL w="3810" cap="flat" cmpd="sng" algn="ctr">
                       <a:solidFill>
-                        <a:srgbClr val="CCCCCC"/>
+                        <a:srgbClr val="DDDDDD"/>
                       </a:solidFill>
                       <a:prstDash val="solid"/>
                       <a:round/>
@@ -7537,7 +7610,7 @@
                     </a:lnL>
                     <a:lnR w="3810" cap="flat" cmpd="sng" algn="ctr">
                       <a:solidFill>
-                        <a:srgbClr val="CCCCCC"/>
+                        <a:srgbClr val="DDDDDD"/>
                       </a:solidFill>
                       <a:prstDash val="solid"/>
                       <a:round/>
@@ -7546,7 +7619,7 @@
                     </a:lnR>
                     <a:lnT w="3810" cap="flat" cmpd="sng" algn="ctr">
                       <a:solidFill>
-                        <a:srgbClr val="CCCCCC"/>
+                        <a:srgbClr val="DDDDDD"/>
                       </a:solidFill>
                       <a:prstDash val="solid"/>
                       <a:round/>
@@ -7555,7 +7628,7 @@
                     </a:lnT>
                     <a:lnB w="3810" cap="flat" cmpd="sng" algn="ctr">
                       <a:solidFill>
-                        <a:srgbClr val="CCCCCC"/>
+                        <a:srgbClr val="DDDDDD"/>
                       </a:solidFill>
                       <a:prstDash val="solid"/>
                       <a:round/>
@@ -7596,7 +7669,7 @@
                   <a:tcPr marL="91440" marR="91440" marT="45720" marB="45720">
                     <a:lnL w="3810" cap="flat" cmpd="sng" algn="ctr">
                       <a:solidFill>
-                        <a:srgbClr val="CCCCCC"/>
+                        <a:srgbClr val="DDDDDD"/>
                       </a:solidFill>
                       <a:prstDash val="solid"/>
                       <a:round/>
@@ -7605,7 +7678,7 @@
                     </a:lnL>
                     <a:lnR w="3810" cap="flat" cmpd="sng" algn="ctr">
                       <a:solidFill>
-                        <a:srgbClr val="CCCCCC"/>
+                        <a:srgbClr val="DDDDDD"/>
                       </a:solidFill>
                       <a:prstDash val="solid"/>
                       <a:round/>
@@ -7614,7 +7687,7 @@
                     </a:lnR>
                     <a:lnT w="3810" cap="flat" cmpd="sng" algn="ctr">
                       <a:solidFill>
-                        <a:srgbClr val="CCCCCC"/>
+                        <a:srgbClr val="DDDDDD"/>
                       </a:solidFill>
                       <a:prstDash val="solid"/>
                       <a:round/>
@@ -7623,7 +7696,7 @@
                     </a:lnT>
                     <a:lnB w="3810" cap="flat" cmpd="sng" algn="ctr">
                       <a:solidFill>
-                        <a:srgbClr val="CCCCCC"/>
+                        <a:srgbClr val="DDDDDD"/>
                       </a:solidFill>
                       <a:prstDash val="solid"/>
                       <a:round/>
@@ -7652,7 +7725,7 @@
                           <a:ea typeface="Calibri" pitchFamily="34" charset="-122"/>
                           <a:cs typeface="Calibri" pitchFamily="34" charset="-120"/>
                         </a:rPr>
-                        <a:t>0,79%</a:t>
+                        <a:t>2,37%</a:t>
                       </a:r>
                       <a:endParaRPr lang="en-US" sz="750" dirty="0">
                         <a:latin typeface="Calibri" charset="0"/>
@@ -7664,7 +7737,7 @@
                   <a:tcPr marL="91440" marR="91440" marT="45720" marB="45720">
                     <a:lnL w="3810" cap="flat" cmpd="sng" algn="ctr">
                       <a:solidFill>
-                        <a:srgbClr val="CCCCCC"/>
+                        <a:srgbClr val="DDDDDD"/>
                       </a:solidFill>
                       <a:prstDash val="solid"/>
                       <a:round/>
@@ -7673,7 +7746,7 @@
                     </a:lnL>
                     <a:lnR w="3810" cap="flat" cmpd="sng" algn="ctr">
                       <a:solidFill>
-                        <a:srgbClr val="CCCCCC"/>
+                        <a:srgbClr val="DDDDDD"/>
                       </a:solidFill>
                       <a:prstDash val="solid"/>
                       <a:round/>
@@ -7682,7 +7755,7 @@
                     </a:lnR>
                     <a:lnT w="3810" cap="flat" cmpd="sng" algn="ctr">
                       <a:solidFill>
-                        <a:srgbClr val="CCCCCC"/>
+                        <a:srgbClr val="DDDDDD"/>
                       </a:solidFill>
                       <a:prstDash val="solid"/>
                       <a:round/>
@@ -7691,7 +7764,7 @@
                     </a:lnT>
                     <a:lnB w="3810" cap="flat" cmpd="sng" algn="ctr">
                       <a:solidFill>
-                        <a:srgbClr val="CCCCCC"/>
+                        <a:srgbClr val="DDDDDD"/>
                       </a:solidFill>
                       <a:prstDash val="solid"/>
                       <a:round/>
@@ -7704,7 +7777,7 @@
                   </a:tcPr>
                 </a:tc>
               </a:tr>
-              <a:tr h="192024">
+              <a:tr h="182880">
                 <a:tc>
                   <a:txBody>
                     <a:bodyPr/>
@@ -7734,7 +7807,7 @@
                   <a:tcPr marL="91440" marR="91440" marT="45720" marB="45720">
                     <a:lnL w="3810" cap="flat" cmpd="sng" algn="ctr">
                       <a:solidFill>
-                        <a:srgbClr val="CCCCCC"/>
+                        <a:srgbClr val="DDDDDD"/>
                       </a:solidFill>
                       <a:prstDash val="solid"/>
                       <a:round/>
@@ -7743,7 +7816,7 @@
                     </a:lnL>
                     <a:lnR w="3810" cap="flat" cmpd="sng" algn="ctr">
                       <a:solidFill>
-                        <a:srgbClr val="CCCCCC"/>
+                        <a:srgbClr val="DDDDDD"/>
                       </a:solidFill>
                       <a:prstDash val="solid"/>
                       <a:round/>
@@ -7752,7 +7825,7 @@
                     </a:lnR>
                     <a:lnT w="3810" cap="flat" cmpd="sng" algn="ctr">
                       <a:solidFill>
-                        <a:srgbClr val="CCCCCC"/>
+                        <a:srgbClr val="DDDDDD"/>
                       </a:solidFill>
                       <a:prstDash val="solid"/>
                       <a:round/>
@@ -7761,7 +7834,7 @@
                     </a:lnT>
                     <a:lnB w="3810" cap="flat" cmpd="sng" algn="ctr">
                       <a:solidFill>
-                        <a:srgbClr val="CCCCCC"/>
+                        <a:srgbClr val="DDDDDD"/>
                       </a:solidFill>
                       <a:prstDash val="solid"/>
                       <a:round/>
@@ -7802,7 +7875,7 @@
                   <a:tcPr marL="91440" marR="91440" marT="45720" marB="45720">
                     <a:lnL w="3810" cap="flat" cmpd="sng" algn="ctr">
                       <a:solidFill>
-                        <a:srgbClr val="CCCCCC"/>
+                        <a:srgbClr val="DDDDDD"/>
                       </a:solidFill>
                       <a:prstDash val="solid"/>
                       <a:round/>
@@ -7811,7 +7884,7 @@
                     </a:lnL>
                     <a:lnR w="3810" cap="flat" cmpd="sng" algn="ctr">
                       <a:solidFill>
-                        <a:srgbClr val="CCCCCC"/>
+                        <a:srgbClr val="DDDDDD"/>
                       </a:solidFill>
                       <a:prstDash val="solid"/>
                       <a:round/>
@@ -7820,7 +7893,7 @@
                     </a:lnR>
                     <a:lnT w="3810" cap="flat" cmpd="sng" algn="ctr">
                       <a:solidFill>
-                        <a:srgbClr val="CCCCCC"/>
+                        <a:srgbClr val="DDDDDD"/>
                       </a:solidFill>
                       <a:prstDash val="solid"/>
                       <a:round/>
@@ -7829,7 +7902,7 @@
                     </a:lnT>
                     <a:lnB w="3810" cap="flat" cmpd="sng" algn="ctr">
                       <a:solidFill>
-                        <a:srgbClr val="CCCCCC"/>
+                        <a:srgbClr val="DDDDDD"/>
                       </a:solidFill>
                       <a:prstDash val="solid"/>
                       <a:round/>
@@ -7870,7 +7943,7 @@
                   <a:tcPr marL="91440" marR="91440" marT="45720" marB="45720">
                     <a:lnL w="3810" cap="flat" cmpd="sng" algn="ctr">
                       <a:solidFill>
-                        <a:srgbClr val="CCCCCC"/>
+                        <a:srgbClr val="DDDDDD"/>
                       </a:solidFill>
                       <a:prstDash val="solid"/>
                       <a:round/>
@@ -7879,7 +7952,7 @@
                     </a:lnL>
                     <a:lnR w="3810" cap="flat" cmpd="sng" algn="ctr">
                       <a:solidFill>
-                        <a:srgbClr val="CCCCCC"/>
+                        <a:srgbClr val="DDDDDD"/>
                       </a:solidFill>
                       <a:prstDash val="solid"/>
                       <a:round/>
@@ -7888,7 +7961,7 @@
                     </a:lnR>
                     <a:lnT w="3810" cap="flat" cmpd="sng" algn="ctr">
                       <a:solidFill>
-                        <a:srgbClr val="CCCCCC"/>
+                        <a:srgbClr val="DDDDDD"/>
                       </a:solidFill>
                       <a:prstDash val="solid"/>
                       <a:round/>
@@ -7897,7 +7970,7 @@
                     </a:lnT>
                     <a:lnB w="3810" cap="flat" cmpd="sng" algn="ctr">
                       <a:solidFill>
-                        <a:srgbClr val="CCCCCC"/>
+                        <a:srgbClr val="DDDDDD"/>
                       </a:solidFill>
                       <a:prstDash val="solid"/>
                       <a:round/>
@@ -7938,7 +8011,7 @@
                   <a:tcPr marL="91440" marR="91440" marT="45720" marB="45720">
                     <a:lnL w="3810" cap="flat" cmpd="sng" algn="ctr">
                       <a:solidFill>
-                        <a:srgbClr val="CCCCCC"/>
+                        <a:srgbClr val="DDDDDD"/>
                       </a:solidFill>
                       <a:prstDash val="solid"/>
                       <a:round/>
@@ -7947,7 +8020,7 @@
                     </a:lnL>
                     <a:lnR w="3810" cap="flat" cmpd="sng" algn="ctr">
                       <a:solidFill>
-                        <a:srgbClr val="CCCCCC"/>
+                        <a:srgbClr val="DDDDDD"/>
                       </a:solidFill>
                       <a:prstDash val="solid"/>
                       <a:round/>
@@ -7956,7 +8029,7 @@
                     </a:lnR>
                     <a:lnT w="3810" cap="flat" cmpd="sng" algn="ctr">
                       <a:solidFill>
-                        <a:srgbClr val="CCCCCC"/>
+                        <a:srgbClr val="DDDDDD"/>
                       </a:solidFill>
                       <a:prstDash val="solid"/>
                       <a:round/>
@@ -7965,64 +8038,7 @@
                     </a:lnT>
                     <a:lnB w="3810" cap="flat" cmpd="sng" algn="ctr">
                       <a:solidFill>
-                        <a:srgbClr val="CCCCCC"/>
-                      </a:solidFill>
-                      <a:prstDash val="solid"/>
-                      <a:round/>
-                      <a:headEnd type="none" w="med" len="med"/>
-                      <a:tailEnd type="none" w="med" len="med"/>
-                    </a:lnB>
-                    <a:solidFill>
-                      <a:srgbClr val="F9F9F9"/>
-                    </a:solidFill>
-                  </a:tcPr>
-                </a:tc>
-                <a:tc>
-                  <a:txBody>
-                    <a:bodyPr/>
-                    <a:lstStyle/>
-                    <a:p>
-                      <a:pPr algn="ctr" indent="0" marL="0">
-                        <a:buNone/>
-                      </a:pPr>
-                      <a:endParaRPr lang="en-US" sz="750" dirty="0">
-                        <a:latin typeface="Calibri" charset="0"/>
-                        <a:ea typeface="Calibri" charset="0"/>
-                        <a:cs typeface="Calibri" charset="0"/>
-                      </a:endParaRPr>
-                    </a:p>
-                  </a:txBody>
-                  <a:tcPr marL="91440" marR="91440" marT="45720" marB="45720">
-                    <a:lnL w="3810" cap="flat" cmpd="sng" algn="ctr">
-                      <a:solidFill>
-                        <a:srgbClr val="CCCCCC"/>
-                      </a:solidFill>
-                      <a:prstDash val="solid"/>
-                      <a:round/>
-                      <a:headEnd type="none" w="med" len="med"/>
-                      <a:tailEnd type="none" w="med" len="med"/>
-                    </a:lnL>
-                    <a:lnR w="3810" cap="flat" cmpd="sng" algn="ctr">
-                      <a:solidFill>
-                        <a:srgbClr val="CCCCCC"/>
-                      </a:solidFill>
-                      <a:prstDash val="solid"/>
-                      <a:round/>
-                      <a:headEnd type="none" w="med" len="med"/>
-                      <a:tailEnd type="none" w="med" len="med"/>
-                    </a:lnR>
-                    <a:lnT w="3810" cap="flat" cmpd="sng" algn="ctr">
-                      <a:solidFill>
-                        <a:srgbClr val="CCCCCC"/>
-                      </a:solidFill>
-                      <a:prstDash val="solid"/>
-                      <a:round/>
-                      <a:headEnd type="none" w="med" len="med"/>
-                      <a:tailEnd type="none" w="med" len="med"/>
-                    </a:lnT>
-                    <a:lnB w="3810" cap="flat" cmpd="sng" algn="ctr">
-                      <a:solidFill>
-                        <a:srgbClr val="CCCCCC"/>
+                        <a:srgbClr val="DDDDDD"/>
                       </a:solidFill>
                       <a:prstDash val="solid"/>
                       <a:round/>
@@ -8051,7 +8067,7 @@
                           <a:ea typeface="Calibri" pitchFamily="34" charset="-122"/>
                           <a:cs typeface="Calibri" pitchFamily="34" charset="-120"/>
                         </a:rPr>
-                        <a:t>1,68%</a:t>
+                        <a:t>—</a:t>
                       </a:r>
                       <a:endParaRPr lang="en-US" sz="750" dirty="0">
                         <a:latin typeface="Calibri" charset="0"/>
@@ -8063,7 +8079,7 @@
                   <a:tcPr marL="91440" marR="91440" marT="45720" marB="45720">
                     <a:lnL w="3810" cap="flat" cmpd="sng" algn="ctr">
                       <a:solidFill>
-                        <a:srgbClr val="CCCCCC"/>
+                        <a:srgbClr val="DDDDDD"/>
                       </a:solidFill>
                       <a:prstDash val="solid"/>
                       <a:round/>
@@ -8072,7 +8088,7 @@
                     </a:lnL>
                     <a:lnR w="3810" cap="flat" cmpd="sng" algn="ctr">
                       <a:solidFill>
-                        <a:srgbClr val="CCCCCC"/>
+                        <a:srgbClr val="DDDDDD"/>
                       </a:solidFill>
                       <a:prstDash val="solid"/>
                       <a:round/>
@@ -8081,7 +8097,7 @@
                     </a:lnR>
                     <a:lnT w="3810" cap="flat" cmpd="sng" algn="ctr">
                       <a:solidFill>
-                        <a:srgbClr val="CCCCCC"/>
+                        <a:srgbClr val="DDDDDD"/>
                       </a:solidFill>
                       <a:prstDash val="solid"/>
                       <a:round/>
@@ -8090,7 +8106,75 @@
                     </a:lnT>
                     <a:lnB w="3810" cap="flat" cmpd="sng" algn="ctr">
                       <a:solidFill>
-                        <a:srgbClr val="CCCCCC"/>
+                        <a:srgbClr val="DDDDDD"/>
+                      </a:solidFill>
+                      <a:prstDash val="solid"/>
+                      <a:round/>
+                      <a:headEnd type="none" w="med" len="med"/>
+                      <a:tailEnd type="none" w="med" len="med"/>
+                    </a:lnB>
+                    <a:solidFill>
+                      <a:srgbClr val="F9F9F9"/>
+                    </a:solidFill>
+                  </a:tcPr>
+                </a:tc>
+                <a:tc>
+                  <a:txBody>
+                    <a:bodyPr/>
+                    <a:lstStyle/>
+                    <a:p>
+                      <a:pPr algn="ctr" indent="0" marL="0">
+                        <a:buNone/>
+                      </a:pPr>
+                      <a:r>
+                        <a:rPr lang="en-US" sz="750" dirty="0">
+                          <a:solidFill>
+                            <a:srgbClr val="333333"/>
+                          </a:solidFill>
+                          <a:latin typeface="Calibri" pitchFamily="34" charset="0"/>
+                          <a:ea typeface="Calibri" pitchFamily="34" charset="-122"/>
+                          <a:cs typeface="Calibri" pitchFamily="34" charset="-120"/>
+                        </a:rPr>
+                        <a:t>5,04%</a:t>
+                      </a:r>
+                      <a:endParaRPr lang="en-US" sz="750" dirty="0">
+                        <a:latin typeface="Calibri" charset="0"/>
+                        <a:ea typeface="Calibri" charset="0"/>
+                        <a:cs typeface="Calibri" charset="0"/>
+                      </a:endParaRPr>
+                    </a:p>
+                  </a:txBody>
+                  <a:tcPr marL="91440" marR="91440" marT="45720" marB="45720">
+                    <a:lnL w="3810" cap="flat" cmpd="sng" algn="ctr">
+                      <a:solidFill>
+                        <a:srgbClr val="DDDDDD"/>
+                      </a:solidFill>
+                      <a:prstDash val="solid"/>
+                      <a:round/>
+                      <a:headEnd type="none" w="med" len="med"/>
+                      <a:tailEnd type="none" w="med" len="med"/>
+                    </a:lnL>
+                    <a:lnR w="3810" cap="flat" cmpd="sng" algn="ctr">
+                      <a:solidFill>
+                        <a:srgbClr val="DDDDDD"/>
+                      </a:solidFill>
+                      <a:prstDash val="solid"/>
+                      <a:round/>
+                      <a:headEnd type="none" w="med" len="med"/>
+                      <a:tailEnd type="none" w="med" len="med"/>
+                    </a:lnR>
+                    <a:lnT w="3810" cap="flat" cmpd="sng" algn="ctr">
+                      <a:solidFill>
+                        <a:srgbClr val="DDDDDD"/>
+                      </a:solidFill>
+                      <a:prstDash val="solid"/>
+                      <a:round/>
+                      <a:headEnd type="none" w="med" len="med"/>
+                      <a:tailEnd type="none" w="med" len="med"/>
+                    </a:lnT>
+                    <a:lnB w="3810" cap="flat" cmpd="sng" algn="ctr">
+                      <a:solidFill>
+                        <a:srgbClr val="DDDDDD"/>
                       </a:solidFill>
                       <a:prstDash val="solid"/>
                       <a:round/>
@@ -8109,14 +8193,14 @@
       </p:graphicFrame>
       <p:sp>
         <p:nvSpPr>
-          <p:cNvPr id="47" name="Text 43"/>
+          <p:cNvPr id="51" name="Text 47"/>
           <p:cNvSpPr/>
           <p:nvPr/>
         </p:nvSpPr>
         <p:spPr>
           <a:xfrm>
-            <a:off x="2697480" y="5477256"/>
-            <a:ext cx="4636008" cy="137160"/>
+            <a:off x="2606040" y="5422392"/>
+            <a:ext cx="4818888" cy="128016"/>
           </a:xfrm>
           <a:prstGeom prst="rect">
             <a:avLst/>
@@ -8148,22 +8232,22 @@
       </p:sp>
       <p:sp>
         <p:nvSpPr>
-          <p:cNvPr id="48" name="Shape 44"/>
+          <p:cNvPr id="52" name="Shape 48"/>
           <p:cNvSpPr/>
           <p:nvPr/>
         </p:nvSpPr>
         <p:spPr>
           <a:xfrm>
-            <a:off x="2697480" y="5660136"/>
-            <a:ext cx="4636008" cy="0"/>
+            <a:off x="2606040" y="5586984"/>
+            <a:ext cx="4818888" cy="0"/>
           </a:xfrm>
           <a:prstGeom prst="line">
             <a:avLst/>
           </a:prstGeom>
           <a:noFill/>
-          <a:ln w="5080">
+          <a:ln w="6350">
             <a:solidFill>
-              <a:srgbClr val="CCCCCC"/>
+              <a:srgbClr val="DDDDDD"/>
             </a:solidFill>
             <a:prstDash val="solid"/>
           </a:ln>
@@ -8184,31 +8268,31 @@
           </p:nvPr>
         </p:nvGraphicFramePr>
         <p:xfrm>
-          <a:off x="2697480" y="5724144"/>
-          <a:ext cx="4636008" cy="914400"/>
+          <a:off x="2606040" y="5650992"/>
+          <a:ext cx="4818888" cy="914400"/>
         </p:xfrm>
         <a:graphic>
           <a:graphicData uri="http://schemas.openxmlformats.org/drawingml/2006/table">
             <a:tbl>
               <a:tblPr/>
               <a:tblGrid>
-                <a:gridCol w="201168"/>
-                <a:gridCol w="749808"/>
-                <a:gridCol w="283464"/>
-                <a:gridCol w="283464"/>
-                <a:gridCol w="283464"/>
-                <a:gridCol w="283464"/>
-                <a:gridCol w="283464"/>
-                <a:gridCol w="283464"/>
-                <a:gridCol w="283464"/>
-                <a:gridCol w="283464"/>
-                <a:gridCol w="283464"/>
-                <a:gridCol w="283464"/>
-                <a:gridCol w="283464"/>
-                <a:gridCol w="283464"/>
-                <a:gridCol w="301752"/>
+                <a:gridCol w="219456"/>
+                <a:gridCol w="859536"/>
+                <a:gridCol w="265176"/>
+                <a:gridCol w="265176"/>
+                <a:gridCol w="265176"/>
+                <a:gridCol w="265176"/>
+                <a:gridCol w="265176"/>
+                <a:gridCol w="265176"/>
+                <a:gridCol w="256032"/>
+                <a:gridCol w="265176"/>
+                <a:gridCol w="256032"/>
+                <a:gridCol w="265176"/>
+                <a:gridCol w="256032"/>
+                <a:gridCol w="256032"/>
+                <a:gridCol w="274320"/>
               </a:tblGrid>
-              <a:tr h="123444">
+              <a:tr h="128016">
                 <a:tc>
                   <a:txBody>
                     <a:bodyPr/>
@@ -8218,7 +8302,7 @@
                         <a:buNone/>
                       </a:pPr>
                       <a:r>
-                        <a:rPr lang="en-US" sz="580" b="1" dirty="0">
+                        <a:rPr lang="en-US" sz="600" b="1" dirty="0">
                           <a:solidFill>
                             <a:srgbClr val="000000"/>
                           </a:solidFill>
@@ -8228,7 +8312,7 @@
                         </a:rPr>
                         <a:t>Año</a:t>
                       </a:r>
-                      <a:endParaRPr lang="en-US" sz="580" dirty="0">
+                      <a:endParaRPr lang="en-US" sz="600" dirty="0">
                         <a:latin typeface="Calibri" charset="0"/>
                         <a:ea typeface="Calibri" charset="0"/>
                         <a:cs typeface="Calibri" charset="0"/>
@@ -8254,18 +8338,18 @@
                       <a:headEnd type="none" w="med" len="med"/>
                       <a:tailEnd type="none" w="med" len="med"/>
                     </a:lnR>
-                    <a:lnT w="2540" cap="flat" cmpd="sng" algn="ctr">
-                      <a:solidFill>
-                        <a:srgbClr val="EEEEEE"/>
+                    <a:lnT w="19050" cap="flat" cmpd="sng" algn="ctr">
+                      <a:solidFill>
+                        <a:srgbClr val="000000"/>
                       </a:solidFill>
                       <a:prstDash val="solid"/>
                       <a:round/>
                       <a:headEnd type="none" w="med" len="med"/>
                       <a:tailEnd type="none" w="med" len="med"/>
                     </a:lnT>
-                    <a:lnB w="2540" cap="flat" cmpd="sng" algn="ctr">
-                      <a:solidFill>
-                        <a:srgbClr val="EEEEEE"/>
+                    <a:lnB w="19050" cap="flat" cmpd="sng" algn="ctr">
+                      <a:solidFill>
+                        <a:srgbClr val="000000"/>
                       </a:solidFill>
                       <a:prstDash val="solid"/>
                       <a:round/>
@@ -8283,7 +8367,7 @@
                         <a:buNone/>
                       </a:pPr>
                       <a:r>
-                        <a:rPr lang="en-US" sz="580" b="1" dirty="0">
+                        <a:rPr lang="en-US" sz="600" b="1" dirty="0">
                           <a:solidFill>
                             <a:srgbClr val="000000"/>
                           </a:solidFill>
@@ -8293,7 +8377,7 @@
                         </a:rPr>
                         <a:t>Fondo</a:t>
                       </a:r>
-                      <a:endParaRPr lang="en-US" sz="580" dirty="0">
+                      <a:endParaRPr lang="en-US" sz="600" dirty="0">
                         <a:latin typeface="Calibri" charset="0"/>
                         <a:ea typeface="Calibri" charset="0"/>
                         <a:cs typeface="Calibri" charset="0"/>
@@ -8319,18 +8403,18 @@
                       <a:headEnd type="none" w="med" len="med"/>
                       <a:tailEnd type="none" w="med" len="med"/>
                     </a:lnR>
-                    <a:lnT w="2540" cap="flat" cmpd="sng" algn="ctr">
-                      <a:solidFill>
-                        <a:srgbClr val="EEEEEE"/>
+                    <a:lnT w="19050" cap="flat" cmpd="sng" algn="ctr">
+                      <a:solidFill>
+                        <a:srgbClr val="000000"/>
                       </a:solidFill>
                       <a:prstDash val="solid"/>
                       <a:round/>
                       <a:headEnd type="none" w="med" len="med"/>
                       <a:tailEnd type="none" w="med" len="med"/>
                     </a:lnT>
-                    <a:lnB w="2540" cap="flat" cmpd="sng" algn="ctr">
-                      <a:solidFill>
-                        <a:srgbClr val="EEEEEE"/>
+                    <a:lnB w="19050" cap="flat" cmpd="sng" algn="ctr">
+                      <a:solidFill>
+                        <a:srgbClr val="000000"/>
                       </a:solidFill>
                       <a:prstDash val="solid"/>
                       <a:round/>
@@ -8348,7 +8432,7 @@
                         <a:buNone/>
                       </a:pPr>
                       <a:r>
-                        <a:rPr lang="en-US" sz="580" b="1" dirty="0">
+                        <a:rPr lang="en-US" sz="600" b="1" dirty="0">
                           <a:solidFill>
                             <a:srgbClr val="000000"/>
                           </a:solidFill>
@@ -8358,7 +8442,7 @@
                         </a:rPr>
                         <a:t>Ene</a:t>
                       </a:r>
-                      <a:endParaRPr lang="en-US" sz="580" dirty="0">
+                      <a:endParaRPr lang="en-US" sz="600" dirty="0">
                         <a:latin typeface="Calibri" charset="0"/>
                         <a:ea typeface="Calibri" charset="0"/>
                         <a:cs typeface="Calibri" charset="0"/>
@@ -8384,18 +8468,18 @@
                       <a:headEnd type="none" w="med" len="med"/>
                       <a:tailEnd type="none" w="med" len="med"/>
                     </a:lnR>
-                    <a:lnT w="2540" cap="flat" cmpd="sng" algn="ctr">
-                      <a:solidFill>
-                        <a:srgbClr val="EEEEEE"/>
+                    <a:lnT w="19050" cap="flat" cmpd="sng" algn="ctr">
+                      <a:solidFill>
+                        <a:srgbClr val="000000"/>
                       </a:solidFill>
                       <a:prstDash val="solid"/>
                       <a:round/>
                       <a:headEnd type="none" w="med" len="med"/>
                       <a:tailEnd type="none" w="med" len="med"/>
                     </a:lnT>
-                    <a:lnB w="2540" cap="flat" cmpd="sng" algn="ctr">
-                      <a:solidFill>
-                        <a:srgbClr val="EEEEEE"/>
+                    <a:lnB w="19050" cap="flat" cmpd="sng" algn="ctr">
+                      <a:solidFill>
+                        <a:srgbClr val="000000"/>
                       </a:solidFill>
                       <a:prstDash val="solid"/>
                       <a:round/>
@@ -8413,7 +8497,7 @@
                         <a:buNone/>
                       </a:pPr>
                       <a:r>
-                        <a:rPr lang="en-US" sz="580" b="1" dirty="0">
+                        <a:rPr lang="en-US" sz="600" b="1" dirty="0">
                           <a:solidFill>
                             <a:srgbClr val="000000"/>
                           </a:solidFill>
@@ -8423,7 +8507,7 @@
                         </a:rPr>
                         <a:t>Feb</a:t>
                       </a:r>
-                      <a:endParaRPr lang="en-US" sz="580" dirty="0">
+                      <a:endParaRPr lang="en-US" sz="600" dirty="0">
                         <a:latin typeface="Calibri" charset="0"/>
                         <a:ea typeface="Calibri" charset="0"/>
                         <a:cs typeface="Calibri" charset="0"/>
@@ -8449,18 +8533,18 @@
                       <a:headEnd type="none" w="med" len="med"/>
                       <a:tailEnd type="none" w="med" len="med"/>
                     </a:lnR>
-                    <a:lnT w="2540" cap="flat" cmpd="sng" algn="ctr">
-                      <a:solidFill>
-                        <a:srgbClr val="EEEEEE"/>
+                    <a:lnT w="19050" cap="flat" cmpd="sng" algn="ctr">
+                      <a:solidFill>
+                        <a:srgbClr val="000000"/>
                       </a:solidFill>
                       <a:prstDash val="solid"/>
                       <a:round/>
                       <a:headEnd type="none" w="med" len="med"/>
                       <a:tailEnd type="none" w="med" len="med"/>
                     </a:lnT>
-                    <a:lnB w="2540" cap="flat" cmpd="sng" algn="ctr">
-                      <a:solidFill>
-                        <a:srgbClr val="EEEEEE"/>
+                    <a:lnB w="19050" cap="flat" cmpd="sng" algn="ctr">
+                      <a:solidFill>
+                        <a:srgbClr val="000000"/>
                       </a:solidFill>
                       <a:prstDash val="solid"/>
                       <a:round/>
@@ -8478,7 +8562,7 @@
                         <a:buNone/>
                       </a:pPr>
                       <a:r>
-                        <a:rPr lang="en-US" sz="580" b="1" dirty="0">
+                        <a:rPr lang="en-US" sz="600" b="1" dirty="0">
                           <a:solidFill>
                             <a:srgbClr val="000000"/>
                           </a:solidFill>
@@ -8488,7 +8572,7 @@
                         </a:rPr>
                         <a:t>Mar</a:t>
                       </a:r>
-                      <a:endParaRPr lang="en-US" sz="580" dirty="0">
+                      <a:endParaRPr lang="en-US" sz="600" dirty="0">
                         <a:latin typeface="Calibri" charset="0"/>
                         <a:ea typeface="Calibri" charset="0"/>
                         <a:cs typeface="Calibri" charset="0"/>
@@ -8514,18 +8598,18 @@
                       <a:headEnd type="none" w="med" len="med"/>
                       <a:tailEnd type="none" w="med" len="med"/>
                     </a:lnR>
-                    <a:lnT w="2540" cap="flat" cmpd="sng" algn="ctr">
-                      <a:solidFill>
-                        <a:srgbClr val="EEEEEE"/>
+                    <a:lnT w="19050" cap="flat" cmpd="sng" algn="ctr">
+                      <a:solidFill>
+                        <a:srgbClr val="000000"/>
                       </a:solidFill>
                       <a:prstDash val="solid"/>
                       <a:round/>
                       <a:headEnd type="none" w="med" len="med"/>
                       <a:tailEnd type="none" w="med" len="med"/>
                     </a:lnT>
-                    <a:lnB w="2540" cap="flat" cmpd="sng" algn="ctr">
-                      <a:solidFill>
-                        <a:srgbClr val="EEEEEE"/>
+                    <a:lnB w="19050" cap="flat" cmpd="sng" algn="ctr">
+                      <a:solidFill>
+                        <a:srgbClr val="000000"/>
                       </a:solidFill>
                       <a:prstDash val="solid"/>
                       <a:round/>
@@ -8543,7 +8627,7 @@
                         <a:buNone/>
                       </a:pPr>
                       <a:r>
-                        <a:rPr lang="en-US" sz="580" b="1" dirty="0">
+                        <a:rPr lang="en-US" sz="600" b="1" dirty="0">
                           <a:solidFill>
                             <a:srgbClr val="000000"/>
                           </a:solidFill>
@@ -8553,7 +8637,7 @@
                         </a:rPr>
                         <a:t>Abr</a:t>
                       </a:r>
-                      <a:endParaRPr lang="en-US" sz="580" dirty="0">
+                      <a:endParaRPr lang="en-US" sz="600" dirty="0">
                         <a:latin typeface="Calibri" charset="0"/>
                         <a:ea typeface="Calibri" charset="0"/>
                         <a:cs typeface="Calibri" charset="0"/>
@@ -8579,18 +8663,18 @@
                       <a:headEnd type="none" w="med" len="med"/>
                       <a:tailEnd type="none" w="med" len="med"/>
                     </a:lnR>
-                    <a:lnT w="2540" cap="flat" cmpd="sng" algn="ctr">
-                      <a:solidFill>
-                        <a:srgbClr val="EEEEEE"/>
+                    <a:lnT w="19050" cap="flat" cmpd="sng" algn="ctr">
+                      <a:solidFill>
+                        <a:srgbClr val="000000"/>
                       </a:solidFill>
                       <a:prstDash val="solid"/>
                       <a:round/>
                       <a:headEnd type="none" w="med" len="med"/>
                       <a:tailEnd type="none" w="med" len="med"/>
                     </a:lnT>
-                    <a:lnB w="2540" cap="flat" cmpd="sng" algn="ctr">
-                      <a:solidFill>
-                        <a:srgbClr val="EEEEEE"/>
+                    <a:lnB w="19050" cap="flat" cmpd="sng" algn="ctr">
+                      <a:solidFill>
+                        <a:srgbClr val="000000"/>
                       </a:solidFill>
                       <a:prstDash val="solid"/>
                       <a:round/>
@@ -8608,7 +8692,7 @@
                         <a:buNone/>
                       </a:pPr>
                       <a:r>
-                        <a:rPr lang="en-US" sz="580" b="1" dirty="0">
+                        <a:rPr lang="en-US" sz="600" b="1" dirty="0">
                           <a:solidFill>
                             <a:srgbClr val="000000"/>
                           </a:solidFill>
@@ -8618,7 +8702,7 @@
                         </a:rPr>
                         <a:t>May</a:t>
                       </a:r>
-                      <a:endParaRPr lang="en-US" sz="580" dirty="0">
+                      <a:endParaRPr lang="en-US" sz="600" dirty="0">
                         <a:latin typeface="Calibri" charset="0"/>
                         <a:ea typeface="Calibri" charset="0"/>
                         <a:cs typeface="Calibri" charset="0"/>
@@ -8644,18 +8728,18 @@
                       <a:headEnd type="none" w="med" len="med"/>
                       <a:tailEnd type="none" w="med" len="med"/>
                     </a:lnR>
-                    <a:lnT w="2540" cap="flat" cmpd="sng" algn="ctr">
-                      <a:solidFill>
-                        <a:srgbClr val="EEEEEE"/>
+                    <a:lnT w="19050" cap="flat" cmpd="sng" algn="ctr">
+                      <a:solidFill>
+                        <a:srgbClr val="000000"/>
                       </a:solidFill>
                       <a:prstDash val="solid"/>
                       <a:round/>
                       <a:headEnd type="none" w="med" len="med"/>
                       <a:tailEnd type="none" w="med" len="med"/>
                     </a:lnT>
-                    <a:lnB w="2540" cap="flat" cmpd="sng" algn="ctr">
-                      <a:solidFill>
-                        <a:srgbClr val="EEEEEE"/>
+                    <a:lnB w="19050" cap="flat" cmpd="sng" algn="ctr">
+                      <a:solidFill>
+                        <a:srgbClr val="000000"/>
                       </a:solidFill>
                       <a:prstDash val="solid"/>
                       <a:round/>
@@ -8673,7 +8757,7 @@
                         <a:buNone/>
                       </a:pPr>
                       <a:r>
-                        <a:rPr lang="en-US" sz="580" b="1" dirty="0">
+                        <a:rPr lang="en-US" sz="600" b="1" dirty="0">
                           <a:solidFill>
                             <a:srgbClr val="000000"/>
                           </a:solidFill>
@@ -8683,7 +8767,7 @@
                         </a:rPr>
                         <a:t>Jun</a:t>
                       </a:r>
-                      <a:endParaRPr lang="en-US" sz="580" dirty="0">
+                      <a:endParaRPr lang="en-US" sz="600" dirty="0">
                         <a:latin typeface="Calibri" charset="0"/>
                         <a:ea typeface="Calibri" charset="0"/>
                         <a:cs typeface="Calibri" charset="0"/>
@@ -8709,18 +8793,18 @@
                       <a:headEnd type="none" w="med" len="med"/>
                       <a:tailEnd type="none" w="med" len="med"/>
                     </a:lnR>
-                    <a:lnT w="2540" cap="flat" cmpd="sng" algn="ctr">
-                      <a:solidFill>
-                        <a:srgbClr val="EEEEEE"/>
+                    <a:lnT w="19050" cap="flat" cmpd="sng" algn="ctr">
+                      <a:solidFill>
+                        <a:srgbClr val="000000"/>
                       </a:solidFill>
                       <a:prstDash val="solid"/>
                       <a:round/>
                       <a:headEnd type="none" w="med" len="med"/>
                       <a:tailEnd type="none" w="med" len="med"/>
                     </a:lnT>
-                    <a:lnB w="2540" cap="flat" cmpd="sng" algn="ctr">
-                      <a:solidFill>
-                        <a:srgbClr val="EEEEEE"/>
+                    <a:lnB w="19050" cap="flat" cmpd="sng" algn="ctr">
+                      <a:solidFill>
+                        <a:srgbClr val="000000"/>
                       </a:solidFill>
                       <a:prstDash val="solid"/>
                       <a:round/>
@@ -8738,7 +8822,7 @@
                         <a:buNone/>
                       </a:pPr>
                       <a:r>
-                        <a:rPr lang="en-US" sz="580" b="1" dirty="0">
+                        <a:rPr lang="en-US" sz="600" b="1" dirty="0">
                           <a:solidFill>
                             <a:srgbClr val="000000"/>
                           </a:solidFill>
@@ -8748,7 +8832,7 @@
                         </a:rPr>
                         <a:t>Jul</a:t>
                       </a:r>
-                      <a:endParaRPr lang="en-US" sz="580" dirty="0">
+                      <a:endParaRPr lang="en-US" sz="600" dirty="0">
                         <a:latin typeface="Calibri" charset="0"/>
                         <a:ea typeface="Calibri" charset="0"/>
                         <a:cs typeface="Calibri" charset="0"/>
@@ -8774,18 +8858,18 @@
                       <a:headEnd type="none" w="med" len="med"/>
                       <a:tailEnd type="none" w="med" len="med"/>
                     </a:lnR>
-                    <a:lnT w="2540" cap="flat" cmpd="sng" algn="ctr">
-                      <a:solidFill>
-                        <a:srgbClr val="EEEEEE"/>
+                    <a:lnT w="19050" cap="flat" cmpd="sng" algn="ctr">
+                      <a:solidFill>
+                        <a:srgbClr val="000000"/>
                       </a:solidFill>
                       <a:prstDash val="solid"/>
                       <a:round/>
                       <a:headEnd type="none" w="med" len="med"/>
                       <a:tailEnd type="none" w="med" len="med"/>
                     </a:lnT>
-                    <a:lnB w="2540" cap="flat" cmpd="sng" algn="ctr">
-                      <a:solidFill>
-                        <a:srgbClr val="EEEEEE"/>
+                    <a:lnB w="19050" cap="flat" cmpd="sng" algn="ctr">
+                      <a:solidFill>
+                        <a:srgbClr val="000000"/>
                       </a:solidFill>
                       <a:prstDash val="solid"/>
                       <a:round/>
@@ -8803,7 +8887,7 @@
                         <a:buNone/>
                       </a:pPr>
                       <a:r>
-                        <a:rPr lang="en-US" sz="580" b="1" dirty="0">
+                        <a:rPr lang="en-US" sz="600" b="1" dirty="0">
                           <a:solidFill>
                             <a:srgbClr val="000000"/>
                           </a:solidFill>
@@ -8813,7 +8897,7 @@
                         </a:rPr>
                         <a:t>Ago</a:t>
                       </a:r>
-                      <a:endParaRPr lang="en-US" sz="580" dirty="0">
+                      <a:endParaRPr lang="en-US" sz="600" dirty="0">
                         <a:latin typeface="Calibri" charset="0"/>
                         <a:ea typeface="Calibri" charset="0"/>
                         <a:cs typeface="Calibri" charset="0"/>
@@ -8839,18 +8923,18 @@
                       <a:headEnd type="none" w="med" len="med"/>
                       <a:tailEnd type="none" w="med" len="med"/>
                     </a:lnR>
-                    <a:lnT w="2540" cap="flat" cmpd="sng" algn="ctr">
-                      <a:solidFill>
-                        <a:srgbClr val="EEEEEE"/>
+                    <a:lnT w="19050" cap="flat" cmpd="sng" algn="ctr">
+                      <a:solidFill>
+                        <a:srgbClr val="000000"/>
                       </a:solidFill>
                       <a:prstDash val="solid"/>
                       <a:round/>
                       <a:headEnd type="none" w="med" len="med"/>
                       <a:tailEnd type="none" w="med" len="med"/>
                     </a:lnT>
-                    <a:lnB w="2540" cap="flat" cmpd="sng" algn="ctr">
-                      <a:solidFill>
-                        <a:srgbClr val="EEEEEE"/>
+                    <a:lnB w="19050" cap="flat" cmpd="sng" algn="ctr">
+                      <a:solidFill>
+                        <a:srgbClr val="000000"/>
                       </a:solidFill>
                       <a:prstDash val="solid"/>
                       <a:round/>
@@ -8868,7 +8952,7 @@
                         <a:buNone/>
                       </a:pPr>
                       <a:r>
-                        <a:rPr lang="en-US" sz="580" b="1" dirty="0">
+                        <a:rPr lang="en-US" sz="600" b="1" dirty="0">
                           <a:solidFill>
                             <a:srgbClr val="000000"/>
                           </a:solidFill>
@@ -8878,7 +8962,7 @@
                         </a:rPr>
                         <a:t>Sep</a:t>
                       </a:r>
-                      <a:endParaRPr lang="en-US" sz="580" dirty="0">
+                      <a:endParaRPr lang="en-US" sz="600" dirty="0">
                         <a:latin typeface="Calibri" charset="0"/>
                         <a:ea typeface="Calibri" charset="0"/>
                         <a:cs typeface="Calibri" charset="0"/>
@@ -8904,18 +8988,18 @@
                       <a:headEnd type="none" w="med" len="med"/>
                       <a:tailEnd type="none" w="med" len="med"/>
                     </a:lnR>
-                    <a:lnT w="2540" cap="flat" cmpd="sng" algn="ctr">
-                      <a:solidFill>
-                        <a:srgbClr val="EEEEEE"/>
+                    <a:lnT w="19050" cap="flat" cmpd="sng" algn="ctr">
+                      <a:solidFill>
+                        <a:srgbClr val="000000"/>
                       </a:solidFill>
                       <a:prstDash val="solid"/>
                       <a:round/>
                       <a:headEnd type="none" w="med" len="med"/>
                       <a:tailEnd type="none" w="med" len="med"/>
                     </a:lnT>
-                    <a:lnB w="2540" cap="flat" cmpd="sng" algn="ctr">
-                      <a:solidFill>
-                        <a:srgbClr val="EEEEEE"/>
+                    <a:lnB w="19050" cap="flat" cmpd="sng" algn="ctr">
+                      <a:solidFill>
+                        <a:srgbClr val="000000"/>
                       </a:solidFill>
                       <a:prstDash val="solid"/>
                       <a:round/>
@@ -8933,7 +9017,7 @@
                         <a:buNone/>
                       </a:pPr>
                       <a:r>
-                        <a:rPr lang="en-US" sz="580" b="1" dirty="0">
+                        <a:rPr lang="en-US" sz="600" b="1" dirty="0">
                           <a:solidFill>
                             <a:srgbClr val="000000"/>
                           </a:solidFill>
@@ -8943,7 +9027,7 @@
                         </a:rPr>
                         <a:t>Oct</a:t>
                       </a:r>
-                      <a:endParaRPr lang="en-US" sz="580" dirty="0">
+                      <a:endParaRPr lang="en-US" sz="600" dirty="0">
                         <a:latin typeface="Calibri" charset="0"/>
                         <a:ea typeface="Calibri" charset="0"/>
                         <a:cs typeface="Calibri" charset="0"/>
@@ -8969,18 +9053,18 @@
                       <a:headEnd type="none" w="med" len="med"/>
                       <a:tailEnd type="none" w="med" len="med"/>
                     </a:lnR>
-                    <a:lnT w="2540" cap="flat" cmpd="sng" algn="ctr">
-                      <a:solidFill>
-                        <a:srgbClr val="EEEEEE"/>
+                    <a:lnT w="19050" cap="flat" cmpd="sng" algn="ctr">
+                      <a:solidFill>
+                        <a:srgbClr val="000000"/>
                       </a:solidFill>
                       <a:prstDash val="solid"/>
                       <a:round/>
                       <a:headEnd type="none" w="med" len="med"/>
                       <a:tailEnd type="none" w="med" len="med"/>
                     </a:lnT>
-                    <a:lnB w="2540" cap="flat" cmpd="sng" algn="ctr">
-                      <a:solidFill>
-                        <a:srgbClr val="EEEEEE"/>
+                    <a:lnB w="19050" cap="flat" cmpd="sng" algn="ctr">
+                      <a:solidFill>
+                        <a:srgbClr val="000000"/>
                       </a:solidFill>
                       <a:prstDash val="solid"/>
                       <a:round/>
@@ -8998,7 +9082,7 @@
                         <a:buNone/>
                       </a:pPr>
                       <a:r>
-                        <a:rPr lang="en-US" sz="580" b="1" dirty="0">
+                        <a:rPr lang="en-US" sz="600" b="1" dirty="0">
                           <a:solidFill>
                             <a:srgbClr val="000000"/>
                           </a:solidFill>
@@ -9008,7 +9092,7 @@
                         </a:rPr>
                         <a:t>Nov</a:t>
                       </a:r>
-                      <a:endParaRPr lang="en-US" sz="580" dirty="0">
+                      <a:endParaRPr lang="en-US" sz="600" dirty="0">
                         <a:latin typeface="Calibri" charset="0"/>
                         <a:ea typeface="Calibri" charset="0"/>
                         <a:cs typeface="Calibri" charset="0"/>
@@ -9034,18 +9118,18 @@
                       <a:headEnd type="none" w="med" len="med"/>
                       <a:tailEnd type="none" w="med" len="med"/>
                     </a:lnR>
-                    <a:lnT w="2540" cap="flat" cmpd="sng" algn="ctr">
-                      <a:solidFill>
-                        <a:srgbClr val="EEEEEE"/>
+                    <a:lnT w="19050" cap="flat" cmpd="sng" algn="ctr">
+                      <a:solidFill>
+                        <a:srgbClr val="000000"/>
                       </a:solidFill>
                       <a:prstDash val="solid"/>
                       <a:round/>
                       <a:headEnd type="none" w="med" len="med"/>
                       <a:tailEnd type="none" w="med" len="med"/>
                     </a:lnT>
-                    <a:lnB w="2540" cap="flat" cmpd="sng" algn="ctr">
-                      <a:solidFill>
-                        <a:srgbClr val="EEEEEE"/>
+                    <a:lnB w="19050" cap="flat" cmpd="sng" algn="ctr">
+                      <a:solidFill>
+                        <a:srgbClr val="000000"/>
                       </a:solidFill>
                       <a:prstDash val="solid"/>
                       <a:round/>
@@ -9063,7 +9147,7 @@
                         <a:buNone/>
                       </a:pPr>
                       <a:r>
-                        <a:rPr lang="en-US" sz="580" b="1" dirty="0">
+                        <a:rPr lang="en-US" sz="600" b="1" dirty="0">
                           <a:solidFill>
                             <a:srgbClr val="000000"/>
                           </a:solidFill>
@@ -9073,7 +9157,7 @@
                         </a:rPr>
                         <a:t>Dic</a:t>
                       </a:r>
-                      <a:endParaRPr lang="en-US" sz="580" dirty="0">
+                      <a:endParaRPr lang="en-US" sz="600" dirty="0">
                         <a:latin typeface="Calibri" charset="0"/>
                         <a:ea typeface="Calibri" charset="0"/>
                         <a:cs typeface="Calibri" charset="0"/>
@@ -9099,18 +9183,18 @@
                       <a:headEnd type="none" w="med" len="med"/>
                       <a:tailEnd type="none" w="med" len="med"/>
                     </a:lnR>
-                    <a:lnT w="2540" cap="flat" cmpd="sng" algn="ctr">
-                      <a:solidFill>
-                        <a:srgbClr val="EEEEEE"/>
+                    <a:lnT w="19050" cap="flat" cmpd="sng" algn="ctr">
+                      <a:solidFill>
+                        <a:srgbClr val="000000"/>
                       </a:solidFill>
                       <a:prstDash val="solid"/>
                       <a:round/>
                       <a:headEnd type="none" w="med" len="med"/>
                       <a:tailEnd type="none" w="med" len="med"/>
                     </a:lnT>
-                    <a:lnB w="2540" cap="flat" cmpd="sng" algn="ctr">
-                      <a:solidFill>
-                        <a:srgbClr val="EEEEEE"/>
+                    <a:lnB w="19050" cap="flat" cmpd="sng" algn="ctr">
+                      <a:solidFill>
+                        <a:srgbClr val="000000"/>
                       </a:solidFill>
                       <a:prstDash val="solid"/>
                       <a:round/>
@@ -9128,7 +9212,7 @@
                         <a:buNone/>
                       </a:pPr>
                       <a:r>
-                        <a:rPr lang="en-US" sz="580" b="1" dirty="0">
+                        <a:rPr lang="en-US" sz="600" b="1" dirty="0">
                           <a:solidFill>
                             <a:srgbClr val="000000"/>
                           </a:solidFill>
@@ -9138,7 +9222,7 @@
                         </a:rPr>
                         <a:t>Total</a:t>
                       </a:r>
-                      <a:endParaRPr lang="en-US" sz="580" dirty="0">
+                      <a:endParaRPr lang="en-US" sz="600" dirty="0">
                         <a:latin typeface="Calibri" charset="0"/>
                         <a:ea typeface="Calibri" charset="0"/>
                         <a:cs typeface="Calibri" charset="0"/>
@@ -9149,7 +9233,7 @@
                         <a:buNone/>
                       </a:pPr>
                       <a:r>
-                        <a:rPr lang="en-US" sz="580" b="1" dirty="0">
+                        <a:rPr lang="en-US" sz="600" b="1" dirty="0">
                           <a:solidFill>
                             <a:srgbClr val="000000"/>
                           </a:solidFill>
@@ -9159,7 +9243,7 @@
                         </a:rPr>
                         <a:t>Año</a:t>
                       </a:r>
-                      <a:endParaRPr lang="en-US" sz="580" dirty="0">
+                      <a:endParaRPr lang="en-US" sz="600" dirty="0">
                         <a:latin typeface="Calibri" charset="0"/>
                         <a:ea typeface="Calibri" charset="0"/>
                         <a:cs typeface="Calibri" charset="0"/>
@@ -9185,18 +9269,18 @@
                       <a:headEnd type="none" w="med" len="med"/>
                       <a:tailEnd type="none" w="med" len="med"/>
                     </a:lnR>
-                    <a:lnT w="2540" cap="flat" cmpd="sng" algn="ctr">
-                      <a:solidFill>
-                        <a:srgbClr val="EEEEEE"/>
+                    <a:lnT w="19050" cap="flat" cmpd="sng" algn="ctr">
+                      <a:solidFill>
+                        <a:srgbClr val="000000"/>
                       </a:solidFill>
                       <a:prstDash val="solid"/>
                       <a:round/>
                       <a:headEnd type="none" w="med" len="med"/>
                       <a:tailEnd type="none" w="med" len="med"/>
                     </a:lnT>
-                    <a:lnB w="2540" cap="flat" cmpd="sng" algn="ctr">
-                      <a:solidFill>
-                        <a:srgbClr val="EEEEEE"/>
+                    <a:lnB w="19050" cap="flat" cmpd="sng" algn="ctr">
+                      <a:solidFill>
+                        <a:srgbClr val="000000"/>
                       </a:solidFill>
                       <a:prstDash val="solid"/>
                       <a:round/>
@@ -9206,7 +9290,7 @@
                   </a:tcPr>
                 </a:tc>
               </a:tr>
-              <a:tr h="123444">
+              <a:tr h="128016">
                 <a:tc>
                   <a:txBody>
                     <a:bodyPr/>
@@ -9408,7 +9492,7 @@
                           <a:ea typeface="Calibri" pitchFamily="34" charset="-122"/>
                           <a:cs typeface="Calibri" pitchFamily="34" charset="-120"/>
                         </a:rPr>
-                        <a:t>0,59%</a:t>
+                        <a:t>0.59%</a:t>
                       </a:r>
                       <a:endParaRPr lang="en-US" sz="580" dirty="0">
                         <a:latin typeface="Calibri" charset="0"/>
@@ -9473,7 +9557,7 @@
                           <a:ea typeface="Calibri" pitchFamily="34" charset="-122"/>
                           <a:cs typeface="Calibri" pitchFamily="34" charset="-120"/>
                         </a:rPr>
-                        <a:t>0,57%</a:t>
+                        <a:t>0.57%</a:t>
                       </a:r>
                       <a:endParaRPr lang="en-US" sz="580" dirty="0">
                         <a:latin typeface="Calibri" charset="0"/>
@@ -9538,7 +9622,7 @@
                           <a:ea typeface="Calibri" pitchFamily="34" charset="-122"/>
                           <a:cs typeface="Calibri" pitchFamily="34" charset="-120"/>
                         </a:rPr>
-                        <a:t>0,61%</a:t>
+                        <a:t>0.61%</a:t>
                       </a:r>
                       <a:endParaRPr lang="en-US" sz="580" dirty="0">
                         <a:latin typeface="Calibri" charset="0"/>
@@ -9603,7 +9687,7 @@
                           <a:ea typeface="Calibri" pitchFamily="34" charset="-122"/>
                           <a:cs typeface="Calibri" pitchFamily="34" charset="-120"/>
                         </a:rPr>
-                        <a:t>0,55%</a:t>
+                        <a:t>0.55%</a:t>
                       </a:r>
                       <a:endParaRPr lang="en-US" sz="580" dirty="0">
                         <a:latin typeface="Calibri" charset="0"/>
@@ -9668,7 +9752,7 @@
                           <a:ea typeface="Calibri" pitchFamily="34" charset="-122"/>
                           <a:cs typeface="Calibri" pitchFamily="34" charset="-120"/>
                         </a:rPr>
-                        <a:t>0,46%</a:t>
+                        <a:t>0.46%</a:t>
                       </a:r>
                       <a:endParaRPr lang="en-US" sz="580" dirty="0">
                         <a:latin typeface="Calibri" charset="0"/>
@@ -9733,7 +9817,7 @@
                           <a:ea typeface="Calibri" pitchFamily="34" charset="-122"/>
                           <a:cs typeface="Calibri" pitchFamily="34" charset="-120"/>
                         </a:rPr>
-                        <a:t>0,53%</a:t>
+                        <a:t>0.53%</a:t>
                       </a:r>
                       <a:endParaRPr lang="en-US" sz="580" dirty="0">
                         <a:latin typeface="Calibri" charset="0"/>
@@ -9798,7 +9882,7 @@
                           <a:ea typeface="Calibri" pitchFamily="34" charset="-122"/>
                           <a:cs typeface="Calibri" pitchFamily="34" charset="-120"/>
                         </a:rPr>
-                        <a:t>0,48%</a:t>
+                        <a:t>0.48%</a:t>
                       </a:r>
                       <a:endParaRPr lang="en-US" sz="580" dirty="0">
                         <a:latin typeface="Calibri" charset="0"/>
@@ -9863,7 +9947,7 @@
                           <a:ea typeface="Calibri" pitchFamily="34" charset="-122"/>
                           <a:cs typeface="Calibri" pitchFamily="34" charset="-120"/>
                         </a:rPr>
-                        <a:t>0,48%</a:t>
+                        <a:t>0.48%</a:t>
                       </a:r>
                       <a:endParaRPr lang="en-US" sz="580" dirty="0">
                         <a:latin typeface="Calibri" charset="0"/>
@@ -9928,7 +10012,7 @@
                           <a:ea typeface="Calibri" pitchFamily="34" charset="-122"/>
                           <a:cs typeface="Calibri" pitchFamily="34" charset="-120"/>
                         </a:rPr>
-                        <a:t>0,45%</a:t>
+                        <a:t>0.45%</a:t>
                       </a:r>
                       <a:endParaRPr lang="en-US" sz="580" dirty="0">
                         <a:latin typeface="Calibri" charset="0"/>
@@ -9993,7 +10077,7 @@
                           <a:ea typeface="Calibri" pitchFamily="34" charset="-122"/>
                           <a:cs typeface="Calibri" pitchFamily="34" charset="-120"/>
                         </a:rPr>
-                        <a:t>0,44%</a:t>
+                        <a:t>0.44%</a:t>
                       </a:r>
                       <a:endParaRPr lang="en-US" sz="580" dirty="0">
                         <a:latin typeface="Calibri" charset="0"/>
@@ -10058,7 +10142,7 @@
                           <a:ea typeface="Calibri" pitchFamily="34" charset="-122"/>
                           <a:cs typeface="Calibri" pitchFamily="34" charset="-120"/>
                         </a:rPr>
-                        <a:t>0,89%</a:t>
+                        <a:t>0.89%</a:t>
                       </a:r>
                       <a:endParaRPr lang="en-US" sz="580" dirty="0">
                         <a:latin typeface="Calibri" charset="0"/>
@@ -10115,7 +10199,7 @@
                         <a:buNone/>
                       </a:pPr>
                       <a:r>
-                        <a:rPr lang="en-US" sz="580" dirty="0">
+                        <a:rPr lang="en-US" sz="580" b="1" dirty="0">
                           <a:solidFill>
                             <a:srgbClr val="666666"/>
                           </a:solidFill>
@@ -10123,7 +10207,7 @@
                           <a:ea typeface="Calibri" pitchFamily="34" charset="-122"/>
                           <a:cs typeface="Calibri" pitchFamily="34" charset="-120"/>
                         </a:rPr>
-                        <a:t>6,21%</a:t>
+                        <a:t>6.21%</a:t>
                       </a:r>
                       <a:endParaRPr lang="en-US" sz="580" dirty="0">
                         <a:latin typeface="Calibri" charset="0"/>
@@ -10172,7 +10256,7 @@
                   </a:tcPr>
                 </a:tc>
               </a:tr>
-              <a:tr h="123444">
+              <a:tr h="128016">
                 <a:tc>
                   <a:txBody>
                     <a:bodyPr/>
@@ -10238,7 +10322,7 @@
                       <a:r>
                         <a:rPr lang="en-US" sz="580" dirty="0">
                           <a:solidFill>
-                            <a:srgbClr val="666666"/>
+                            <a:srgbClr val="999999"/>
                           </a:solidFill>
                           <a:latin typeface="Calibri" pitchFamily="34" charset="0"/>
                           <a:ea typeface="Calibri" pitchFamily="34" charset="-122"/>
@@ -10995,7 +11079,7 @@
                   </a:tcPr>
                 </a:tc>
               </a:tr>
-              <a:tr h="123444">
+              <a:tr h="128016">
                 <a:tc>
                   <a:txBody>
                     <a:bodyPr/>
@@ -11059,7 +11143,7 @@
                         <a:buNone/>
                       </a:pPr>
                       <a:r>
-                        <a:rPr lang="en-US" sz="580" b="1" dirty="0">
+                        <a:rPr lang="en-US" sz="580" dirty="0">
                           <a:solidFill>
                             <a:srgbClr val="000000"/>
                           </a:solidFill>
@@ -11818,7 +11902,7 @@
                   </a:tcPr>
                 </a:tc>
               </a:tr>
-              <a:tr h="123444">
+              <a:tr h="128016">
                 <a:tc>
                   <a:txBody>
                     <a:bodyPr/>
@@ -11966,7 +12050,7 @@
                           <a:ea typeface="Calibri" pitchFamily="34" charset="-122"/>
                           <a:cs typeface="Calibri" pitchFamily="34" charset="-120"/>
                         </a:rPr>
-                        <a:t>0,00%</a:t>
+                        <a:t>0.00%</a:t>
                       </a:r>
                       <a:endParaRPr lang="en-US" sz="580" dirty="0">
                         <a:latin typeface="Calibri" charset="0"/>
@@ -12031,7 +12115,7 @@
                           <a:ea typeface="Calibri" pitchFamily="34" charset="-122"/>
                           <a:cs typeface="Calibri" pitchFamily="34" charset="-120"/>
                         </a:rPr>
-                        <a:t>0,39%</a:t>
+                        <a:t>0.39%</a:t>
                       </a:r>
                       <a:endParaRPr lang="en-US" sz="580" dirty="0">
                         <a:latin typeface="Calibri" charset="0"/>
@@ -12096,7 +12180,7 @@
                           <a:ea typeface="Calibri" pitchFamily="34" charset="-122"/>
                           <a:cs typeface="Calibri" pitchFamily="34" charset="-120"/>
                         </a:rPr>
-                        <a:t>0,43%</a:t>
+                        <a:t>0.43%</a:t>
                       </a:r>
                       <a:endParaRPr lang="en-US" sz="580" dirty="0">
                         <a:latin typeface="Calibri" charset="0"/>
@@ -12161,7 +12245,7 @@
                           <a:ea typeface="Calibri" pitchFamily="34" charset="-122"/>
                           <a:cs typeface="Calibri" pitchFamily="34" charset="-120"/>
                         </a:rPr>
-                        <a:t>0,42%</a:t>
+                        <a:t>0.42%</a:t>
                       </a:r>
                       <a:endParaRPr lang="en-US" sz="580" dirty="0">
                         <a:latin typeface="Calibri" charset="0"/>
@@ -12226,7 +12310,7 @@
                           <a:ea typeface="Calibri" pitchFamily="34" charset="-122"/>
                           <a:cs typeface="Calibri" pitchFamily="34" charset="-120"/>
                         </a:rPr>
-                        <a:t>0,42%</a:t>
+                        <a:t>0.42%</a:t>
                       </a:r>
                       <a:endParaRPr lang="en-US" sz="580" dirty="0">
                         <a:latin typeface="Calibri" charset="0"/>
@@ -12291,7 +12375,7 @@
                           <a:ea typeface="Calibri" pitchFamily="34" charset="-122"/>
                           <a:cs typeface="Calibri" pitchFamily="34" charset="-120"/>
                         </a:rPr>
-                        <a:t>0,43%</a:t>
+                        <a:t>0.43%</a:t>
                       </a:r>
                       <a:endParaRPr lang="en-US" sz="580" dirty="0">
                         <a:latin typeface="Calibri" charset="0"/>
@@ -12356,7 +12440,7 @@
                           <a:ea typeface="Calibri" pitchFamily="34" charset="-122"/>
                           <a:cs typeface="Calibri" pitchFamily="34" charset="-120"/>
                         </a:rPr>
-                        <a:t>0,43%</a:t>
+                        <a:t>0.43%</a:t>
                       </a:r>
                       <a:endParaRPr lang="en-US" sz="580" dirty="0">
                         <a:latin typeface="Calibri" charset="0"/>
@@ -12421,7 +12505,7 @@
                           <a:ea typeface="Calibri" pitchFamily="34" charset="-122"/>
                           <a:cs typeface="Calibri" pitchFamily="34" charset="-120"/>
                         </a:rPr>
-                        <a:t>0,38%</a:t>
+                        <a:t>0.38%</a:t>
                       </a:r>
                       <a:endParaRPr lang="en-US" sz="580" dirty="0">
                         <a:latin typeface="Calibri" charset="0"/>
@@ -12486,7 +12570,7 @@
                           <a:ea typeface="Calibri" pitchFamily="34" charset="-122"/>
                           <a:cs typeface="Calibri" pitchFamily="34" charset="-120"/>
                         </a:rPr>
-                        <a:t>0,42%</a:t>
+                        <a:t>0.42%</a:t>
                       </a:r>
                       <a:endParaRPr lang="en-US" sz="580" dirty="0">
                         <a:latin typeface="Calibri" charset="0"/>
@@ -12551,7 +12635,7 @@
                           <a:ea typeface="Calibri" pitchFamily="34" charset="-122"/>
                           <a:cs typeface="Calibri" pitchFamily="34" charset="-120"/>
                         </a:rPr>
-                        <a:t>0,40%</a:t>
+                        <a:t>0.40%</a:t>
                       </a:r>
                       <a:endParaRPr lang="en-US" sz="580" dirty="0">
                         <a:latin typeface="Calibri" charset="0"/>
@@ -12616,7 +12700,7 @@
                           <a:ea typeface="Calibri" pitchFamily="34" charset="-122"/>
                           <a:cs typeface="Calibri" pitchFamily="34" charset="-120"/>
                         </a:rPr>
-                        <a:t>0,38%</a:t>
+                        <a:t>0.38%</a:t>
                       </a:r>
                       <a:endParaRPr lang="en-US" sz="580" dirty="0">
                         <a:latin typeface="Calibri" charset="0"/>
@@ -12681,7 +12765,7 @@
                           <a:ea typeface="Calibri" pitchFamily="34" charset="-122"/>
                           <a:cs typeface="Calibri" pitchFamily="34" charset="-120"/>
                         </a:rPr>
-                        <a:t>0,80%</a:t>
+                        <a:t>0.80%</a:t>
                       </a:r>
                       <a:endParaRPr lang="en-US" sz="580" dirty="0">
                         <a:latin typeface="Calibri" charset="0"/>
@@ -12738,7 +12822,7 @@
                         <a:buNone/>
                       </a:pPr>
                       <a:r>
-                        <a:rPr lang="en-US" sz="580" dirty="0">
+                        <a:rPr lang="en-US" sz="580" b="1" dirty="0">
                           <a:solidFill>
                             <a:srgbClr val="666666"/>
                           </a:solidFill>
@@ -12746,7 +12830,7 @@
                           <a:ea typeface="Calibri" pitchFamily="34" charset="-122"/>
                           <a:cs typeface="Calibri" pitchFamily="34" charset="-120"/>
                         </a:rPr>
-                        <a:t>5,02%</a:t>
+                        <a:t>5.02%</a:t>
                       </a:r>
                       <a:endParaRPr lang="en-US" sz="580" dirty="0">
                         <a:latin typeface="Calibri" charset="0"/>
@@ -12795,7 +12879,7 @@
                   </a:tcPr>
                 </a:tc>
               </a:tr>
-              <a:tr h="123444">
+              <a:tr h="128016">
                 <a:tc>
                   <a:txBody>
                     <a:bodyPr/>
@@ -12861,7 +12945,7 @@
                       <a:r>
                         <a:rPr lang="en-US" sz="580" dirty="0">
                           <a:solidFill>
-                            <a:srgbClr val="666666"/>
+                            <a:srgbClr val="999999"/>
                           </a:solidFill>
                           <a:latin typeface="Calibri" pitchFamily="34" charset="0"/>
                           <a:ea typeface="Calibri" pitchFamily="34" charset="-122"/>
@@ -12926,13 +13010,13 @@
                       <a:r>
                         <a:rPr lang="en-US" sz="580" dirty="0">
                           <a:solidFill>
-                            <a:srgbClr val="666666"/>
+                            <a:srgbClr val="999999"/>
                           </a:solidFill>
                           <a:latin typeface="Calibri" pitchFamily="34" charset="0"/>
                           <a:ea typeface="Calibri" pitchFamily="34" charset="-122"/>
                           <a:cs typeface="Calibri" pitchFamily="34" charset="-120"/>
                         </a:rPr>
-                        <a:t>0,00%</a:t>
+                        <a:t>0.00%</a:t>
                       </a:r>
                       <a:endParaRPr lang="en-US" sz="580" dirty="0">
                         <a:latin typeface="Calibri" charset="0"/>
@@ -12991,13 +13075,13 @@
                       <a:r>
                         <a:rPr lang="en-US" sz="580" dirty="0">
                           <a:solidFill>
-                            <a:srgbClr val="666666"/>
+                            <a:srgbClr val="999999"/>
                           </a:solidFill>
                           <a:latin typeface="Calibri" pitchFamily="34" charset="0"/>
                           <a:ea typeface="Calibri" pitchFamily="34" charset="-122"/>
                           <a:cs typeface="Calibri" pitchFamily="34" charset="-120"/>
                         </a:rPr>
-                        <a:t>0,28%</a:t>
+                        <a:t>0.28%</a:t>
                       </a:r>
                       <a:endParaRPr lang="en-US" sz="580" dirty="0">
                         <a:latin typeface="Calibri" charset="0"/>
@@ -13056,13 +13140,13 @@
                       <a:r>
                         <a:rPr lang="en-US" sz="580" dirty="0">
                           <a:solidFill>
-                            <a:srgbClr val="666666"/>
+                            <a:srgbClr val="999999"/>
                           </a:solidFill>
                           <a:latin typeface="Calibri" pitchFamily="34" charset="0"/>
                           <a:ea typeface="Calibri" pitchFamily="34" charset="-122"/>
                           <a:cs typeface="Calibri" pitchFamily="34" charset="-120"/>
                         </a:rPr>
-                        <a:t>0,30%</a:t>
+                        <a:t>0.30%</a:t>
                       </a:r>
                       <a:endParaRPr lang="en-US" sz="580" dirty="0">
                         <a:latin typeface="Calibri" charset="0"/>
@@ -13121,13 +13205,13 @@
                       <a:r>
                         <a:rPr lang="en-US" sz="580" dirty="0">
                           <a:solidFill>
-                            <a:srgbClr val="666666"/>
+                            <a:srgbClr val="999999"/>
                           </a:solidFill>
                           <a:latin typeface="Calibri" pitchFamily="34" charset="0"/>
                           <a:ea typeface="Calibri" pitchFamily="34" charset="-122"/>
                           <a:cs typeface="Calibri" pitchFamily="34" charset="-120"/>
                         </a:rPr>
-                        <a:t>0,29%</a:t>
+                        <a:t>0.29%</a:t>
                       </a:r>
                       <a:endParaRPr lang="en-US" sz="580" dirty="0">
                         <a:latin typeface="Calibri" charset="0"/>
@@ -13186,13 +13270,13 @@
                       <a:r>
                         <a:rPr lang="en-US" sz="580" dirty="0">
                           <a:solidFill>
-                            <a:srgbClr val="666666"/>
+                            <a:srgbClr val="999999"/>
                           </a:solidFill>
                           <a:latin typeface="Calibri" pitchFamily="34" charset="0"/>
                           <a:ea typeface="Calibri" pitchFamily="34" charset="-122"/>
                           <a:cs typeface="Calibri" pitchFamily="34" charset="-120"/>
                         </a:rPr>
-                        <a:t>0,29%</a:t>
+                        <a:t>0.29%</a:t>
                       </a:r>
                       <a:endParaRPr lang="en-US" sz="580" dirty="0">
                         <a:latin typeface="Calibri" charset="0"/>
@@ -13251,13 +13335,13 @@
                       <a:r>
                         <a:rPr lang="en-US" sz="580" dirty="0">
                           <a:solidFill>
-                            <a:srgbClr val="666666"/>
+                            <a:srgbClr val="999999"/>
                           </a:solidFill>
                           <a:latin typeface="Calibri" pitchFamily="34" charset="0"/>
                           <a:ea typeface="Calibri" pitchFamily="34" charset="-122"/>
                           <a:cs typeface="Calibri" pitchFamily="34" charset="-120"/>
                         </a:rPr>
-                        <a:t>0,28%</a:t>
+                        <a:t>0.28%</a:t>
                       </a:r>
                       <a:endParaRPr lang="en-US" sz="580" dirty="0">
                         <a:latin typeface="Calibri" charset="0"/>
@@ -13316,13 +13400,13 @@
                       <a:r>
                         <a:rPr lang="en-US" sz="580" dirty="0">
                           <a:solidFill>
-                            <a:srgbClr val="666666"/>
+                            <a:srgbClr val="999999"/>
                           </a:solidFill>
                           <a:latin typeface="Calibri" pitchFamily="34" charset="0"/>
                           <a:ea typeface="Calibri" pitchFamily="34" charset="-122"/>
                           <a:cs typeface="Calibri" pitchFamily="34" charset="-120"/>
                         </a:rPr>
-                        <a:t>0,30%</a:t>
+                        <a:t>0.30%</a:t>
                       </a:r>
                       <a:endParaRPr lang="en-US" sz="580" dirty="0">
                         <a:latin typeface="Calibri" charset="0"/>
@@ -13381,13 +13465,13 @@
                       <a:r>
                         <a:rPr lang="en-US" sz="580" dirty="0">
                           <a:solidFill>
-                            <a:srgbClr val="666666"/>
+                            <a:srgbClr val="999999"/>
                           </a:solidFill>
                           <a:latin typeface="Calibri" pitchFamily="34" charset="0"/>
                           <a:ea typeface="Calibri" pitchFamily="34" charset="-122"/>
                           <a:cs typeface="Calibri" pitchFamily="34" charset="-120"/>
                         </a:rPr>
-                        <a:t>0,30%</a:t>
+                        <a:t>0.30%</a:t>
                       </a:r>
                       <a:endParaRPr lang="en-US" sz="580" dirty="0">
                         <a:latin typeface="Calibri" charset="0"/>
@@ -13446,13 +13530,13 @@
                       <a:r>
                         <a:rPr lang="en-US" sz="580" dirty="0">
                           <a:solidFill>
-                            <a:srgbClr val="666666"/>
+                            <a:srgbClr val="999999"/>
                           </a:solidFill>
                           <a:latin typeface="Calibri" pitchFamily="34" charset="0"/>
                           <a:ea typeface="Calibri" pitchFamily="34" charset="-122"/>
                           <a:cs typeface="Calibri" pitchFamily="34" charset="-120"/>
                         </a:rPr>
-                        <a:t>0,29%</a:t>
+                        <a:t>0.29%</a:t>
                       </a:r>
                       <a:endParaRPr lang="en-US" sz="580" dirty="0">
                         <a:latin typeface="Calibri" charset="0"/>
@@ -13511,13 +13595,13 @@
                       <a:r>
                         <a:rPr lang="en-US" sz="580" dirty="0">
                           <a:solidFill>
-                            <a:srgbClr val="666666"/>
+                            <a:srgbClr val="999999"/>
                           </a:solidFill>
                           <a:latin typeface="Calibri" pitchFamily="34" charset="0"/>
                           <a:ea typeface="Calibri" pitchFamily="34" charset="-122"/>
                           <a:cs typeface="Calibri" pitchFamily="34" charset="-120"/>
                         </a:rPr>
-                        <a:t>0,30%</a:t>
+                        <a:t>0.30%</a:t>
                       </a:r>
                       <a:endParaRPr lang="en-US" sz="580" dirty="0">
                         <a:latin typeface="Calibri" charset="0"/>
@@ -13576,13 +13660,13 @@
                       <a:r>
                         <a:rPr lang="en-US" sz="580" dirty="0">
                           <a:solidFill>
-                            <a:srgbClr val="666666"/>
+                            <a:srgbClr val="999999"/>
                           </a:solidFill>
                           <a:latin typeface="Calibri" pitchFamily="34" charset="0"/>
                           <a:ea typeface="Calibri" pitchFamily="34" charset="-122"/>
                           <a:cs typeface="Calibri" pitchFamily="34" charset="-120"/>
                         </a:rPr>
-                        <a:t>0,28%</a:t>
+                        <a:t>0.28%</a:t>
                       </a:r>
                       <a:endParaRPr lang="en-US" sz="580" dirty="0">
                         <a:latin typeface="Calibri" charset="0"/>
@@ -13641,13 +13725,13 @@
                       <a:r>
                         <a:rPr lang="en-US" sz="580" dirty="0">
                           <a:solidFill>
-                            <a:srgbClr val="666666"/>
+                            <a:srgbClr val="999999"/>
                           </a:solidFill>
                           <a:latin typeface="Calibri" pitchFamily="34" charset="0"/>
                           <a:ea typeface="Calibri" pitchFamily="34" charset="-122"/>
                           <a:cs typeface="Calibri" pitchFamily="34" charset="-120"/>
                         </a:rPr>
-                        <a:t>0,58%</a:t>
+                        <a:t>0.58%</a:t>
                       </a:r>
                       <a:endParaRPr lang="en-US" sz="580" dirty="0">
                         <a:latin typeface="Calibri" charset="0"/>
@@ -13704,15 +13788,15 @@
                         <a:buNone/>
                       </a:pPr>
                       <a:r>
-                        <a:rPr lang="en-US" sz="580" dirty="0">
+                        <a:rPr lang="en-US" sz="580" b="1" dirty="0">
                           <a:solidFill>
-                            <a:srgbClr val="666666"/>
+                            <a:srgbClr val="999999"/>
                           </a:solidFill>
                           <a:latin typeface="Calibri" pitchFamily="34" charset="0"/>
                           <a:ea typeface="Calibri" pitchFamily="34" charset="-122"/>
                           <a:cs typeface="Calibri" pitchFamily="34" charset="-120"/>
                         </a:rPr>
-                        <a:t>3,53%</a:t>
+                        <a:t>3.53%</a:t>
                       </a:r>
                       <a:endParaRPr lang="en-US" sz="580" dirty="0">
                         <a:latin typeface="Calibri" charset="0"/>
@@ -13761,7 +13845,7 @@
                   </a:tcPr>
                 </a:tc>
               </a:tr>
-              <a:tr h="123444">
+              <a:tr h="128016">
                 <a:tc>
                   <a:txBody>
                     <a:bodyPr/>
@@ -13825,7 +13909,7 @@
                         <a:buNone/>
                       </a:pPr>
                       <a:r>
-                        <a:rPr lang="en-US" sz="580" b="1" dirty="0">
+                        <a:rPr lang="en-US" sz="580" dirty="0">
                           <a:solidFill>
                             <a:srgbClr val="000000"/>
                           </a:solidFill>
@@ -14276,7 +14360,7 @@
                           <a:ea typeface="Calibri" pitchFamily="34" charset="-122"/>
                           <a:cs typeface="Calibri" pitchFamily="34" charset="-120"/>
                         </a:rPr>
-                        <a:t>0,50%</a:t>
+                        <a:t>0.50%</a:t>
                       </a:r>
                       <a:endParaRPr lang="en-US" sz="580" dirty="0">
                         <a:latin typeface="Calibri" charset="0"/>
@@ -14341,7 +14425,7 @@
                           <a:ea typeface="Calibri" pitchFamily="34" charset="-122"/>
                           <a:cs typeface="Calibri" pitchFamily="34" charset="-120"/>
                         </a:rPr>
-                        <a:t>0,50%</a:t>
+                        <a:t>0.50%</a:t>
                       </a:r>
                       <a:endParaRPr lang="en-US" sz="580" dirty="0">
                         <a:latin typeface="Calibri" charset="0"/>
@@ -14406,7 +14490,7 @@
                           <a:ea typeface="Calibri" pitchFamily="34" charset="-122"/>
                           <a:cs typeface="Calibri" pitchFamily="34" charset="-120"/>
                         </a:rPr>
-                        <a:t>0,49%</a:t>
+                        <a:t>0.49%</a:t>
                       </a:r>
                       <a:endParaRPr lang="en-US" sz="580" dirty="0">
                         <a:latin typeface="Calibri" charset="0"/>
@@ -14471,7 +14555,7 @@
                           <a:ea typeface="Calibri" pitchFamily="34" charset="-122"/>
                           <a:cs typeface="Calibri" pitchFamily="34" charset="-120"/>
                         </a:rPr>
-                        <a:t>0,46%</a:t>
+                        <a:t>0.46%</a:t>
                       </a:r>
                       <a:endParaRPr lang="en-US" sz="580" dirty="0">
                         <a:latin typeface="Calibri" charset="0"/>
@@ -14536,7 +14620,7 @@
                           <a:ea typeface="Calibri" pitchFamily="34" charset="-122"/>
                           <a:cs typeface="Calibri" pitchFamily="34" charset="-120"/>
                         </a:rPr>
-                        <a:t>0,48%</a:t>
+                        <a:t>0.48%</a:t>
                       </a:r>
                       <a:endParaRPr lang="en-US" sz="580" dirty="0">
                         <a:latin typeface="Calibri" charset="0"/>
@@ -14593,7 +14677,7 @@
                         <a:buNone/>
                       </a:pPr>
                       <a:r>
-                        <a:rPr lang="en-US" sz="580" dirty="0">
+                        <a:rPr lang="en-US" sz="580" b="1" dirty="0">
                           <a:solidFill>
                             <a:srgbClr val="000000"/>
                           </a:solidFill>
@@ -14601,7 +14685,7 @@
                           <a:ea typeface="Calibri" pitchFamily="34" charset="-122"/>
                           <a:cs typeface="Calibri" pitchFamily="34" charset="-120"/>
                         </a:rPr>
-                        <a:t>2,45%</a:t>
+                        <a:t>2.45%</a:t>
                       </a:r>
                       <a:endParaRPr lang="en-US" sz="580" dirty="0">
                         <a:latin typeface="Calibri" charset="0"/>
@@ -14650,7 +14734,7 @@
                   </a:tcPr>
                 </a:tc>
               </a:tr>
-              <a:tr h="123444">
+              <a:tr h="128016">
                 <a:tc>
                   <a:txBody>
                     <a:bodyPr/>
@@ -14798,7 +14882,7 @@
                           <a:ea typeface="Calibri" pitchFamily="34" charset="-122"/>
                           <a:cs typeface="Calibri" pitchFamily="34" charset="-120"/>
                         </a:rPr>
-                        <a:t>0,00%</a:t>
+                        <a:t>0.00%</a:t>
                       </a:r>
                       <a:endParaRPr lang="en-US" sz="580" dirty="0">
                         <a:latin typeface="Calibri" charset="0"/>
@@ -14863,7 +14947,7 @@
                           <a:ea typeface="Calibri" pitchFamily="34" charset="-122"/>
                           <a:cs typeface="Calibri" pitchFamily="34" charset="-120"/>
                         </a:rPr>
-                        <a:t>0,35%</a:t>
+                        <a:t>0.35%</a:t>
                       </a:r>
                       <a:endParaRPr lang="en-US" sz="580" dirty="0">
                         <a:latin typeface="Calibri" charset="0"/>
@@ -14928,7 +15012,7 @@
                           <a:ea typeface="Calibri" pitchFamily="34" charset="-122"/>
                           <a:cs typeface="Calibri" pitchFamily="34" charset="-120"/>
                         </a:rPr>
-                        <a:t>0,40%</a:t>
+                        <a:t>0.40%</a:t>
                       </a:r>
                       <a:endParaRPr lang="en-US" sz="580" dirty="0">
                         <a:latin typeface="Calibri" charset="0"/>
@@ -14993,7 +15077,7 @@
                           <a:ea typeface="Calibri" pitchFamily="34" charset="-122"/>
                           <a:cs typeface="Calibri" pitchFamily="34" charset="-120"/>
                         </a:rPr>
-                        <a:t>0,38%</a:t>
+                        <a:t>0.38%</a:t>
                       </a:r>
                       <a:endParaRPr lang="en-US" sz="580" dirty="0">
                         <a:latin typeface="Calibri" charset="0"/>
@@ -15482,7 +15566,7 @@
                         <a:buNone/>
                       </a:pPr>
                       <a:r>
-                        <a:rPr lang="en-US" sz="580" dirty="0">
+                        <a:rPr lang="en-US" sz="580" b="1" dirty="0">
                           <a:solidFill>
                             <a:srgbClr val="666666"/>
                           </a:solidFill>
@@ -15490,7 +15574,7 @@
                           <a:ea typeface="Calibri" pitchFamily="34" charset="-122"/>
                           <a:cs typeface="Calibri" pitchFamily="34" charset="-120"/>
                         </a:rPr>
-                        <a:t>1,13%</a:t>
+                        <a:t>1.13%</a:t>
                       </a:r>
                       <a:endParaRPr lang="en-US" sz="580" dirty="0">
                         <a:latin typeface="Calibri" charset="0"/>
@@ -15539,7 +15623,7 @@
                   </a:tcPr>
                 </a:tc>
               </a:tr>
-              <a:tr h="123444">
+              <a:tr h="128016">
                 <a:tc>
                   <a:txBody>
                     <a:bodyPr/>
@@ -15605,7 +15689,7 @@
                       <a:r>
                         <a:rPr lang="en-US" sz="580" dirty="0">
                           <a:solidFill>
-                            <a:srgbClr val="666666"/>
+                            <a:srgbClr val="999999"/>
                           </a:solidFill>
                           <a:latin typeface="Calibri" pitchFamily="34" charset="0"/>
                           <a:ea typeface="Calibri" pitchFamily="34" charset="-122"/>
@@ -15670,13 +15754,13 @@
                       <a:r>
                         <a:rPr lang="en-US" sz="580" dirty="0">
                           <a:solidFill>
-                            <a:srgbClr val="666666"/>
+                            <a:srgbClr val="999999"/>
                           </a:solidFill>
                           <a:latin typeface="Calibri" pitchFamily="34" charset="0"/>
                           <a:ea typeface="Calibri" pitchFamily="34" charset="-122"/>
                           <a:cs typeface="Calibri" pitchFamily="34" charset="-120"/>
                         </a:rPr>
-                        <a:t>0,00%</a:t>
+                        <a:t>0.00%</a:t>
                       </a:r>
                       <a:endParaRPr lang="en-US" sz="580" dirty="0">
                         <a:latin typeface="Calibri" charset="0"/>
@@ -15735,13 +15819,13 @@
                       <a:r>
                         <a:rPr lang="en-US" sz="580" dirty="0">
                           <a:solidFill>
-                            <a:srgbClr val="666666"/>
+                            <a:srgbClr val="999999"/>
                           </a:solidFill>
                           <a:latin typeface="Calibri" pitchFamily="34" charset="0"/>
                           <a:ea typeface="Calibri" pitchFamily="34" charset="-122"/>
                           <a:cs typeface="Calibri" pitchFamily="34" charset="-120"/>
                         </a:rPr>
-                        <a:t>0,25%</a:t>
+                        <a:t>0.25%</a:t>
                       </a:r>
                       <a:endParaRPr lang="en-US" sz="580" dirty="0">
                         <a:latin typeface="Calibri" charset="0"/>
@@ -15800,13 +15884,13 @@
                       <a:r>
                         <a:rPr lang="en-US" sz="580" dirty="0">
                           <a:solidFill>
-                            <a:srgbClr val="666666"/>
+                            <a:srgbClr val="999999"/>
                           </a:solidFill>
                           <a:latin typeface="Calibri" pitchFamily="34" charset="0"/>
                           <a:ea typeface="Calibri" pitchFamily="34" charset="-122"/>
                           <a:cs typeface="Calibri" pitchFamily="34" charset="-120"/>
                         </a:rPr>
-                        <a:t>0,27%</a:t>
+                        <a:t>0.27%</a:t>
                       </a:r>
                       <a:endParaRPr lang="en-US" sz="580" dirty="0">
                         <a:latin typeface="Calibri" charset="0"/>
@@ -15865,13 +15949,13 @@
                       <a:r>
                         <a:rPr lang="en-US" sz="580" dirty="0">
                           <a:solidFill>
-                            <a:srgbClr val="666666"/>
+                            <a:srgbClr val="999999"/>
                           </a:solidFill>
                           <a:latin typeface="Calibri" pitchFamily="34" charset="0"/>
                           <a:ea typeface="Calibri" pitchFamily="34" charset="-122"/>
                           <a:cs typeface="Calibri" pitchFamily="34" charset="-120"/>
                         </a:rPr>
-                        <a:t>0,26%</a:t>
+                        <a:t>0.26%</a:t>
                       </a:r>
                       <a:endParaRPr lang="en-US" sz="580" dirty="0">
                         <a:latin typeface="Calibri" charset="0"/>
@@ -16360,15 +16444,15 @@
                         <a:buNone/>
                       </a:pPr>
                       <a:r>
-                        <a:rPr lang="en-US" sz="580" dirty="0">
+                        <a:rPr lang="en-US" sz="580" b="1" dirty="0">
                           <a:solidFill>
-                            <a:srgbClr val="666666"/>
+                            <a:srgbClr val="999999"/>
                           </a:solidFill>
                           <a:latin typeface="Calibri" pitchFamily="34" charset="0"/>
                           <a:ea typeface="Calibri" pitchFamily="34" charset="-122"/>
                           <a:cs typeface="Calibri" pitchFamily="34" charset="-120"/>
                         </a:rPr>
-                        <a:t>0,79%</a:t>
+                        <a:t>0.79%</a:t>
                       </a:r>
                       <a:endParaRPr lang="en-US" sz="580" dirty="0">
                         <a:latin typeface="Calibri" charset="0"/>
@@ -16417,7 +16501,7 @@
                   </a:tcPr>
                 </a:tc>
               </a:tr>
-              <a:tr h="123444">
+              <a:tr h="128016">
                 <a:tc>
                   <a:txBody>
                     <a:bodyPr/>
@@ -16481,7 +16565,7 @@
                         <a:buNone/>
                       </a:pPr>
                       <a:r>
-                        <a:rPr lang="en-US" sz="580" b="1" dirty="0">
+                        <a:rPr lang="en-US" sz="580" dirty="0">
                           <a:solidFill>
                             <a:srgbClr val="000000"/>
                           </a:solidFill>
@@ -16554,7 +16638,7 @@
                           <a:ea typeface="Calibri" pitchFamily="34" charset="-122"/>
                           <a:cs typeface="Calibri" pitchFamily="34" charset="-120"/>
                         </a:rPr>
-                        <a:t>0,41%</a:t>
+                        <a:t>0.41%</a:t>
                       </a:r>
                       <a:endParaRPr lang="en-US" sz="580" dirty="0">
                         <a:latin typeface="Calibri" charset="0"/>
@@ -16619,7 +16703,7 @@
                           <a:ea typeface="Calibri" pitchFamily="34" charset="-122"/>
                           <a:cs typeface="Calibri" pitchFamily="34" charset="-120"/>
                         </a:rPr>
-                        <a:t>0,41%</a:t>
+                        <a:t>0.41%</a:t>
                       </a:r>
                       <a:endParaRPr lang="en-US" sz="580" dirty="0">
                         <a:latin typeface="Calibri" charset="0"/>
@@ -16684,7 +16768,7 @@
                           <a:ea typeface="Calibri" pitchFamily="34" charset="-122"/>
                           <a:cs typeface="Calibri" pitchFamily="34" charset="-120"/>
                         </a:rPr>
-                        <a:t>0,42%</a:t>
+                        <a:t>0.42%</a:t>
                       </a:r>
                       <a:endParaRPr lang="en-US" sz="580" dirty="0">
                         <a:latin typeface="Calibri" charset="0"/>
@@ -16749,7 +16833,7 @@
                           <a:ea typeface="Calibri" pitchFamily="34" charset="-122"/>
                           <a:cs typeface="Calibri" pitchFamily="34" charset="-120"/>
                         </a:rPr>
-                        <a:t>0,43%</a:t>
+                        <a:t>0.43%</a:t>
                       </a:r>
                       <a:endParaRPr lang="en-US" sz="580" dirty="0">
                         <a:latin typeface="Calibri" charset="0"/>
@@ -17238,7 +17322,7 @@
                         <a:buNone/>
                       </a:pPr>
                       <a:r>
-                        <a:rPr lang="en-US" sz="580" dirty="0">
+                        <a:rPr lang="en-US" sz="580" b="1" dirty="0">
                           <a:solidFill>
                             <a:srgbClr val="000000"/>
                           </a:solidFill>
@@ -17246,7 +17330,7 @@
                           <a:ea typeface="Calibri" pitchFamily="34" charset="-122"/>
                           <a:cs typeface="Calibri" pitchFamily="34" charset="-120"/>
                         </a:rPr>
-                        <a:t>1,68%</a:t>
+                        <a:t>1.68%</a:t>
                       </a:r>
                       <a:endParaRPr lang="en-US" sz="580" dirty="0">
                         <a:latin typeface="Calibri" charset="0"/>
@@ -17340,7 +17424,27 @@
         <p:spPr>
           <a:xfrm>
             <a:off x="0" y="0"/>
-            <a:ext cx="2542032" cy="1325880"/>
+            <a:ext cx="2450592" cy="10689336"/>
+          </a:xfrm>
+          <a:prstGeom prst="rect">
+            <a:avLst/>
+          </a:prstGeom>
+          <a:solidFill>
+            <a:srgbClr val="FFFFFF"/>
+          </a:solidFill>
+          <a:ln/>
+        </p:spPr>
+      </p:sp>
+      <p:sp>
+        <p:nvSpPr>
+          <p:cNvPr id="3" name="Shape 1"/>
+          <p:cNvSpPr/>
+          <p:nvPr/>
+        </p:nvSpPr>
+        <p:spPr>
+          <a:xfrm>
+            <a:off x="0" y="0"/>
+            <a:ext cx="2450592" cy="1325880"/>
           </a:xfrm>
           <a:prstGeom prst="rect">
             <a:avLst/>
@@ -17353,14 +17457,14 @@
       </p:sp>
       <p:sp>
         <p:nvSpPr>
-          <p:cNvPr id="3" name="Text 1"/>
+          <p:cNvPr id="4" name="Text 2"/>
           <p:cNvSpPr/>
           <p:nvPr/>
         </p:nvSpPr>
         <p:spPr>
           <a:xfrm>
-            <a:off x="182880" y="1024128"/>
-            <a:ext cx="2194560" cy="182880"/>
+            <a:off x="118872" y="1024128"/>
+            <a:ext cx="2212848" cy="182880"/>
           </a:xfrm>
           <a:prstGeom prst="rect">
             <a:avLst/>
@@ -17376,7 +17480,7 @@
               <a:buNone/>
             </a:pPr>
             <a:r>
-              <a:rPr lang="en-US" sz="700" spc="500" kern="0" dirty="0">
+              <a:rPr lang="en-US" sz="700" spc="400" kern="0" dirty="0">
                 <a:solidFill>
                   <a:srgbClr val="AAAAAA"/>
                 </a:solidFill>
@@ -17392,13 +17496,13 @@
       </p:sp>
       <p:sp>
         <p:nvSpPr>
-          <p:cNvPr id="4" name="Shape 2"/>
+          <p:cNvPr id="5" name="Shape 3"/>
           <p:cNvSpPr/>
           <p:nvPr/>
         </p:nvSpPr>
         <p:spPr>
           <a:xfrm>
-            <a:off x="2560320" y="0"/>
+            <a:off x="2450592" y="0"/>
             <a:ext cx="0" cy="10689336"/>
           </a:xfrm>
           <a:prstGeom prst="line">
@@ -17407,7 +17511,7 @@
           <a:noFill/>
           <a:ln w="6350">
             <a:solidFill>
-              <a:srgbClr val="CCCCCC"/>
+              <a:srgbClr val="EEEEEE"/>
             </a:solidFill>
             <a:prstDash val="solid"/>
           </a:ln>
@@ -17415,14 +17519,200 @@
       </p:sp>
       <p:sp>
         <p:nvSpPr>
-          <p:cNvPr id="5" name="Text 3"/>
+          <p:cNvPr id="6" name="Text 4"/>
           <p:cNvSpPr/>
           <p:nvPr/>
         </p:nvSpPr>
         <p:spPr>
           <a:xfrm>
-            <a:off x="2697480" y="137160"/>
-            <a:ext cx="4636008" cy="182880"/>
+            <a:off x="118872" y="1463040"/>
+            <a:ext cx="2212848" cy="164592"/>
+          </a:xfrm>
+          <a:prstGeom prst="rect">
+            <a:avLst/>
+          </a:prstGeom>
+          <a:noFill/>
+          <a:ln/>
+        </p:spPr>
+        <p:txBody>
+          <a:bodyPr wrap="square" lIns="0" tIns="0" rIns="0" bIns="0" rtlCol="0" anchor="ctr"/>
+          <a:lstStyle/>
+          <a:p>
+            <a:pPr indent="0" marL="0">
+              <a:buNone/>
+            </a:pPr>
+            <a:r>
+              <a:rPr lang="en-US" sz="800" b="1" dirty="0">
+                <a:solidFill>
+                  <a:srgbClr val="000000"/>
+                </a:solidFill>
+                <a:latin typeface="Calibri" pitchFamily="34" charset="0"/>
+                <a:ea typeface="Calibri" pitchFamily="34" charset="-122"/>
+                <a:cs typeface="Calibri" pitchFamily="34" charset="-120"/>
+              </a:rPr>
+              <a:t>Composición por Moneda</a:t>
+            </a:r>
+            <a:endParaRPr lang="en-US" sz="800" dirty="0"/>
+          </a:p>
+        </p:txBody>
+      </p:sp>
+      <p:sp>
+        <p:nvSpPr>
+          <p:cNvPr id="7" name="Shape 5"/>
+          <p:cNvSpPr/>
+          <p:nvPr/>
+        </p:nvSpPr>
+        <p:spPr>
+          <a:xfrm>
+            <a:off x="118872" y="1645920"/>
+            <a:ext cx="2212848" cy="0"/>
+          </a:xfrm>
+          <a:prstGeom prst="line">
+            <a:avLst/>
+          </a:prstGeom>
+          <a:noFill/>
+          <a:ln w="12700">
+            <a:solidFill>
+              <a:srgbClr val="000000"/>
+            </a:solidFill>
+            <a:prstDash val="solid"/>
+          </a:ln>
+        </p:spPr>
+      </p:sp>
+      <p:sp>
+        <p:nvSpPr>
+          <p:cNvPr id="8" name="Shape 6"/>
+          <p:cNvSpPr/>
+          <p:nvPr/>
+        </p:nvSpPr>
+        <p:spPr>
+          <a:xfrm>
+            <a:off x="118872" y="1810512"/>
+            <a:ext cx="2212848" cy="0"/>
+          </a:xfrm>
+          <a:prstGeom prst="line">
+            <a:avLst/>
+          </a:prstGeom>
+          <a:noFill/>
+          <a:ln w="6350">
+            <a:solidFill>
+              <a:srgbClr val="DDDDDD"/>
+            </a:solidFill>
+            <a:prstDash val="solid"/>
+          </a:ln>
+        </p:spPr>
+      </p:sp>
+      <p:sp>
+        <p:nvSpPr>
+          <p:cNvPr id="9" name="Text 7"/>
+          <p:cNvSpPr/>
+          <p:nvPr/>
+        </p:nvSpPr>
+        <p:spPr>
+          <a:xfrm>
+            <a:off x="118872" y="1901952"/>
+            <a:ext cx="2212848" cy="164592"/>
+          </a:xfrm>
+          <a:prstGeom prst="rect">
+            <a:avLst/>
+          </a:prstGeom>
+          <a:noFill/>
+          <a:ln/>
+        </p:spPr>
+        <p:txBody>
+          <a:bodyPr wrap="square" lIns="0" tIns="0" rIns="0" bIns="0" rtlCol="0" anchor="ctr"/>
+          <a:lstStyle/>
+          <a:p>
+            <a:pPr indent="0" marL="0">
+              <a:buNone/>
+            </a:pPr>
+            <a:r>
+              <a:rPr lang="en-US" sz="800" b="1" dirty="0">
+                <a:solidFill>
+                  <a:srgbClr val="000000"/>
+                </a:solidFill>
+                <a:latin typeface="Calibri" pitchFamily="34" charset="0"/>
+                <a:ea typeface="Calibri" pitchFamily="34" charset="-122"/>
+                <a:cs typeface="Calibri" pitchFamily="34" charset="-120"/>
+              </a:rPr>
+              <a:t>Composición por Instrumento</a:t>
+            </a:r>
+            <a:endParaRPr lang="en-US" sz="800" dirty="0"/>
+          </a:p>
+        </p:txBody>
+      </p:sp>
+      <p:sp>
+        <p:nvSpPr>
+          <p:cNvPr id="10" name="Shape 8"/>
+          <p:cNvSpPr/>
+          <p:nvPr/>
+        </p:nvSpPr>
+        <p:spPr>
+          <a:xfrm>
+            <a:off x="118872" y="2084832"/>
+            <a:ext cx="2212848" cy="0"/>
+          </a:xfrm>
+          <a:prstGeom prst="line">
+            <a:avLst/>
+          </a:prstGeom>
+          <a:noFill/>
+          <a:ln w="12700">
+            <a:solidFill>
+              <a:srgbClr val="000000"/>
+            </a:solidFill>
+            <a:prstDash val="solid"/>
+          </a:ln>
+        </p:spPr>
+      </p:sp>
+      <p:sp>
+        <p:nvSpPr>
+          <p:cNvPr id="11" name="Text 9"/>
+          <p:cNvSpPr/>
+          <p:nvPr/>
+        </p:nvSpPr>
+        <p:spPr>
+          <a:xfrm>
+            <a:off x="118872" y="2157984"/>
+            <a:ext cx="1371600" cy="164592"/>
+          </a:xfrm>
+          <a:prstGeom prst="rect">
+            <a:avLst/>
+          </a:prstGeom>
+          <a:noFill/>
+          <a:ln/>
+        </p:spPr>
+        <p:txBody>
+          <a:bodyPr wrap="square" lIns="0" tIns="0" rIns="0" bIns="0" rtlCol="0" anchor="ctr"/>
+          <a:lstStyle/>
+          <a:p>
+            <a:pPr indent="0" marL="0">
+              <a:buNone/>
+            </a:pPr>
+            <a:r>
+              <a:rPr lang="en-US" sz="700" dirty="0">
+                <a:solidFill>
+                  <a:srgbClr val="000000"/>
+                </a:solidFill>
+                <a:latin typeface="Calibri" pitchFamily="34" charset="0"/>
+                <a:ea typeface="Calibri" pitchFamily="34" charset="-122"/>
+                <a:cs typeface="Calibri" pitchFamily="34" charset="-120"/>
+              </a:rPr>
+              <a:t>FMX</a:t>
+            </a:r>
+            <a:endParaRPr lang="en-US" sz="700" dirty="0"/>
+          </a:p>
+        </p:txBody>
+      </p:sp>
+      <p:sp>
+        <p:nvSpPr>
+          <p:cNvPr id="12" name="Text 10"/>
+          <p:cNvSpPr/>
+          <p:nvPr/>
+        </p:nvSpPr>
+        <p:spPr>
+          <a:xfrm>
+            <a:off x="1490472" y="2157984"/>
+            <a:ext cx="841248" cy="164592"/>
           </a:xfrm>
           <a:prstGeom prst="rect">
             <a:avLst/>
@@ -17438,30 +17728,53 @@
               <a:buNone/>
             </a:pPr>
             <a:r>
-              <a:rPr lang="en-US" sz="750" dirty="0">
+              <a:rPr lang="en-US" sz="700" b="1" dirty="0">
                 <a:solidFill>
-                  <a:srgbClr val="666666"/>
+                  <a:srgbClr val="000000"/>
                 </a:solidFill>
                 <a:latin typeface="Calibri" pitchFamily="34" charset="0"/>
                 <a:ea typeface="Calibri" pitchFamily="34" charset="-122"/>
                 <a:cs typeface="Calibri" pitchFamily="34" charset="-120"/>
               </a:rPr>
-              <a:t>VanTrust Capital</a:t>
+              <a:t>100,00%</a:t>
             </a:r>
-            <a:endParaRPr lang="en-US" sz="750" dirty="0"/>
+            <a:endParaRPr lang="en-US" sz="700" dirty="0"/>
           </a:p>
         </p:txBody>
       </p:sp>
       <p:sp>
         <p:nvSpPr>
-          <p:cNvPr id="6" name="Text 4"/>
+          <p:cNvPr id="13" name="Shape 11"/>
           <p:cNvSpPr/>
           <p:nvPr/>
         </p:nvSpPr>
         <p:spPr>
           <a:xfrm>
-            <a:off x="228600" y="1463040"/>
-            <a:ext cx="2240280" cy="173736"/>
+            <a:off x="118872" y="2423160"/>
+            <a:ext cx="2212848" cy="0"/>
+          </a:xfrm>
+          <a:prstGeom prst="line">
+            <a:avLst/>
+          </a:prstGeom>
+          <a:noFill/>
+          <a:ln w="6350">
+            <a:solidFill>
+              <a:srgbClr val="DDDDDD"/>
+            </a:solidFill>
+            <a:prstDash val="solid"/>
+          </a:ln>
+        </p:spPr>
+      </p:sp>
+      <p:sp>
+        <p:nvSpPr>
+          <p:cNvPr id="14" name="Text 12"/>
+          <p:cNvSpPr/>
+          <p:nvPr/>
+        </p:nvSpPr>
+        <p:spPr>
+          <a:xfrm>
+            <a:off x="118872" y="2514600"/>
+            <a:ext cx="2212848" cy="164592"/>
           </a:xfrm>
           <a:prstGeom prst="rect">
             <a:avLst/>
@@ -17477,7 +17790,7 @@
               <a:buNone/>
             </a:pPr>
             <a:r>
-              <a:rPr lang="en-US" sz="850" b="1" dirty="0">
+              <a:rPr lang="en-US" sz="800" b="1" dirty="0">
                 <a:solidFill>
                   <a:srgbClr val="000000"/>
                 </a:solidFill>
@@ -17485,30 +17798,30 @@
                 <a:ea typeface="Calibri" pitchFamily="34" charset="-122"/>
                 <a:cs typeface="Calibri" pitchFamily="34" charset="-120"/>
               </a:rPr>
-              <a:t>Composición por Moneda</a:t>
+              <a:t>Composición por Duración</a:t>
             </a:r>
-            <a:endParaRPr lang="en-US" sz="850" dirty="0"/>
+            <a:endParaRPr lang="en-US" sz="800" dirty="0"/>
           </a:p>
         </p:txBody>
       </p:sp>
       <p:sp>
         <p:nvSpPr>
-          <p:cNvPr id="7" name="Shape 5"/>
+          <p:cNvPr id="15" name="Shape 13"/>
           <p:cNvSpPr/>
           <p:nvPr/>
         </p:nvSpPr>
         <p:spPr>
           <a:xfrm>
-            <a:off x="228600" y="1664208"/>
-            <a:ext cx="2240280" cy="0"/>
+            <a:off x="118872" y="2697480"/>
+            <a:ext cx="2212848" cy="0"/>
           </a:xfrm>
           <a:prstGeom prst="line">
             <a:avLst/>
           </a:prstGeom>
           <a:noFill/>
-          <a:ln w="5080">
+          <a:ln w="12700">
             <a:solidFill>
-              <a:srgbClr val="CCCCCC"/>
+              <a:srgbClr val="000000"/>
             </a:solidFill>
             <a:prstDash val="solid"/>
           </a:ln>
@@ -17516,76 +17829,14 @@
       </p:sp>
       <p:sp>
         <p:nvSpPr>
-          <p:cNvPr id="8" name="Shape 6"/>
+          <p:cNvPr id="16" name="Text 14"/>
           <p:cNvSpPr/>
           <p:nvPr/>
         </p:nvSpPr>
         <p:spPr>
           <a:xfrm>
-            <a:off x="228600" y="1865376"/>
-            <a:ext cx="2240280" cy="0"/>
-          </a:xfrm>
-          <a:prstGeom prst="line">
-            <a:avLst/>
-          </a:prstGeom>
-          <a:noFill/>
-          <a:ln w="5080">
-            <a:solidFill>
-              <a:srgbClr val="CCCCCC"/>
-            </a:solidFill>
-            <a:prstDash val="solid"/>
-          </a:ln>
-        </p:spPr>
-      </p:sp>
-      <p:sp>
-        <p:nvSpPr>
-          <p:cNvPr id="9" name="Text 7"/>
-          <p:cNvSpPr/>
-          <p:nvPr/>
-        </p:nvSpPr>
-        <p:spPr>
-          <a:xfrm>
-            <a:off x="228600" y="1956816"/>
-            <a:ext cx="2240280" cy="173736"/>
-          </a:xfrm>
-          <a:prstGeom prst="rect">
-            <a:avLst/>
-          </a:prstGeom>
-          <a:noFill/>
-          <a:ln/>
-        </p:spPr>
-        <p:txBody>
-          <a:bodyPr wrap="square" lIns="0" tIns="0" rIns="0" bIns="0" rtlCol="0" anchor="ctr"/>
-          <a:lstStyle/>
-          <a:p>
-            <a:pPr indent="0" marL="0">
-              <a:buNone/>
-            </a:pPr>
-            <a:r>
-              <a:rPr lang="en-US" sz="850" b="1" dirty="0">
-                <a:solidFill>
-                  <a:srgbClr val="000000"/>
-                </a:solidFill>
-                <a:latin typeface="Calibri" pitchFamily="34" charset="0"/>
-                <a:ea typeface="Calibri" pitchFamily="34" charset="-122"/>
-                <a:cs typeface="Calibri" pitchFamily="34" charset="-120"/>
-              </a:rPr>
-              <a:t>Composición General por Instrumentos Financieros</a:t>
-            </a:r>
-            <a:endParaRPr lang="en-US" sz="850" dirty="0"/>
-          </a:p>
-        </p:txBody>
-      </p:sp>
-      <p:sp>
-        <p:nvSpPr>
-          <p:cNvPr id="10" name="Text 8"/>
-          <p:cNvSpPr/>
-          <p:nvPr/>
-        </p:nvSpPr>
-        <p:spPr>
-          <a:xfrm>
-            <a:off x="228600" y="2157984"/>
-            <a:ext cx="1417320" cy="164592"/>
+            <a:off x="118872" y="2770632"/>
+            <a:ext cx="1371600" cy="182880"/>
           </a:xfrm>
           <a:prstGeom prst="rect">
             <a:avLst/>
@@ -17609,7 +17860,7 @@
                 <a:ea typeface="Calibri" pitchFamily="34" charset="-122"/>
                 <a:cs typeface="Calibri" pitchFamily="34" charset="-120"/>
               </a:rPr>
-              <a:t>FMX</a:t>
+              <a:t>Hasta 30 días</a:t>
             </a:r>
             <a:endParaRPr lang="en-US" sz="750" dirty="0"/>
           </a:p>
@@ -17617,14 +17868,14 @@
       </p:sp>
       <p:sp>
         <p:nvSpPr>
-          <p:cNvPr id="11" name="Text 9"/>
+          <p:cNvPr id="17" name="Text 15"/>
           <p:cNvSpPr/>
           <p:nvPr/>
         </p:nvSpPr>
         <p:spPr>
           <a:xfrm>
-            <a:off x="1645920" y="2157984"/>
-            <a:ext cx="822960" cy="164592"/>
+            <a:off x="1490472" y="2770632"/>
+            <a:ext cx="841248" cy="182880"/>
           </a:xfrm>
           <a:prstGeom prst="rect">
             <a:avLst/>
@@ -17640,7 +17891,7 @@
               <a:buNone/>
             </a:pPr>
             <a:r>
-              <a:rPr lang="en-US" sz="750" dirty="0">
+              <a:rPr lang="en-US" sz="750" b="1" dirty="0">
                 <a:solidFill>
                   <a:srgbClr val="000000"/>
                 </a:solidFill>
@@ -17648,1778 +17899,22 @@
                 <a:ea typeface="Calibri" pitchFamily="34" charset="-122"/>
                 <a:cs typeface="Calibri" pitchFamily="34" charset="-120"/>
               </a:rPr>
-              <a:t>100,00%</a:t>
+              <a:t>63,16%</a:t>
             </a:r>
             <a:endParaRPr lang="en-US" sz="750" dirty="0"/>
           </a:p>
         </p:txBody>
       </p:sp>
-      <p:graphicFrame>
-        <p:nvGraphicFramePr>
-          <p:cNvPr id="3" name="Table 0"/>
-          <p:cNvGraphicFramePr>
-            <a:graphicFrameLocks noGrp="1"/>
-          </p:cNvGraphicFramePr>
-          <p:nvPr>
-            <p:extLst>
-              <p:ext uri="{D42A27DB-BD31-4B8C-83A1-F6EECF244321}">
-                <p14:modId xmlns:p14="http://schemas.microsoft.com/office/powerpoint/2010/main" val="1579011935"/>
-              </p:ext>
-            </p:extLst>
-          </p:nvPr>
-        </p:nvGraphicFramePr>
-        <p:xfrm>
-          <a:off x="228600" y="2386584"/>
-          <a:ext cx="2240280" cy="914400"/>
-        </p:xfrm>
-        <a:graphic>
-          <a:graphicData uri="http://schemas.openxmlformats.org/drawingml/2006/table">
-            <a:tbl>
-              <a:tblPr/>
-              <a:tblGrid>
-                <a:gridCol w="1207008"/>
-                <a:gridCol w="502920"/>
-                <a:gridCol w="530352"/>
-              </a:tblGrid>
-              <a:tr h="173736">
-                <a:tc>
-                  <a:txBody>
-                    <a:bodyPr/>
-                    <a:lstStyle/>
-                    <a:p>
-                      <a:pPr indent="0" marL="0">
-                        <a:buNone/>
-                      </a:pPr>
-                      <a:endParaRPr lang="en-US" sz="700" dirty="0"/>
-                    </a:p>
-                  </a:txBody>
-                  <a:tcPr marL="91440" marR="91440" marT="45720" marB="45720">
-                    <a:lnL w="3810" cap="flat" cmpd="sng" algn="ctr">
-                      <a:solidFill>
-                        <a:srgbClr val="CCCCCC"/>
-                      </a:solidFill>
-                      <a:prstDash val="solid"/>
-                      <a:round/>
-                      <a:headEnd type="none" w="med" len="med"/>
-                      <a:tailEnd type="none" w="med" len="med"/>
-                    </a:lnL>
-                    <a:lnR w="3810" cap="flat" cmpd="sng" algn="ctr">
-                      <a:solidFill>
-                        <a:srgbClr val="CCCCCC"/>
-                      </a:solidFill>
-                      <a:prstDash val="solid"/>
-                      <a:round/>
-                      <a:headEnd type="none" w="med" len="med"/>
-                      <a:tailEnd type="none" w="med" len="med"/>
-                    </a:lnR>
-                    <a:lnT w="3810" cap="flat" cmpd="sng" algn="ctr">
-                      <a:solidFill>
-                        <a:srgbClr val="CCCCCC"/>
-                      </a:solidFill>
-                      <a:prstDash val="solid"/>
-                      <a:round/>
-                      <a:headEnd type="none" w="med" len="med"/>
-                      <a:tailEnd type="none" w="med" len="med"/>
-                    </a:lnT>
-                    <a:lnB w="3810" cap="flat" cmpd="sng" algn="ctr">
-                      <a:solidFill>
-                        <a:srgbClr val="CCCCCC"/>
-                      </a:solidFill>
-                      <a:prstDash val="solid"/>
-                      <a:round/>
-                      <a:headEnd type="none" w="med" len="med"/>
-                      <a:tailEnd type="none" w="med" len="med"/>
-                    </a:lnB>
-                  </a:tcPr>
-                </a:tc>
-                <a:tc gridSpan="2">
-                  <a:txBody>
-                    <a:bodyPr/>
-                    <a:lstStyle/>
-                    <a:p>
-                      <a:pPr algn="ctr" indent="0" marL="0">
-                        <a:buNone/>
-                      </a:pPr>
-                      <a:r>
-                        <a:rPr lang="en-US" sz="700" b="1" dirty="0">
-                          <a:solidFill>
-                            <a:srgbClr val="000000"/>
-                          </a:solidFill>
-                          <a:latin typeface="Calibri" pitchFamily="34" charset="0"/>
-                          <a:ea typeface="Calibri" pitchFamily="34" charset="-122"/>
-                          <a:cs typeface="Calibri" pitchFamily="34" charset="-120"/>
-                        </a:rPr>
-                        <a:t>Límites de Inversión</a:t>
-                      </a:r>
-                      <a:endParaRPr lang="en-US" sz="700" dirty="0">
-                        <a:latin typeface="Calibri" charset="0"/>
-                        <a:ea typeface="Calibri" charset="0"/>
-                        <a:cs typeface="Calibri" charset="0"/>
-                      </a:endParaRPr>
-                    </a:p>
-                  </a:txBody>
-                  <a:tcPr marL="91440" marR="91440" marT="45720" marB="45720">
-                    <a:lnL w="3810" cap="flat" cmpd="sng" algn="ctr">
-                      <a:solidFill>
-                        <a:srgbClr val="CCCCCC"/>
-                      </a:solidFill>
-                      <a:prstDash val="solid"/>
-                      <a:round/>
-                      <a:headEnd type="none" w="med" len="med"/>
-                      <a:tailEnd type="none" w="med" len="med"/>
-                    </a:lnL>
-                    <a:lnR w="3810" cap="flat" cmpd="sng" algn="ctr">
-                      <a:solidFill>
-                        <a:srgbClr val="CCCCCC"/>
-                      </a:solidFill>
-                      <a:prstDash val="solid"/>
-                      <a:round/>
-                      <a:headEnd type="none" w="med" len="med"/>
-                      <a:tailEnd type="none" w="med" len="med"/>
-                    </a:lnR>
-                    <a:lnT w="3810" cap="flat" cmpd="sng" algn="ctr">
-                      <a:solidFill>
-                        <a:srgbClr val="CCCCCC"/>
-                      </a:solidFill>
-                      <a:prstDash val="solid"/>
-                      <a:round/>
-                      <a:headEnd type="none" w="med" len="med"/>
-                      <a:tailEnd type="none" w="med" len="med"/>
-                    </a:lnT>
-                    <a:lnB w="3810" cap="flat" cmpd="sng" algn="ctr">
-                      <a:solidFill>
-                        <a:srgbClr val="CCCCCC"/>
-                      </a:solidFill>
-                      <a:prstDash val="solid"/>
-                      <a:round/>
-                      <a:headEnd type="none" w="med" len="med"/>
-                      <a:tailEnd type="none" w="med" len="med"/>
-                    </a:lnB>
-                  </a:tcPr>
-                </a:tc>
-                <a:tc hMerge="1">
-                  <a:tcPr/>
-                </a:tc>
-              </a:tr>
-              <a:tr h="173736">
-                <a:tc>
-                  <a:txBody>
-                    <a:bodyPr/>
-                    <a:lstStyle/>
-                    <a:p>
-                      <a:pPr indent="0" marL="0">
-                        <a:buNone/>
-                      </a:pPr>
-                      <a:endParaRPr lang="en-US" sz="700" dirty="0"/>
-                    </a:p>
-                  </a:txBody>
-                  <a:tcPr marL="91440" marR="91440" marT="45720" marB="45720">
-                    <a:lnL w="3810" cap="flat" cmpd="sng" algn="ctr">
-                      <a:solidFill>
-                        <a:srgbClr val="CCCCCC"/>
-                      </a:solidFill>
-                      <a:prstDash val="solid"/>
-                      <a:round/>
-                      <a:headEnd type="none" w="med" len="med"/>
-                      <a:tailEnd type="none" w="med" len="med"/>
-                    </a:lnL>
-                    <a:lnR w="3810" cap="flat" cmpd="sng" algn="ctr">
-                      <a:solidFill>
-                        <a:srgbClr val="CCCCCC"/>
-                      </a:solidFill>
-                      <a:prstDash val="solid"/>
-                      <a:round/>
-                      <a:headEnd type="none" w="med" len="med"/>
-                      <a:tailEnd type="none" w="med" len="med"/>
-                    </a:lnR>
-                    <a:lnT w="3810" cap="flat" cmpd="sng" algn="ctr">
-                      <a:solidFill>
-                        <a:srgbClr val="CCCCCC"/>
-                      </a:solidFill>
-                      <a:prstDash val="solid"/>
-                      <a:round/>
-                      <a:headEnd type="none" w="med" len="med"/>
-                      <a:tailEnd type="none" w="med" len="med"/>
-                    </a:lnT>
-                    <a:lnB w="3810" cap="flat" cmpd="sng" algn="ctr">
-                      <a:solidFill>
-                        <a:srgbClr val="CCCCCC"/>
-                      </a:solidFill>
-                      <a:prstDash val="solid"/>
-                      <a:round/>
-                      <a:headEnd type="none" w="med" len="med"/>
-                      <a:tailEnd type="none" w="med" len="med"/>
-                    </a:lnB>
-                  </a:tcPr>
-                </a:tc>
-                <a:tc>
-                  <a:txBody>
-                    <a:bodyPr/>
-                    <a:lstStyle/>
-                    <a:p>
-                      <a:pPr algn="ctr" indent="0" marL="0">
-                        <a:buNone/>
-                      </a:pPr>
-                      <a:r>
-                        <a:rPr lang="en-US" sz="700" b="1" dirty="0">
-                          <a:solidFill>
-                            <a:srgbClr val="000000"/>
-                          </a:solidFill>
-                          <a:latin typeface="Calibri" pitchFamily="34" charset="0"/>
-                          <a:ea typeface="Calibri" pitchFamily="34" charset="-122"/>
-                          <a:cs typeface="Calibri" pitchFamily="34" charset="-120"/>
-                        </a:rPr>
-                        <a:t>Mínimo</a:t>
-                      </a:r>
-                      <a:endParaRPr lang="en-US" sz="700" dirty="0">
-                        <a:latin typeface="Calibri" charset="0"/>
-                        <a:ea typeface="Calibri" charset="0"/>
-                        <a:cs typeface="Calibri" charset="0"/>
-                      </a:endParaRPr>
-                    </a:p>
-                  </a:txBody>
-                  <a:tcPr marL="91440" marR="91440" marT="45720" marB="45720">
-                    <a:lnL w="3810" cap="flat" cmpd="sng" algn="ctr">
-                      <a:solidFill>
-                        <a:srgbClr val="CCCCCC"/>
-                      </a:solidFill>
-                      <a:prstDash val="solid"/>
-                      <a:round/>
-                      <a:headEnd type="none" w="med" len="med"/>
-                      <a:tailEnd type="none" w="med" len="med"/>
-                    </a:lnL>
-                    <a:lnR w="3810" cap="flat" cmpd="sng" algn="ctr">
-                      <a:solidFill>
-                        <a:srgbClr val="CCCCCC"/>
-                      </a:solidFill>
-                      <a:prstDash val="solid"/>
-                      <a:round/>
-                      <a:headEnd type="none" w="med" len="med"/>
-                      <a:tailEnd type="none" w="med" len="med"/>
-                    </a:lnR>
-                    <a:lnT w="3810" cap="flat" cmpd="sng" algn="ctr">
-                      <a:solidFill>
-                        <a:srgbClr val="CCCCCC"/>
-                      </a:solidFill>
-                      <a:prstDash val="solid"/>
-                      <a:round/>
-                      <a:headEnd type="none" w="med" len="med"/>
-                      <a:tailEnd type="none" w="med" len="med"/>
-                    </a:lnT>
-                    <a:lnB w="3810" cap="flat" cmpd="sng" algn="ctr">
-                      <a:solidFill>
-                        <a:srgbClr val="CCCCCC"/>
-                      </a:solidFill>
-                      <a:prstDash val="solid"/>
-                      <a:round/>
-                      <a:headEnd type="none" w="med" len="med"/>
-                      <a:tailEnd type="none" w="med" len="med"/>
-                    </a:lnB>
-                  </a:tcPr>
-                </a:tc>
-                <a:tc>
-                  <a:txBody>
-                    <a:bodyPr/>
-                    <a:lstStyle/>
-                    <a:p>
-                      <a:pPr algn="ctr" indent="0" marL="0">
-                        <a:buNone/>
-                      </a:pPr>
-                      <a:r>
-                        <a:rPr lang="en-US" sz="700" b="1" dirty="0">
-                          <a:solidFill>
-                            <a:srgbClr val="000000"/>
-                          </a:solidFill>
-                          <a:latin typeface="Calibri" pitchFamily="34" charset="0"/>
-                          <a:ea typeface="Calibri" pitchFamily="34" charset="-122"/>
-                          <a:cs typeface="Calibri" pitchFamily="34" charset="-120"/>
-                        </a:rPr>
-                        <a:t>Máximo</a:t>
-                      </a:r>
-                      <a:endParaRPr lang="en-US" sz="700" dirty="0">
-                        <a:latin typeface="Calibri" charset="0"/>
-                        <a:ea typeface="Calibri" charset="0"/>
-                        <a:cs typeface="Calibri" charset="0"/>
-                      </a:endParaRPr>
-                    </a:p>
-                  </a:txBody>
-                  <a:tcPr marL="91440" marR="91440" marT="45720" marB="45720">
-                    <a:lnL w="3810" cap="flat" cmpd="sng" algn="ctr">
-                      <a:solidFill>
-                        <a:srgbClr val="CCCCCC"/>
-                      </a:solidFill>
-                      <a:prstDash val="solid"/>
-                      <a:round/>
-                      <a:headEnd type="none" w="med" len="med"/>
-                      <a:tailEnd type="none" w="med" len="med"/>
-                    </a:lnL>
-                    <a:lnR w="3810" cap="flat" cmpd="sng" algn="ctr">
-                      <a:solidFill>
-                        <a:srgbClr val="CCCCCC"/>
-                      </a:solidFill>
-                      <a:prstDash val="solid"/>
-                      <a:round/>
-                      <a:headEnd type="none" w="med" len="med"/>
-                      <a:tailEnd type="none" w="med" len="med"/>
-                    </a:lnR>
-                    <a:lnT w="3810" cap="flat" cmpd="sng" algn="ctr">
-                      <a:solidFill>
-                        <a:srgbClr val="CCCCCC"/>
-                      </a:solidFill>
-                      <a:prstDash val="solid"/>
-                      <a:round/>
-                      <a:headEnd type="none" w="med" len="med"/>
-                      <a:tailEnd type="none" w="med" len="med"/>
-                    </a:lnT>
-                    <a:lnB w="3810" cap="flat" cmpd="sng" algn="ctr">
-                      <a:solidFill>
-                        <a:srgbClr val="CCCCCC"/>
-                      </a:solidFill>
-                      <a:prstDash val="solid"/>
-                      <a:round/>
-                      <a:headEnd type="none" w="med" len="med"/>
-                      <a:tailEnd type="none" w="med" len="med"/>
-                    </a:lnB>
-                  </a:tcPr>
-                </a:tc>
-              </a:tr>
-              <a:tr h="173736">
-                <a:tc>
-                  <a:txBody>
-                    <a:bodyPr/>
-                    <a:lstStyle/>
-                    <a:p>
-                      <a:pPr indent="0" marL="0">
-                        <a:buNone/>
-                      </a:pPr>
-                      <a:r>
-                        <a:rPr lang="en-US" sz="700" dirty="0">
-                          <a:solidFill>
-                            <a:srgbClr val="000000"/>
-                          </a:solidFill>
-                          <a:latin typeface="Calibri" pitchFamily="34" charset="0"/>
-                          <a:ea typeface="Calibri" pitchFamily="34" charset="-122"/>
-                          <a:cs typeface="Calibri" pitchFamily="34" charset="-120"/>
-                        </a:rPr>
-                        <a:t>Bonos</a:t>
-                      </a:r>
-                      <a:endParaRPr lang="en-US" sz="700" dirty="0">
-                        <a:latin typeface="Calibri" charset="0"/>
-                        <a:ea typeface="Calibri" charset="0"/>
-                        <a:cs typeface="Calibri" charset="0"/>
-                      </a:endParaRPr>
-                    </a:p>
-                  </a:txBody>
-                  <a:tcPr marL="91440" marR="91440" marT="45720" marB="45720">
-                    <a:lnL w="3810" cap="flat" cmpd="sng" algn="ctr">
-                      <a:solidFill>
-                        <a:srgbClr val="CCCCCC"/>
-                      </a:solidFill>
-                      <a:prstDash val="solid"/>
-                      <a:round/>
-                      <a:headEnd type="none" w="med" len="med"/>
-                      <a:tailEnd type="none" w="med" len="med"/>
-                    </a:lnL>
-                    <a:lnR w="3810" cap="flat" cmpd="sng" algn="ctr">
-                      <a:solidFill>
-                        <a:srgbClr val="CCCCCC"/>
-                      </a:solidFill>
-                      <a:prstDash val="solid"/>
-                      <a:round/>
-                      <a:headEnd type="none" w="med" len="med"/>
-                      <a:tailEnd type="none" w="med" len="med"/>
-                    </a:lnR>
-                    <a:lnT w="3810" cap="flat" cmpd="sng" algn="ctr">
-                      <a:solidFill>
-                        <a:srgbClr val="CCCCCC"/>
-                      </a:solidFill>
-                      <a:prstDash val="solid"/>
-                      <a:round/>
-                      <a:headEnd type="none" w="med" len="med"/>
-                      <a:tailEnd type="none" w="med" len="med"/>
-                    </a:lnT>
-                    <a:lnB w="3810" cap="flat" cmpd="sng" algn="ctr">
-                      <a:solidFill>
-                        <a:srgbClr val="CCCCCC"/>
-                      </a:solidFill>
-                      <a:prstDash val="solid"/>
-                      <a:round/>
-                      <a:headEnd type="none" w="med" len="med"/>
-                      <a:tailEnd type="none" w="med" len="med"/>
-                    </a:lnB>
-                  </a:tcPr>
-                </a:tc>
-                <a:tc>
-                  <a:txBody>
-                    <a:bodyPr/>
-                    <a:lstStyle/>
-                    <a:p>
-                      <a:pPr algn="ctr" indent="0" marL="0">
-                        <a:buNone/>
-                      </a:pPr>
-                      <a:r>
-                        <a:rPr lang="en-US" sz="700" dirty="0">
-                          <a:solidFill>
-                            <a:srgbClr val="000000"/>
-                          </a:solidFill>
-                          <a:latin typeface="Calibri" pitchFamily="34" charset="0"/>
-                          <a:ea typeface="Calibri" pitchFamily="34" charset="-122"/>
-                          <a:cs typeface="Calibri" pitchFamily="34" charset="-120"/>
-                        </a:rPr>
-                        <a:t>0%</a:t>
-                      </a:r>
-                      <a:endParaRPr lang="en-US" sz="700" dirty="0">
-                        <a:latin typeface="Calibri" charset="0"/>
-                        <a:ea typeface="Calibri" charset="0"/>
-                        <a:cs typeface="Calibri" charset="0"/>
-                      </a:endParaRPr>
-                    </a:p>
-                  </a:txBody>
-                  <a:tcPr marL="91440" marR="91440" marT="45720" marB="45720">
-                    <a:lnL w="3810" cap="flat" cmpd="sng" algn="ctr">
-                      <a:solidFill>
-                        <a:srgbClr val="CCCCCC"/>
-                      </a:solidFill>
-                      <a:prstDash val="solid"/>
-                      <a:round/>
-                      <a:headEnd type="none" w="med" len="med"/>
-                      <a:tailEnd type="none" w="med" len="med"/>
-                    </a:lnL>
-                    <a:lnR w="3810" cap="flat" cmpd="sng" algn="ctr">
-                      <a:solidFill>
-                        <a:srgbClr val="CCCCCC"/>
-                      </a:solidFill>
-                      <a:prstDash val="solid"/>
-                      <a:round/>
-                      <a:headEnd type="none" w="med" len="med"/>
-                      <a:tailEnd type="none" w="med" len="med"/>
-                    </a:lnR>
-                    <a:lnT w="3810" cap="flat" cmpd="sng" algn="ctr">
-                      <a:solidFill>
-                        <a:srgbClr val="CCCCCC"/>
-                      </a:solidFill>
-                      <a:prstDash val="solid"/>
-                      <a:round/>
-                      <a:headEnd type="none" w="med" len="med"/>
-                      <a:tailEnd type="none" w="med" len="med"/>
-                    </a:lnT>
-                    <a:lnB w="3810" cap="flat" cmpd="sng" algn="ctr">
-                      <a:solidFill>
-                        <a:srgbClr val="CCCCCC"/>
-                      </a:solidFill>
-                      <a:prstDash val="solid"/>
-                      <a:round/>
-                      <a:headEnd type="none" w="med" len="med"/>
-                      <a:tailEnd type="none" w="med" len="med"/>
-                    </a:lnB>
-                  </a:tcPr>
-                </a:tc>
-                <a:tc>
-                  <a:txBody>
-                    <a:bodyPr/>
-                    <a:lstStyle/>
-                    <a:p>
-                      <a:pPr algn="ctr" indent="0" marL="0">
-                        <a:buNone/>
-                      </a:pPr>
-                      <a:r>
-                        <a:rPr lang="en-US" sz="700" dirty="0">
-                          <a:solidFill>
-                            <a:srgbClr val="000000"/>
-                          </a:solidFill>
-                          <a:latin typeface="Calibri" pitchFamily="34" charset="0"/>
-                          <a:ea typeface="Calibri" pitchFamily="34" charset="-122"/>
-                          <a:cs typeface="Calibri" pitchFamily="34" charset="-120"/>
-                        </a:rPr>
-                        <a:t>25%</a:t>
-                      </a:r>
-                      <a:endParaRPr lang="en-US" sz="700" dirty="0">
-                        <a:latin typeface="Calibri" charset="0"/>
-                        <a:ea typeface="Calibri" charset="0"/>
-                        <a:cs typeface="Calibri" charset="0"/>
-                      </a:endParaRPr>
-                    </a:p>
-                  </a:txBody>
-                  <a:tcPr marL="91440" marR="91440" marT="45720" marB="45720">
-                    <a:lnL w="3810" cap="flat" cmpd="sng" algn="ctr">
-                      <a:solidFill>
-                        <a:srgbClr val="CCCCCC"/>
-                      </a:solidFill>
-                      <a:prstDash val="solid"/>
-                      <a:round/>
-                      <a:headEnd type="none" w="med" len="med"/>
-                      <a:tailEnd type="none" w="med" len="med"/>
-                    </a:lnL>
-                    <a:lnR w="3810" cap="flat" cmpd="sng" algn="ctr">
-                      <a:solidFill>
-                        <a:srgbClr val="CCCCCC"/>
-                      </a:solidFill>
-                      <a:prstDash val="solid"/>
-                      <a:round/>
-                      <a:headEnd type="none" w="med" len="med"/>
-                      <a:tailEnd type="none" w="med" len="med"/>
-                    </a:lnR>
-                    <a:lnT w="3810" cap="flat" cmpd="sng" algn="ctr">
-                      <a:solidFill>
-                        <a:srgbClr val="CCCCCC"/>
-                      </a:solidFill>
-                      <a:prstDash val="solid"/>
-                      <a:round/>
-                      <a:headEnd type="none" w="med" len="med"/>
-                      <a:tailEnd type="none" w="med" len="med"/>
-                    </a:lnT>
-                    <a:lnB w="3810" cap="flat" cmpd="sng" algn="ctr">
-                      <a:solidFill>
-                        <a:srgbClr val="CCCCCC"/>
-                      </a:solidFill>
-                      <a:prstDash val="solid"/>
-                      <a:round/>
-                      <a:headEnd type="none" w="med" len="med"/>
-                      <a:tailEnd type="none" w="med" len="med"/>
-                    </a:lnB>
-                  </a:tcPr>
-                </a:tc>
-              </a:tr>
-              <a:tr h="173736">
-                <a:tc>
-                  <a:txBody>
-                    <a:bodyPr/>
-                    <a:lstStyle/>
-                    <a:p>
-                      <a:pPr indent="0" marL="0">
-                        <a:buNone/>
-                      </a:pPr>
-                      <a:r>
-                        <a:rPr lang="en-US" sz="700" dirty="0">
-                          <a:solidFill>
-                            <a:srgbClr val="000000"/>
-                          </a:solidFill>
-                          <a:latin typeface="Calibri" pitchFamily="34" charset="0"/>
-                          <a:ea typeface="Calibri" pitchFamily="34" charset="-122"/>
-                          <a:cs typeface="Calibri" pitchFamily="34" charset="-120"/>
-                        </a:rPr>
-                        <a:t>Depósitos a Plazo</a:t>
-                      </a:r>
-                      <a:endParaRPr lang="en-US" sz="700" dirty="0">
-                        <a:latin typeface="Calibri" charset="0"/>
-                        <a:ea typeface="Calibri" charset="0"/>
-                        <a:cs typeface="Calibri" charset="0"/>
-                      </a:endParaRPr>
-                    </a:p>
-                  </a:txBody>
-                  <a:tcPr marL="91440" marR="91440" marT="45720" marB="45720">
-                    <a:lnL w="3810" cap="flat" cmpd="sng" algn="ctr">
-                      <a:solidFill>
-                        <a:srgbClr val="CCCCCC"/>
-                      </a:solidFill>
-                      <a:prstDash val="solid"/>
-                      <a:round/>
-                      <a:headEnd type="none" w="med" len="med"/>
-                      <a:tailEnd type="none" w="med" len="med"/>
-                    </a:lnL>
-                    <a:lnR w="3810" cap="flat" cmpd="sng" algn="ctr">
-                      <a:solidFill>
-                        <a:srgbClr val="CCCCCC"/>
-                      </a:solidFill>
-                      <a:prstDash val="solid"/>
-                      <a:round/>
-                      <a:headEnd type="none" w="med" len="med"/>
-                      <a:tailEnd type="none" w="med" len="med"/>
-                    </a:lnR>
-                    <a:lnT w="3810" cap="flat" cmpd="sng" algn="ctr">
-                      <a:solidFill>
-                        <a:srgbClr val="CCCCCC"/>
-                      </a:solidFill>
-                      <a:prstDash val="solid"/>
-                      <a:round/>
-                      <a:headEnd type="none" w="med" len="med"/>
-                      <a:tailEnd type="none" w="med" len="med"/>
-                    </a:lnT>
-                    <a:lnB w="3810" cap="flat" cmpd="sng" algn="ctr">
-                      <a:solidFill>
-                        <a:srgbClr val="CCCCCC"/>
-                      </a:solidFill>
-                      <a:prstDash val="solid"/>
-                      <a:round/>
-                      <a:headEnd type="none" w="med" len="med"/>
-                      <a:tailEnd type="none" w="med" len="med"/>
-                    </a:lnB>
-                  </a:tcPr>
-                </a:tc>
-                <a:tc>
-                  <a:txBody>
-                    <a:bodyPr/>
-                    <a:lstStyle/>
-                    <a:p>
-                      <a:pPr algn="ctr" indent="0" marL="0">
-                        <a:buNone/>
-                      </a:pPr>
-                      <a:r>
-                        <a:rPr lang="en-US" sz="700" dirty="0">
-                          <a:solidFill>
-                            <a:srgbClr val="000000"/>
-                          </a:solidFill>
-                          <a:latin typeface="Calibri" pitchFamily="34" charset="0"/>
-                          <a:ea typeface="Calibri" pitchFamily="34" charset="-122"/>
-                          <a:cs typeface="Calibri" pitchFamily="34" charset="-120"/>
-                        </a:rPr>
-                        <a:t>5%</a:t>
-                      </a:r>
-                      <a:endParaRPr lang="en-US" sz="700" dirty="0">
-                        <a:latin typeface="Calibri" charset="0"/>
-                        <a:ea typeface="Calibri" charset="0"/>
-                        <a:cs typeface="Calibri" charset="0"/>
-                      </a:endParaRPr>
-                    </a:p>
-                  </a:txBody>
-                  <a:tcPr marL="91440" marR="91440" marT="45720" marB="45720">
-                    <a:lnL w="3810" cap="flat" cmpd="sng" algn="ctr">
-                      <a:solidFill>
-                        <a:srgbClr val="CCCCCC"/>
-                      </a:solidFill>
-                      <a:prstDash val="solid"/>
-                      <a:round/>
-                      <a:headEnd type="none" w="med" len="med"/>
-                      <a:tailEnd type="none" w="med" len="med"/>
-                    </a:lnL>
-                    <a:lnR w="3810" cap="flat" cmpd="sng" algn="ctr">
-                      <a:solidFill>
-                        <a:srgbClr val="CCCCCC"/>
-                      </a:solidFill>
-                      <a:prstDash val="solid"/>
-                      <a:round/>
-                      <a:headEnd type="none" w="med" len="med"/>
-                      <a:tailEnd type="none" w="med" len="med"/>
-                    </a:lnR>
-                    <a:lnT w="3810" cap="flat" cmpd="sng" algn="ctr">
-                      <a:solidFill>
-                        <a:srgbClr val="CCCCCC"/>
-                      </a:solidFill>
-                      <a:prstDash val="solid"/>
-                      <a:round/>
-                      <a:headEnd type="none" w="med" len="med"/>
-                      <a:tailEnd type="none" w="med" len="med"/>
-                    </a:lnT>
-                    <a:lnB w="3810" cap="flat" cmpd="sng" algn="ctr">
-                      <a:solidFill>
-                        <a:srgbClr val="CCCCCC"/>
-                      </a:solidFill>
-                      <a:prstDash val="solid"/>
-                      <a:round/>
-                      <a:headEnd type="none" w="med" len="med"/>
-                      <a:tailEnd type="none" w="med" len="med"/>
-                    </a:lnB>
-                  </a:tcPr>
-                </a:tc>
-                <a:tc>
-                  <a:txBody>
-                    <a:bodyPr/>
-                    <a:lstStyle/>
-                    <a:p>
-                      <a:pPr algn="ctr" indent="0" marL="0">
-                        <a:buNone/>
-                      </a:pPr>
-                      <a:r>
-                        <a:rPr lang="en-US" sz="700" dirty="0">
-                          <a:solidFill>
-                            <a:srgbClr val="000000"/>
-                          </a:solidFill>
-                          <a:latin typeface="Calibri" pitchFamily="34" charset="0"/>
-                          <a:ea typeface="Calibri" pitchFamily="34" charset="-122"/>
-                          <a:cs typeface="Calibri" pitchFamily="34" charset="-120"/>
-                        </a:rPr>
-                        <a:t>100%</a:t>
-                      </a:r>
-                      <a:endParaRPr lang="en-US" sz="700" dirty="0">
-                        <a:latin typeface="Calibri" charset="0"/>
-                        <a:ea typeface="Calibri" charset="0"/>
-                        <a:cs typeface="Calibri" charset="0"/>
-                      </a:endParaRPr>
-                    </a:p>
-                  </a:txBody>
-                  <a:tcPr marL="91440" marR="91440" marT="45720" marB="45720">
-                    <a:lnL w="3810" cap="flat" cmpd="sng" algn="ctr">
-                      <a:solidFill>
-                        <a:srgbClr val="CCCCCC"/>
-                      </a:solidFill>
-                      <a:prstDash val="solid"/>
-                      <a:round/>
-                      <a:headEnd type="none" w="med" len="med"/>
-                      <a:tailEnd type="none" w="med" len="med"/>
-                    </a:lnL>
-                    <a:lnR w="3810" cap="flat" cmpd="sng" algn="ctr">
-                      <a:solidFill>
-                        <a:srgbClr val="CCCCCC"/>
-                      </a:solidFill>
-                      <a:prstDash val="solid"/>
-                      <a:round/>
-                      <a:headEnd type="none" w="med" len="med"/>
-                      <a:tailEnd type="none" w="med" len="med"/>
-                    </a:lnR>
-                    <a:lnT w="3810" cap="flat" cmpd="sng" algn="ctr">
-                      <a:solidFill>
-                        <a:srgbClr val="CCCCCC"/>
-                      </a:solidFill>
-                      <a:prstDash val="solid"/>
-                      <a:round/>
-                      <a:headEnd type="none" w="med" len="med"/>
-                      <a:tailEnd type="none" w="med" len="med"/>
-                    </a:lnT>
-                    <a:lnB w="3810" cap="flat" cmpd="sng" algn="ctr">
-                      <a:solidFill>
-                        <a:srgbClr val="CCCCCC"/>
-                      </a:solidFill>
-                      <a:prstDash val="solid"/>
-                      <a:round/>
-                      <a:headEnd type="none" w="med" len="med"/>
-                      <a:tailEnd type="none" w="med" len="med"/>
-                    </a:lnB>
-                  </a:tcPr>
-                </a:tc>
-              </a:tr>
-              <a:tr h="173736">
-                <a:tc>
-                  <a:txBody>
-                    <a:bodyPr/>
-                    <a:lstStyle/>
-                    <a:p>
-                      <a:pPr indent="0" marL="0">
-                        <a:buNone/>
-                      </a:pPr>
-                      <a:r>
-                        <a:rPr lang="en-US" sz="700" dirty="0">
-                          <a:solidFill>
-                            <a:srgbClr val="000000"/>
-                          </a:solidFill>
-                          <a:latin typeface="Calibri" pitchFamily="34" charset="0"/>
-                          <a:ea typeface="Calibri" pitchFamily="34" charset="-122"/>
-                          <a:cs typeface="Calibri" pitchFamily="34" charset="-120"/>
-                        </a:rPr>
-                        <a:t>Facturas</a:t>
-                      </a:r>
-                      <a:endParaRPr lang="en-US" sz="700" dirty="0">
-                        <a:latin typeface="Calibri" charset="0"/>
-                        <a:ea typeface="Calibri" charset="0"/>
-                        <a:cs typeface="Calibri" charset="0"/>
-                      </a:endParaRPr>
-                    </a:p>
-                  </a:txBody>
-                  <a:tcPr marL="91440" marR="91440" marT="45720" marB="45720">
-                    <a:lnL w="3810" cap="flat" cmpd="sng" algn="ctr">
-                      <a:solidFill>
-                        <a:srgbClr val="CCCCCC"/>
-                      </a:solidFill>
-                      <a:prstDash val="solid"/>
-                      <a:round/>
-                      <a:headEnd type="none" w="med" len="med"/>
-                      <a:tailEnd type="none" w="med" len="med"/>
-                    </a:lnL>
-                    <a:lnR w="3810" cap="flat" cmpd="sng" algn="ctr">
-                      <a:solidFill>
-                        <a:srgbClr val="CCCCCC"/>
-                      </a:solidFill>
-                      <a:prstDash val="solid"/>
-                      <a:round/>
-                      <a:headEnd type="none" w="med" len="med"/>
-                      <a:tailEnd type="none" w="med" len="med"/>
-                    </a:lnR>
-                    <a:lnT w="3810" cap="flat" cmpd="sng" algn="ctr">
-                      <a:solidFill>
-                        <a:srgbClr val="CCCCCC"/>
-                      </a:solidFill>
-                      <a:prstDash val="solid"/>
-                      <a:round/>
-                      <a:headEnd type="none" w="med" len="med"/>
-                      <a:tailEnd type="none" w="med" len="med"/>
-                    </a:lnT>
-                    <a:lnB w="3810" cap="flat" cmpd="sng" algn="ctr">
-                      <a:solidFill>
-                        <a:srgbClr val="CCCCCC"/>
-                      </a:solidFill>
-                      <a:prstDash val="solid"/>
-                      <a:round/>
-                      <a:headEnd type="none" w="med" len="med"/>
-                      <a:tailEnd type="none" w="med" len="med"/>
-                    </a:lnB>
-                  </a:tcPr>
-                </a:tc>
-                <a:tc>
-                  <a:txBody>
-                    <a:bodyPr/>
-                    <a:lstStyle/>
-                    <a:p>
-                      <a:pPr algn="ctr" indent="0" marL="0">
-                        <a:buNone/>
-                      </a:pPr>
-                      <a:r>
-                        <a:rPr lang="en-US" sz="700" dirty="0">
-                          <a:solidFill>
-                            <a:srgbClr val="000000"/>
-                          </a:solidFill>
-                          <a:latin typeface="Calibri" pitchFamily="34" charset="0"/>
-                          <a:ea typeface="Calibri" pitchFamily="34" charset="-122"/>
-                          <a:cs typeface="Calibri" pitchFamily="34" charset="-120"/>
-                        </a:rPr>
-                        <a:t>0%</a:t>
-                      </a:r>
-                      <a:endParaRPr lang="en-US" sz="700" dirty="0">
-                        <a:latin typeface="Calibri" charset="0"/>
-                        <a:ea typeface="Calibri" charset="0"/>
-                        <a:cs typeface="Calibri" charset="0"/>
-                      </a:endParaRPr>
-                    </a:p>
-                  </a:txBody>
-                  <a:tcPr marL="91440" marR="91440" marT="45720" marB="45720">
-                    <a:lnL w="3810" cap="flat" cmpd="sng" algn="ctr">
-                      <a:solidFill>
-                        <a:srgbClr val="CCCCCC"/>
-                      </a:solidFill>
-                      <a:prstDash val="solid"/>
-                      <a:round/>
-                      <a:headEnd type="none" w="med" len="med"/>
-                      <a:tailEnd type="none" w="med" len="med"/>
-                    </a:lnL>
-                    <a:lnR w="3810" cap="flat" cmpd="sng" algn="ctr">
-                      <a:solidFill>
-                        <a:srgbClr val="CCCCCC"/>
-                      </a:solidFill>
-                      <a:prstDash val="solid"/>
-                      <a:round/>
-                      <a:headEnd type="none" w="med" len="med"/>
-                      <a:tailEnd type="none" w="med" len="med"/>
-                    </a:lnR>
-                    <a:lnT w="3810" cap="flat" cmpd="sng" algn="ctr">
-                      <a:solidFill>
-                        <a:srgbClr val="CCCCCC"/>
-                      </a:solidFill>
-                      <a:prstDash val="solid"/>
-                      <a:round/>
-                      <a:headEnd type="none" w="med" len="med"/>
-                      <a:tailEnd type="none" w="med" len="med"/>
-                    </a:lnT>
-                    <a:lnB w="3810" cap="flat" cmpd="sng" algn="ctr">
-                      <a:solidFill>
-                        <a:srgbClr val="CCCCCC"/>
-                      </a:solidFill>
-                      <a:prstDash val="solid"/>
-                      <a:round/>
-                      <a:headEnd type="none" w="med" len="med"/>
-                      <a:tailEnd type="none" w="med" len="med"/>
-                    </a:lnB>
-                  </a:tcPr>
-                </a:tc>
-                <a:tc>
-                  <a:txBody>
-                    <a:bodyPr/>
-                    <a:lstStyle/>
-                    <a:p>
-                      <a:pPr algn="ctr" indent="0" marL="0">
-                        <a:buNone/>
-                      </a:pPr>
-                      <a:r>
-                        <a:rPr lang="en-US" sz="700" dirty="0">
-                          <a:solidFill>
-                            <a:srgbClr val="000000"/>
-                          </a:solidFill>
-                          <a:latin typeface="Calibri" pitchFamily="34" charset="0"/>
-                          <a:ea typeface="Calibri" pitchFamily="34" charset="-122"/>
-                          <a:cs typeface="Calibri" pitchFamily="34" charset="-120"/>
-                        </a:rPr>
-                        <a:t>40%</a:t>
-                      </a:r>
-                      <a:endParaRPr lang="en-US" sz="700" dirty="0">
-                        <a:latin typeface="Calibri" charset="0"/>
-                        <a:ea typeface="Calibri" charset="0"/>
-                        <a:cs typeface="Calibri" charset="0"/>
-                      </a:endParaRPr>
-                    </a:p>
-                  </a:txBody>
-                  <a:tcPr marL="91440" marR="91440" marT="45720" marB="45720">
-                    <a:lnL w="3810" cap="flat" cmpd="sng" algn="ctr">
-                      <a:solidFill>
-                        <a:srgbClr val="CCCCCC"/>
-                      </a:solidFill>
-                      <a:prstDash val="solid"/>
-                      <a:round/>
-                      <a:headEnd type="none" w="med" len="med"/>
-                      <a:tailEnd type="none" w="med" len="med"/>
-                    </a:lnL>
-                    <a:lnR w="3810" cap="flat" cmpd="sng" algn="ctr">
-                      <a:solidFill>
-                        <a:srgbClr val="CCCCCC"/>
-                      </a:solidFill>
-                      <a:prstDash val="solid"/>
-                      <a:round/>
-                      <a:headEnd type="none" w="med" len="med"/>
-                      <a:tailEnd type="none" w="med" len="med"/>
-                    </a:lnR>
-                    <a:lnT w="3810" cap="flat" cmpd="sng" algn="ctr">
-                      <a:solidFill>
-                        <a:srgbClr val="CCCCCC"/>
-                      </a:solidFill>
-                      <a:prstDash val="solid"/>
-                      <a:round/>
-                      <a:headEnd type="none" w="med" len="med"/>
-                      <a:tailEnd type="none" w="med" len="med"/>
-                    </a:lnT>
-                    <a:lnB w="3810" cap="flat" cmpd="sng" algn="ctr">
-                      <a:solidFill>
-                        <a:srgbClr val="CCCCCC"/>
-                      </a:solidFill>
-                      <a:prstDash val="solid"/>
-                      <a:round/>
-                      <a:headEnd type="none" w="med" len="med"/>
-                      <a:tailEnd type="none" w="med" len="med"/>
-                    </a:lnB>
-                  </a:tcPr>
-                </a:tc>
-              </a:tr>
-              <a:tr h="173736">
-                <a:tc>
-                  <a:txBody>
-                    <a:bodyPr/>
-                    <a:lstStyle/>
-                    <a:p>
-                      <a:pPr indent="0" marL="0">
-                        <a:buNone/>
-                      </a:pPr>
-                      <a:r>
-                        <a:rPr lang="en-US" sz="700" dirty="0">
-                          <a:solidFill>
-                            <a:srgbClr val="000000"/>
-                          </a:solidFill>
-                          <a:latin typeface="Calibri" pitchFamily="34" charset="0"/>
-                          <a:ea typeface="Calibri" pitchFamily="34" charset="-122"/>
-                          <a:cs typeface="Calibri" pitchFamily="34" charset="-120"/>
-                        </a:rPr>
-                        <a:t>Financiamientos</a:t>
-                      </a:r>
-                      <a:endParaRPr lang="en-US" sz="700" dirty="0">
-                        <a:latin typeface="Calibri" charset="0"/>
-                        <a:ea typeface="Calibri" charset="0"/>
-                        <a:cs typeface="Calibri" charset="0"/>
-                      </a:endParaRPr>
-                    </a:p>
-                    <a:p>
-                      <a:pPr indent="0" marL="0">
-                        <a:buNone/>
-                      </a:pPr>
-                      <a:r>
-                        <a:rPr lang="en-US" sz="700" dirty="0">
-                          <a:solidFill>
-                            <a:srgbClr val="000000"/>
-                          </a:solidFill>
-                          <a:latin typeface="Calibri" pitchFamily="34" charset="0"/>
-                          <a:ea typeface="Calibri" pitchFamily="34" charset="-122"/>
-                          <a:cs typeface="Calibri" pitchFamily="34" charset="-120"/>
-                        </a:rPr>
-                        <a:t>(Inmobiliario, Mezzanine, etc.)</a:t>
-                      </a:r>
-                      <a:endParaRPr lang="en-US" sz="700" dirty="0">
-                        <a:latin typeface="Calibri" charset="0"/>
-                        <a:ea typeface="Calibri" charset="0"/>
-                        <a:cs typeface="Calibri" charset="0"/>
-                      </a:endParaRPr>
-                    </a:p>
-                  </a:txBody>
-                  <a:tcPr marL="91440" marR="91440" marT="45720" marB="45720">
-                    <a:lnL w="3810" cap="flat" cmpd="sng" algn="ctr">
-                      <a:solidFill>
-                        <a:srgbClr val="CCCCCC"/>
-                      </a:solidFill>
-                      <a:prstDash val="solid"/>
-                      <a:round/>
-                      <a:headEnd type="none" w="med" len="med"/>
-                      <a:tailEnd type="none" w="med" len="med"/>
-                    </a:lnL>
-                    <a:lnR w="3810" cap="flat" cmpd="sng" algn="ctr">
-                      <a:solidFill>
-                        <a:srgbClr val="CCCCCC"/>
-                      </a:solidFill>
-                      <a:prstDash val="solid"/>
-                      <a:round/>
-                      <a:headEnd type="none" w="med" len="med"/>
-                      <a:tailEnd type="none" w="med" len="med"/>
-                    </a:lnR>
-                    <a:lnT w="3810" cap="flat" cmpd="sng" algn="ctr">
-                      <a:solidFill>
-                        <a:srgbClr val="CCCCCC"/>
-                      </a:solidFill>
-                      <a:prstDash val="solid"/>
-                      <a:round/>
-                      <a:headEnd type="none" w="med" len="med"/>
-                      <a:tailEnd type="none" w="med" len="med"/>
-                    </a:lnT>
-                    <a:lnB w="3810" cap="flat" cmpd="sng" algn="ctr">
-                      <a:solidFill>
-                        <a:srgbClr val="CCCCCC"/>
-                      </a:solidFill>
-                      <a:prstDash val="solid"/>
-                      <a:round/>
-                      <a:headEnd type="none" w="med" len="med"/>
-                      <a:tailEnd type="none" w="med" len="med"/>
-                    </a:lnB>
-                  </a:tcPr>
-                </a:tc>
-                <a:tc>
-                  <a:txBody>
-                    <a:bodyPr/>
-                    <a:lstStyle/>
-                    <a:p>
-                      <a:pPr algn="ctr" indent="0" marL="0">
-                        <a:buNone/>
-                      </a:pPr>
-                      <a:r>
-                        <a:rPr lang="en-US" sz="700" dirty="0">
-                          <a:solidFill>
-                            <a:srgbClr val="000000"/>
-                          </a:solidFill>
-                          <a:latin typeface="Calibri" pitchFamily="34" charset="0"/>
-                          <a:ea typeface="Calibri" pitchFamily="34" charset="-122"/>
-                          <a:cs typeface="Calibri" pitchFamily="34" charset="-120"/>
-                        </a:rPr>
-                        <a:t>0%</a:t>
-                      </a:r>
-                      <a:endParaRPr lang="en-US" sz="700" dirty="0">
-                        <a:latin typeface="Calibri" charset="0"/>
-                        <a:ea typeface="Calibri" charset="0"/>
-                        <a:cs typeface="Calibri" charset="0"/>
-                      </a:endParaRPr>
-                    </a:p>
-                  </a:txBody>
-                  <a:tcPr marL="91440" marR="91440" marT="45720" marB="45720">
-                    <a:lnL w="3810" cap="flat" cmpd="sng" algn="ctr">
-                      <a:solidFill>
-                        <a:srgbClr val="CCCCCC"/>
-                      </a:solidFill>
-                      <a:prstDash val="solid"/>
-                      <a:round/>
-                      <a:headEnd type="none" w="med" len="med"/>
-                      <a:tailEnd type="none" w="med" len="med"/>
-                    </a:lnL>
-                    <a:lnR w="3810" cap="flat" cmpd="sng" algn="ctr">
-                      <a:solidFill>
-                        <a:srgbClr val="CCCCCC"/>
-                      </a:solidFill>
-                      <a:prstDash val="solid"/>
-                      <a:round/>
-                      <a:headEnd type="none" w="med" len="med"/>
-                      <a:tailEnd type="none" w="med" len="med"/>
-                    </a:lnR>
-                    <a:lnT w="3810" cap="flat" cmpd="sng" algn="ctr">
-                      <a:solidFill>
-                        <a:srgbClr val="CCCCCC"/>
-                      </a:solidFill>
-                      <a:prstDash val="solid"/>
-                      <a:round/>
-                      <a:headEnd type="none" w="med" len="med"/>
-                      <a:tailEnd type="none" w="med" len="med"/>
-                    </a:lnT>
-                    <a:lnB w="3810" cap="flat" cmpd="sng" algn="ctr">
-                      <a:solidFill>
-                        <a:srgbClr val="CCCCCC"/>
-                      </a:solidFill>
-                      <a:prstDash val="solid"/>
-                      <a:round/>
-                      <a:headEnd type="none" w="med" len="med"/>
-                      <a:tailEnd type="none" w="med" len="med"/>
-                    </a:lnB>
-                  </a:tcPr>
-                </a:tc>
-                <a:tc>
-                  <a:txBody>
-                    <a:bodyPr/>
-                    <a:lstStyle/>
-                    <a:p>
-                      <a:pPr algn="ctr" indent="0" marL="0">
-                        <a:buNone/>
-                      </a:pPr>
-                      <a:r>
-                        <a:rPr lang="en-US" sz="700" dirty="0">
-                          <a:solidFill>
-                            <a:srgbClr val="000000"/>
-                          </a:solidFill>
-                          <a:latin typeface="Calibri" pitchFamily="34" charset="0"/>
-                          <a:ea typeface="Calibri" pitchFamily="34" charset="-122"/>
-                          <a:cs typeface="Calibri" pitchFamily="34" charset="-120"/>
-                        </a:rPr>
-                        <a:t>100%</a:t>
-                      </a:r>
-                      <a:endParaRPr lang="en-US" sz="700" dirty="0">
-                        <a:latin typeface="Calibri" charset="0"/>
-                        <a:ea typeface="Calibri" charset="0"/>
-                        <a:cs typeface="Calibri" charset="0"/>
-                      </a:endParaRPr>
-                    </a:p>
-                  </a:txBody>
-                  <a:tcPr marL="91440" marR="91440" marT="45720" marB="45720">
-                    <a:lnL w="3810" cap="flat" cmpd="sng" algn="ctr">
-                      <a:solidFill>
-                        <a:srgbClr val="CCCCCC"/>
-                      </a:solidFill>
-                      <a:prstDash val="solid"/>
-                      <a:round/>
-                      <a:headEnd type="none" w="med" len="med"/>
-                      <a:tailEnd type="none" w="med" len="med"/>
-                    </a:lnL>
-                    <a:lnR w="3810" cap="flat" cmpd="sng" algn="ctr">
-                      <a:solidFill>
-                        <a:srgbClr val="CCCCCC"/>
-                      </a:solidFill>
-                      <a:prstDash val="solid"/>
-                      <a:round/>
-                      <a:headEnd type="none" w="med" len="med"/>
-                      <a:tailEnd type="none" w="med" len="med"/>
-                    </a:lnR>
-                    <a:lnT w="3810" cap="flat" cmpd="sng" algn="ctr">
-                      <a:solidFill>
-                        <a:srgbClr val="CCCCCC"/>
-                      </a:solidFill>
-                      <a:prstDash val="solid"/>
-                      <a:round/>
-                      <a:headEnd type="none" w="med" len="med"/>
-                      <a:tailEnd type="none" w="med" len="med"/>
-                    </a:lnT>
-                    <a:lnB w="3810" cap="flat" cmpd="sng" algn="ctr">
-                      <a:solidFill>
-                        <a:srgbClr val="CCCCCC"/>
-                      </a:solidFill>
-                      <a:prstDash val="solid"/>
-                      <a:round/>
-                      <a:headEnd type="none" w="med" len="med"/>
-                      <a:tailEnd type="none" w="med" len="med"/>
-                    </a:lnB>
-                  </a:tcPr>
-                </a:tc>
-              </a:tr>
-              <a:tr h="173736">
-                <a:tc>
-                  <a:txBody>
-                    <a:bodyPr/>
-                    <a:lstStyle/>
-                    <a:p>
-                      <a:pPr indent="0" marL="0">
-                        <a:buNone/>
-                      </a:pPr>
-                      <a:r>
-                        <a:rPr lang="en-US" sz="700" dirty="0">
-                          <a:solidFill>
-                            <a:srgbClr val="000000"/>
-                          </a:solidFill>
-                          <a:latin typeface="Calibri" pitchFamily="34" charset="0"/>
-                          <a:ea typeface="Calibri" pitchFamily="34" charset="-122"/>
-                          <a:cs typeface="Calibri" pitchFamily="34" charset="-120"/>
-                        </a:rPr>
-                        <a:t>Efectos de Comercio</a:t>
-                      </a:r>
-                      <a:endParaRPr lang="en-US" sz="700" dirty="0">
-                        <a:latin typeface="Calibri" charset="0"/>
-                        <a:ea typeface="Calibri" charset="0"/>
-                        <a:cs typeface="Calibri" charset="0"/>
-                      </a:endParaRPr>
-                    </a:p>
-                  </a:txBody>
-                  <a:tcPr marL="91440" marR="91440" marT="45720" marB="45720">
-                    <a:lnL w="3810" cap="flat" cmpd="sng" algn="ctr">
-                      <a:solidFill>
-                        <a:srgbClr val="CCCCCC"/>
-                      </a:solidFill>
-                      <a:prstDash val="solid"/>
-                      <a:round/>
-                      <a:headEnd type="none" w="med" len="med"/>
-                      <a:tailEnd type="none" w="med" len="med"/>
-                    </a:lnL>
-                    <a:lnR w="3810" cap="flat" cmpd="sng" algn="ctr">
-                      <a:solidFill>
-                        <a:srgbClr val="CCCCCC"/>
-                      </a:solidFill>
-                      <a:prstDash val="solid"/>
-                      <a:round/>
-                      <a:headEnd type="none" w="med" len="med"/>
-                      <a:tailEnd type="none" w="med" len="med"/>
-                    </a:lnR>
-                    <a:lnT w="3810" cap="flat" cmpd="sng" algn="ctr">
-                      <a:solidFill>
-                        <a:srgbClr val="CCCCCC"/>
-                      </a:solidFill>
-                      <a:prstDash val="solid"/>
-                      <a:round/>
-                      <a:headEnd type="none" w="med" len="med"/>
-                      <a:tailEnd type="none" w="med" len="med"/>
-                    </a:lnT>
-                    <a:lnB w="3810" cap="flat" cmpd="sng" algn="ctr">
-                      <a:solidFill>
-                        <a:srgbClr val="CCCCCC"/>
-                      </a:solidFill>
-                      <a:prstDash val="solid"/>
-                      <a:round/>
-                      <a:headEnd type="none" w="med" len="med"/>
-                      <a:tailEnd type="none" w="med" len="med"/>
-                    </a:lnB>
-                  </a:tcPr>
-                </a:tc>
-                <a:tc>
-                  <a:txBody>
-                    <a:bodyPr/>
-                    <a:lstStyle/>
-                    <a:p>
-                      <a:pPr algn="ctr" indent="0" marL="0">
-                        <a:buNone/>
-                      </a:pPr>
-                      <a:r>
-                        <a:rPr lang="en-US" sz="700" dirty="0">
-                          <a:solidFill>
-                            <a:srgbClr val="000000"/>
-                          </a:solidFill>
-                          <a:latin typeface="Calibri" pitchFamily="34" charset="0"/>
-                          <a:ea typeface="Calibri" pitchFamily="34" charset="-122"/>
-                          <a:cs typeface="Calibri" pitchFamily="34" charset="-120"/>
-                        </a:rPr>
-                        <a:t>0%</a:t>
-                      </a:r>
-                      <a:endParaRPr lang="en-US" sz="700" dirty="0">
-                        <a:latin typeface="Calibri" charset="0"/>
-                        <a:ea typeface="Calibri" charset="0"/>
-                        <a:cs typeface="Calibri" charset="0"/>
-                      </a:endParaRPr>
-                    </a:p>
-                  </a:txBody>
-                  <a:tcPr marL="91440" marR="91440" marT="45720" marB="45720">
-                    <a:lnL w="3810" cap="flat" cmpd="sng" algn="ctr">
-                      <a:solidFill>
-                        <a:srgbClr val="CCCCCC"/>
-                      </a:solidFill>
-                      <a:prstDash val="solid"/>
-                      <a:round/>
-                      <a:headEnd type="none" w="med" len="med"/>
-                      <a:tailEnd type="none" w="med" len="med"/>
-                    </a:lnL>
-                    <a:lnR w="3810" cap="flat" cmpd="sng" algn="ctr">
-                      <a:solidFill>
-                        <a:srgbClr val="CCCCCC"/>
-                      </a:solidFill>
-                      <a:prstDash val="solid"/>
-                      <a:round/>
-                      <a:headEnd type="none" w="med" len="med"/>
-                      <a:tailEnd type="none" w="med" len="med"/>
-                    </a:lnR>
-                    <a:lnT w="3810" cap="flat" cmpd="sng" algn="ctr">
-                      <a:solidFill>
-                        <a:srgbClr val="CCCCCC"/>
-                      </a:solidFill>
-                      <a:prstDash val="solid"/>
-                      <a:round/>
-                      <a:headEnd type="none" w="med" len="med"/>
-                      <a:tailEnd type="none" w="med" len="med"/>
-                    </a:lnT>
-                    <a:lnB w="3810" cap="flat" cmpd="sng" algn="ctr">
-                      <a:solidFill>
-                        <a:srgbClr val="CCCCCC"/>
-                      </a:solidFill>
-                      <a:prstDash val="solid"/>
-                      <a:round/>
-                      <a:headEnd type="none" w="med" len="med"/>
-                      <a:tailEnd type="none" w="med" len="med"/>
-                    </a:lnB>
-                  </a:tcPr>
-                </a:tc>
-                <a:tc>
-                  <a:txBody>
-                    <a:bodyPr/>
-                    <a:lstStyle/>
-                    <a:p>
-                      <a:pPr algn="ctr" indent="0" marL="0">
-                        <a:buNone/>
-                      </a:pPr>
-                      <a:r>
-                        <a:rPr lang="en-US" sz="700" dirty="0">
-                          <a:solidFill>
-                            <a:srgbClr val="000000"/>
-                          </a:solidFill>
-                          <a:latin typeface="Calibri" pitchFamily="34" charset="0"/>
-                          <a:ea typeface="Calibri" pitchFamily="34" charset="-122"/>
-                          <a:cs typeface="Calibri" pitchFamily="34" charset="-120"/>
-                        </a:rPr>
-                        <a:t>40%</a:t>
-                      </a:r>
-                      <a:endParaRPr lang="en-US" sz="700" dirty="0">
-                        <a:latin typeface="Calibri" charset="0"/>
-                        <a:ea typeface="Calibri" charset="0"/>
-                        <a:cs typeface="Calibri" charset="0"/>
-                      </a:endParaRPr>
-                    </a:p>
-                  </a:txBody>
-                  <a:tcPr marL="91440" marR="91440" marT="45720" marB="45720">
-                    <a:lnL w="3810" cap="flat" cmpd="sng" algn="ctr">
-                      <a:solidFill>
-                        <a:srgbClr val="CCCCCC"/>
-                      </a:solidFill>
-                      <a:prstDash val="solid"/>
-                      <a:round/>
-                      <a:headEnd type="none" w="med" len="med"/>
-                      <a:tailEnd type="none" w="med" len="med"/>
-                    </a:lnL>
-                    <a:lnR w="3810" cap="flat" cmpd="sng" algn="ctr">
-                      <a:solidFill>
-                        <a:srgbClr val="CCCCCC"/>
-                      </a:solidFill>
-                      <a:prstDash val="solid"/>
-                      <a:round/>
-                      <a:headEnd type="none" w="med" len="med"/>
-                      <a:tailEnd type="none" w="med" len="med"/>
-                    </a:lnR>
-                    <a:lnT w="3810" cap="flat" cmpd="sng" algn="ctr">
-                      <a:solidFill>
-                        <a:srgbClr val="CCCCCC"/>
-                      </a:solidFill>
-                      <a:prstDash val="solid"/>
-                      <a:round/>
-                      <a:headEnd type="none" w="med" len="med"/>
-                      <a:tailEnd type="none" w="med" len="med"/>
-                    </a:lnT>
-                    <a:lnB w="3810" cap="flat" cmpd="sng" algn="ctr">
-                      <a:solidFill>
-                        <a:srgbClr val="CCCCCC"/>
-                      </a:solidFill>
-                      <a:prstDash val="solid"/>
-                      <a:round/>
-                      <a:headEnd type="none" w="med" len="med"/>
-                      <a:tailEnd type="none" w="med" len="med"/>
-                    </a:lnB>
-                  </a:tcPr>
-                </a:tc>
-              </a:tr>
-              <a:tr h="173736">
-                <a:tc>
-                  <a:txBody>
-                    <a:bodyPr/>
-                    <a:lstStyle/>
-                    <a:p>
-                      <a:pPr indent="0" marL="0">
-                        <a:buNone/>
-                      </a:pPr>
-                      <a:r>
-                        <a:rPr lang="en-US" sz="700" dirty="0">
-                          <a:solidFill>
-                            <a:srgbClr val="000000"/>
-                          </a:solidFill>
-                          <a:latin typeface="Calibri" pitchFamily="34" charset="0"/>
-                          <a:ea typeface="Calibri" pitchFamily="34" charset="-122"/>
-                          <a:cs typeface="Calibri" pitchFamily="34" charset="-120"/>
-                        </a:rPr>
-                        <a:t>Pagaré Banco Central</a:t>
-                      </a:r>
-                      <a:endParaRPr lang="en-US" sz="700" dirty="0">
-                        <a:latin typeface="Calibri" charset="0"/>
-                        <a:ea typeface="Calibri" charset="0"/>
-                        <a:cs typeface="Calibri" charset="0"/>
-                      </a:endParaRPr>
-                    </a:p>
-                  </a:txBody>
-                  <a:tcPr marL="91440" marR="91440" marT="45720" marB="45720">
-                    <a:lnL w="3810" cap="flat" cmpd="sng" algn="ctr">
-                      <a:solidFill>
-                        <a:srgbClr val="CCCCCC"/>
-                      </a:solidFill>
-                      <a:prstDash val="solid"/>
-                      <a:round/>
-                      <a:headEnd type="none" w="med" len="med"/>
-                      <a:tailEnd type="none" w="med" len="med"/>
-                    </a:lnL>
-                    <a:lnR w="3810" cap="flat" cmpd="sng" algn="ctr">
-                      <a:solidFill>
-                        <a:srgbClr val="CCCCCC"/>
-                      </a:solidFill>
-                      <a:prstDash val="solid"/>
-                      <a:round/>
-                      <a:headEnd type="none" w="med" len="med"/>
-                      <a:tailEnd type="none" w="med" len="med"/>
-                    </a:lnR>
-                    <a:lnT w="3810" cap="flat" cmpd="sng" algn="ctr">
-                      <a:solidFill>
-                        <a:srgbClr val="CCCCCC"/>
-                      </a:solidFill>
-                      <a:prstDash val="solid"/>
-                      <a:round/>
-                      <a:headEnd type="none" w="med" len="med"/>
-                      <a:tailEnd type="none" w="med" len="med"/>
-                    </a:lnT>
-                    <a:lnB w="3810" cap="flat" cmpd="sng" algn="ctr">
-                      <a:solidFill>
-                        <a:srgbClr val="CCCCCC"/>
-                      </a:solidFill>
-                      <a:prstDash val="solid"/>
-                      <a:round/>
-                      <a:headEnd type="none" w="med" len="med"/>
-                      <a:tailEnd type="none" w="med" len="med"/>
-                    </a:lnB>
-                  </a:tcPr>
-                </a:tc>
-                <a:tc>
-                  <a:txBody>
-                    <a:bodyPr/>
-                    <a:lstStyle/>
-                    <a:p>
-                      <a:pPr algn="ctr" indent="0" marL="0">
-                        <a:buNone/>
-                      </a:pPr>
-                      <a:r>
-                        <a:rPr lang="en-US" sz="700" dirty="0">
-                          <a:solidFill>
-                            <a:srgbClr val="000000"/>
-                          </a:solidFill>
-                          <a:latin typeface="Calibri" pitchFamily="34" charset="0"/>
-                          <a:ea typeface="Calibri" pitchFamily="34" charset="-122"/>
-                          <a:cs typeface="Calibri" pitchFamily="34" charset="-120"/>
-                        </a:rPr>
-                        <a:t>0%</a:t>
-                      </a:r>
-                      <a:endParaRPr lang="en-US" sz="700" dirty="0">
-                        <a:latin typeface="Calibri" charset="0"/>
-                        <a:ea typeface="Calibri" charset="0"/>
-                        <a:cs typeface="Calibri" charset="0"/>
-                      </a:endParaRPr>
-                    </a:p>
-                  </a:txBody>
-                  <a:tcPr marL="91440" marR="91440" marT="45720" marB="45720">
-                    <a:lnL w="3810" cap="flat" cmpd="sng" algn="ctr">
-                      <a:solidFill>
-                        <a:srgbClr val="CCCCCC"/>
-                      </a:solidFill>
-                      <a:prstDash val="solid"/>
-                      <a:round/>
-                      <a:headEnd type="none" w="med" len="med"/>
-                      <a:tailEnd type="none" w="med" len="med"/>
-                    </a:lnL>
-                    <a:lnR w="3810" cap="flat" cmpd="sng" algn="ctr">
-                      <a:solidFill>
-                        <a:srgbClr val="CCCCCC"/>
-                      </a:solidFill>
-                      <a:prstDash val="solid"/>
-                      <a:round/>
-                      <a:headEnd type="none" w="med" len="med"/>
-                      <a:tailEnd type="none" w="med" len="med"/>
-                    </a:lnR>
-                    <a:lnT w="3810" cap="flat" cmpd="sng" algn="ctr">
-                      <a:solidFill>
-                        <a:srgbClr val="CCCCCC"/>
-                      </a:solidFill>
-                      <a:prstDash val="solid"/>
-                      <a:round/>
-                      <a:headEnd type="none" w="med" len="med"/>
-                      <a:tailEnd type="none" w="med" len="med"/>
-                    </a:lnT>
-                    <a:lnB w="3810" cap="flat" cmpd="sng" algn="ctr">
-                      <a:solidFill>
-                        <a:srgbClr val="CCCCCC"/>
-                      </a:solidFill>
-                      <a:prstDash val="solid"/>
-                      <a:round/>
-                      <a:headEnd type="none" w="med" len="med"/>
-                      <a:tailEnd type="none" w="med" len="med"/>
-                    </a:lnB>
-                  </a:tcPr>
-                </a:tc>
-                <a:tc>
-                  <a:txBody>
-                    <a:bodyPr/>
-                    <a:lstStyle/>
-                    <a:p>
-                      <a:pPr algn="ctr" indent="0" marL="0">
-                        <a:buNone/>
-                      </a:pPr>
-                      <a:r>
-                        <a:rPr lang="en-US" sz="700" dirty="0">
-                          <a:solidFill>
-                            <a:srgbClr val="000000"/>
-                          </a:solidFill>
-                          <a:latin typeface="Calibri" pitchFamily="34" charset="0"/>
-                          <a:ea typeface="Calibri" pitchFamily="34" charset="-122"/>
-                          <a:cs typeface="Calibri" pitchFamily="34" charset="-120"/>
-                        </a:rPr>
-                        <a:t>100%</a:t>
-                      </a:r>
-                      <a:endParaRPr lang="en-US" sz="700" dirty="0">
-                        <a:latin typeface="Calibri" charset="0"/>
-                        <a:ea typeface="Calibri" charset="0"/>
-                        <a:cs typeface="Calibri" charset="0"/>
-                      </a:endParaRPr>
-                    </a:p>
-                  </a:txBody>
-                  <a:tcPr marL="91440" marR="91440" marT="45720" marB="45720">
-                    <a:lnL w="3810" cap="flat" cmpd="sng" algn="ctr">
-                      <a:solidFill>
-                        <a:srgbClr val="CCCCCC"/>
-                      </a:solidFill>
-                      <a:prstDash val="solid"/>
-                      <a:round/>
-                      <a:headEnd type="none" w="med" len="med"/>
-                      <a:tailEnd type="none" w="med" len="med"/>
-                    </a:lnL>
-                    <a:lnR w="3810" cap="flat" cmpd="sng" algn="ctr">
-                      <a:solidFill>
-                        <a:srgbClr val="CCCCCC"/>
-                      </a:solidFill>
-                      <a:prstDash val="solid"/>
-                      <a:round/>
-                      <a:headEnd type="none" w="med" len="med"/>
-                      <a:tailEnd type="none" w="med" len="med"/>
-                    </a:lnR>
-                    <a:lnT w="3810" cap="flat" cmpd="sng" algn="ctr">
-                      <a:solidFill>
-                        <a:srgbClr val="CCCCCC"/>
-                      </a:solidFill>
-                      <a:prstDash val="solid"/>
-                      <a:round/>
-                      <a:headEnd type="none" w="med" len="med"/>
-                      <a:tailEnd type="none" w="med" len="med"/>
-                    </a:lnT>
-                    <a:lnB w="3810" cap="flat" cmpd="sng" algn="ctr">
-                      <a:solidFill>
-                        <a:srgbClr val="CCCCCC"/>
-                      </a:solidFill>
-                      <a:prstDash val="solid"/>
-                      <a:round/>
-                      <a:headEnd type="none" w="med" len="med"/>
-                      <a:tailEnd type="none" w="med" len="med"/>
-                    </a:lnB>
-                  </a:tcPr>
-                </a:tc>
-              </a:tr>
-              <a:tr h="173736">
-                <a:tc>
-                  <a:txBody>
-                    <a:bodyPr/>
-                    <a:lstStyle/>
-                    <a:p>
-                      <a:pPr indent="0" marL="0">
-                        <a:buNone/>
-                      </a:pPr>
-                      <a:r>
-                        <a:rPr lang="en-US" sz="700" dirty="0">
-                          <a:solidFill>
-                            <a:srgbClr val="000000"/>
-                          </a:solidFill>
-                          <a:latin typeface="Calibri" pitchFamily="34" charset="0"/>
-                          <a:ea typeface="Calibri" pitchFamily="34" charset="-122"/>
-                          <a:cs typeface="Calibri" pitchFamily="34" charset="-120"/>
-                        </a:rPr>
-                        <a:t>Caja</a:t>
-                      </a:r>
-                      <a:endParaRPr lang="en-US" sz="700" dirty="0">
-                        <a:latin typeface="Calibri" charset="0"/>
-                        <a:ea typeface="Calibri" charset="0"/>
-                        <a:cs typeface="Calibri" charset="0"/>
-                      </a:endParaRPr>
-                    </a:p>
-                  </a:txBody>
-                  <a:tcPr marL="91440" marR="91440" marT="45720" marB="45720">
-                    <a:lnL w="3810" cap="flat" cmpd="sng" algn="ctr">
-                      <a:solidFill>
-                        <a:srgbClr val="CCCCCC"/>
-                      </a:solidFill>
-                      <a:prstDash val="solid"/>
-                      <a:round/>
-                      <a:headEnd type="none" w="med" len="med"/>
-                      <a:tailEnd type="none" w="med" len="med"/>
-                    </a:lnL>
-                    <a:lnR w="3810" cap="flat" cmpd="sng" algn="ctr">
-                      <a:solidFill>
-                        <a:srgbClr val="CCCCCC"/>
-                      </a:solidFill>
-                      <a:prstDash val="solid"/>
-                      <a:round/>
-                      <a:headEnd type="none" w="med" len="med"/>
-                      <a:tailEnd type="none" w="med" len="med"/>
-                    </a:lnR>
-                    <a:lnT w="3810" cap="flat" cmpd="sng" algn="ctr">
-                      <a:solidFill>
-                        <a:srgbClr val="CCCCCC"/>
-                      </a:solidFill>
-                      <a:prstDash val="solid"/>
-                      <a:round/>
-                      <a:headEnd type="none" w="med" len="med"/>
-                      <a:tailEnd type="none" w="med" len="med"/>
-                    </a:lnT>
-                    <a:lnB w="3810" cap="flat" cmpd="sng" algn="ctr">
-                      <a:solidFill>
-                        <a:srgbClr val="CCCCCC"/>
-                      </a:solidFill>
-                      <a:prstDash val="solid"/>
-                      <a:round/>
-                      <a:headEnd type="none" w="med" len="med"/>
-                      <a:tailEnd type="none" w="med" len="med"/>
-                    </a:lnB>
-                  </a:tcPr>
-                </a:tc>
-                <a:tc>
-                  <a:txBody>
-                    <a:bodyPr/>
-                    <a:lstStyle/>
-                    <a:p>
-                      <a:pPr algn="ctr" indent="0" marL="0">
-                        <a:buNone/>
-                      </a:pPr>
-                      <a:r>
-                        <a:rPr lang="en-US" sz="700" dirty="0">
-                          <a:solidFill>
-                            <a:srgbClr val="000000"/>
-                          </a:solidFill>
-                          <a:latin typeface="Calibri" pitchFamily="34" charset="0"/>
-                          <a:ea typeface="Calibri" pitchFamily="34" charset="-122"/>
-                          <a:cs typeface="Calibri" pitchFamily="34" charset="-120"/>
-                        </a:rPr>
-                        <a:t>5%</a:t>
-                      </a:r>
-                      <a:endParaRPr lang="en-US" sz="700" dirty="0">
-                        <a:latin typeface="Calibri" charset="0"/>
-                        <a:ea typeface="Calibri" charset="0"/>
-                        <a:cs typeface="Calibri" charset="0"/>
-                      </a:endParaRPr>
-                    </a:p>
-                  </a:txBody>
-                  <a:tcPr marL="91440" marR="91440" marT="45720" marB="45720">
-                    <a:lnL w="3810" cap="flat" cmpd="sng" algn="ctr">
-                      <a:solidFill>
-                        <a:srgbClr val="CCCCCC"/>
-                      </a:solidFill>
-                      <a:prstDash val="solid"/>
-                      <a:round/>
-                      <a:headEnd type="none" w="med" len="med"/>
-                      <a:tailEnd type="none" w="med" len="med"/>
-                    </a:lnL>
-                    <a:lnR w="3810" cap="flat" cmpd="sng" algn="ctr">
-                      <a:solidFill>
-                        <a:srgbClr val="CCCCCC"/>
-                      </a:solidFill>
-                      <a:prstDash val="solid"/>
-                      <a:round/>
-                      <a:headEnd type="none" w="med" len="med"/>
-                      <a:tailEnd type="none" w="med" len="med"/>
-                    </a:lnR>
-                    <a:lnT w="3810" cap="flat" cmpd="sng" algn="ctr">
-                      <a:solidFill>
-                        <a:srgbClr val="CCCCCC"/>
-                      </a:solidFill>
-                      <a:prstDash val="solid"/>
-                      <a:round/>
-                      <a:headEnd type="none" w="med" len="med"/>
-                      <a:tailEnd type="none" w="med" len="med"/>
-                    </a:lnT>
-                    <a:lnB w="3810" cap="flat" cmpd="sng" algn="ctr">
-                      <a:solidFill>
-                        <a:srgbClr val="CCCCCC"/>
-                      </a:solidFill>
-                      <a:prstDash val="solid"/>
-                      <a:round/>
-                      <a:headEnd type="none" w="med" len="med"/>
-                      <a:tailEnd type="none" w="med" len="med"/>
-                    </a:lnB>
-                  </a:tcPr>
-                </a:tc>
-                <a:tc>
-                  <a:txBody>
-                    <a:bodyPr/>
-                    <a:lstStyle/>
-                    <a:p>
-                      <a:pPr algn="ctr" indent="0" marL="0">
-                        <a:buNone/>
-                      </a:pPr>
-                      <a:r>
-                        <a:rPr lang="en-US" sz="700" dirty="0">
-                          <a:solidFill>
-                            <a:srgbClr val="000000"/>
-                          </a:solidFill>
-                          <a:latin typeface="Calibri" pitchFamily="34" charset="0"/>
-                          <a:ea typeface="Calibri" pitchFamily="34" charset="-122"/>
-                          <a:cs typeface="Calibri" pitchFamily="34" charset="-120"/>
-                        </a:rPr>
-                        <a:t>25%</a:t>
-                      </a:r>
-                      <a:endParaRPr lang="en-US" sz="700" dirty="0">
-                        <a:latin typeface="Calibri" charset="0"/>
-                        <a:ea typeface="Calibri" charset="0"/>
-                        <a:cs typeface="Calibri" charset="0"/>
-                      </a:endParaRPr>
-                    </a:p>
-                  </a:txBody>
-                  <a:tcPr marL="91440" marR="91440" marT="45720" marB="45720">
-                    <a:lnL w="3810" cap="flat" cmpd="sng" algn="ctr">
-                      <a:solidFill>
-                        <a:srgbClr val="CCCCCC"/>
-                      </a:solidFill>
-                      <a:prstDash val="solid"/>
-                      <a:round/>
-                      <a:headEnd type="none" w="med" len="med"/>
-                      <a:tailEnd type="none" w="med" len="med"/>
-                    </a:lnL>
-                    <a:lnR w="3810" cap="flat" cmpd="sng" algn="ctr">
-                      <a:solidFill>
-                        <a:srgbClr val="CCCCCC"/>
-                      </a:solidFill>
-                      <a:prstDash val="solid"/>
-                      <a:round/>
-                      <a:headEnd type="none" w="med" len="med"/>
-                      <a:tailEnd type="none" w="med" len="med"/>
-                    </a:lnR>
-                    <a:lnT w="3810" cap="flat" cmpd="sng" algn="ctr">
-                      <a:solidFill>
-                        <a:srgbClr val="CCCCCC"/>
-                      </a:solidFill>
-                      <a:prstDash val="solid"/>
-                      <a:round/>
-                      <a:headEnd type="none" w="med" len="med"/>
-                      <a:tailEnd type="none" w="med" len="med"/>
-                    </a:lnT>
-                    <a:lnB w="3810" cap="flat" cmpd="sng" algn="ctr">
-                      <a:solidFill>
-                        <a:srgbClr val="CCCCCC"/>
-                      </a:solidFill>
-                      <a:prstDash val="solid"/>
-                      <a:round/>
-                      <a:headEnd type="none" w="med" len="med"/>
-                      <a:tailEnd type="none" w="med" len="med"/>
-                    </a:lnB>
-                  </a:tcPr>
-                </a:tc>
-              </a:tr>
-            </a:tbl>
-          </a:graphicData>
-        </a:graphic>
-      </p:graphicFrame>
       <p:sp>
         <p:nvSpPr>
-          <p:cNvPr id="13" name="Shape 10"/>
+          <p:cNvPr id="18" name="Text 16"/>
           <p:cNvSpPr/>
           <p:nvPr/>
         </p:nvSpPr>
         <p:spPr>
           <a:xfrm>
-            <a:off x="228600" y="4151376"/>
-            <a:ext cx="2240280" cy="0"/>
-          </a:xfrm>
-          <a:prstGeom prst="line">
-            <a:avLst/>
-          </a:prstGeom>
-          <a:noFill/>
-          <a:ln w="5080">
-            <a:solidFill>
-              <a:srgbClr val="CCCCCC"/>
-            </a:solidFill>
-            <a:prstDash val="solid"/>
-          </a:ln>
-        </p:spPr>
-      </p:sp>
-      <p:sp>
-        <p:nvSpPr>
-          <p:cNvPr id="14" name="Text 11"/>
-          <p:cNvSpPr/>
-          <p:nvPr/>
-        </p:nvSpPr>
-        <p:spPr>
-          <a:xfrm>
-            <a:off x="228600" y="4242816"/>
-            <a:ext cx="2240280" cy="173736"/>
+            <a:off x="118872" y="2971800"/>
+            <a:ext cx="1371600" cy="182880"/>
           </a:xfrm>
           <a:prstGeom prst="rect">
             <a:avLst/>
@@ -19435,7 +17930,7 @@
               <a:buNone/>
             </a:pPr>
             <a:r>
-              <a:rPr lang="en-US" sz="850" b="1" dirty="0">
+              <a:rPr lang="en-US" sz="750" dirty="0">
                 <a:solidFill>
                   <a:srgbClr val="000000"/>
                 </a:solidFill>
@@ -19443,22 +17938,61 @@
                 <a:ea typeface="Calibri" pitchFamily="34" charset="-122"/>
                 <a:cs typeface="Calibri" pitchFamily="34" charset="-120"/>
               </a:rPr>
-              <a:t>Composición por Duración</a:t>
+              <a:t>Entre 31 y 90 días</a:t>
             </a:r>
-            <a:endParaRPr lang="en-US" sz="850" dirty="0"/>
+            <a:endParaRPr lang="en-US" sz="750" dirty="0"/>
           </a:p>
         </p:txBody>
       </p:sp>
       <p:sp>
         <p:nvSpPr>
-          <p:cNvPr id="15" name="Text 12"/>
+          <p:cNvPr id="19" name="Text 17"/>
           <p:cNvSpPr/>
           <p:nvPr/>
         </p:nvSpPr>
         <p:spPr>
           <a:xfrm>
-            <a:off x="228600" y="4471416"/>
-            <a:ext cx="1417320" cy="201168"/>
+            <a:off x="1490472" y="2971800"/>
+            <a:ext cx="841248" cy="182880"/>
+          </a:xfrm>
+          <a:prstGeom prst="rect">
+            <a:avLst/>
+          </a:prstGeom>
+          <a:noFill/>
+          <a:ln/>
+        </p:spPr>
+        <p:txBody>
+          <a:bodyPr wrap="square" lIns="0" tIns="0" rIns="0" bIns="0" rtlCol="0" anchor="ctr"/>
+          <a:lstStyle/>
+          <a:p>
+            <a:pPr algn="r" indent="0" marL="0">
+              <a:buNone/>
+            </a:pPr>
+            <a:r>
+              <a:rPr lang="en-US" sz="750" b="1" dirty="0">
+                <a:solidFill>
+                  <a:srgbClr val="000000"/>
+                </a:solidFill>
+                <a:latin typeface="Calibri" pitchFamily="34" charset="0"/>
+                <a:ea typeface="Calibri" pitchFamily="34" charset="-122"/>
+                <a:cs typeface="Calibri" pitchFamily="34" charset="-120"/>
+              </a:rPr>
+              <a:t>28,00%</a:t>
+            </a:r>
+            <a:endParaRPr lang="en-US" sz="750" dirty="0"/>
+          </a:p>
+        </p:txBody>
+      </p:sp>
+      <p:sp>
+        <p:nvSpPr>
+          <p:cNvPr id="20" name="Text 18"/>
+          <p:cNvSpPr/>
+          <p:nvPr/>
+        </p:nvSpPr>
+        <p:spPr>
+          <a:xfrm>
+            <a:off x="118872" y="3172968"/>
+            <a:ext cx="1371600" cy="182880"/>
           </a:xfrm>
           <a:prstGeom prst="rect">
             <a:avLst/>
@@ -19474,7 +18008,7 @@
               <a:buNone/>
             </a:pPr>
             <a:r>
-              <a:rPr lang="en-US" sz="800" dirty="0">
+              <a:rPr lang="en-US" sz="750" dirty="0">
                 <a:solidFill>
                   <a:srgbClr val="000000"/>
                 </a:solidFill>
@@ -19482,22 +18016,22 @@
                 <a:ea typeface="Calibri" pitchFamily="34" charset="-122"/>
                 <a:cs typeface="Calibri" pitchFamily="34" charset="-120"/>
               </a:rPr>
-              <a:t>Hasta 30 días</a:t>
+              <a:t>Entre 91 y 120 días</a:t>
             </a:r>
-            <a:endParaRPr lang="en-US" sz="800" dirty="0"/>
+            <a:endParaRPr lang="en-US" sz="750" dirty="0"/>
           </a:p>
         </p:txBody>
       </p:sp>
       <p:sp>
         <p:nvSpPr>
-          <p:cNvPr id="16" name="Text 13"/>
+          <p:cNvPr id="21" name="Text 19"/>
           <p:cNvSpPr/>
           <p:nvPr/>
         </p:nvSpPr>
         <p:spPr>
           <a:xfrm>
-            <a:off x="1645920" y="4471416"/>
-            <a:ext cx="822960" cy="201168"/>
+            <a:off x="1490472" y="3172968"/>
+            <a:ext cx="841248" cy="182880"/>
           </a:xfrm>
           <a:prstGeom prst="rect">
             <a:avLst/>
@@ -19513,7 +18047,7 @@
               <a:buNone/>
             </a:pPr>
             <a:r>
-              <a:rPr lang="en-US" sz="800" b="1" dirty="0">
+              <a:rPr lang="en-US" sz="750" b="1" dirty="0">
                 <a:solidFill>
                   <a:srgbClr val="000000"/>
                 </a:solidFill>
@@ -19521,22 +18055,22 @@
                 <a:ea typeface="Calibri" pitchFamily="34" charset="-122"/>
                 <a:cs typeface="Calibri" pitchFamily="34" charset="-120"/>
               </a:rPr>
-              <a:t>63,16%</a:t>
+              <a:t>8,84%</a:t>
             </a:r>
-            <a:endParaRPr lang="en-US" sz="800" dirty="0"/>
+            <a:endParaRPr lang="en-US" sz="750" dirty="0"/>
           </a:p>
         </p:txBody>
       </p:sp>
       <p:sp>
         <p:nvSpPr>
-          <p:cNvPr id="17" name="Text 14"/>
+          <p:cNvPr id="22" name="Text 20"/>
           <p:cNvSpPr/>
           <p:nvPr/>
         </p:nvSpPr>
         <p:spPr>
           <a:xfrm>
-            <a:off x="228600" y="4690872"/>
-            <a:ext cx="1417320" cy="201168"/>
+            <a:off x="118872" y="3374136"/>
+            <a:ext cx="1371600" cy="182880"/>
           </a:xfrm>
           <a:prstGeom prst="rect">
             <a:avLst/>
@@ -19552,7 +18086,7 @@
               <a:buNone/>
             </a:pPr>
             <a:r>
-              <a:rPr lang="en-US" sz="800" dirty="0">
+              <a:rPr lang="en-US" sz="750" dirty="0">
                 <a:solidFill>
                   <a:srgbClr val="000000"/>
                 </a:solidFill>
@@ -19560,22 +18094,22 @@
                 <a:ea typeface="Calibri" pitchFamily="34" charset="-122"/>
                 <a:cs typeface="Calibri" pitchFamily="34" charset="-120"/>
               </a:rPr>
-              <a:t>Entre 31 y 90 días</a:t>
+              <a:t>Entre 1 y 2 años</a:t>
             </a:r>
-            <a:endParaRPr lang="en-US" sz="800" dirty="0"/>
+            <a:endParaRPr lang="en-US" sz="750" dirty="0"/>
           </a:p>
         </p:txBody>
       </p:sp>
       <p:sp>
         <p:nvSpPr>
-          <p:cNvPr id="18" name="Text 15"/>
+          <p:cNvPr id="23" name="Text 21"/>
           <p:cNvSpPr/>
           <p:nvPr/>
         </p:nvSpPr>
         <p:spPr>
           <a:xfrm>
-            <a:off x="1645920" y="4690872"/>
-            <a:ext cx="822960" cy="201168"/>
+            <a:off x="1490472" y="3374136"/>
+            <a:ext cx="841248" cy="182880"/>
           </a:xfrm>
           <a:prstGeom prst="rect">
             <a:avLst/>
@@ -19591,163 +18125,7 @@
               <a:buNone/>
             </a:pPr>
             <a:r>
-              <a:rPr lang="en-US" sz="800" b="1" dirty="0">
-                <a:solidFill>
-                  <a:srgbClr val="000000"/>
-                </a:solidFill>
-                <a:latin typeface="Calibri" pitchFamily="34" charset="0"/>
-                <a:ea typeface="Calibri" pitchFamily="34" charset="-122"/>
-                <a:cs typeface="Calibri" pitchFamily="34" charset="-120"/>
-              </a:rPr>
-              <a:t>28,00%</a:t>
-            </a:r>
-            <a:endParaRPr lang="en-US" sz="800" dirty="0"/>
-          </a:p>
-        </p:txBody>
-      </p:sp>
-      <p:sp>
-        <p:nvSpPr>
-          <p:cNvPr id="19" name="Text 16"/>
-          <p:cNvSpPr/>
-          <p:nvPr/>
-        </p:nvSpPr>
-        <p:spPr>
-          <a:xfrm>
-            <a:off x="228600" y="4910328"/>
-            <a:ext cx="1417320" cy="201168"/>
-          </a:xfrm>
-          <a:prstGeom prst="rect">
-            <a:avLst/>
-          </a:prstGeom>
-          <a:noFill/>
-          <a:ln/>
-        </p:spPr>
-        <p:txBody>
-          <a:bodyPr wrap="square" lIns="0" tIns="0" rIns="0" bIns="0" rtlCol="0" anchor="ctr"/>
-          <a:lstStyle/>
-          <a:p>
-            <a:pPr indent="0" marL="0">
-              <a:buNone/>
-            </a:pPr>
-            <a:r>
-              <a:rPr lang="en-US" sz="800" dirty="0">
-                <a:solidFill>
-                  <a:srgbClr val="000000"/>
-                </a:solidFill>
-                <a:latin typeface="Calibri" pitchFamily="34" charset="0"/>
-                <a:ea typeface="Calibri" pitchFamily="34" charset="-122"/>
-                <a:cs typeface="Calibri" pitchFamily="34" charset="-120"/>
-              </a:rPr>
-              <a:t>Entre 91 y 120 días</a:t>
-            </a:r>
-            <a:endParaRPr lang="en-US" sz="800" dirty="0"/>
-          </a:p>
-        </p:txBody>
-      </p:sp>
-      <p:sp>
-        <p:nvSpPr>
-          <p:cNvPr id="20" name="Text 17"/>
-          <p:cNvSpPr/>
-          <p:nvPr/>
-        </p:nvSpPr>
-        <p:spPr>
-          <a:xfrm>
-            <a:off x="1645920" y="4910328"/>
-            <a:ext cx="822960" cy="201168"/>
-          </a:xfrm>
-          <a:prstGeom prst="rect">
-            <a:avLst/>
-          </a:prstGeom>
-          <a:noFill/>
-          <a:ln/>
-        </p:spPr>
-        <p:txBody>
-          <a:bodyPr wrap="square" lIns="0" tIns="0" rIns="0" bIns="0" rtlCol="0" anchor="ctr"/>
-          <a:lstStyle/>
-          <a:p>
-            <a:pPr algn="r" indent="0" marL="0">
-              <a:buNone/>
-            </a:pPr>
-            <a:r>
-              <a:rPr lang="en-US" sz="800" b="1" dirty="0">
-                <a:solidFill>
-                  <a:srgbClr val="000000"/>
-                </a:solidFill>
-                <a:latin typeface="Calibri" pitchFamily="34" charset="0"/>
-                <a:ea typeface="Calibri" pitchFamily="34" charset="-122"/>
-                <a:cs typeface="Calibri" pitchFamily="34" charset="-120"/>
-              </a:rPr>
-              <a:t>8,84%</a:t>
-            </a:r>
-            <a:endParaRPr lang="en-US" sz="800" dirty="0"/>
-          </a:p>
-        </p:txBody>
-      </p:sp>
-      <p:sp>
-        <p:nvSpPr>
-          <p:cNvPr id="21" name="Text 18"/>
-          <p:cNvSpPr/>
-          <p:nvPr/>
-        </p:nvSpPr>
-        <p:spPr>
-          <a:xfrm>
-            <a:off x="228600" y="5129784"/>
-            <a:ext cx="1417320" cy="201168"/>
-          </a:xfrm>
-          <a:prstGeom prst="rect">
-            <a:avLst/>
-          </a:prstGeom>
-          <a:noFill/>
-          <a:ln/>
-        </p:spPr>
-        <p:txBody>
-          <a:bodyPr wrap="square" lIns="0" tIns="0" rIns="0" bIns="0" rtlCol="0" anchor="ctr"/>
-          <a:lstStyle/>
-          <a:p>
-            <a:pPr indent="0" marL="0">
-              <a:buNone/>
-            </a:pPr>
-            <a:r>
-              <a:rPr lang="en-US" sz="800" dirty="0">
-                <a:solidFill>
-                  <a:srgbClr val="000000"/>
-                </a:solidFill>
-                <a:latin typeface="Calibri" pitchFamily="34" charset="0"/>
-                <a:ea typeface="Calibri" pitchFamily="34" charset="-122"/>
-                <a:cs typeface="Calibri" pitchFamily="34" charset="-120"/>
-              </a:rPr>
-              <a:t>Entre 1 y 2 años</a:t>
-            </a:r>
-            <a:endParaRPr lang="en-US" sz="800" dirty="0"/>
-          </a:p>
-        </p:txBody>
-      </p:sp>
-      <p:sp>
-        <p:nvSpPr>
-          <p:cNvPr id="22" name="Text 19"/>
-          <p:cNvSpPr/>
-          <p:nvPr/>
-        </p:nvSpPr>
-        <p:spPr>
-          <a:xfrm>
-            <a:off x="1645920" y="5129784"/>
-            <a:ext cx="822960" cy="201168"/>
-          </a:xfrm>
-          <a:prstGeom prst="rect">
-            <a:avLst/>
-          </a:prstGeom>
-          <a:noFill/>
-          <a:ln/>
-        </p:spPr>
-        <p:txBody>
-          <a:bodyPr wrap="square" lIns="0" tIns="0" rIns="0" bIns="0" rtlCol="0" anchor="ctr"/>
-          <a:lstStyle/>
-          <a:p>
-            <a:pPr algn="r" indent="0" marL="0">
-              <a:buNone/>
-            </a:pPr>
-            <a:r>
-              <a:rPr lang="en-US" sz="800" b="1" dirty="0">
+              <a:rPr lang="en-US" sz="750" b="1" dirty="0">
                 <a:solidFill>
                   <a:srgbClr val="000000"/>
                 </a:solidFill>
@@ -19757,20 +18135,20 @@
               </a:rPr>
               <a:t>0,00%</a:t>
             </a:r>
-            <a:endParaRPr lang="en-US" sz="800" dirty="0"/>
+            <a:endParaRPr lang="en-US" sz="750" dirty="0"/>
           </a:p>
         </p:txBody>
       </p:sp>
       <p:sp>
         <p:nvSpPr>
-          <p:cNvPr id="23" name="Text 20"/>
+          <p:cNvPr id="24" name="Text 22"/>
           <p:cNvSpPr/>
           <p:nvPr/>
         </p:nvSpPr>
         <p:spPr>
           <a:xfrm>
-            <a:off x="2697480" y="137160"/>
-            <a:ext cx="4636008" cy="246888"/>
+            <a:off x="2606040" y="137160"/>
+            <a:ext cx="4818888" cy="246888"/>
           </a:xfrm>
           <a:prstGeom prst="rect">
             <a:avLst/>
@@ -19802,14 +18180,37 @@
       </p:sp>
       <p:sp>
         <p:nvSpPr>
-          <p:cNvPr id="24" name="Text 21"/>
+          <p:cNvPr id="25" name="Shape 23"/>
           <p:cNvSpPr/>
           <p:nvPr/>
         </p:nvSpPr>
         <p:spPr>
           <a:xfrm>
-            <a:off x="2697480" y="457200"/>
-            <a:ext cx="4636008" cy="402336"/>
+            <a:off x="2606040" y="411480"/>
+            <a:ext cx="4818888" cy="0"/>
+          </a:xfrm>
+          <a:prstGeom prst="line">
+            <a:avLst/>
+          </a:prstGeom>
+          <a:noFill/>
+          <a:ln w="19050">
+            <a:solidFill>
+              <a:srgbClr val="000000"/>
+            </a:solidFill>
+            <a:prstDash val="solid"/>
+          </a:ln>
+        </p:spPr>
+      </p:sp>
+      <p:sp>
+        <p:nvSpPr>
+          <p:cNvPr id="26" name="Text 24"/>
+          <p:cNvSpPr/>
+          <p:nvPr/>
+        </p:nvSpPr>
+        <p:spPr>
+          <a:xfrm>
+            <a:off x="2606040" y="502920"/>
+            <a:ext cx="4818888" cy="393192"/>
           </a:xfrm>
           <a:prstGeom prst="rect">
             <a:avLst/>
@@ -19858,14 +18259,14 @@
       </p:sp>
       <p:sp>
         <p:nvSpPr>
-          <p:cNvPr id="25" name="Text 22"/>
+          <p:cNvPr id="27" name="Text 25"/>
           <p:cNvSpPr/>
           <p:nvPr/>
         </p:nvSpPr>
         <p:spPr>
           <a:xfrm>
-            <a:off x="2697480" y="886968"/>
-            <a:ext cx="4636008" cy="402336"/>
+            <a:off x="2606040" y="923544"/>
+            <a:ext cx="4818888" cy="393192"/>
           </a:xfrm>
           <a:prstGeom prst="rect">
             <a:avLst/>
@@ -19914,14 +18315,14 @@
       </p:sp>
       <p:sp>
         <p:nvSpPr>
-          <p:cNvPr id="26" name="Text 23"/>
+          <p:cNvPr id="28" name="Text 26"/>
           <p:cNvSpPr/>
           <p:nvPr/>
         </p:nvSpPr>
         <p:spPr>
           <a:xfrm>
-            <a:off x="2697480" y="1316736"/>
-            <a:ext cx="4636008" cy="402336"/>
+            <a:off x="2606040" y="1344168"/>
+            <a:ext cx="4818888" cy="393192"/>
           </a:xfrm>
           <a:prstGeom prst="rect">
             <a:avLst/>
@@ -19970,14 +18371,14 @@
       </p:sp>
       <p:sp>
         <p:nvSpPr>
-          <p:cNvPr id="27" name="Text 24"/>
+          <p:cNvPr id="29" name="Text 27"/>
           <p:cNvSpPr/>
           <p:nvPr/>
         </p:nvSpPr>
         <p:spPr>
           <a:xfrm>
-            <a:off x="2697480" y="1746504"/>
-            <a:ext cx="4636008" cy="402336"/>
+            <a:off x="2606040" y="1764792"/>
+            <a:ext cx="4818888" cy="393192"/>
           </a:xfrm>
           <a:prstGeom prst="rect">
             <a:avLst/>
@@ -20026,14 +18427,14 @@
       </p:sp>
       <p:sp>
         <p:nvSpPr>
-          <p:cNvPr id="28" name="Text 25"/>
+          <p:cNvPr id="30" name="Text 28"/>
           <p:cNvSpPr/>
           <p:nvPr/>
         </p:nvSpPr>
         <p:spPr>
           <a:xfrm>
-            <a:off x="2697480" y="2176272"/>
-            <a:ext cx="4636008" cy="402336"/>
+            <a:off x="2606040" y="2185416"/>
+            <a:ext cx="4818888" cy="393192"/>
           </a:xfrm>
           <a:prstGeom prst="rect">
             <a:avLst/>
@@ -20082,14 +18483,14 @@
       </p:sp>
       <p:sp>
         <p:nvSpPr>
-          <p:cNvPr id="29" name="Text 26"/>
+          <p:cNvPr id="31" name="Text 29"/>
           <p:cNvSpPr/>
           <p:nvPr/>
         </p:nvSpPr>
         <p:spPr>
           <a:xfrm>
-            <a:off x="2697480" y="2606040"/>
-            <a:ext cx="4636008" cy="402336"/>
+            <a:off x="2606040" y="2606040"/>
+            <a:ext cx="4818888" cy="393192"/>
           </a:xfrm>
           <a:prstGeom prst="rect">
             <a:avLst/>
@@ -20138,14 +18539,14 @@
       </p:sp>
       <p:sp>
         <p:nvSpPr>
-          <p:cNvPr id="30" name="Text 27"/>
+          <p:cNvPr id="32" name="Text 30"/>
           <p:cNvSpPr/>
           <p:nvPr/>
         </p:nvSpPr>
         <p:spPr>
           <a:xfrm>
-            <a:off x="2697480" y="3035808"/>
-            <a:ext cx="4636008" cy="402336"/>
+            <a:off x="2606040" y="3026664"/>
+            <a:ext cx="4818888" cy="393192"/>
           </a:xfrm>
           <a:prstGeom prst="rect">
             <a:avLst/>
@@ -20194,14 +18595,14 @@
       </p:sp>
       <p:sp>
         <p:nvSpPr>
-          <p:cNvPr id="31" name="Text 28"/>
+          <p:cNvPr id="33" name="Text 31"/>
           <p:cNvSpPr/>
           <p:nvPr/>
         </p:nvSpPr>
         <p:spPr>
           <a:xfrm>
-            <a:off x="2697480" y="3465576"/>
-            <a:ext cx="4636008" cy="402336"/>
+            <a:off x="2606040" y="3447288"/>
+            <a:ext cx="4818888" cy="393192"/>
           </a:xfrm>
           <a:prstGeom prst="rect">
             <a:avLst/>
@@ -20250,14 +18651,14 @@
       </p:sp>
       <p:sp>
         <p:nvSpPr>
-          <p:cNvPr id="32" name="Text 29"/>
+          <p:cNvPr id="34" name="Text 32"/>
           <p:cNvSpPr/>
           <p:nvPr/>
         </p:nvSpPr>
         <p:spPr>
           <a:xfrm>
-            <a:off x="2697480" y="3895344"/>
-            <a:ext cx="4636008" cy="402336"/>
+            <a:off x="2606040" y="3867912"/>
+            <a:ext cx="4818888" cy="393192"/>
           </a:xfrm>
           <a:prstGeom prst="rect">
             <a:avLst/>
@@ -20306,22 +18707,22 @@
       </p:sp>
       <p:sp>
         <p:nvSpPr>
-          <p:cNvPr id="33" name="Shape 30"/>
+          <p:cNvPr id="35" name="Shape 33"/>
           <p:cNvSpPr/>
           <p:nvPr/>
         </p:nvSpPr>
         <p:spPr>
           <a:xfrm>
-            <a:off x="2697480" y="4398264"/>
-            <a:ext cx="4636008" cy="0"/>
+            <a:off x="2606040" y="4361688"/>
+            <a:ext cx="4818888" cy="0"/>
           </a:xfrm>
           <a:prstGeom prst="line">
             <a:avLst/>
           </a:prstGeom>
           <a:noFill/>
-          <a:ln w="5080">
+          <a:ln w="6350">
             <a:solidFill>
-              <a:srgbClr val="CCCCCC"/>
+              <a:srgbClr val="DDDDDD"/>
             </a:solidFill>
             <a:prstDash val="solid"/>
           </a:ln>
@@ -20329,14 +18730,14 @@
       </p:sp>
       <p:sp>
         <p:nvSpPr>
-          <p:cNvPr id="34" name="Text 31"/>
+          <p:cNvPr id="36" name="Text 34"/>
           <p:cNvSpPr/>
           <p:nvPr/>
         </p:nvSpPr>
         <p:spPr>
           <a:xfrm>
-            <a:off x="2697480" y="4526280"/>
-            <a:ext cx="4636008" cy="228600"/>
+            <a:off x="2606040" y="4489704"/>
+            <a:ext cx="4818888" cy="228600"/>
           </a:xfrm>
           <a:prstGeom prst="rect">
             <a:avLst/>
@@ -20368,14 +18769,37 @@
       </p:sp>
       <p:sp>
         <p:nvSpPr>
-          <p:cNvPr id="35" name="Text 32"/>
+          <p:cNvPr id="37" name="Shape 35"/>
           <p:cNvSpPr/>
           <p:nvPr/>
         </p:nvSpPr>
         <p:spPr>
           <a:xfrm>
-            <a:off x="2697480" y="4800600"/>
-            <a:ext cx="4636008" cy="640080"/>
+            <a:off x="2606040" y="4745736"/>
+            <a:ext cx="4818888" cy="0"/>
+          </a:xfrm>
+          <a:prstGeom prst="line">
+            <a:avLst/>
+          </a:prstGeom>
+          <a:noFill/>
+          <a:ln w="19050">
+            <a:solidFill>
+              <a:srgbClr val="000000"/>
+            </a:solidFill>
+            <a:prstDash val="solid"/>
+          </a:ln>
+        </p:spPr>
+      </p:sp>
+      <p:sp>
+        <p:nvSpPr>
+          <p:cNvPr id="38" name="Text 36"/>
+          <p:cNvSpPr/>
+          <p:nvPr/>
+        </p:nvSpPr>
+        <p:spPr>
+          <a:xfrm>
+            <a:off x="2606040" y="4837176"/>
+            <a:ext cx="4818888" cy="640080"/>
           </a:xfrm>
           <a:prstGeom prst="rect">
             <a:avLst/>

--- a/folletos/2026-04/pptx/FIP_VANTRUST_LIQUIDEZ_DOLAR.pptx
+++ b/folletos/2026-04/pptx/FIP_VANTRUST_LIQUIDEZ_DOLAR.pptx
@@ -6373,7 +6373,7 @@
                 <a:ea typeface="Calibri" pitchFamily="34" charset="-122"/>
                 <a:cs typeface="Calibri" pitchFamily="34" charset="-120"/>
               </a:rPr>
-              <a:t>prueba USD</a:t>
+              <a:t>prueba 6 USD</a:t>
             </a:r>
             <a:endParaRPr lang="en-US" sz="800" dirty="0"/>
           </a:p>

--- a/folletos/2026-04/pptx/FIP_VANTRUST_LIQUIDEZ_DOLAR.pptx
+++ b/folletos/2026-04/pptx/FIP_VANTRUST_LIQUIDEZ_DOLAR.pptx
@@ -6373,7 +6373,7 @@
                 <a:ea typeface="Calibri" pitchFamily="34" charset="-122"/>
                 <a:cs typeface="Calibri" pitchFamily="34" charset="-120"/>
               </a:rPr>
-              <a:t>prueba 6 USD</a:t>
+              <a:t>prueba USD</a:t>
             </a:r>
             <a:endParaRPr lang="en-US" sz="800" dirty="0"/>
           </a:p>
@@ -17581,13 +17581,91 @@
       </p:sp>
       <p:sp>
         <p:nvSpPr>
-          <p:cNvPr id="8" name="Shape 6"/>
+          <p:cNvPr id="8" name="Text 6"/>
           <p:cNvSpPr/>
           <p:nvPr/>
         </p:nvSpPr>
         <p:spPr>
           <a:xfrm>
-            <a:off x="118872" y="1810512"/>
+            <a:off x="118872" y="1719072"/>
+            <a:ext cx="1188720" cy="173736"/>
+          </a:xfrm>
+          <a:prstGeom prst="rect">
+            <a:avLst/>
+          </a:prstGeom>
+          <a:noFill/>
+          <a:ln/>
+        </p:spPr>
+        <p:txBody>
+          <a:bodyPr wrap="square" lIns="0" tIns="0" rIns="0" bIns="0" rtlCol="0" anchor="ctr"/>
+          <a:lstStyle/>
+          <a:p>
+            <a:pPr indent="0" marL="0">
+              <a:buNone/>
+            </a:pPr>
+            <a:r>
+              <a:rPr lang="en-US" sz="750" dirty="0">
+                <a:solidFill>
+                  <a:srgbClr val="000000"/>
+                </a:solidFill>
+                <a:latin typeface="Calibri" pitchFamily="34" charset="0"/>
+                <a:ea typeface="Calibri" pitchFamily="34" charset="-122"/>
+                <a:cs typeface="Calibri" pitchFamily="34" charset="-120"/>
+              </a:rPr>
+              <a:t>USD</a:t>
+            </a:r>
+            <a:endParaRPr lang="en-US" sz="750" dirty="0"/>
+          </a:p>
+        </p:txBody>
+      </p:sp>
+      <p:sp>
+        <p:nvSpPr>
+          <p:cNvPr id="9" name="Text 7"/>
+          <p:cNvSpPr/>
+          <p:nvPr/>
+        </p:nvSpPr>
+        <p:spPr>
+          <a:xfrm>
+            <a:off x="1307592" y="1719072"/>
+            <a:ext cx="1024128" cy="173736"/>
+          </a:xfrm>
+          <a:prstGeom prst="rect">
+            <a:avLst/>
+          </a:prstGeom>
+          <a:noFill/>
+          <a:ln/>
+        </p:spPr>
+        <p:txBody>
+          <a:bodyPr wrap="square" lIns="0" tIns="0" rIns="0" bIns="0" rtlCol="0" anchor="ctr"/>
+          <a:lstStyle/>
+          <a:p>
+            <a:pPr algn="r" indent="0" marL="0">
+              <a:buNone/>
+            </a:pPr>
+            <a:r>
+              <a:rPr lang="en-US" sz="750" b="1" dirty="0">
+                <a:solidFill>
+                  <a:srgbClr val="000000"/>
+                </a:solidFill>
+                <a:latin typeface="Calibri" pitchFamily="34" charset="0"/>
+                <a:ea typeface="Calibri" pitchFamily="34" charset="-122"/>
+                <a:cs typeface="Calibri" pitchFamily="34" charset="-120"/>
+              </a:rPr>
+              <a:t>100,00%</a:t>
+            </a:r>
+            <a:endParaRPr lang="en-US" sz="750" dirty="0"/>
+          </a:p>
+        </p:txBody>
+      </p:sp>
+      <p:sp>
+        <p:nvSpPr>
+          <p:cNvPr id="10" name="Shape 8"/>
+          <p:cNvSpPr/>
+          <p:nvPr/>
+        </p:nvSpPr>
+        <p:spPr>
+          <a:xfrm>
+            <a:off x="118872" y="2002536"/>
             <a:ext cx="2212848" cy="0"/>
           </a:xfrm>
           <a:prstGeom prst="line">
@@ -17604,13 +17682,13 @@
       </p:sp>
       <p:sp>
         <p:nvSpPr>
-          <p:cNvPr id="9" name="Text 7"/>
+          <p:cNvPr id="11" name="Text 9"/>
           <p:cNvSpPr/>
           <p:nvPr/>
         </p:nvSpPr>
         <p:spPr>
           <a:xfrm>
-            <a:off x="118872" y="1901952"/>
+            <a:off x="118872" y="2093976"/>
             <a:ext cx="2212848" cy="164592"/>
           </a:xfrm>
           <a:prstGeom prst="rect">
@@ -17643,13 +17721,13 @@
       </p:sp>
       <p:sp>
         <p:nvSpPr>
-          <p:cNvPr id="10" name="Shape 8"/>
+          <p:cNvPr id="12" name="Shape 10"/>
           <p:cNvSpPr/>
           <p:nvPr/>
         </p:nvSpPr>
         <p:spPr>
           <a:xfrm>
-            <a:off x="118872" y="2084832"/>
+            <a:off x="118872" y="2276856"/>
             <a:ext cx="2212848" cy="0"/>
           </a:xfrm>
           <a:prstGeom prst="line">
@@ -17666,13 +17744,13 @@
       </p:sp>
       <p:sp>
         <p:nvSpPr>
-          <p:cNvPr id="11" name="Text 9"/>
+          <p:cNvPr id="13" name="Text 11"/>
           <p:cNvSpPr/>
           <p:nvPr/>
         </p:nvSpPr>
         <p:spPr>
           <a:xfrm>
-            <a:off x="118872" y="2157984"/>
+            <a:off x="118872" y="2350008"/>
             <a:ext cx="1371600" cy="164592"/>
           </a:xfrm>
           <a:prstGeom prst="rect">
@@ -17705,13 +17783,13 @@
       </p:sp>
       <p:sp>
         <p:nvSpPr>
-          <p:cNvPr id="12" name="Text 10"/>
+          <p:cNvPr id="14" name="Text 12"/>
           <p:cNvSpPr/>
           <p:nvPr/>
         </p:nvSpPr>
         <p:spPr>
           <a:xfrm>
-            <a:off x="1490472" y="2157984"/>
+            <a:off x="1490472" y="2350008"/>
             <a:ext cx="841248" cy="164592"/>
           </a:xfrm>
           <a:prstGeom prst="rect">
@@ -17744,13 +17822,13 @@
       </p:sp>
       <p:sp>
         <p:nvSpPr>
-          <p:cNvPr id="13" name="Shape 11"/>
+          <p:cNvPr id="15" name="Shape 13"/>
           <p:cNvSpPr/>
           <p:nvPr/>
         </p:nvSpPr>
         <p:spPr>
           <a:xfrm>
-            <a:off x="118872" y="2423160"/>
+            <a:off x="118872" y="2615184"/>
             <a:ext cx="2212848" cy="0"/>
           </a:xfrm>
           <a:prstGeom prst="line">
@@ -17767,13 +17845,13 @@
       </p:sp>
       <p:sp>
         <p:nvSpPr>
-          <p:cNvPr id="14" name="Text 12"/>
+          <p:cNvPr id="16" name="Text 14"/>
           <p:cNvSpPr/>
           <p:nvPr/>
         </p:nvSpPr>
         <p:spPr>
           <a:xfrm>
-            <a:off x="118872" y="2514600"/>
+            <a:off x="118872" y="2706624"/>
             <a:ext cx="2212848" cy="164592"/>
           </a:xfrm>
           <a:prstGeom prst="rect">
@@ -17806,13 +17884,13 @@
       </p:sp>
       <p:sp>
         <p:nvSpPr>
-          <p:cNvPr id="15" name="Shape 13"/>
+          <p:cNvPr id="17" name="Shape 15"/>
           <p:cNvSpPr/>
           <p:nvPr/>
         </p:nvSpPr>
         <p:spPr>
           <a:xfrm>
-            <a:off x="118872" y="2697480"/>
+            <a:off x="118872" y="2889504"/>
             <a:ext cx="2212848" cy="0"/>
           </a:xfrm>
           <a:prstGeom prst="line">
@@ -17829,13 +17907,13 @@
       </p:sp>
       <p:sp>
         <p:nvSpPr>
-          <p:cNvPr id="16" name="Text 14"/>
+          <p:cNvPr id="18" name="Text 16"/>
           <p:cNvSpPr/>
           <p:nvPr/>
         </p:nvSpPr>
         <p:spPr>
           <a:xfrm>
-            <a:off x="118872" y="2770632"/>
+            <a:off x="118872" y="2962656"/>
             <a:ext cx="1371600" cy="182880"/>
           </a:xfrm>
           <a:prstGeom prst="rect">
@@ -17868,13 +17946,13 @@
       </p:sp>
       <p:sp>
         <p:nvSpPr>
-          <p:cNvPr id="17" name="Text 15"/>
+          <p:cNvPr id="19" name="Text 17"/>
           <p:cNvSpPr/>
           <p:nvPr/>
         </p:nvSpPr>
         <p:spPr>
           <a:xfrm>
-            <a:off x="1490472" y="2770632"/>
+            <a:off x="1490472" y="2962656"/>
             <a:ext cx="841248" cy="182880"/>
           </a:xfrm>
           <a:prstGeom prst="rect">
@@ -17899,7 +17977,7 @@
                 <a:ea typeface="Calibri" pitchFamily="34" charset="-122"/>
                 <a:cs typeface="Calibri" pitchFamily="34" charset="-120"/>
               </a:rPr>
-              <a:t>63,16%</a:t>
+              <a:t>19,12%</a:t>
             </a:r>
             <a:endParaRPr lang="en-US" sz="750" dirty="0"/>
           </a:p>
@@ -17907,13 +17985,13 @@
       </p:sp>
       <p:sp>
         <p:nvSpPr>
-          <p:cNvPr id="18" name="Text 16"/>
+          <p:cNvPr id="20" name="Text 18"/>
           <p:cNvSpPr/>
           <p:nvPr/>
         </p:nvSpPr>
         <p:spPr>
           <a:xfrm>
-            <a:off x="118872" y="2971800"/>
+            <a:off x="118872" y="3163824"/>
             <a:ext cx="1371600" cy="182880"/>
           </a:xfrm>
           <a:prstGeom prst="rect">
@@ -17946,13 +18024,13 @@
       </p:sp>
       <p:sp>
         <p:nvSpPr>
-          <p:cNvPr id="19" name="Text 17"/>
+          <p:cNvPr id="21" name="Text 19"/>
           <p:cNvSpPr/>
           <p:nvPr/>
         </p:nvSpPr>
         <p:spPr>
           <a:xfrm>
-            <a:off x="1490472" y="2971800"/>
+            <a:off x="1490472" y="3163824"/>
             <a:ext cx="841248" cy="182880"/>
           </a:xfrm>
           <a:prstGeom prst="rect">
@@ -17977,7 +18055,7 @@
                 <a:ea typeface="Calibri" pitchFamily="34" charset="-122"/>
                 <a:cs typeface="Calibri" pitchFamily="34" charset="-120"/>
               </a:rPr>
-              <a:t>28,00%</a:t>
+              <a:t>35,18%</a:t>
             </a:r>
             <a:endParaRPr lang="en-US" sz="750" dirty="0"/>
           </a:p>
@@ -17985,13 +18063,13 @@
       </p:sp>
       <p:sp>
         <p:nvSpPr>
-          <p:cNvPr id="20" name="Text 18"/>
+          <p:cNvPr id="22" name="Text 20"/>
           <p:cNvSpPr/>
           <p:nvPr/>
         </p:nvSpPr>
         <p:spPr>
           <a:xfrm>
-            <a:off x="118872" y="3172968"/>
+            <a:off x="118872" y="3364992"/>
             <a:ext cx="1371600" cy="182880"/>
           </a:xfrm>
           <a:prstGeom prst="rect">
@@ -18024,13 +18102,13 @@
       </p:sp>
       <p:sp>
         <p:nvSpPr>
-          <p:cNvPr id="21" name="Text 19"/>
+          <p:cNvPr id="23" name="Text 21"/>
           <p:cNvSpPr/>
           <p:nvPr/>
         </p:nvSpPr>
         <p:spPr>
           <a:xfrm>
-            <a:off x="1490472" y="3172968"/>
+            <a:off x="1490472" y="3364992"/>
             <a:ext cx="841248" cy="182880"/>
           </a:xfrm>
           <a:prstGeom prst="rect">
@@ -18055,7 +18133,7 @@
                 <a:ea typeface="Calibri" pitchFamily="34" charset="-122"/>
                 <a:cs typeface="Calibri" pitchFamily="34" charset="-120"/>
               </a:rPr>
-              <a:t>8,84%</a:t>
+              <a:t>14,54%</a:t>
             </a:r>
             <a:endParaRPr lang="en-US" sz="750" dirty="0"/>
           </a:p>
@@ -18063,13 +18141,13 @@
       </p:sp>
       <p:sp>
         <p:nvSpPr>
-          <p:cNvPr id="22" name="Text 20"/>
+          <p:cNvPr id="24" name="Text 22"/>
           <p:cNvSpPr/>
           <p:nvPr/>
         </p:nvSpPr>
         <p:spPr>
           <a:xfrm>
-            <a:off x="118872" y="3374136"/>
+            <a:off x="118872" y="3566160"/>
             <a:ext cx="1371600" cy="182880"/>
           </a:xfrm>
           <a:prstGeom prst="rect">
@@ -18102,13 +18180,13 @@
       </p:sp>
       <p:sp>
         <p:nvSpPr>
-          <p:cNvPr id="23" name="Text 21"/>
+          <p:cNvPr id="25" name="Text 23"/>
           <p:cNvSpPr/>
           <p:nvPr/>
         </p:nvSpPr>
         <p:spPr>
           <a:xfrm>
-            <a:off x="1490472" y="3374136"/>
+            <a:off x="1490472" y="3566160"/>
             <a:ext cx="841248" cy="182880"/>
           </a:xfrm>
           <a:prstGeom prst="rect">
@@ -18133,7 +18211,7 @@
                 <a:ea typeface="Calibri" pitchFamily="34" charset="-122"/>
                 <a:cs typeface="Calibri" pitchFamily="34" charset="-120"/>
               </a:rPr>
-              <a:t>0,00%</a:t>
+              <a:t>31,16%</a:t>
             </a:r>
             <a:endParaRPr lang="en-US" sz="750" dirty="0"/>
           </a:p>
@@ -18141,7 +18219,7 @@
       </p:sp>
       <p:sp>
         <p:nvSpPr>
-          <p:cNvPr id="24" name="Text 22"/>
+          <p:cNvPr id="26" name="Text 24"/>
           <p:cNvSpPr/>
           <p:nvPr/>
         </p:nvSpPr>
@@ -18180,7 +18258,7 @@
       </p:sp>
       <p:sp>
         <p:nvSpPr>
-          <p:cNvPr id="25" name="Shape 23"/>
+          <p:cNvPr id="27" name="Shape 25"/>
           <p:cNvSpPr/>
           <p:nvPr/>
         </p:nvSpPr>
@@ -18203,7 +18281,7 @@
       </p:sp>
       <p:sp>
         <p:nvSpPr>
-          <p:cNvPr id="26" name="Text 24"/>
+          <p:cNvPr id="28" name="Text 26"/>
           <p:cNvSpPr/>
           <p:nvPr/>
         </p:nvSpPr>
@@ -18259,7 +18337,7 @@
       </p:sp>
       <p:sp>
         <p:nvSpPr>
-          <p:cNvPr id="27" name="Text 25"/>
+          <p:cNvPr id="29" name="Text 27"/>
           <p:cNvSpPr/>
           <p:nvPr/>
         </p:nvSpPr>
@@ -18315,7 +18393,7 @@
       </p:sp>
       <p:sp>
         <p:nvSpPr>
-          <p:cNvPr id="28" name="Text 26"/>
+          <p:cNvPr id="30" name="Text 28"/>
           <p:cNvSpPr/>
           <p:nvPr/>
         </p:nvSpPr>
@@ -18371,7 +18449,7 @@
       </p:sp>
       <p:sp>
         <p:nvSpPr>
-          <p:cNvPr id="29" name="Text 27"/>
+          <p:cNvPr id="31" name="Text 29"/>
           <p:cNvSpPr/>
           <p:nvPr/>
         </p:nvSpPr>
@@ -18427,7 +18505,7 @@
       </p:sp>
       <p:sp>
         <p:nvSpPr>
-          <p:cNvPr id="30" name="Text 28"/>
+          <p:cNvPr id="32" name="Text 30"/>
           <p:cNvSpPr/>
           <p:nvPr/>
         </p:nvSpPr>
@@ -18483,7 +18561,7 @@
       </p:sp>
       <p:sp>
         <p:nvSpPr>
-          <p:cNvPr id="31" name="Text 29"/>
+          <p:cNvPr id="33" name="Text 31"/>
           <p:cNvSpPr/>
           <p:nvPr/>
         </p:nvSpPr>
@@ -18539,7 +18617,7 @@
       </p:sp>
       <p:sp>
         <p:nvSpPr>
-          <p:cNvPr id="32" name="Text 30"/>
+          <p:cNvPr id="34" name="Text 32"/>
           <p:cNvSpPr/>
           <p:nvPr/>
         </p:nvSpPr>
@@ -18595,7 +18673,7 @@
       </p:sp>
       <p:sp>
         <p:nvSpPr>
-          <p:cNvPr id="33" name="Text 31"/>
+          <p:cNvPr id="35" name="Text 33"/>
           <p:cNvSpPr/>
           <p:nvPr/>
         </p:nvSpPr>
@@ -18651,7 +18729,7 @@
       </p:sp>
       <p:sp>
         <p:nvSpPr>
-          <p:cNvPr id="34" name="Text 32"/>
+          <p:cNvPr id="36" name="Text 34"/>
           <p:cNvSpPr/>
           <p:nvPr/>
         </p:nvSpPr>
@@ -18707,7 +18785,7 @@
       </p:sp>
       <p:sp>
         <p:nvSpPr>
-          <p:cNvPr id="35" name="Shape 33"/>
+          <p:cNvPr id="37" name="Shape 35"/>
           <p:cNvSpPr/>
           <p:nvPr/>
         </p:nvSpPr>
@@ -18730,7 +18808,7 @@
       </p:sp>
       <p:sp>
         <p:nvSpPr>
-          <p:cNvPr id="36" name="Text 34"/>
+          <p:cNvPr id="38" name="Text 36"/>
           <p:cNvSpPr/>
           <p:nvPr/>
         </p:nvSpPr>
@@ -18769,7 +18847,7 @@
       </p:sp>
       <p:sp>
         <p:nvSpPr>
-          <p:cNvPr id="37" name="Shape 35"/>
+          <p:cNvPr id="39" name="Shape 37"/>
           <p:cNvSpPr/>
           <p:nvPr/>
         </p:nvSpPr>
@@ -18792,7 +18870,7 @@
       </p:sp>
       <p:sp>
         <p:nvSpPr>
-          <p:cNvPr id="38" name="Text 36"/>
+          <p:cNvPr id="40" name="Text 38"/>
           <p:cNvSpPr/>
           <p:nvPr/>
         </p:nvSpPr>

--- a/folletos/2026-04/pptx/FIP_VANTRUST_LIQUIDEZ_DOLAR.pptx
+++ b/folletos/2026-04/pptx/FIP_VANTRUST_LIQUIDEZ_DOLAR.pptx
@@ -6373,7 +6373,7 @@
                 <a:ea typeface="Calibri" pitchFamily="34" charset="-122"/>
                 <a:cs typeface="Calibri" pitchFamily="34" charset="-120"/>
               </a:rPr>
-              <a:t>prueba USD</a:t>
+              <a:t>prueba 8 USD</a:t>
             </a:r>
             <a:endParaRPr lang="en-US" sz="800" dirty="0"/>
           </a:p>

--- a/folletos/2026-04/pptx/FIP_VANTRUST_LIQUIDEZ_DOLAR.pptx
+++ b/folletos/2026-04/pptx/FIP_VANTRUST_LIQUIDEZ_DOLAR.pptx
@@ -3114,7 +3114,7 @@
                 <a:ea typeface="Calibri" pitchFamily="34" charset="-122"/>
                 <a:cs typeface="Calibri" pitchFamily="34" charset="-120"/>
               </a:rPr>
-              <a:t>prueba USD</a:t>
+              <a:t>prueba 10 USD</a:t>
             </a:r>
             <a:endParaRPr lang="en-US" sz="800" dirty="0"/>
           </a:p>

--- a/folletos/2026-04/pptx/FIP_VANTRUST_LIQUIDEZ_DOLAR.pptx
+++ b/folletos/2026-04/pptx/FIP_VANTRUST_LIQUIDEZ_DOLAR.pptx
@@ -3114,7 +3114,7 @@
                 <a:ea typeface="Calibri" pitchFamily="34" charset="-122"/>
                 <a:cs typeface="Calibri" pitchFamily="34" charset="-120"/>
               </a:rPr>
-              <a:t>prueba 10 USD</a:t>
+              <a:t>prueba 11 USD</a:t>
             </a:r>
             <a:endParaRPr lang="en-US" sz="800" dirty="0"/>
           </a:p>

--- a/folletos/2026-04/pptx/FIP_VANTRUST_LIQUIDEZ_DOLAR.pptx
+++ b/folletos/2026-04/pptx/FIP_VANTRUST_LIQUIDEZ_DOLAR.pptx
@@ -3131,7 +3131,7 @@
                 <a:ea typeface="Calibri" pitchFamily="34" charset="-122"/>
                 <a:cs typeface="Calibri" pitchFamily="34" charset="-120"/>
               </a:rPr>
-              <a:t>prueba USD</a:t>
+              <a:t>prueba 11 USD</a:t>
             </a:r>
             <a:endParaRPr lang="en-US" sz="800" dirty="0"/>
           </a:p>

--- a/folletos/2026-04/pptx/FIP_VANTRUST_LIQUIDEZ_DOLAR.pptx
+++ b/folletos/2026-04/pptx/FIP_VANTRUST_LIQUIDEZ_DOLAR.pptx
@@ -3131,7 +3131,7 @@
                 <a:ea typeface="Calibri" pitchFamily="34" charset="-122"/>
                 <a:cs typeface="Calibri" pitchFamily="34" charset="-120"/>
               </a:rPr>
-              <a:t>prueba 11 USD</a:t>
+              <a:t>prueba 12 USD</a:t>
             </a:r>
             <a:endParaRPr lang="en-US" sz="800" dirty="0"/>
           </a:p>

--- a/folletos/2026-04/pptx/FIP_VANTRUST_LIQUIDEZ_DOLAR.pptx
+++ b/folletos/2026-04/pptx/FIP_VANTRUST_LIQUIDEZ_DOLAR.pptx
@@ -3113,7 +3113,7 @@
                 <a:ea typeface="Calibri" pitchFamily="34" charset="-122"/>
                 <a:cs typeface="Calibri" pitchFamily="34" charset="-120"/>
               </a:rPr>
-              <a:t>prueba USD</a:t>
+              <a:t>Prueba 12 USD</a:t>
             </a:r>
             <a:endParaRPr lang="en-US" sz="800" dirty="0"/>
           </a:p>

--- a/folletos/2026-04/pptx/FIP_VANTRUST_LIQUIDEZ_DOLAR.pptx
+++ b/folletos/2026-04/pptx/FIP_VANTRUST_LIQUIDEZ_DOLAR.pptx
@@ -3113,7 +3113,7 @@
                 <a:ea typeface="Calibri" pitchFamily="34" charset="-122"/>
                 <a:cs typeface="Calibri" pitchFamily="34" charset="-120"/>
               </a:rPr>
-              <a:t>prueba USD</a:t>
+              <a:t>prueba 13 USD</a:t>
             </a:r>
             <a:endParaRPr lang="en-US" sz="800" dirty="0"/>
           </a:p>

--- a/folletos/2026-04/pptx/FIP_VANTRUST_LIQUIDEZ_DOLAR.pptx
+++ b/folletos/2026-04/pptx/FIP_VANTRUST_LIQUIDEZ_DOLAR.pptx
@@ -127,7 +127,7 @@
               <c:strCache>
                 <c:ptCount val="1"/>
                 <c:pt idx="0">
-                  <c:v>ICP Nom.</c:v>
+                  <c:v>LIQUIDEZ DÓLAR</c:v>
                 </c:pt>
               </c:strCache>
             </c:strRef>
@@ -189,38 +189,188 @@
           </c:marker>
           <c:cat>
             <c:multiLvlStrRef>
-              <c:f>Sheet1!$A$2:$A$11</c:f>
+              <c:f>Sheet1!$A$2:$A$61</c:f>
               <c:multiLvlStrCache>
-                <c:ptCount val="10"/>
+                <c:ptCount val="60"/>
                 <c:lvl>
                   <c:pt idx="0">
+                    <c:v>May 2021</c:v>
+                  </c:pt>
+                  <c:pt idx="1">
+                    <c:v>Jun 2021</c:v>
+                  </c:pt>
+                  <c:pt idx="2">
+                    <c:v>Jul 2021</c:v>
+                  </c:pt>
+                  <c:pt idx="3">
+                    <c:v>Aug 2021</c:v>
+                  </c:pt>
+                  <c:pt idx="4">
+                    <c:v>Sep 2021</c:v>
+                  </c:pt>
+                  <c:pt idx="5">
+                    <c:v>Oct 2021</c:v>
+                  </c:pt>
+                  <c:pt idx="6">
+                    <c:v>Nov 2021</c:v>
+                  </c:pt>
+                  <c:pt idx="7">
+                    <c:v>Dec 2021</c:v>
+                  </c:pt>
+                  <c:pt idx="8">
+                    <c:v>Jan 2022</c:v>
+                  </c:pt>
+                  <c:pt idx="9">
+                    <c:v>Feb 2022</c:v>
+                  </c:pt>
+                  <c:pt idx="10">
+                    <c:v>Mar 2022</c:v>
+                  </c:pt>
+                  <c:pt idx="11">
+                    <c:v>Apr 2022</c:v>
+                  </c:pt>
+                  <c:pt idx="12">
+                    <c:v>May 2022</c:v>
+                  </c:pt>
+                  <c:pt idx="13">
+                    <c:v>Jun 2022</c:v>
+                  </c:pt>
+                  <c:pt idx="14">
+                    <c:v>Jul 2022</c:v>
+                  </c:pt>
+                  <c:pt idx="15">
+                    <c:v>Aug 2022</c:v>
+                  </c:pt>
+                  <c:pt idx="16">
+                    <c:v>Sep 2022</c:v>
+                  </c:pt>
+                  <c:pt idx="17">
+                    <c:v>Oct 2022</c:v>
+                  </c:pt>
+                  <c:pt idx="18">
+                    <c:v>Nov 2022</c:v>
+                  </c:pt>
+                  <c:pt idx="19">
+                    <c:v>Dec 2022</c:v>
+                  </c:pt>
+                  <c:pt idx="20">
+                    <c:v>Jan 2023</c:v>
+                  </c:pt>
+                  <c:pt idx="21">
+                    <c:v>Feb 2023</c:v>
+                  </c:pt>
+                  <c:pt idx="22">
+                    <c:v>Mar 2023</c:v>
+                  </c:pt>
+                  <c:pt idx="23">
+                    <c:v>Apr 2023</c:v>
+                  </c:pt>
+                  <c:pt idx="24">
+                    <c:v>May 2023</c:v>
+                  </c:pt>
+                  <c:pt idx="25">
+                    <c:v>Jun 2023</c:v>
+                  </c:pt>
+                  <c:pt idx="26">
+                    <c:v>Jul 2023</c:v>
+                  </c:pt>
+                  <c:pt idx="27">
+                    <c:v>Aug 2023</c:v>
+                  </c:pt>
+                  <c:pt idx="28">
+                    <c:v>Sep 2023</c:v>
+                  </c:pt>
+                  <c:pt idx="29">
+                    <c:v>Oct 2023</c:v>
+                  </c:pt>
+                  <c:pt idx="30">
+                    <c:v>Nov 2023</c:v>
+                  </c:pt>
+                  <c:pt idx="31">
+                    <c:v>Dec 2023</c:v>
+                  </c:pt>
+                  <c:pt idx="32">
+                    <c:v>Jan 2024</c:v>
+                  </c:pt>
+                  <c:pt idx="33">
+                    <c:v>Feb 2024</c:v>
+                  </c:pt>
+                  <c:pt idx="34">
+                    <c:v>Mar 2024</c:v>
+                  </c:pt>
+                  <c:pt idx="35">
+                    <c:v>Apr 2024</c:v>
+                  </c:pt>
+                  <c:pt idx="36">
+                    <c:v>May 2024</c:v>
+                  </c:pt>
+                  <c:pt idx="37">
+                    <c:v>Jun 2024</c:v>
+                  </c:pt>
+                  <c:pt idx="38">
+                    <c:v>Jul 2024</c:v>
+                  </c:pt>
+                  <c:pt idx="39">
+                    <c:v>Aug 2024</c:v>
+                  </c:pt>
+                  <c:pt idx="40">
+                    <c:v>Sep 2024</c:v>
+                  </c:pt>
+                  <c:pt idx="41">
+                    <c:v>Oct 2024</c:v>
+                  </c:pt>
+                  <c:pt idx="42">
+                    <c:v>Nov 2024</c:v>
+                  </c:pt>
+                  <c:pt idx="43">
+                    <c:v>Dec 2024</c:v>
+                  </c:pt>
+                  <c:pt idx="44">
+                    <c:v>Jan 2025</c:v>
+                  </c:pt>
+                  <c:pt idx="45">
+                    <c:v>Feb 2025</c:v>
+                  </c:pt>
+                  <c:pt idx="46">
+                    <c:v>Mar 2025</c:v>
+                  </c:pt>
+                  <c:pt idx="47">
+                    <c:v>Apr 2025</c:v>
+                  </c:pt>
+                  <c:pt idx="48">
+                    <c:v>May 2025</c:v>
+                  </c:pt>
+                  <c:pt idx="49">
+                    <c:v>Jun 2025</c:v>
+                  </c:pt>
+                  <c:pt idx="50">
                     <c:v>Jul 2025</c:v>
                   </c:pt>
-                  <c:pt idx="1">
+                  <c:pt idx="51">
                     <c:v>Aug 2025</c:v>
                   </c:pt>
-                  <c:pt idx="2">
+                  <c:pt idx="52">
                     <c:v>Sep 2025</c:v>
                   </c:pt>
-                  <c:pt idx="3">
+                  <c:pt idx="53">
                     <c:v>Oct 2025</c:v>
                   </c:pt>
-                  <c:pt idx="4">
+                  <c:pt idx="54">
                     <c:v>Nov 2025</c:v>
                   </c:pt>
-                  <c:pt idx="5">
+                  <c:pt idx="55">
                     <c:v>Dec 2025</c:v>
                   </c:pt>
-                  <c:pt idx="6">
+                  <c:pt idx="56">
                     <c:v>Jan 2026</c:v>
                   </c:pt>
-                  <c:pt idx="7">
+                  <c:pt idx="57">
                     <c:v>Feb 2026</c:v>
                   </c:pt>
-                  <c:pt idx="8">
+                  <c:pt idx="58">
                     <c:v>Mar 2026</c:v>
                   </c:pt>
-                  <c:pt idx="9">
+                  <c:pt idx="59">
                     <c:v>Apr 2026</c:v>
                   </c:pt>
                 </c:lvl>
@@ -229,39 +379,189 @@
           </c:cat>
           <c:val>
             <c:numRef>
-              <c:f>Sheet1!$B$2:$B$11</c:f>
+              <c:f>Sheet1!$B$2:$B$61</c:f>
               <c:numCache>
                 <c:formatCode>General</c:formatCode>
-                <c:ptCount val="10"/>
+                <c:ptCount val="60"/>
                 <c:pt idx="0">
                   <c:v>100</c:v>
                 </c:pt>
                 <c:pt idx="1">
-                  <c:v>100.4</c:v>
+                  <c:v>100.09</c:v>
                 </c:pt>
                 <c:pt idx="2">
-                  <c:v>100.79</c:v>
+                  <c:v>100.27</c:v>
                 </c:pt>
                 <c:pt idx="3">
-                  <c:v>101.19</c:v>
+                  <c:v>100.45</c:v>
                 </c:pt>
                 <c:pt idx="4">
-                  <c:v>101.59</c:v>
+                  <c:v>100.48</c:v>
                 </c:pt>
                 <c:pt idx="5">
-                  <c:v>101.98</c:v>
+                  <c:v>100.55</c:v>
                 </c:pt>
                 <c:pt idx="6">
-                  <c:v>102.37</c:v>
+                  <c:v>100.66</c:v>
                 </c:pt>
                 <c:pt idx="7">
-                  <c:v>102.75</c:v>
+                  <c:v>100.65</c:v>
                 </c:pt>
                 <c:pt idx="8">
-                  <c:v>103.14</c:v>
+                  <c:v>100.69</c:v>
                 </c:pt>
                 <c:pt idx="9">
-                  <c:v>103.52</c:v>
+                  <c:v>100.75</c:v>
+                </c:pt>
+                <c:pt idx="10">
+                  <c:v>100.82</c:v>
+                </c:pt>
+                <c:pt idx="11">
+                  <c:v>100.92</c:v>
+                </c:pt>
+                <c:pt idx="12">
+                  <c:v>101.05</c:v>
+                </c:pt>
+                <c:pt idx="13">
+                  <c:v>101.13</c:v>
+                </c:pt>
+                <c:pt idx="14">
+                  <c:v>101.28</c:v>
+                </c:pt>
+                <c:pt idx="15">
+                  <c:v>101.5</c:v>
+                </c:pt>
+                <c:pt idx="16">
+                  <c:v>101.73</c:v>
+                </c:pt>
+                <c:pt idx="17">
+                  <c:v>101.97</c:v>
+                </c:pt>
+                <c:pt idx="18">
+                  <c:v>102.27</c:v>
+                </c:pt>
+                <c:pt idx="19">
+                  <c:v>102.54</c:v>
+                </c:pt>
+                <c:pt idx="20">
+                  <c:v>102.84</c:v>
+                </c:pt>
+                <c:pt idx="21">
+                  <c:v>103.2</c:v>
+                </c:pt>
+                <c:pt idx="22">
+                  <c:v>103.62</c:v>
+                </c:pt>
+                <c:pt idx="23">
+                  <c:v>104.02</c:v>
+                </c:pt>
+                <c:pt idx="24">
+                  <c:v>104.52</c:v>
+                </c:pt>
+                <c:pt idx="25">
+                  <c:v>104.99</c:v>
+                </c:pt>
+                <c:pt idx="26">
+                  <c:v>105.48</c:v>
+                </c:pt>
+                <c:pt idx="27">
+                  <c:v>105.99</c:v>
+                </c:pt>
+                <c:pt idx="28">
+                  <c:v>106.48</c:v>
+                </c:pt>
+                <c:pt idx="29">
+                  <c:v>106.98</c:v>
+                </c:pt>
+                <c:pt idx="30">
+                  <c:v>107.46</c:v>
+                </c:pt>
+                <c:pt idx="31">
+                  <c:v>107.97</c:v>
+                </c:pt>
+                <c:pt idx="32">
+                  <c:v>108.48</c:v>
+                </c:pt>
+                <c:pt idx="33">
+                  <c:v>108.98</c:v>
+                </c:pt>
+                <c:pt idx="34">
+                  <c:v>109.39</c:v>
+                </c:pt>
+                <c:pt idx="35">
+                  <c:v>109.86</c:v>
+                </c:pt>
+                <c:pt idx="36">
+                  <c:v>110.23</c:v>
+                </c:pt>
+                <c:pt idx="37">
+                  <c:v>110.61</c:v>
+                </c:pt>
+                <c:pt idx="38">
+                  <c:v>111</c:v>
+                </c:pt>
+                <c:pt idx="39">
+                  <c:v>111.41</c:v>
+                </c:pt>
+                <c:pt idx="40">
+                  <c:v>111.81</c:v>
+                </c:pt>
+                <c:pt idx="41">
+                  <c:v>112.18</c:v>
+                </c:pt>
+                <c:pt idx="42">
+                  <c:v>112.57</c:v>
+                </c:pt>
+                <c:pt idx="43">
+                  <c:v>112.9</c:v>
+                </c:pt>
+                <c:pt idx="44">
+                  <c:v>113.18</c:v>
+                </c:pt>
+                <c:pt idx="45">
+                  <c:v>113.48</c:v>
+                </c:pt>
+                <c:pt idx="46">
+                  <c:v>113.9</c:v>
+                </c:pt>
+                <c:pt idx="47">
+                  <c:v>114.27</c:v>
+                </c:pt>
+                <c:pt idx="48">
+                  <c:v>114.67</c:v>
+                </c:pt>
+                <c:pt idx="49">
+                  <c:v>115.21</c:v>
+                </c:pt>
+                <c:pt idx="50">
+                  <c:v>115.76</c:v>
+                </c:pt>
+                <c:pt idx="51">
+                  <c:v>116.33</c:v>
+                </c:pt>
+                <c:pt idx="52">
+                  <c:v>116.9</c:v>
+                </c:pt>
+                <c:pt idx="53">
+                  <c:v>117.46</c:v>
+                </c:pt>
+                <c:pt idx="54">
+                  <c:v>117.99</c:v>
+                </c:pt>
+                <c:pt idx="55">
+                  <c:v>118.54</c:v>
+                </c:pt>
+                <c:pt idx="56">
+                  <c:v>119.02</c:v>
+                </c:pt>
+                <c:pt idx="57">
+                  <c:v>119.5</c:v>
+                </c:pt>
+                <c:pt idx="58">
+                  <c:v>119.99</c:v>
+                </c:pt>
+                <c:pt idx="59">
+                  <c:v>120.49</c:v>
                 </c:pt>
               </c:numCache>
             </c:numRef>
@@ -277,7 +577,7 @@
               <c:strCache>
                 <c:ptCount val="1"/>
                 <c:pt idx="0">
-                  <c:v>LIQUIDEZ DÓLAR</c:v>
+                  <c:v>Competencia Relevante (*)</c:v>
                 </c:pt>
               </c:strCache>
             </c:strRef>
@@ -339,38 +639,188 @@
           </c:marker>
           <c:cat>
             <c:multiLvlStrRef>
-              <c:f>Sheet1!$A$2:$A$11</c:f>
+              <c:f>Sheet1!$A$2:$A$61</c:f>
               <c:multiLvlStrCache>
-                <c:ptCount val="10"/>
+                <c:ptCount val="60"/>
                 <c:lvl>
                   <c:pt idx="0">
+                    <c:v>May 2021</c:v>
+                  </c:pt>
+                  <c:pt idx="1">
+                    <c:v>Jun 2021</c:v>
+                  </c:pt>
+                  <c:pt idx="2">
+                    <c:v>Jul 2021</c:v>
+                  </c:pt>
+                  <c:pt idx="3">
+                    <c:v>Aug 2021</c:v>
+                  </c:pt>
+                  <c:pt idx="4">
+                    <c:v>Sep 2021</c:v>
+                  </c:pt>
+                  <c:pt idx="5">
+                    <c:v>Oct 2021</c:v>
+                  </c:pt>
+                  <c:pt idx="6">
+                    <c:v>Nov 2021</c:v>
+                  </c:pt>
+                  <c:pt idx="7">
+                    <c:v>Dec 2021</c:v>
+                  </c:pt>
+                  <c:pt idx="8">
+                    <c:v>Jan 2022</c:v>
+                  </c:pt>
+                  <c:pt idx="9">
+                    <c:v>Feb 2022</c:v>
+                  </c:pt>
+                  <c:pt idx="10">
+                    <c:v>Mar 2022</c:v>
+                  </c:pt>
+                  <c:pt idx="11">
+                    <c:v>Apr 2022</c:v>
+                  </c:pt>
+                  <c:pt idx="12">
+                    <c:v>May 2022</c:v>
+                  </c:pt>
+                  <c:pt idx="13">
+                    <c:v>Jun 2022</c:v>
+                  </c:pt>
+                  <c:pt idx="14">
+                    <c:v>Jul 2022</c:v>
+                  </c:pt>
+                  <c:pt idx="15">
+                    <c:v>Aug 2022</c:v>
+                  </c:pt>
+                  <c:pt idx="16">
+                    <c:v>Sep 2022</c:v>
+                  </c:pt>
+                  <c:pt idx="17">
+                    <c:v>Oct 2022</c:v>
+                  </c:pt>
+                  <c:pt idx="18">
+                    <c:v>Nov 2022</c:v>
+                  </c:pt>
+                  <c:pt idx="19">
+                    <c:v>Dec 2022</c:v>
+                  </c:pt>
+                  <c:pt idx="20">
+                    <c:v>Jan 2023</c:v>
+                  </c:pt>
+                  <c:pt idx="21">
+                    <c:v>Feb 2023</c:v>
+                  </c:pt>
+                  <c:pt idx="22">
+                    <c:v>Mar 2023</c:v>
+                  </c:pt>
+                  <c:pt idx="23">
+                    <c:v>Apr 2023</c:v>
+                  </c:pt>
+                  <c:pt idx="24">
+                    <c:v>May 2023</c:v>
+                  </c:pt>
+                  <c:pt idx="25">
+                    <c:v>Jun 2023</c:v>
+                  </c:pt>
+                  <c:pt idx="26">
+                    <c:v>Jul 2023</c:v>
+                  </c:pt>
+                  <c:pt idx="27">
+                    <c:v>Aug 2023</c:v>
+                  </c:pt>
+                  <c:pt idx="28">
+                    <c:v>Sep 2023</c:v>
+                  </c:pt>
+                  <c:pt idx="29">
+                    <c:v>Oct 2023</c:v>
+                  </c:pt>
+                  <c:pt idx="30">
+                    <c:v>Nov 2023</c:v>
+                  </c:pt>
+                  <c:pt idx="31">
+                    <c:v>Dec 2023</c:v>
+                  </c:pt>
+                  <c:pt idx="32">
+                    <c:v>Jan 2024</c:v>
+                  </c:pt>
+                  <c:pt idx="33">
+                    <c:v>Feb 2024</c:v>
+                  </c:pt>
+                  <c:pt idx="34">
+                    <c:v>Mar 2024</c:v>
+                  </c:pt>
+                  <c:pt idx="35">
+                    <c:v>Apr 2024</c:v>
+                  </c:pt>
+                  <c:pt idx="36">
+                    <c:v>May 2024</c:v>
+                  </c:pt>
+                  <c:pt idx="37">
+                    <c:v>Jun 2024</c:v>
+                  </c:pt>
+                  <c:pt idx="38">
+                    <c:v>Jul 2024</c:v>
+                  </c:pt>
+                  <c:pt idx="39">
+                    <c:v>Aug 2024</c:v>
+                  </c:pt>
+                  <c:pt idx="40">
+                    <c:v>Sep 2024</c:v>
+                  </c:pt>
+                  <c:pt idx="41">
+                    <c:v>Oct 2024</c:v>
+                  </c:pt>
+                  <c:pt idx="42">
+                    <c:v>Nov 2024</c:v>
+                  </c:pt>
+                  <c:pt idx="43">
+                    <c:v>Dec 2024</c:v>
+                  </c:pt>
+                  <c:pt idx="44">
+                    <c:v>Jan 2025</c:v>
+                  </c:pt>
+                  <c:pt idx="45">
+                    <c:v>Feb 2025</c:v>
+                  </c:pt>
+                  <c:pt idx="46">
+                    <c:v>Mar 2025</c:v>
+                  </c:pt>
+                  <c:pt idx="47">
+                    <c:v>Apr 2025</c:v>
+                  </c:pt>
+                  <c:pt idx="48">
+                    <c:v>May 2025</c:v>
+                  </c:pt>
+                  <c:pt idx="49">
+                    <c:v>Jun 2025</c:v>
+                  </c:pt>
+                  <c:pt idx="50">
                     <c:v>Jul 2025</c:v>
                   </c:pt>
-                  <c:pt idx="1">
+                  <c:pt idx="51">
                     <c:v>Aug 2025</c:v>
                   </c:pt>
-                  <c:pt idx="2">
+                  <c:pt idx="52">
                     <c:v>Sep 2025</c:v>
                   </c:pt>
-                  <c:pt idx="3">
+                  <c:pt idx="53">
                     <c:v>Oct 2025</c:v>
                   </c:pt>
-                  <c:pt idx="4">
+                  <c:pt idx="54">
                     <c:v>Nov 2025</c:v>
                   </c:pt>
-                  <c:pt idx="5">
+                  <c:pt idx="55">
                     <c:v>Dec 2025</c:v>
                   </c:pt>
-                  <c:pt idx="6">
+                  <c:pt idx="56">
                     <c:v>Jan 2026</c:v>
                   </c:pt>
-                  <c:pt idx="7">
+                  <c:pt idx="57">
                     <c:v>Feb 2026</c:v>
                   </c:pt>
-                  <c:pt idx="8">
+                  <c:pt idx="58">
                     <c:v>Mar 2026</c:v>
                   </c:pt>
-                  <c:pt idx="9">
+                  <c:pt idx="59">
                     <c:v>Apr 2026</c:v>
                   </c:pt>
                 </c:lvl>
@@ -379,189 +829,189 @@
           </c:cat>
           <c:val>
             <c:numRef>
-              <c:f>Sheet1!$C$2:$C$11</c:f>
+              <c:f>Sheet1!$C$2:$C$61</c:f>
               <c:numCache>
                 <c:formatCode>General</c:formatCode>
-                <c:ptCount val="10"/>
+                <c:ptCount val="60"/>
                 <c:pt idx="0">
                   <c:v>100</c:v>
                 </c:pt>
                 <c:pt idx="1">
-                  <c:v>100.49</c:v>
+                  <c:v>100</c:v>
                 </c:pt>
                 <c:pt idx="2">
-                  <c:v>100.98</c:v>
+                  <c:v>100</c:v>
                 </c:pt>
                 <c:pt idx="3">
-                  <c:v>101.47</c:v>
+                  <c:v>100</c:v>
                 </c:pt>
                 <c:pt idx="4">
-                  <c:v>101.93</c:v>
+                  <c:v>100.01</c:v>
                 </c:pt>
                 <c:pt idx="5">
-                  <c:v>102.4</c:v>
+                  <c:v>100.01</c:v>
                 </c:pt>
                 <c:pt idx="6">
-                  <c:v>102.82</c:v>
+                  <c:v>100.01</c:v>
                 </c:pt>
                 <c:pt idx="7">
-                  <c:v>103.23</c:v>
+                  <c:v>100.01</c:v>
                 </c:pt>
                 <c:pt idx="8">
-                  <c:v>103.65</c:v>
+                  <c:v>100.02</c:v>
                 </c:pt>
                 <c:pt idx="9">
+                  <c:v>100.02</c:v>
+                </c:pt>
+                <c:pt idx="10">
+                  <c:v>100.03</c:v>
+                </c:pt>
+                <c:pt idx="11">
+                  <c:v>100.04</c:v>
+                </c:pt>
+                <c:pt idx="12">
+                  <c:v>100.07</c:v>
+                </c:pt>
+                <c:pt idx="13">
+                  <c:v>100.11</c:v>
+                </c:pt>
+                <c:pt idx="14">
+                  <c:v>100.17</c:v>
+                </c:pt>
+                <c:pt idx="15">
+                  <c:v>100.27</c:v>
+                </c:pt>
+                <c:pt idx="16">
+                  <c:v>100.42</c:v>
+                </c:pt>
+                <c:pt idx="17">
+                  <c:v>100.58</c:v>
+                </c:pt>
+                <c:pt idx="18">
+                  <c:v>100.81</c:v>
+                </c:pt>
+                <c:pt idx="19">
+                  <c:v>101.08</c:v>
+                </c:pt>
+                <c:pt idx="20">
+                  <c:v>101.43</c:v>
+                </c:pt>
+                <c:pt idx="21">
+                  <c:v>101.75</c:v>
+                </c:pt>
+                <c:pt idx="22">
+                  <c:v>102.12</c:v>
+                </c:pt>
+                <c:pt idx="23">
+                  <c:v>102.46</c:v>
+                </c:pt>
+                <c:pt idx="24">
+                  <c:v>102.87</c:v>
+                </c:pt>
+                <c:pt idx="25">
+                  <c:v>103.26</c:v>
+                </c:pt>
+                <c:pt idx="26">
+                  <c:v>103.66</c:v>
+                </c:pt>
+                <c:pt idx="27">
                   <c:v>104.09</c:v>
                 </c:pt>
-              </c:numCache>
-            </c:numRef>
-          </c:val>
-          <c:smooth val="0"/>
-        </c:ser>
-        <c:ser>
-          <c:idx val="2"/>
-          <c:order val="2"/>
-          <c:tx>
-            <c:strRef>
-              <c:f>Sheet1!$D$1</c:f>
-              <c:strCache>
-                <c:ptCount val="1"/>
-                <c:pt idx="0">
-                  <c:v>Competencia Relevante (*)</c:v>
+                <c:pt idx="28">
+                  <c:v>104.49</c:v>
                 </c:pt>
-              </c:strCache>
-            </c:strRef>
-          </c:tx>
-          <c:spPr>
-            <a:solidFill>
-              <a:srgbClr val="555555"/>
-            </a:solidFill>
-            <a:ln w="15240" cap="flat">
-              <a:solidFill>
-                <a:srgbClr val="555555"/>
-              </a:solidFill>
-              <a:prstDash val="solid"/>
-              <a:round/>
-            </a:ln>
-            <a:effectLst/>
-          </c:spPr>
-          <c:invertIfNegative val="0"/>
-          <c:dLbls>
-            <c:numFmt formatCode="#,##0" sourceLinked="0"/>
-            <c:txPr>
-              <a:bodyPr/>
-              <a:lstStyle/>
-              <a:p>
-                <a:pPr>
-                  <a:defRPr b="0" i="0" strike="noStrike" sz="1200" u="none">
-                    <a:solidFill>
-                      <a:srgbClr val="000000"/>
-                    </a:solidFill>
-                    <a:latin typeface="Arial"/>
-                  </a:defRPr>
-                </a:pPr>
-              </a:p>
-            </c:txPr>
-            <c:showLegendKey val="0"/>
-            <c:showVal val="0"/>
-            <c:showCatName val="0"/>
-            <c:showSerName val="0"/>
-            <c:showPercent val="0"/>
-            <c:showBubbleSize val="0"/>
-            <c:showLeaderLines val="0"/>
-          </c:dLbls>
-          <c:marker>
-            <c:symbol val="circle"/>
-            <c:size val="6"/>
-            <c:spPr>
-              <a:solidFill>
-                <a:srgbClr val="555555"/>
-              </a:solidFill>
-              <a:ln w="9525" cap="flat">
-                <a:solidFill>
-                  <a:srgbClr val="555555"/>
-                </a:solidFill>
-                <a:prstDash val="solid"/>
-                <a:round/>
-              </a:ln>
-              <a:effectLst/>
-            </c:spPr>
-          </c:marker>
-          <c:cat>
-            <c:multiLvlStrRef>
-              <c:f>Sheet1!$A$2:$A$11</c:f>
-              <c:multiLvlStrCache>
-                <c:ptCount val="10"/>
-                <c:lvl>
-                  <c:pt idx="0">
-                    <c:v>Jul 2025</c:v>
-                  </c:pt>
-                  <c:pt idx="1">
-                    <c:v>Aug 2025</c:v>
-                  </c:pt>
-                  <c:pt idx="2">
-                    <c:v>Sep 2025</c:v>
-                  </c:pt>
-                  <c:pt idx="3">
-                    <c:v>Oct 2025</c:v>
-                  </c:pt>
-                  <c:pt idx="4">
-                    <c:v>Nov 2025</c:v>
-                  </c:pt>
-                  <c:pt idx="5">
-                    <c:v>Dec 2025</c:v>
-                  </c:pt>
-                  <c:pt idx="6">
-                    <c:v>Jan 2026</c:v>
-                  </c:pt>
-                  <c:pt idx="7">
-                    <c:v>Feb 2026</c:v>
-                  </c:pt>
-                  <c:pt idx="8">
-                    <c:v>Mar 2026</c:v>
-                  </c:pt>
-                  <c:pt idx="9">
-                    <c:v>Apr 2026</c:v>
-                  </c:pt>
-                </c:lvl>
-              </c:multiLvlStrCache>
-            </c:multiLvlStrRef>
-          </c:cat>
-          <c:val>
-            <c:numRef>
-              <c:f>Sheet1!$D$2:$D$11</c:f>
-              <c:numCache>
-                <c:formatCode>General</c:formatCode>
-                <c:ptCount val="10"/>
-                <c:pt idx="0">
-                  <c:v>100</c:v>
+                <c:pt idx="29">
+                  <c:v>104.91</c:v>
                 </c:pt>
-                <c:pt idx="1">
-                  <c:v>100.4</c:v>
+                <c:pt idx="30">
+                  <c:v>105.27</c:v>
                 </c:pt>
-                <c:pt idx="2">
-                  <c:v>100.82</c:v>
+                <c:pt idx="31">
+                  <c:v>105.69</c:v>
                 </c:pt>
-                <c:pt idx="3">
-                  <c:v>101.23</c:v>
+                <c:pt idx="32">
+                  <c:v>106.09</c:v>
                 </c:pt>
-                <c:pt idx="4">
-                  <c:v>101.66</c:v>
+                <c:pt idx="33">
+                  <c:v>106.47</c:v>
                 </c:pt>
-                <c:pt idx="5">
-                  <c:v>102.56</c:v>
+                <c:pt idx="34">
+                  <c:v>106.82</c:v>
                 </c:pt>
-                <c:pt idx="6">
-                  <c:v>102.56</c:v>
+                <c:pt idx="35">
+                  <c:v>107.24</c:v>
                 </c:pt>
-                <c:pt idx="7">
-                  <c:v>102.91</c:v>
+                <c:pt idx="36">
+                  <c:v>107.63</c:v>
                 </c:pt>
-                <c:pt idx="8">
-                  <c:v>103.32</c:v>
+                <c:pt idx="37">
+                  <c:v>108.02</c:v>
                 </c:pt>
-                <c:pt idx="9">
-                  <c:v>103.72</c:v>
+                <c:pt idx="38">
+                  <c:v>108.41</c:v>
+                </c:pt>
+                <c:pt idx="39">
+                  <c:v>108.81</c:v>
+                </c:pt>
+                <c:pt idx="40">
+                  <c:v>109.18</c:v>
+                </c:pt>
+                <c:pt idx="41">
+                  <c:v>109.55</c:v>
+                </c:pt>
+                <c:pt idx="42">
+                  <c:v>109.89</c:v>
+                </c:pt>
+                <c:pt idx="43">
+                  <c:v>110.24</c:v>
+                </c:pt>
+                <c:pt idx="44">
+                  <c:v>110.58</c:v>
+                </c:pt>
+                <c:pt idx="45">
+                  <c:v>110.88</c:v>
+                </c:pt>
+                <c:pt idx="46">
+                  <c:v>111.21</c:v>
+                </c:pt>
+                <c:pt idx="47">
+                  <c:v>111.53</c:v>
+                </c:pt>
+                <c:pt idx="48">
+                  <c:v>111.86</c:v>
+                </c:pt>
+                <c:pt idx="49">
+                  <c:v>112.18</c:v>
+                </c:pt>
+                <c:pt idx="50">
+                  <c:v>112.51</c:v>
+                </c:pt>
+                <c:pt idx="51">
+                  <c:v>112.85</c:v>
+                </c:pt>
+                <c:pt idx="52">
+                  <c:v>113.18</c:v>
+                </c:pt>
+                <c:pt idx="53">
+                  <c:v>113.51</c:v>
+                </c:pt>
+                <c:pt idx="54">
+                  <c:v>113.83</c:v>
+                </c:pt>
+                <c:pt idx="55">
+                  <c:v>114.16</c:v>
+                </c:pt>
+                <c:pt idx="56">
+                  <c:v>114.49</c:v>
+                </c:pt>
+                <c:pt idx="57">
+                  <c:v>114.78</c:v>
+                </c:pt>
+                <c:pt idx="58">
+                  <c:v>115.09</c:v>
+                </c:pt>
+                <c:pt idx="59">
+                  <c:v>115.39</c:v>
                 </c:pt>
               </c:numCache>
             </c:numRef>
@@ -637,7 +1087,7 @@
         <c:auto val="1"/>
         <c:lblAlgn val="ctr"/>
         <c:noMultiLvlLbl val="1"/>
-        <c:tickLblSkip val="1"/>
+        <c:tickLblSkip val="6"/>
       </c:catAx>
       <c:valAx>
         <c:axId val="2094734552"/>
@@ -3113,7 +3563,7 @@
                 <a:ea typeface="Calibri" pitchFamily="34" charset="-122"/>
                 <a:cs typeface="Calibri" pitchFamily="34" charset="-120"/>
               </a:rPr>
-              <a:t>prueba 13 USD</a:t>
+              <a:t>prueba USD</a:t>
             </a:r>
             <a:endParaRPr lang="en-US" sz="800" dirty="0"/>
           </a:p>
@@ -3783,7 +4233,7 @@
                           <a:ea typeface="Calibri" pitchFamily="34" charset="-122"/>
                           <a:cs typeface="Calibri" pitchFamily="34" charset="-120"/>
                         </a:rPr>
-                        <a:t>0.39%</a:t>
+                        <a:t>3.16%</a:t>
                       </a:r>
                       <a:endParaRPr lang="en-US" sz="750" dirty="0">
                         <a:latin typeface="Calibri" charset="0"/>
@@ -3851,7 +4301,7 @@
                           <a:ea typeface="Calibri" pitchFamily="34" charset="-122"/>
                           <a:cs typeface="Calibri" pitchFamily="34" charset="-120"/>
                         </a:rPr>
-                        <a:t>1.13%</a:t>
+                        <a:t>0.79%</a:t>
                       </a:r>
                       <a:endParaRPr lang="en-US" sz="750" dirty="0">
                         <a:latin typeface="Calibri" charset="0"/>
@@ -3919,7 +4369,7 @@
                           <a:ea typeface="Calibri" pitchFamily="34" charset="-122"/>
                           <a:cs typeface="Calibri" pitchFamily="34" charset="-120"/>
                         </a:rPr>
-                        <a:t>2.46%</a:t>
+                        <a:t>1.66%</a:t>
                       </a:r>
                       <a:endParaRPr lang="en-US" sz="750" dirty="0">
                         <a:latin typeface="Calibri" charset="0"/>
@@ -3987,7 +4437,7 @@
                           <a:ea typeface="Calibri" pitchFamily="34" charset="-122"/>
                           <a:cs typeface="Calibri" pitchFamily="34" charset="-120"/>
                         </a:rPr>
-                        <a:t>4.92%</a:t>
+                        <a:t>3.46%</a:t>
                       </a:r>
                       <a:endParaRPr lang="en-US" sz="750" dirty="0">
                         <a:latin typeface="Calibri" charset="0"/>
@@ -4055,7 +4505,7 @@
                           <a:ea typeface="Calibri" pitchFamily="34" charset="-122"/>
                           <a:cs typeface="Calibri" pitchFamily="34" charset="-120"/>
                         </a:rPr>
-                        <a:t>3.39%</a:t>
+                        <a:t>2.37%</a:t>
                       </a:r>
                       <a:endParaRPr lang="en-US" sz="750" dirty="0">
                         <a:latin typeface="Calibri" charset="0"/>
@@ -4193,7 +4643,7 @@
                           <a:ea typeface="Calibri" pitchFamily="34" charset="-122"/>
                           <a:cs typeface="Calibri" pitchFamily="34" charset="-120"/>
                         </a:rPr>
-                        <a:t>0.42%</a:t>
+                        <a:t>5.00%</a:t>
                       </a:r>
                       <a:endParaRPr lang="en-US" sz="750" dirty="0">
                         <a:latin typeface="Calibri" charset="0"/>
@@ -4397,7 +4847,7 @@
                           <a:ea typeface="Calibri" pitchFamily="34" charset="-122"/>
                           <a:cs typeface="Calibri" pitchFamily="34" charset="-120"/>
                         </a:rPr>
-                        <a:t>—</a:t>
+                        <a:t>5.44%</a:t>
                       </a:r>
                       <a:endParaRPr lang="en-US" sz="750" dirty="0">
                         <a:latin typeface="Calibri" charset="0"/>
@@ -5017,20 +5467,20 @@
               <a:tblPr/>
               <a:tblGrid>
                 <a:gridCol w="201168"/>
-                <a:gridCol w="822960"/>
-                <a:gridCol w="246888"/>
-                <a:gridCol w="246888"/>
-                <a:gridCol w="246888"/>
-                <a:gridCol w="246888"/>
-                <a:gridCol w="246888"/>
-                <a:gridCol w="246888"/>
-                <a:gridCol w="246888"/>
-                <a:gridCol w="246888"/>
-                <a:gridCol w="246888"/>
-                <a:gridCol w="246888"/>
-                <a:gridCol w="246888"/>
-                <a:gridCol w="246888"/>
-                <a:gridCol w="283464"/>
+                <a:gridCol w="804672"/>
+                <a:gridCol w="292608"/>
+                <a:gridCol w="292608"/>
+                <a:gridCol w="292608"/>
+                <a:gridCol w="292608"/>
+                <a:gridCol w="292608"/>
+                <a:gridCol w="292608"/>
+                <a:gridCol w="292608"/>
+                <a:gridCol w="292608"/>
+                <a:gridCol w="292608"/>
+                <a:gridCol w="292608"/>
+                <a:gridCol w="292608"/>
+                <a:gridCol w="292608"/>
+                <a:gridCol w="301752"/>
               </a:tblGrid>
               <a:tr h="123444">
                 <a:tc>
@@ -6903,7 +7353,7 @@
                           <a:ea typeface="Calibri" pitchFamily="34" charset="-122"/>
                           <a:cs typeface="Calibri" pitchFamily="34" charset="-120"/>
                         </a:rPr>
-                        <a:t>0.16%</a:t>
+                        <a:t>0.03%</a:t>
                       </a:r>
                       <a:endParaRPr lang="en-US" sz="500" dirty="0">
                         <a:latin typeface="Calibri" charset="0"/>
@@ -7814,7 +8264,7 @@
                           <a:ea typeface="Calibri" pitchFamily="34" charset="-122"/>
                           <a:cs typeface="Calibri" pitchFamily="34" charset="-120"/>
                         </a:rPr>
-                        <a:t>8.34%</a:t>
+                        <a:t>1.11%</a:t>
                       </a:r>
                       <a:endParaRPr lang="en-US" sz="500" dirty="0">
                         <a:latin typeface="Calibri" charset="0"/>
@@ -8791,7 +9241,7 @@
                           <a:ea typeface="Calibri" pitchFamily="34" charset="-122"/>
                           <a:cs typeface="Calibri" pitchFamily="34" charset="-120"/>
                         </a:rPr>
-                        <a:t>13.25%</a:t>
+                        <a:t>1.07%</a:t>
                       </a:r>
                       <a:endParaRPr lang="en-US" sz="500" dirty="0">
                         <a:latin typeface="Calibri" charset="0"/>
@@ -9757,7 +10207,7 @@
                           <a:ea typeface="Calibri" pitchFamily="34" charset="-122"/>
                           <a:cs typeface="Calibri" pitchFamily="34" charset="-120"/>
                         </a:rPr>
-                        <a:t>24.35%</a:t>
+                        <a:t>1.88%</a:t>
                       </a:r>
                       <a:endParaRPr lang="en-US" sz="500" dirty="0">
                         <a:latin typeface="Calibri" charset="0"/>
@@ -10734,7 +11184,7 @@
                           <a:ea typeface="Calibri" pitchFamily="34" charset="-122"/>
                           <a:cs typeface="Calibri" pitchFamily="34" charset="-120"/>
                         </a:rPr>
-                        <a:t>67.45%</a:t>
+                        <a:t>4.56%</a:t>
                       </a:r>
                       <a:endParaRPr lang="en-US" sz="500" dirty="0">
                         <a:latin typeface="Calibri" charset="0"/>
@@ -11700,7 +12150,7 @@
                           <a:ea typeface="Calibri" pitchFamily="34" charset="-122"/>
                           <a:cs typeface="Calibri" pitchFamily="34" charset="-120"/>
                         </a:rPr>
-                        <a:t>81.30%</a:t>
+                        <a:t>5.29%</a:t>
                       </a:r>
                       <a:endParaRPr lang="en-US" sz="500" dirty="0">
                         <a:latin typeface="Calibri" charset="0"/>
@@ -12677,7 +13127,7 @@
                           <a:ea typeface="Calibri" pitchFamily="34" charset="-122"/>
                           <a:cs typeface="Calibri" pitchFamily="34" charset="-120"/>
                         </a:rPr>
-                        <a:t>63.01%</a:t>
+                        <a:t>3.98%</a:t>
                       </a:r>
                       <a:endParaRPr lang="en-US" sz="500" dirty="0">
                         <a:latin typeface="Calibri" charset="0"/>
@@ -13643,7 +14093,7 @@
                           <a:ea typeface="Calibri" pitchFamily="34" charset="-122"/>
                           <a:cs typeface="Calibri" pitchFamily="34" charset="-120"/>
                         </a:rPr>
-                        <a:t>67.89%</a:t>
+                        <a:t>4.57%</a:t>
                       </a:r>
                       <a:endParaRPr lang="en-US" sz="500" dirty="0">
                         <a:latin typeface="Calibri" charset="0"/>
@@ -13840,7 +14290,7 @@
                           <a:ea typeface="Calibri" pitchFamily="34" charset="-122"/>
                           <a:cs typeface="Calibri" pitchFamily="34" charset="-120"/>
                         </a:rPr>
-                        <a:t>0.00%</a:t>
+                        <a:t>3.58%</a:t>
                       </a:r>
                       <a:endParaRPr lang="en-US" sz="500" dirty="0">
                         <a:latin typeface="Calibri" charset="0"/>
@@ -13905,7 +14355,7 @@
                           <a:ea typeface="Calibri" pitchFamily="34" charset="-122"/>
                           <a:cs typeface="Calibri" pitchFamily="34" charset="-120"/>
                         </a:rPr>
-                        <a:t>0.32%</a:t>
+                        <a:t>3.55%</a:t>
                       </a:r>
                       <a:endParaRPr lang="en-US" sz="500" dirty="0">
                         <a:latin typeface="Calibri" charset="0"/>
@@ -13970,7 +14420,7 @@
                           <a:ea typeface="Calibri" pitchFamily="34" charset="-122"/>
                           <a:cs typeface="Calibri" pitchFamily="34" charset="-120"/>
                         </a:rPr>
-                        <a:t>0.34%</a:t>
+                        <a:t>3.44%</a:t>
                       </a:r>
                       <a:endParaRPr lang="en-US" sz="500" dirty="0">
                         <a:latin typeface="Calibri" charset="0"/>
@@ -14035,7 +14485,7 @@
                           <a:ea typeface="Calibri" pitchFamily="34" charset="-122"/>
                           <a:cs typeface="Calibri" pitchFamily="34" charset="-120"/>
                         </a:rPr>
-                        <a:t>0.34%</a:t>
+                        <a:t>3.43%</a:t>
                       </a:r>
                       <a:endParaRPr lang="en-US" sz="500" dirty="0">
                         <a:latin typeface="Calibri" charset="0"/>
@@ -14100,7 +14550,7 @@
                           <a:ea typeface="Calibri" pitchFamily="34" charset="-122"/>
                           <a:cs typeface="Calibri" pitchFamily="34" charset="-120"/>
                         </a:rPr>
-                        <a:t>0.37%</a:t>
+                        <a:t>3.40%</a:t>
                       </a:r>
                       <a:endParaRPr lang="en-US" sz="500" dirty="0">
                         <a:latin typeface="Calibri" charset="0"/>
@@ -14165,7 +14615,7 @@
                           <a:ea typeface="Calibri" pitchFamily="34" charset="-122"/>
                           <a:cs typeface="Calibri" pitchFamily="34" charset="-120"/>
                         </a:rPr>
-                        <a:t>0.39%</a:t>
+                        <a:t>3.42%</a:t>
                       </a:r>
                       <a:endParaRPr lang="en-US" sz="500" dirty="0">
                         <a:latin typeface="Calibri" charset="0"/>
@@ -14230,7 +14680,7 @@
                           <a:ea typeface="Calibri" pitchFamily="34" charset="-122"/>
                           <a:cs typeface="Calibri" pitchFamily="34" charset="-120"/>
                         </a:rPr>
-                        <a:t>0.39%</a:t>
+                        <a:t>3.46%</a:t>
                       </a:r>
                       <a:endParaRPr lang="en-US" sz="500" dirty="0">
                         <a:latin typeface="Calibri" charset="0"/>
@@ -14295,7 +14745,7 @@
                           <a:ea typeface="Calibri" pitchFamily="34" charset="-122"/>
                           <a:cs typeface="Calibri" pitchFamily="34" charset="-120"/>
                         </a:rPr>
-                        <a:t>0.40%</a:t>
+                        <a:t>3.49%</a:t>
                       </a:r>
                       <a:endParaRPr lang="en-US" sz="500" dirty="0">
                         <a:latin typeface="Calibri" charset="0"/>
@@ -14360,7 +14810,7 @@
                           <a:ea typeface="Calibri" pitchFamily="34" charset="-122"/>
                           <a:cs typeface="Calibri" pitchFamily="34" charset="-120"/>
                         </a:rPr>
-                        <a:t>0.42%</a:t>
+                        <a:t>3.49%</a:t>
                       </a:r>
                       <a:endParaRPr lang="en-US" sz="500" dirty="0">
                         <a:latin typeface="Calibri" charset="0"/>
@@ -14425,7 +14875,7 @@
                           <a:ea typeface="Calibri" pitchFamily="34" charset="-122"/>
                           <a:cs typeface="Calibri" pitchFamily="34" charset="-120"/>
                         </a:rPr>
-                        <a:t>0.41%</a:t>
+                        <a:t>3.43%</a:t>
                       </a:r>
                       <a:endParaRPr lang="en-US" sz="500" dirty="0">
                         <a:latin typeface="Calibri" charset="0"/>
@@ -14490,7 +14940,7 @@
                           <a:ea typeface="Calibri" pitchFamily="34" charset="-122"/>
                           <a:cs typeface="Calibri" pitchFamily="34" charset="-120"/>
                         </a:rPr>
-                        <a:t>0.42%</a:t>
+                        <a:t>3.37%</a:t>
                       </a:r>
                       <a:endParaRPr lang="en-US" sz="500" dirty="0">
                         <a:latin typeface="Calibri" charset="0"/>
@@ -14555,7 +15005,7 @@
                           <a:ea typeface="Calibri" pitchFamily="34" charset="-122"/>
                           <a:cs typeface="Calibri" pitchFamily="34" charset="-120"/>
                         </a:rPr>
-                        <a:t>0.89%</a:t>
+                        <a:t>3.36%</a:t>
                       </a:r>
                       <a:endParaRPr lang="en-US" sz="500" dirty="0">
                         <a:latin typeface="Calibri" charset="0"/>
@@ -14620,7 +15070,7 @@
                           <a:ea typeface="Calibri" pitchFamily="34" charset="-122"/>
                           <a:cs typeface="Calibri" pitchFamily="34" charset="-120"/>
                         </a:rPr>
-                        <a:t>4.78%</a:t>
+                        <a:t>3.24%</a:t>
                       </a:r>
                       <a:endParaRPr lang="en-US" sz="500" dirty="0">
                         <a:latin typeface="Calibri" charset="0"/>
@@ -15261,7 +15711,7 @@
                           <a:ea typeface="Calibri" pitchFamily="34" charset="-122"/>
                           <a:cs typeface="Calibri" pitchFamily="34" charset="-120"/>
                         </a:rPr>
-                        <a:t>0.49%</a:t>
+                        <a:t>5.72%</a:t>
                       </a:r>
                       <a:endParaRPr lang="en-US" sz="500" dirty="0">
                         <a:latin typeface="Calibri" charset="0"/>
@@ -15326,7 +15776,7 @@
                           <a:ea typeface="Calibri" pitchFamily="34" charset="-122"/>
                           <a:cs typeface="Calibri" pitchFamily="34" charset="-120"/>
                         </a:rPr>
-                        <a:t>0.49%</a:t>
+                        <a:t>5.88%</a:t>
                       </a:r>
                       <a:endParaRPr lang="en-US" sz="500" dirty="0">
                         <a:latin typeface="Calibri" charset="0"/>
@@ -15391,7 +15841,7 @@
                           <a:ea typeface="Calibri" pitchFamily="34" charset="-122"/>
                           <a:cs typeface="Calibri" pitchFamily="34" charset="-120"/>
                         </a:rPr>
-                        <a:t>0.48%</a:t>
+                        <a:t>5.56%</a:t>
                       </a:r>
                       <a:endParaRPr lang="en-US" sz="500" dirty="0">
                         <a:latin typeface="Calibri" charset="0"/>
@@ -15456,7 +15906,7 @@
                           <a:ea typeface="Calibri" pitchFamily="34" charset="-122"/>
                           <a:cs typeface="Calibri" pitchFamily="34" charset="-120"/>
                         </a:rPr>
-                        <a:t>0.45%</a:t>
+                        <a:t>5.41%</a:t>
                       </a:r>
                       <a:endParaRPr lang="en-US" sz="500" dirty="0">
                         <a:latin typeface="Calibri" charset="0"/>
@@ -15521,7 +15971,7 @@
                           <a:ea typeface="Calibri" pitchFamily="34" charset="-122"/>
                           <a:cs typeface="Calibri" pitchFamily="34" charset="-120"/>
                         </a:rPr>
-                        <a:t>0.47%</a:t>
+                        <a:t>5.41%</a:t>
                       </a:r>
                       <a:endParaRPr lang="en-US" sz="500" dirty="0">
                         <a:latin typeface="Calibri" charset="0"/>
@@ -15586,7 +16036,7 @@
                           <a:ea typeface="Calibri" pitchFamily="34" charset="-122"/>
                           <a:cs typeface="Calibri" pitchFamily="34" charset="-120"/>
                         </a:rPr>
-                        <a:t>36.99%</a:t>
+                        <a:t>4.74%</a:t>
                       </a:r>
                       <a:endParaRPr lang="en-US" sz="500" dirty="0">
                         <a:latin typeface="Calibri" charset="0"/>
@@ -15783,7 +16233,7 @@
                           <a:ea typeface="Calibri" pitchFamily="34" charset="-122"/>
                           <a:cs typeface="Calibri" pitchFamily="34" charset="-120"/>
                         </a:rPr>
-                        <a:t>0.00%</a:t>
+                        <a:t>3.35%</a:t>
                       </a:r>
                       <a:endParaRPr lang="en-US" sz="500" dirty="0">
                         <a:latin typeface="Calibri" charset="0"/>
@@ -15848,7 +16298,7 @@
                           <a:ea typeface="Calibri" pitchFamily="34" charset="-122"/>
                           <a:cs typeface="Calibri" pitchFamily="34" charset="-120"/>
                         </a:rPr>
-                        <a:t>0.33%</a:t>
+                        <a:t>3.25%</a:t>
                       </a:r>
                       <a:endParaRPr lang="en-US" sz="500" dirty="0">
                         <a:latin typeface="Calibri" charset="0"/>
@@ -15913,7 +16363,7 @@
                           <a:ea typeface="Calibri" pitchFamily="34" charset="-122"/>
                           <a:cs typeface="Calibri" pitchFamily="34" charset="-120"/>
                         </a:rPr>
-                        <a:t>0.40%</a:t>
+                        <a:t>3.17%</a:t>
                       </a:r>
                       <a:endParaRPr lang="en-US" sz="500" dirty="0">
                         <a:latin typeface="Calibri" charset="0"/>
@@ -15978,7 +16428,7 @@
                           <a:ea typeface="Calibri" pitchFamily="34" charset="-122"/>
                           <a:cs typeface="Calibri" pitchFamily="34" charset="-120"/>
                         </a:rPr>
-                        <a:t>0.39%</a:t>
+                        <a:t>3.16%</a:t>
                       </a:r>
                       <a:endParaRPr lang="en-US" sz="500" dirty="0">
                         <a:latin typeface="Calibri" charset="0"/>
@@ -16661,7 +17111,7 @@
                           <a:ea typeface="Calibri" pitchFamily="34" charset="-122"/>
                           <a:cs typeface="Calibri" pitchFamily="34" charset="-120"/>
                         </a:rPr>
-                        <a:t>0.40%</a:t>
+                        <a:t>4.70%</a:t>
                       </a:r>
                       <a:endParaRPr lang="en-US" sz="500" dirty="0">
                         <a:latin typeface="Calibri" charset="0"/>
@@ -16726,7 +17176,7 @@
                           <a:ea typeface="Calibri" pitchFamily="34" charset="-122"/>
                           <a:cs typeface="Calibri" pitchFamily="34" charset="-120"/>
                         </a:rPr>
-                        <a:t>0.40%</a:t>
+                        <a:t>5.18%</a:t>
                       </a:r>
                       <a:endParaRPr lang="en-US" sz="500" dirty="0">
                         <a:latin typeface="Calibri" charset="0"/>
@@ -16791,7 +17241,7 @@
                           <a:ea typeface="Calibri" pitchFamily="34" charset="-122"/>
                           <a:cs typeface="Calibri" pitchFamily="34" charset="-120"/>
                         </a:rPr>
-                        <a:t>0.41%</a:t>
+                        <a:t>4.76%</a:t>
                       </a:r>
                       <a:endParaRPr lang="en-US" sz="500" dirty="0">
                         <a:latin typeface="Calibri" charset="0"/>
@@ -16856,7 +17306,7 @@
                           <a:ea typeface="Calibri" pitchFamily="34" charset="-122"/>
                           <a:cs typeface="Calibri" pitchFamily="34" charset="-120"/>
                         </a:rPr>
-                        <a:t>0.42%</a:t>
+                        <a:t>5.00%</a:t>
                       </a:r>
                       <a:endParaRPr lang="en-US" sz="500" dirty="0">
                         <a:latin typeface="Calibri" charset="0"/>

--- a/folletos/2026-04/pptx/FIP_VANTRUST_LIQUIDEZ_DOLAR.pptx
+++ b/folletos/2026-04/pptx/FIP_VANTRUST_LIQUIDEZ_DOLAR.pptx
@@ -3563,7 +3563,7 @@
                 <a:ea typeface="Calibri" pitchFamily="34" charset="-122"/>
                 <a:cs typeface="Calibri" pitchFamily="34" charset="-120"/>
               </a:rPr>
-              <a:t>prueba USD</a:t>
+              <a:t>prueba 13 USD</a:t>
             </a:r>
             <a:endParaRPr lang="en-US" sz="800" dirty="0"/>
           </a:p>

--- a/folletos/2026-04/pptx/FIP_VANTRUST_LIQUIDEZ_DOLAR.pptx
+++ b/folletos/2026-04/pptx/FIP_VANTRUST_LIQUIDEZ_DOLAR.pptx
@@ -127,7 +127,7 @@
               <c:strCache>
                 <c:ptCount val="1"/>
                 <c:pt idx="0">
-                  <c:v>LIQUIDEZ DÓLAR</c:v>
+                  <c:v>ICP Nom.</c:v>
                 </c:pt>
               </c:strCache>
             </c:strRef>
@@ -387,181 +387,181 @@
                   <c:v>100</c:v>
                 </c:pt>
                 <c:pt idx="1">
-                  <c:v>100.09</c:v>
+                  <c:v>100.03</c:v>
                 </c:pt>
                 <c:pt idx="2">
+                  <c:v>100.08</c:v>
+                </c:pt>
+                <c:pt idx="3">
+                  <c:v>100.14</c:v>
+                </c:pt>
+                <c:pt idx="4">
                   <c:v>100.27</c:v>
                 </c:pt>
-                <c:pt idx="3">
-                  <c:v>100.45</c:v>
-                </c:pt>
-                <c:pt idx="4">
-                  <c:v>100.48</c:v>
-                </c:pt>
                 <c:pt idx="5">
-                  <c:v>100.55</c:v>
+                  <c:v>100.47</c:v>
                 </c:pt>
                 <c:pt idx="6">
-                  <c:v>100.66</c:v>
+                  <c:v>100.69</c:v>
                 </c:pt>
                 <c:pt idx="7">
-                  <c:v>100.65</c:v>
+                  <c:v>101.01</c:v>
                 </c:pt>
                 <c:pt idx="8">
-                  <c:v>100.69</c:v>
+                  <c:v>101.36</c:v>
                 </c:pt>
                 <c:pt idx="9">
-                  <c:v>100.75</c:v>
+                  <c:v>101.79</c:v>
                 </c:pt>
                 <c:pt idx="10">
-                  <c:v>100.82</c:v>
+                  <c:v>102.28</c:v>
                 </c:pt>
                 <c:pt idx="11">
-                  <c:v>100.92</c:v>
+                  <c:v>102.84</c:v>
                 </c:pt>
                 <c:pt idx="12">
-                  <c:v>101.05</c:v>
+                  <c:v>103.57</c:v>
                 </c:pt>
                 <c:pt idx="13">
-                  <c:v>101.13</c:v>
+                  <c:v>104.33</c:v>
                 </c:pt>
                 <c:pt idx="14">
-                  <c:v>101.28</c:v>
+                  <c:v>105.13</c:v>
                 </c:pt>
                 <c:pt idx="15">
-                  <c:v>101.5</c:v>
+                  <c:v>106.07</c:v>
                 </c:pt>
                 <c:pt idx="16">
-                  <c:v>101.73</c:v>
+                  <c:v>107</c:v>
                 </c:pt>
                 <c:pt idx="17">
-                  <c:v>101.97</c:v>
+                  <c:v>107.92</c:v>
                 </c:pt>
                 <c:pt idx="18">
-                  <c:v>102.27</c:v>
+                  <c:v>109.04</c:v>
                 </c:pt>
                 <c:pt idx="19">
-                  <c:v>102.54</c:v>
+                  <c:v>110.07</c:v>
                 </c:pt>
                 <c:pt idx="20">
-                  <c:v>102.84</c:v>
+                  <c:v>111.17</c:v>
                 </c:pt>
                 <c:pt idx="21">
-                  <c:v>103.2</c:v>
+                  <c:v>112.15</c:v>
                 </c:pt>
                 <c:pt idx="22">
-                  <c:v>103.62</c:v>
+                  <c:v>113.24</c:v>
                 </c:pt>
                 <c:pt idx="23">
-                  <c:v>104.02</c:v>
+                  <c:v>114.24</c:v>
                 </c:pt>
                 <c:pt idx="24">
-                  <c:v>104.52</c:v>
+                  <c:v>115.42</c:v>
                 </c:pt>
                 <c:pt idx="25">
-                  <c:v>104.99</c:v>
+                  <c:v>116.51</c:v>
                 </c:pt>
                 <c:pt idx="26">
-                  <c:v>105.48</c:v>
+                  <c:v>117.64</c:v>
                 </c:pt>
                 <c:pt idx="27">
-                  <c:v>105.99</c:v>
+                  <c:v>118.68</c:v>
                 </c:pt>
                 <c:pt idx="28">
-                  <c:v>106.48</c:v>
+                  <c:v>119.61</c:v>
                 </c:pt>
                 <c:pt idx="29">
-                  <c:v>106.98</c:v>
+                  <c:v>120.62</c:v>
                 </c:pt>
                 <c:pt idx="30">
-                  <c:v>107.46</c:v>
+                  <c:v>121.53</c:v>
                 </c:pt>
                 <c:pt idx="31">
-                  <c:v>107.97</c:v>
+                  <c:v>122.39</c:v>
                 </c:pt>
                 <c:pt idx="32">
-                  <c:v>108.48</c:v>
+                  <c:v>123.29</c:v>
                 </c:pt>
                 <c:pt idx="33">
-                  <c:v>108.98</c:v>
+                  <c:v>124.04</c:v>
                 </c:pt>
                 <c:pt idx="34">
-                  <c:v>109.39</c:v>
+                  <c:v>124.74</c:v>
                 </c:pt>
                 <c:pt idx="35">
-                  <c:v>109.86</c:v>
+                  <c:v>125.5</c:v>
                 </c:pt>
                 <c:pt idx="36">
-                  <c:v>110.23</c:v>
+                  <c:v>126.2</c:v>
                 </c:pt>
                 <c:pt idx="37">
-                  <c:v>110.61</c:v>
+                  <c:v>126.78</c:v>
                 </c:pt>
                 <c:pt idx="38">
-                  <c:v>111</c:v>
+                  <c:v>127.45</c:v>
                 </c:pt>
                 <c:pt idx="39">
-                  <c:v>111.41</c:v>
+                  <c:v>128.06</c:v>
                 </c:pt>
                 <c:pt idx="40">
-                  <c:v>111.81</c:v>
+                  <c:v>128.67</c:v>
                 </c:pt>
                 <c:pt idx="41">
-                  <c:v>112.18</c:v>
+                  <c:v>129.25</c:v>
                 </c:pt>
                 <c:pt idx="42">
-                  <c:v>112.57</c:v>
+                  <c:v>129.82</c:v>
                 </c:pt>
                 <c:pt idx="43">
-                  <c:v>112.9</c:v>
+                  <c:v>130.4</c:v>
                 </c:pt>
                 <c:pt idx="44">
-                  <c:v>113.18</c:v>
+                  <c:v>130.98</c:v>
                 </c:pt>
                 <c:pt idx="45">
-                  <c:v>113.48</c:v>
+                  <c:v>131.49</c:v>
                 </c:pt>
                 <c:pt idx="46">
-                  <c:v>113.9</c:v>
+                  <c:v>132.06</c:v>
                 </c:pt>
                 <c:pt idx="47">
-                  <c:v>114.27</c:v>
+                  <c:v>132.61</c:v>
                 </c:pt>
                 <c:pt idx="48">
-                  <c:v>114.67</c:v>
+                  <c:v>133.16</c:v>
                 </c:pt>
                 <c:pt idx="49">
-                  <c:v>115.21</c:v>
+                  <c:v>133.73</c:v>
                 </c:pt>
                 <c:pt idx="50">
-                  <c:v>115.76</c:v>
+                  <c:v>134.31</c:v>
                 </c:pt>
                 <c:pt idx="51">
-                  <c:v>116.33</c:v>
+                  <c:v>134.83</c:v>
                 </c:pt>
                 <c:pt idx="52">
-                  <c:v>116.9</c:v>
+                  <c:v>135.55</c:v>
                 </c:pt>
                 <c:pt idx="53">
-                  <c:v>117.46</c:v>
+                  <c:v>135.93</c:v>
                 </c:pt>
                 <c:pt idx="54">
-                  <c:v>117.99</c:v>
+                  <c:v>136.45</c:v>
                 </c:pt>
                 <c:pt idx="55">
-                  <c:v>118.54</c:v>
+                  <c:v>137.02</c:v>
                 </c:pt>
                 <c:pt idx="56">
-                  <c:v>119.02</c:v>
+                  <c:v>137.55</c:v>
                 </c:pt>
                 <c:pt idx="57">
-                  <c:v>119.5</c:v>
+                  <c:v>138.05</c:v>
                 </c:pt>
                 <c:pt idx="58">
-                  <c:v>119.99</c:v>
+                  <c:v>138.59</c:v>
                 </c:pt>
                 <c:pt idx="59">
-                  <c:v>120.49</c:v>
+                  <c:v>103.33</c:v>
                 </c:pt>
               </c:numCache>
             </c:numRef>
@@ -577,7 +577,7 @@
               <c:strCache>
                 <c:ptCount val="1"/>
                 <c:pt idx="0">
-                  <c:v>Competencia Relevante (*)</c:v>
+                  <c:v>LIQUIDEZ DÓLAR</c:v>
                 </c:pt>
               </c:strCache>
             </c:strRef>
@@ -837,6 +837,456 @@
                   <c:v>100</c:v>
                 </c:pt>
                 <c:pt idx="1">
+                  <c:v>100.09</c:v>
+                </c:pt>
+                <c:pt idx="2">
+                  <c:v>100.27</c:v>
+                </c:pt>
+                <c:pt idx="3">
+                  <c:v>100.45</c:v>
+                </c:pt>
+                <c:pt idx="4">
+                  <c:v>100.48</c:v>
+                </c:pt>
+                <c:pt idx="5">
+                  <c:v>100.55</c:v>
+                </c:pt>
+                <c:pt idx="6">
+                  <c:v>100.66</c:v>
+                </c:pt>
+                <c:pt idx="7">
+                  <c:v>100.65</c:v>
+                </c:pt>
+                <c:pt idx="8">
+                  <c:v>100.69</c:v>
+                </c:pt>
+                <c:pt idx="9">
+                  <c:v>100.75</c:v>
+                </c:pt>
+                <c:pt idx="10">
+                  <c:v>100.82</c:v>
+                </c:pt>
+                <c:pt idx="11">
+                  <c:v>100.92</c:v>
+                </c:pt>
+                <c:pt idx="12">
+                  <c:v>101.05</c:v>
+                </c:pt>
+                <c:pt idx="13">
+                  <c:v>101.13</c:v>
+                </c:pt>
+                <c:pt idx="14">
+                  <c:v>101.28</c:v>
+                </c:pt>
+                <c:pt idx="15">
+                  <c:v>101.5</c:v>
+                </c:pt>
+                <c:pt idx="16">
+                  <c:v>101.73</c:v>
+                </c:pt>
+                <c:pt idx="17">
+                  <c:v>101.97</c:v>
+                </c:pt>
+                <c:pt idx="18">
+                  <c:v>102.27</c:v>
+                </c:pt>
+                <c:pt idx="19">
+                  <c:v>102.54</c:v>
+                </c:pt>
+                <c:pt idx="20">
+                  <c:v>102.84</c:v>
+                </c:pt>
+                <c:pt idx="21">
+                  <c:v>103.2</c:v>
+                </c:pt>
+                <c:pt idx="22">
+                  <c:v>103.62</c:v>
+                </c:pt>
+                <c:pt idx="23">
+                  <c:v>104.02</c:v>
+                </c:pt>
+                <c:pt idx="24">
+                  <c:v>104.52</c:v>
+                </c:pt>
+                <c:pt idx="25">
+                  <c:v>104.99</c:v>
+                </c:pt>
+                <c:pt idx="26">
+                  <c:v>105.48</c:v>
+                </c:pt>
+                <c:pt idx="27">
+                  <c:v>105.99</c:v>
+                </c:pt>
+                <c:pt idx="28">
+                  <c:v>106.48</c:v>
+                </c:pt>
+                <c:pt idx="29">
+                  <c:v>106.98</c:v>
+                </c:pt>
+                <c:pt idx="30">
+                  <c:v>107.46</c:v>
+                </c:pt>
+                <c:pt idx="31">
+                  <c:v>107.97</c:v>
+                </c:pt>
+                <c:pt idx="32">
+                  <c:v>108.48</c:v>
+                </c:pt>
+                <c:pt idx="33">
+                  <c:v>108.98</c:v>
+                </c:pt>
+                <c:pt idx="34">
+                  <c:v>109.39</c:v>
+                </c:pt>
+                <c:pt idx="35">
+                  <c:v>109.86</c:v>
+                </c:pt>
+                <c:pt idx="36">
+                  <c:v>110.23</c:v>
+                </c:pt>
+                <c:pt idx="37">
+                  <c:v>110.61</c:v>
+                </c:pt>
+                <c:pt idx="38">
+                  <c:v>111</c:v>
+                </c:pt>
+                <c:pt idx="39">
+                  <c:v>111.41</c:v>
+                </c:pt>
+                <c:pt idx="40">
+                  <c:v>111.81</c:v>
+                </c:pt>
+                <c:pt idx="41">
+                  <c:v>112.18</c:v>
+                </c:pt>
+                <c:pt idx="42">
+                  <c:v>112.57</c:v>
+                </c:pt>
+                <c:pt idx="43">
+                  <c:v>112.9</c:v>
+                </c:pt>
+                <c:pt idx="44">
+                  <c:v>113.18</c:v>
+                </c:pt>
+                <c:pt idx="45">
+                  <c:v>113.48</c:v>
+                </c:pt>
+                <c:pt idx="46">
+                  <c:v>113.9</c:v>
+                </c:pt>
+                <c:pt idx="47">
+                  <c:v>114.27</c:v>
+                </c:pt>
+                <c:pt idx="48">
+                  <c:v>114.67</c:v>
+                </c:pt>
+                <c:pt idx="49">
+                  <c:v>115.21</c:v>
+                </c:pt>
+                <c:pt idx="50">
+                  <c:v>115.76</c:v>
+                </c:pt>
+                <c:pt idx="51">
+                  <c:v>116.33</c:v>
+                </c:pt>
+                <c:pt idx="52">
+                  <c:v>116.9</c:v>
+                </c:pt>
+                <c:pt idx="53">
+                  <c:v>117.46</c:v>
+                </c:pt>
+                <c:pt idx="54">
+                  <c:v>117.99</c:v>
+                </c:pt>
+                <c:pt idx="55">
+                  <c:v>118.54</c:v>
+                </c:pt>
+                <c:pt idx="56">
+                  <c:v>119.02</c:v>
+                </c:pt>
+                <c:pt idx="57">
+                  <c:v>119.5</c:v>
+                </c:pt>
+                <c:pt idx="58">
+                  <c:v>119.99</c:v>
+                </c:pt>
+                <c:pt idx="59">
+                  <c:v>120.49</c:v>
+                </c:pt>
+              </c:numCache>
+            </c:numRef>
+          </c:val>
+          <c:smooth val="0"/>
+        </c:ser>
+        <c:ser>
+          <c:idx val="2"/>
+          <c:order val="2"/>
+          <c:tx>
+            <c:strRef>
+              <c:f>Sheet1!$D$1</c:f>
+              <c:strCache>
+                <c:ptCount val="1"/>
+                <c:pt idx="0">
+                  <c:v>Competencia Relevante (*)</c:v>
+                </c:pt>
+              </c:strCache>
+            </c:strRef>
+          </c:tx>
+          <c:spPr>
+            <a:solidFill>
+              <a:srgbClr val="555555"/>
+            </a:solidFill>
+            <a:ln w="15240" cap="flat">
+              <a:solidFill>
+                <a:srgbClr val="555555"/>
+              </a:solidFill>
+              <a:prstDash val="solid"/>
+              <a:round/>
+            </a:ln>
+            <a:effectLst/>
+          </c:spPr>
+          <c:invertIfNegative val="0"/>
+          <c:dLbls>
+            <c:numFmt formatCode="#,##0" sourceLinked="0"/>
+            <c:txPr>
+              <a:bodyPr/>
+              <a:lstStyle/>
+              <a:p>
+                <a:pPr>
+                  <a:defRPr b="0" i="0" strike="noStrike" sz="1200" u="none">
+                    <a:solidFill>
+                      <a:srgbClr val="000000"/>
+                    </a:solidFill>
+                    <a:latin typeface="Arial"/>
+                  </a:defRPr>
+                </a:pPr>
+              </a:p>
+            </c:txPr>
+            <c:showLegendKey val="0"/>
+            <c:showVal val="0"/>
+            <c:showCatName val="0"/>
+            <c:showSerName val="0"/>
+            <c:showPercent val="0"/>
+            <c:showBubbleSize val="0"/>
+            <c:showLeaderLines val="0"/>
+          </c:dLbls>
+          <c:marker>
+            <c:symbol val="circle"/>
+            <c:size val="6"/>
+            <c:spPr>
+              <a:solidFill>
+                <a:srgbClr val="555555"/>
+              </a:solidFill>
+              <a:ln w="9525" cap="flat">
+                <a:solidFill>
+                  <a:srgbClr val="555555"/>
+                </a:solidFill>
+                <a:prstDash val="solid"/>
+                <a:round/>
+              </a:ln>
+              <a:effectLst/>
+            </c:spPr>
+          </c:marker>
+          <c:cat>
+            <c:multiLvlStrRef>
+              <c:f>Sheet1!$A$2:$A$61</c:f>
+              <c:multiLvlStrCache>
+                <c:ptCount val="60"/>
+                <c:lvl>
+                  <c:pt idx="0">
+                    <c:v>May 2021</c:v>
+                  </c:pt>
+                  <c:pt idx="1">
+                    <c:v>Jun 2021</c:v>
+                  </c:pt>
+                  <c:pt idx="2">
+                    <c:v>Jul 2021</c:v>
+                  </c:pt>
+                  <c:pt idx="3">
+                    <c:v>Aug 2021</c:v>
+                  </c:pt>
+                  <c:pt idx="4">
+                    <c:v>Sep 2021</c:v>
+                  </c:pt>
+                  <c:pt idx="5">
+                    <c:v>Oct 2021</c:v>
+                  </c:pt>
+                  <c:pt idx="6">
+                    <c:v>Nov 2021</c:v>
+                  </c:pt>
+                  <c:pt idx="7">
+                    <c:v>Dec 2021</c:v>
+                  </c:pt>
+                  <c:pt idx="8">
+                    <c:v>Jan 2022</c:v>
+                  </c:pt>
+                  <c:pt idx="9">
+                    <c:v>Feb 2022</c:v>
+                  </c:pt>
+                  <c:pt idx="10">
+                    <c:v>Mar 2022</c:v>
+                  </c:pt>
+                  <c:pt idx="11">
+                    <c:v>Apr 2022</c:v>
+                  </c:pt>
+                  <c:pt idx="12">
+                    <c:v>May 2022</c:v>
+                  </c:pt>
+                  <c:pt idx="13">
+                    <c:v>Jun 2022</c:v>
+                  </c:pt>
+                  <c:pt idx="14">
+                    <c:v>Jul 2022</c:v>
+                  </c:pt>
+                  <c:pt idx="15">
+                    <c:v>Aug 2022</c:v>
+                  </c:pt>
+                  <c:pt idx="16">
+                    <c:v>Sep 2022</c:v>
+                  </c:pt>
+                  <c:pt idx="17">
+                    <c:v>Oct 2022</c:v>
+                  </c:pt>
+                  <c:pt idx="18">
+                    <c:v>Nov 2022</c:v>
+                  </c:pt>
+                  <c:pt idx="19">
+                    <c:v>Dec 2022</c:v>
+                  </c:pt>
+                  <c:pt idx="20">
+                    <c:v>Jan 2023</c:v>
+                  </c:pt>
+                  <c:pt idx="21">
+                    <c:v>Feb 2023</c:v>
+                  </c:pt>
+                  <c:pt idx="22">
+                    <c:v>Mar 2023</c:v>
+                  </c:pt>
+                  <c:pt idx="23">
+                    <c:v>Apr 2023</c:v>
+                  </c:pt>
+                  <c:pt idx="24">
+                    <c:v>May 2023</c:v>
+                  </c:pt>
+                  <c:pt idx="25">
+                    <c:v>Jun 2023</c:v>
+                  </c:pt>
+                  <c:pt idx="26">
+                    <c:v>Jul 2023</c:v>
+                  </c:pt>
+                  <c:pt idx="27">
+                    <c:v>Aug 2023</c:v>
+                  </c:pt>
+                  <c:pt idx="28">
+                    <c:v>Sep 2023</c:v>
+                  </c:pt>
+                  <c:pt idx="29">
+                    <c:v>Oct 2023</c:v>
+                  </c:pt>
+                  <c:pt idx="30">
+                    <c:v>Nov 2023</c:v>
+                  </c:pt>
+                  <c:pt idx="31">
+                    <c:v>Dec 2023</c:v>
+                  </c:pt>
+                  <c:pt idx="32">
+                    <c:v>Jan 2024</c:v>
+                  </c:pt>
+                  <c:pt idx="33">
+                    <c:v>Feb 2024</c:v>
+                  </c:pt>
+                  <c:pt idx="34">
+                    <c:v>Mar 2024</c:v>
+                  </c:pt>
+                  <c:pt idx="35">
+                    <c:v>Apr 2024</c:v>
+                  </c:pt>
+                  <c:pt idx="36">
+                    <c:v>May 2024</c:v>
+                  </c:pt>
+                  <c:pt idx="37">
+                    <c:v>Jun 2024</c:v>
+                  </c:pt>
+                  <c:pt idx="38">
+                    <c:v>Jul 2024</c:v>
+                  </c:pt>
+                  <c:pt idx="39">
+                    <c:v>Aug 2024</c:v>
+                  </c:pt>
+                  <c:pt idx="40">
+                    <c:v>Sep 2024</c:v>
+                  </c:pt>
+                  <c:pt idx="41">
+                    <c:v>Oct 2024</c:v>
+                  </c:pt>
+                  <c:pt idx="42">
+                    <c:v>Nov 2024</c:v>
+                  </c:pt>
+                  <c:pt idx="43">
+                    <c:v>Dec 2024</c:v>
+                  </c:pt>
+                  <c:pt idx="44">
+                    <c:v>Jan 2025</c:v>
+                  </c:pt>
+                  <c:pt idx="45">
+                    <c:v>Feb 2025</c:v>
+                  </c:pt>
+                  <c:pt idx="46">
+                    <c:v>Mar 2025</c:v>
+                  </c:pt>
+                  <c:pt idx="47">
+                    <c:v>Apr 2025</c:v>
+                  </c:pt>
+                  <c:pt idx="48">
+                    <c:v>May 2025</c:v>
+                  </c:pt>
+                  <c:pt idx="49">
+                    <c:v>Jun 2025</c:v>
+                  </c:pt>
+                  <c:pt idx="50">
+                    <c:v>Jul 2025</c:v>
+                  </c:pt>
+                  <c:pt idx="51">
+                    <c:v>Aug 2025</c:v>
+                  </c:pt>
+                  <c:pt idx="52">
+                    <c:v>Sep 2025</c:v>
+                  </c:pt>
+                  <c:pt idx="53">
+                    <c:v>Oct 2025</c:v>
+                  </c:pt>
+                  <c:pt idx="54">
+                    <c:v>Nov 2025</c:v>
+                  </c:pt>
+                  <c:pt idx="55">
+                    <c:v>Dec 2025</c:v>
+                  </c:pt>
+                  <c:pt idx="56">
+                    <c:v>Jan 2026</c:v>
+                  </c:pt>
+                  <c:pt idx="57">
+                    <c:v>Feb 2026</c:v>
+                  </c:pt>
+                  <c:pt idx="58">
+                    <c:v>Mar 2026</c:v>
+                  </c:pt>
+                  <c:pt idx="59">
+                    <c:v>Apr 2026</c:v>
+                  </c:pt>
+                </c:lvl>
+              </c:multiLvlStrCache>
+            </c:multiLvlStrRef>
+          </c:cat>
+          <c:val>
+            <c:numRef>
+              <c:f>Sheet1!$D$2:$D$61</c:f>
+              <c:numCache>
+                <c:formatCode>General</c:formatCode>
+                <c:ptCount val="60"/>
+                <c:pt idx="0">
+                  <c:v>100</c:v>
+                </c:pt>
+                <c:pt idx="1">
                   <c:v>100</c:v>
                 </c:pt>
                 <c:pt idx="2">
@@ -1011,7 +1461,7 @@
                   <c:v>115.09</c:v>
                 </c:pt>
                 <c:pt idx="59">
-                  <c:v>115.39</c:v>
+                  <c:v/>
                 </c:pt>
               </c:numCache>
             </c:numRef>
@@ -3563,7 +4013,7 @@
                 <a:ea typeface="Calibri" pitchFamily="34" charset="-122"/>
                 <a:cs typeface="Calibri" pitchFamily="34" charset="-120"/>
               </a:rPr>
-              <a:t>prueba 13 USD</a:t>
+              <a:t>prueba USD</a:t>
             </a:r>
             <a:endParaRPr lang="en-US" sz="800" dirty="0"/>
           </a:p>
@@ -4233,7 +4683,7 @@
                           <a:ea typeface="Calibri" pitchFamily="34" charset="-122"/>
                           <a:cs typeface="Calibri" pitchFamily="34" charset="-120"/>
                         </a:rPr>
-                        <a:t>3.16%</a:t>
+                        <a:t>-1200.00%</a:t>
                       </a:r>
                       <a:endParaRPr lang="en-US" sz="750" dirty="0">
                         <a:latin typeface="Calibri" charset="0"/>
@@ -4301,7 +4751,7 @@
                           <a:ea typeface="Calibri" pitchFamily="34" charset="-122"/>
                           <a:cs typeface="Calibri" pitchFamily="34" charset="-120"/>
                         </a:rPr>
-                        <a:t>0.79%</a:t>
+                        <a:t>-100.00%</a:t>
                       </a:r>
                       <a:endParaRPr lang="en-US" sz="750" dirty="0">
                         <a:latin typeface="Calibri" charset="0"/>
@@ -4369,7 +4819,7 @@
                           <a:ea typeface="Calibri" pitchFamily="34" charset="-122"/>
                           <a:cs typeface="Calibri" pitchFamily="34" charset="-120"/>
                         </a:rPr>
-                        <a:t>1.66%</a:t>
+                        <a:t>-100.00%</a:t>
                       </a:r>
                       <a:endParaRPr lang="en-US" sz="750" dirty="0">
                         <a:latin typeface="Calibri" charset="0"/>
@@ -4437,7 +4887,7 @@
                           <a:ea typeface="Calibri" pitchFamily="34" charset="-122"/>
                           <a:cs typeface="Calibri" pitchFamily="34" charset="-120"/>
                         </a:rPr>
-                        <a:t>3.46%</a:t>
+                        <a:t>-100.00%</a:t>
                       </a:r>
                       <a:endParaRPr lang="en-US" sz="750" dirty="0">
                         <a:latin typeface="Calibri" charset="0"/>
@@ -4505,7 +4955,7 @@
                           <a:ea typeface="Calibri" pitchFamily="34" charset="-122"/>
                           <a:cs typeface="Calibri" pitchFamily="34" charset="-120"/>
                         </a:rPr>
-                        <a:t>2.37%</a:t>
+                        <a:t>-300.00%</a:t>
                       </a:r>
                       <a:endParaRPr lang="en-US" sz="750" dirty="0">
                         <a:latin typeface="Calibri" charset="0"/>
@@ -16428,7 +16878,7 @@
                           <a:ea typeface="Calibri" pitchFamily="34" charset="-122"/>
                           <a:cs typeface="Calibri" pitchFamily="34" charset="-120"/>
                         </a:rPr>
-                        <a:t>3.16%</a:t>
+                        <a:t>-1200.00%</a:t>
                       </a:r>
                       <a:endParaRPr lang="en-US" sz="500" dirty="0">
                         <a:latin typeface="Calibri" charset="0"/>
@@ -16925,7 +17375,7 @@
                           <a:ea typeface="Calibri" pitchFamily="34" charset="-122"/>
                           <a:cs typeface="Calibri" pitchFamily="34" charset="-120"/>
                         </a:rPr>
-                        <a:t>2.37%</a:t>
+                        <a:t>-300.00%</a:t>
                       </a:r>
                       <a:endParaRPr lang="en-US" sz="500" dirty="0">
                         <a:latin typeface="Calibri" charset="0"/>

--- a/folletos/2026-04/pptx/FIP_VANTRUST_LIQUIDEZ_DOLAR.pptx
+++ b/folletos/2026-04/pptx/FIP_VANTRUST_LIQUIDEZ_DOLAR.pptx
@@ -4013,7 +4013,7 @@
                 <a:ea typeface="Calibri" pitchFamily="34" charset="-122"/>
                 <a:cs typeface="Calibri" pitchFamily="34" charset="-120"/>
               </a:rPr>
-              <a:t>prueba USD</a:t>
+              <a:t>Prueba 15 CLP</a:t>
             </a:r>
             <a:endParaRPr lang="en-US" sz="800" dirty="0"/>
           </a:p>
